--- a/Risultati_0386492.pptx
+++ b/Risultati_0386492.pptx
@@ -4,8 +4,39 @@
   <p:sldMasterIdLst>
     <p:sldMasterId id="2147483648" r:id="rId1"/>
   </p:sldMasterIdLst>
+  <p:notesMasterIdLst>
+    <p:notesMasterId r:id="rId31"/>
+  </p:notesMasterIdLst>
   <p:sldIdLst>
     <p:sldId id="256" r:id="rId2"/>
+    <p:sldId id="258" r:id="rId3"/>
+    <p:sldId id="259" r:id="rId4"/>
+    <p:sldId id="260" r:id="rId5"/>
+    <p:sldId id="261" r:id="rId6"/>
+    <p:sldId id="262" r:id="rId7"/>
+    <p:sldId id="263" r:id="rId8"/>
+    <p:sldId id="264" r:id="rId9"/>
+    <p:sldId id="265" r:id="rId10"/>
+    <p:sldId id="266" r:id="rId11"/>
+    <p:sldId id="267" r:id="rId12"/>
+    <p:sldId id="268" r:id="rId13"/>
+    <p:sldId id="269" r:id="rId14"/>
+    <p:sldId id="270" r:id="rId15"/>
+    <p:sldId id="271" r:id="rId16"/>
+    <p:sldId id="272" r:id="rId17"/>
+    <p:sldId id="273" r:id="rId18"/>
+    <p:sldId id="274" r:id="rId19"/>
+    <p:sldId id="275" r:id="rId20"/>
+    <p:sldId id="276" r:id="rId21"/>
+    <p:sldId id="277" r:id="rId22"/>
+    <p:sldId id="278" r:id="rId23"/>
+    <p:sldId id="279" r:id="rId24"/>
+    <p:sldId id="280" r:id="rId25"/>
+    <p:sldId id="281" r:id="rId26"/>
+    <p:sldId id="282" r:id="rId27"/>
+    <p:sldId id="283" r:id="rId28"/>
+    <p:sldId id="284" r:id="rId29"/>
+    <p:sldId id="285" r:id="rId30"/>
   </p:sldIdLst>
   <p:sldSz cx="12192000" cy="6858000"/>
   <p:notesSz cx="6858000" cy="9144000"/>
@@ -104,7 +135,361 @@
       </a:defRPr>
     </a:lvl9pPr>
   </p:defaultTextStyle>
+  <p:extLst>
+    <p:ext uri="{EFAFB233-063F-42B5-8137-9DF3F51BA10A}">
+      <p15:sldGuideLst xmlns:p15="http://schemas.microsoft.com/office/powerpoint/2012/main"/>
+    </p:ext>
+  </p:extLst>
 </p:presentation>
+</file>
+
+<file path=ppt/notesMasters/notesMaster1.xml><?xml version="1.0" encoding="utf-8"?>
+<p:notesMaster xmlns:a="http://schemas.openxmlformats.org/drawingml/2006/main" xmlns:r="http://schemas.openxmlformats.org/officeDocument/2006/relationships" xmlns:p="http://schemas.openxmlformats.org/presentationml/2006/main">
+  <p:cSld>
+    <p:bg>
+      <p:bgRef idx="1001">
+        <a:schemeClr val="bg1"/>
+      </p:bgRef>
+    </p:bg>
+    <p:spTree>
+      <p:nvGrpSpPr>
+        <p:cNvPr id="1" name=""/>
+        <p:cNvGrpSpPr/>
+        <p:nvPr/>
+      </p:nvGrpSpPr>
+      <p:grpSpPr>
+        <a:xfrm>
+          <a:off x="0" y="0"/>
+          <a:ext cx="0" cy="0"/>
+          <a:chOff x="0" y="0"/>
+          <a:chExt cx="0" cy="0"/>
+        </a:xfrm>
+      </p:grpSpPr>
+      <p:sp>
+        <p:nvSpPr>
+          <p:cNvPr id="2" name="Segnaposto intestazione 1"/>
+          <p:cNvSpPr>
+            <a:spLocks noGrp="1"/>
+          </p:cNvSpPr>
+          <p:nvPr>
+            <p:ph type="hdr" sz="quarter"/>
+          </p:nvPr>
+        </p:nvSpPr>
+        <p:spPr>
+          <a:xfrm>
+            <a:off x="0" y="0"/>
+            <a:ext cx="2971800" cy="458788"/>
+          </a:xfrm>
+          <a:prstGeom prst="rect">
+            <a:avLst/>
+          </a:prstGeom>
+        </p:spPr>
+        <p:txBody>
+          <a:bodyPr vert="horz" lIns="91440" tIns="45720" rIns="91440" bIns="45720" rtlCol="0"/>
+          <a:lstStyle>
+            <a:lvl1pPr algn="l">
+              <a:defRPr sz="1200"/>
+            </a:lvl1pPr>
+          </a:lstStyle>
+          <a:p>
+            <a:endParaRPr lang="it-IT"/>
+          </a:p>
+        </p:txBody>
+      </p:sp>
+      <p:sp>
+        <p:nvSpPr>
+          <p:cNvPr id="3" name="Segnaposto data 2"/>
+          <p:cNvSpPr>
+            <a:spLocks noGrp="1"/>
+          </p:cNvSpPr>
+          <p:nvPr>
+            <p:ph type="dt" idx="1"/>
+          </p:nvPr>
+        </p:nvSpPr>
+        <p:spPr>
+          <a:xfrm>
+            <a:off x="3884613" y="0"/>
+            <a:ext cx="2971800" cy="458788"/>
+          </a:xfrm>
+          <a:prstGeom prst="rect">
+            <a:avLst/>
+          </a:prstGeom>
+        </p:spPr>
+        <p:txBody>
+          <a:bodyPr vert="horz" lIns="91440" tIns="45720" rIns="91440" bIns="45720" rtlCol="0"/>
+          <a:lstStyle>
+            <a:lvl1pPr algn="r">
+              <a:defRPr sz="1200"/>
+            </a:lvl1pPr>
+          </a:lstStyle>
+          <a:p>
+            <a:fld id="{E0C88626-8297-4000-AA78-E4F17AAF9259}" type="datetimeFigureOut">
+              <a:rPr lang="it-IT" smtClean="0"/>
+              <a:t>24/06/2026</a:t>
+            </a:fld>
+            <a:endParaRPr lang="it-IT"/>
+          </a:p>
+        </p:txBody>
+      </p:sp>
+      <p:sp>
+        <p:nvSpPr>
+          <p:cNvPr id="4" name="Segnaposto immagine diapositiva 3"/>
+          <p:cNvSpPr>
+            <a:spLocks noGrp="1" noRot="1" noChangeAspect="1"/>
+          </p:cNvSpPr>
+          <p:nvPr>
+            <p:ph type="sldImg" idx="2"/>
+          </p:nvPr>
+        </p:nvSpPr>
+        <p:spPr>
+          <a:xfrm>
+            <a:off x="685800" y="1143000"/>
+            <a:ext cx="5486400" cy="3086100"/>
+          </a:xfrm>
+          <a:prstGeom prst="rect">
+            <a:avLst/>
+          </a:prstGeom>
+          <a:noFill/>
+          <a:ln w="12700">
+            <a:solidFill>
+              <a:prstClr val="black"/>
+            </a:solidFill>
+          </a:ln>
+        </p:spPr>
+        <p:txBody>
+          <a:bodyPr vert="horz" lIns="91440" tIns="45720" rIns="91440" bIns="45720" rtlCol="0" anchor="ctr"/>
+          <a:lstStyle/>
+          <a:p>
+            <a:endParaRPr lang="it-IT"/>
+          </a:p>
+        </p:txBody>
+      </p:sp>
+      <p:sp>
+        <p:nvSpPr>
+          <p:cNvPr id="5" name="Segnaposto note 4"/>
+          <p:cNvSpPr>
+            <a:spLocks noGrp="1"/>
+          </p:cNvSpPr>
+          <p:nvPr>
+            <p:ph type="body" sz="quarter" idx="3"/>
+          </p:nvPr>
+        </p:nvSpPr>
+        <p:spPr>
+          <a:xfrm>
+            <a:off x="685800" y="4400550"/>
+            <a:ext cx="5486400" cy="3600450"/>
+          </a:xfrm>
+          <a:prstGeom prst="rect">
+            <a:avLst/>
+          </a:prstGeom>
+        </p:spPr>
+        <p:txBody>
+          <a:bodyPr vert="horz" lIns="91440" tIns="45720" rIns="91440" bIns="45720" rtlCol="0"/>
+          <a:lstStyle/>
+          <a:p>
+            <a:pPr lvl="0"/>
+            <a:r>
+              <a:rPr lang="it-IT"/>
+              <a:t>Fare clic per modificare gli stili del testo dello schema</a:t>
+            </a:r>
+          </a:p>
+          <a:p>
+            <a:pPr lvl="1"/>
+            <a:r>
+              <a:rPr lang="it-IT"/>
+              <a:t>Secondo livello</a:t>
+            </a:r>
+          </a:p>
+          <a:p>
+            <a:pPr lvl="2"/>
+            <a:r>
+              <a:rPr lang="it-IT"/>
+              <a:t>Terzo livello</a:t>
+            </a:r>
+          </a:p>
+          <a:p>
+            <a:pPr lvl="3"/>
+            <a:r>
+              <a:rPr lang="it-IT"/>
+              <a:t>Quarto livello</a:t>
+            </a:r>
+          </a:p>
+          <a:p>
+            <a:pPr lvl="4"/>
+            <a:r>
+              <a:rPr lang="it-IT"/>
+              <a:t>Quinto livello</a:t>
+            </a:r>
+          </a:p>
+        </p:txBody>
+      </p:sp>
+      <p:sp>
+        <p:nvSpPr>
+          <p:cNvPr id="6" name="Segnaposto piè di pagina 5"/>
+          <p:cNvSpPr>
+            <a:spLocks noGrp="1"/>
+          </p:cNvSpPr>
+          <p:nvPr>
+            <p:ph type="ftr" sz="quarter" idx="4"/>
+          </p:nvPr>
+        </p:nvSpPr>
+        <p:spPr>
+          <a:xfrm>
+            <a:off x="0" y="8685213"/>
+            <a:ext cx="2971800" cy="458787"/>
+          </a:xfrm>
+          <a:prstGeom prst="rect">
+            <a:avLst/>
+          </a:prstGeom>
+        </p:spPr>
+        <p:txBody>
+          <a:bodyPr vert="horz" lIns="91440" tIns="45720" rIns="91440" bIns="45720" rtlCol="0" anchor="b"/>
+          <a:lstStyle>
+            <a:lvl1pPr algn="l">
+              <a:defRPr sz="1200"/>
+            </a:lvl1pPr>
+          </a:lstStyle>
+          <a:p>
+            <a:endParaRPr lang="it-IT"/>
+          </a:p>
+        </p:txBody>
+      </p:sp>
+      <p:sp>
+        <p:nvSpPr>
+          <p:cNvPr id="7" name="Segnaposto numero diapositiva 6"/>
+          <p:cNvSpPr>
+            <a:spLocks noGrp="1"/>
+          </p:cNvSpPr>
+          <p:nvPr>
+            <p:ph type="sldNum" sz="quarter" idx="5"/>
+          </p:nvPr>
+        </p:nvSpPr>
+        <p:spPr>
+          <a:xfrm>
+            <a:off x="3884613" y="8685213"/>
+            <a:ext cx="2971800" cy="458787"/>
+          </a:xfrm>
+          <a:prstGeom prst="rect">
+            <a:avLst/>
+          </a:prstGeom>
+        </p:spPr>
+        <p:txBody>
+          <a:bodyPr vert="horz" lIns="91440" tIns="45720" rIns="91440" bIns="45720" rtlCol="0" anchor="b"/>
+          <a:lstStyle>
+            <a:lvl1pPr algn="r">
+              <a:defRPr sz="1200"/>
+            </a:lvl1pPr>
+          </a:lstStyle>
+          <a:p>
+            <a:fld id="{DFD32BE9-5CDD-4B08-B335-3127A5390EC4}" type="slidenum">
+              <a:rPr lang="it-IT" smtClean="0"/>
+              <a:t>‹N›</a:t>
+            </a:fld>
+            <a:endParaRPr lang="it-IT"/>
+          </a:p>
+        </p:txBody>
+      </p:sp>
+    </p:spTree>
+    <p:extLst>
+      <p:ext uri="{BB962C8B-B14F-4D97-AF65-F5344CB8AC3E}">
+        <p14:creationId xmlns:p14="http://schemas.microsoft.com/office/powerpoint/2010/main" val="2220518559"/>
+      </p:ext>
+    </p:extLst>
+  </p:cSld>
+  <p:clrMap bg1="lt1" tx1="dk1" bg2="lt2" tx2="dk2" accent1="accent1" accent2="accent2" accent3="accent3" accent4="accent4" accent5="accent5" accent6="accent6" hlink="hlink" folHlink="folHlink"/>
+  <p:notesStyle>
+    <a:lvl1pPr marL="0" algn="l" defTabSz="914400" rtl="0" eaLnBrk="1" latinLnBrk="0" hangingPunct="1">
+      <a:defRPr sz="1200" kern="1200">
+        <a:solidFill>
+          <a:schemeClr val="tx1"/>
+        </a:solidFill>
+        <a:latin typeface="+mn-lt"/>
+        <a:ea typeface="+mn-ea"/>
+        <a:cs typeface="+mn-cs"/>
+      </a:defRPr>
+    </a:lvl1pPr>
+    <a:lvl2pPr marL="457200" algn="l" defTabSz="914400" rtl="0" eaLnBrk="1" latinLnBrk="0" hangingPunct="1">
+      <a:defRPr sz="1200" kern="1200">
+        <a:solidFill>
+          <a:schemeClr val="tx1"/>
+        </a:solidFill>
+        <a:latin typeface="+mn-lt"/>
+        <a:ea typeface="+mn-ea"/>
+        <a:cs typeface="+mn-cs"/>
+      </a:defRPr>
+    </a:lvl2pPr>
+    <a:lvl3pPr marL="914400" algn="l" defTabSz="914400" rtl="0" eaLnBrk="1" latinLnBrk="0" hangingPunct="1">
+      <a:defRPr sz="1200" kern="1200">
+        <a:solidFill>
+          <a:schemeClr val="tx1"/>
+        </a:solidFill>
+        <a:latin typeface="+mn-lt"/>
+        <a:ea typeface="+mn-ea"/>
+        <a:cs typeface="+mn-cs"/>
+      </a:defRPr>
+    </a:lvl3pPr>
+    <a:lvl4pPr marL="1371600" algn="l" defTabSz="914400" rtl="0" eaLnBrk="1" latinLnBrk="0" hangingPunct="1">
+      <a:defRPr sz="1200" kern="1200">
+        <a:solidFill>
+          <a:schemeClr val="tx1"/>
+        </a:solidFill>
+        <a:latin typeface="+mn-lt"/>
+        <a:ea typeface="+mn-ea"/>
+        <a:cs typeface="+mn-cs"/>
+      </a:defRPr>
+    </a:lvl4pPr>
+    <a:lvl5pPr marL="1828800" algn="l" defTabSz="914400" rtl="0" eaLnBrk="1" latinLnBrk="0" hangingPunct="1">
+      <a:defRPr sz="1200" kern="1200">
+        <a:solidFill>
+          <a:schemeClr val="tx1"/>
+        </a:solidFill>
+        <a:latin typeface="+mn-lt"/>
+        <a:ea typeface="+mn-ea"/>
+        <a:cs typeface="+mn-cs"/>
+      </a:defRPr>
+    </a:lvl5pPr>
+    <a:lvl6pPr marL="2286000" algn="l" defTabSz="914400" rtl="0" eaLnBrk="1" latinLnBrk="0" hangingPunct="1">
+      <a:defRPr sz="1200" kern="1200">
+        <a:solidFill>
+          <a:schemeClr val="tx1"/>
+        </a:solidFill>
+        <a:latin typeface="+mn-lt"/>
+        <a:ea typeface="+mn-ea"/>
+        <a:cs typeface="+mn-cs"/>
+      </a:defRPr>
+    </a:lvl6pPr>
+    <a:lvl7pPr marL="2743200" algn="l" defTabSz="914400" rtl="0" eaLnBrk="1" latinLnBrk="0" hangingPunct="1">
+      <a:defRPr sz="1200" kern="1200">
+        <a:solidFill>
+          <a:schemeClr val="tx1"/>
+        </a:solidFill>
+        <a:latin typeface="+mn-lt"/>
+        <a:ea typeface="+mn-ea"/>
+        <a:cs typeface="+mn-cs"/>
+      </a:defRPr>
+    </a:lvl7pPr>
+    <a:lvl8pPr marL="3200400" algn="l" defTabSz="914400" rtl="0" eaLnBrk="1" latinLnBrk="0" hangingPunct="1">
+      <a:defRPr sz="1200" kern="1200">
+        <a:solidFill>
+          <a:schemeClr val="tx1"/>
+        </a:solidFill>
+        <a:latin typeface="+mn-lt"/>
+        <a:ea typeface="+mn-ea"/>
+        <a:cs typeface="+mn-cs"/>
+      </a:defRPr>
+    </a:lvl8pPr>
+    <a:lvl9pPr marL="3657600" algn="l" defTabSz="914400" rtl="0" eaLnBrk="1" latinLnBrk="0" hangingPunct="1">
+      <a:defRPr sz="1200" kern="1200">
+        <a:solidFill>
+          <a:schemeClr val="tx1"/>
+        </a:solidFill>
+        <a:latin typeface="+mn-lt"/>
+        <a:ea typeface="+mn-ea"/>
+        <a:cs typeface="+mn-cs"/>
+      </a:defRPr>
+    </a:lvl9pPr>
+  </p:notesStyle>
+</p:notesMaster>
 </file>
 
 <file path=ppt/slideLayouts/slideLayout1.xml><?xml version="1.0" encoding="utf-8"?>
@@ -252,9 +637,9 @@
           <a:bodyPr/>
           <a:lstStyle/>
           <a:p>
-            <a:fld id="{F594A6A8-9A41-4067-9243-056FE2031F54}" type="datetimeFigureOut">
+            <a:fld id="{4EEC3E97-3DDD-4186-A208-B850F35723DB}" type="datetime1">
               <a:rPr lang="it-IT" smtClean="0"/>
-              <a:t>12/06/2026</a:t>
+              <a:t>24/06/2026</a:t>
             </a:fld>
             <a:endParaRPr lang="it-IT"/>
           </a:p>
@@ -450,9 +835,9 @@
           <a:bodyPr/>
           <a:lstStyle/>
           <a:p>
-            <a:fld id="{F594A6A8-9A41-4067-9243-056FE2031F54}" type="datetimeFigureOut">
+            <a:fld id="{88C2FBA6-F7A9-4C74-B465-9FF20E4A7E98}" type="datetime1">
               <a:rPr lang="it-IT" smtClean="0"/>
-              <a:t>12/06/2026</a:t>
+              <a:t>24/06/2026</a:t>
             </a:fld>
             <a:endParaRPr lang="it-IT"/>
           </a:p>
@@ -658,9 +1043,9 @@
           <a:bodyPr/>
           <a:lstStyle/>
           <a:p>
-            <a:fld id="{F594A6A8-9A41-4067-9243-056FE2031F54}" type="datetimeFigureOut">
+            <a:fld id="{7C289735-B0FA-42EC-B352-C4875869C0BC}" type="datetime1">
               <a:rPr lang="it-IT" smtClean="0"/>
-              <a:t>12/06/2026</a:t>
+              <a:t>24/06/2026</a:t>
             </a:fld>
             <a:endParaRPr lang="it-IT"/>
           </a:p>
@@ -856,9 +1241,9 @@
           <a:bodyPr/>
           <a:lstStyle/>
           <a:p>
-            <a:fld id="{F594A6A8-9A41-4067-9243-056FE2031F54}" type="datetimeFigureOut">
+            <a:fld id="{10E9C9B6-BFF0-438D-B09E-8432B8734EE5}" type="datetime1">
               <a:rPr lang="it-IT" smtClean="0"/>
-              <a:t>12/06/2026</a:t>
+              <a:t>24/06/2026</a:t>
             </a:fld>
             <a:endParaRPr lang="it-IT"/>
           </a:p>
@@ -1131,9 +1516,9 @@
           <a:bodyPr/>
           <a:lstStyle/>
           <a:p>
-            <a:fld id="{F594A6A8-9A41-4067-9243-056FE2031F54}" type="datetimeFigureOut">
+            <a:fld id="{ABFC7979-BD5D-4D0F-9310-241562FF9E94}" type="datetime1">
               <a:rPr lang="it-IT" smtClean="0"/>
-              <a:t>12/06/2026</a:t>
+              <a:t>24/06/2026</a:t>
             </a:fld>
             <a:endParaRPr lang="it-IT"/>
           </a:p>
@@ -1396,9 +1781,9 @@
           <a:bodyPr/>
           <a:lstStyle/>
           <a:p>
-            <a:fld id="{F594A6A8-9A41-4067-9243-056FE2031F54}" type="datetimeFigureOut">
+            <a:fld id="{E6C8F376-66C7-47F4-9CDC-69997AFD8804}" type="datetime1">
               <a:rPr lang="it-IT" smtClean="0"/>
-              <a:t>12/06/2026</a:t>
+              <a:t>24/06/2026</a:t>
             </a:fld>
             <a:endParaRPr lang="it-IT"/>
           </a:p>
@@ -1808,9 +2193,9 @@
           <a:bodyPr/>
           <a:lstStyle/>
           <a:p>
-            <a:fld id="{F594A6A8-9A41-4067-9243-056FE2031F54}" type="datetimeFigureOut">
+            <a:fld id="{DD3CE95E-26FA-4B50-AEEC-A0C3476A6D97}" type="datetime1">
               <a:rPr lang="it-IT" smtClean="0"/>
-              <a:t>12/06/2026</a:t>
+              <a:t>24/06/2026</a:t>
             </a:fld>
             <a:endParaRPr lang="it-IT"/>
           </a:p>
@@ -1949,9 +2334,9 @@
           <a:bodyPr/>
           <a:lstStyle/>
           <a:p>
-            <a:fld id="{F594A6A8-9A41-4067-9243-056FE2031F54}" type="datetimeFigureOut">
+            <a:fld id="{6E6C9EBA-B4EE-4B7C-8D99-E4EE9B4515D3}" type="datetime1">
               <a:rPr lang="it-IT" smtClean="0"/>
-              <a:t>12/06/2026</a:t>
+              <a:t>24/06/2026</a:t>
             </a:fld>
             <a:endParaRPr lang="it-IT"/>
           </a:p>
@@ -2062,9 +2447,9 @@
           <a:bodyPr/>
           <a:lstStyle/>
           <a:p>
-            <a:fld id="{F594A6A8-9A41-4067-9243-056FE2031F54}" type="datetimeFigureOut">
+            <a:fld id="{DE74029C-F4FA-44C2-8417-402E4F9F070D}" type="datetime1">
               <a:rPr lang="it-IT" smtClean="0"/>
-              <a:t>12/06/2026</a:t>
+              <a:t>24/06/2026</a:t>
             </a:fld>
             <a:endParaRPr lang="it-IT"/>
           </a:p>
@@ -2373,9 +2758,9 @@
           <a:bodyPr/>
           <a:lstStyle/>
           <a:p>
-            <a:fld id="{F594A6A8-9A41-4067-9243-056FE2031F54}" type="datetimeFigureOut">
+            <a:fld id="{A99525BE-1E49-4B4B-B3DA-784C3A60B941}" type="datetime1">
               <a:rPr lang="it-IT" smtClean="0"/>
-              <a:t>12/06/2026</a:t>
+              <a:t>24/06/2026</a:t>
             </a:fld>
             <a:endParaRPr lang="it-IT"/>
           </a:p>
@@ -2661,9 +3046,9 @@
           <a:bodyPr/>
           <a:lstStyle/>
           <a:p>
-            <a:fld id="{F594A6A8-9A41-4067-9243-056FE2031F54}" type="datetimeFigureOut">
+            <a:fld id="{D2BC9992-29B7-4892-A984-BAD5A3D1DFD6}" type="datetime1">
               <a:rPr lang="it-IT" smtClean="0"/>
-              <a:t>12/06/2026</a:t>
+              <a:t>24/06/2026</a:t>
             </a:fld>
             <a:endParaRPr lang="it-IT"/>
           </a:p>
@@ -2902,9 +3287,9 @@
             </a:lvl1pPr>
           </a:lstStyle>
           <a:p>
-            <a:fld id="{F594A6A8-9A41-4067-9243-056FE2031F54}" type="datetimeFigureOut">
+            <a:fld id="{C55A07EC-953A-454F-8426-34AAF06A63B6}" type="datetime1">
               <a:rPr lang="it-IT" smtClean="0"/>
-              <a:t>12/06/2026</a:t>
+              <a:t>24/06/2026</a:t>
             </a:fld>
             <a:endParaRPr lang="it-IT"/>
           </a:p>
@@ -3021,6 +3406,7 @@
     <p:sldLayoutId id="2147483658" r:id="rId10"/>
     <p:sldLayoutId id="2147483659" r:id="rId11"/>
   </p:sldLayoutIdLst>
+  <p:hf sldNum="0" hdr="0" ftr="0" dt="0"/>
   <p:txStyles>
     <p:titleStyle>
       <a:lvl1pPr algn="l" defTabSz="914400" rtl="0" eaLnBrk="1" latinLnBrk="0" hangingPunct="1">
@@ -3321,60 +3707,207 @@
           <a:chExt cx="0" cy="0"/>
         </a:xfrm>
       </p:grpSpPr>
-      <p:sp>
-        <p:nvSpPr>
-          <p:cNvPr id="2" name="Titolo 1">
-            <a:extLst>
-              <a:ext uri="{FF2B5EF4-FFF2-40B4-BE49-F238E27FC236}">
-                <a16:creationId xmlns:a16="http://schemas.microsoft.com/office/drawing/2014/main" id="{146411D0-E616-B0BF-7870-2F1879491651}"/>
-              </a:ext>
-            </a:extLst>
-          </p:cNvPr>
-          <p:cNvSpPr>
-            <a:spLocks noGrp="1"/>
-          </p:cNvSpPr>
-          <p:nvPr>
-            <p:ph type="ctrTitle"/>
-          </p:nvPr>
-        </p:nvSpPr>
-        <p:spPr/>
-        <p:txBody>
-          <a:bodyPr/>
-          <a:lstStyle/>
-          <a:p>
-            <a:r>
-              <a:rPr lang="it-IT" dirty="0"/>
-              <a:t>Risultati ottenuti sotto forma </a:t>
-            </a:r>
-            <a:r>
-              <a:rPr lang="it-IT"/>
-              <a:t>di presentazione</a:t>
-            </a:r>
-          </a:p>
-        </p:txBody>
-      </p:sp>
-      <p:sp>
-        <p:nvSpPr>
-          <p:cNvPr id="3" name="Sottotitolo 2">
-            <a:extLst>
-              <a:ext uri="{FF2B5EF4-FFF2-40B4-BE49-F238E27FC236}">
-                <a16:creationId xmlns:a16="http://schemas.microsoft.com/office/drawing/2014/main" id="{2412FCEE-B085-FD03-2C43-7897467DACA9}"/>
-              </a:ext>
-            </a:extLst>
-          </p:cNvPr>
-          <p:cNvSpPr>
-            <a:spLocks noGrp="1"/>
-          </p:cNvSpPr>
-          <p:nvPr>
-            <p:ph type="subTitle" idx="1"/>
-          </p:nvPr>
-        </p:nvSpPr>
-        <p:spPr/>
-        <p:txBody>
-          <a:bodyPr/>
-          <a:lstStyle/>
-          <a:p>
+      <p:pic>
+        <p:nvPicPr>
+          <p:cNvPr id="4" name="Immagine 3" descr="grafos">
+            <a:extLst>
+              <a:ext uri="{FF2B5EF4-FFF2-40B4-BE49-F238E27FC236}">
+                <a16:creationId xmlns:a16="http://schemas.microsoft.com/office/drawing/2014/main" id="{7F45E4BA-9922-4894-47D3-0308BEEE42B2}"/>
+              </a:ext>
+            </a:extLst>
+          </p:cNvPr>
+          <p:cNvPicPr>
+            <a:picLocks noChangeAspect="1"/>
+          </p:cNvPicPr>
+          <p:nvPr/>
+        </p:nvPicPr>
+        <p:blipFill>
+          <a:blip r:embed="rId2">
+            <a:alphaModFix amt="35000"/>
+          </a:blip>
+          <a:stretch>
+            <a:fillRect/>
+          </a:stretch>
+        </p:blipFill>
+        <p:spPr>
+          <a:xfrm>
+            <a:off x="0" y="0"/>
+            <a:ext cx="12192001" cy="4762919"/>
+          </a:xfrm>
+          <a:prstGeom prst="rect">
+            <a:avLst/>
+          </a:prstGeom>
+        </p:spPr>
+      </p:pic>
+      <p:sp>
+        <p:nvSpPr>
+          <p:cNvPr id="5" name="Rettangolo 4">
+            <a:extLst>
+              <a:ext uri="{FF2B5EF4-FFF2-40B4-BE49-F238E27FC236}">
+                <a16:creationId xmlns:a16="http://schemas.microsoft.com/office/drawing/2014/main" id="{83A6944F-C6A5-D8BA-82B2-D03F96F1C803}"/>
+              </a:ext>
+            </a:extLst>
+          </p:cNvPr>
+          <p:cNvSpPr/>
+          <p:nvPr/>
+        </p:nvSpPr>
+        <p:spPr>
+          <a:xfrm rot="16200000">
+            <a:off x="5612871" y="326546"/>
+            <a:ext cx="966258" cy="12192000"/>
+          </a:xfrm>
+          <a:prstGeom prst="rect">
+            <a:avLst/>
+          </a:prstGeom>
+          <a:solidFill>
+            <a:srgbClr val="990000"/>
+          </a:solidFill>
+          <a:ln>
+            <a:solidFill>
+              <a:srgbClr val="990000"/>
+            </a:solidFill>
+          </a:ln>
+        </p:spPr>
+        <p:style>
+          <a:lnRef idx="2">
+            <a:schemeClr val="accent1">
+              <a:shade val="15000"/>
+            </a:schemeClr>
+          </a:lnRef>
+          <a:fillRef idx="1">
+            <a:schemeClr val="accent1"/>
+          </a:fillRef>
+          <a:effectRef idx="0">
+            <a:schemeClr val="accent1"/>
+          </a:effectRef>
+          <a:fontRef idx="minor">
+            <a:schemeClr val="lt1"/>
+          </a:fontRef>
+        </p:style>
+        <p:txBody>
+          <a:bodyPr rtlCol="0" anchor="ctr"/>
+          <a:lstStyle/>
+          <a:p>
+            <a:pPr algn="ctr"/>
             <a:endParaRPr lang="it-IT"/>
+          </a:p>
+        </p:txBody>
+      </p:sp>
+      <p:sp>
+        <p:nvSpPr>
+          <p:cNvPr id="9" name="CasellaDiTesto 8">
+            <a:extLst>
+              <a:ext uri="{FF2B5EF4-FFF2-40B4-BE49-F238E27FC236}">
+                <a16:creationId xmlns:a16="http://schemas.microsoft.com/office/drawing/2014/main" id="{F923F726-1D35-BA39-C8D2-F4EF10F57513}"/>
+              </a:ext>
+            </a:extLst>
+          </p:cNvPr>
+          <p:cNvSpPr txBox="1"/>
+          <p:nvPr/>
+        </p:nvSpPr>
+        <p:spPr>
+          <a:xfrm>
+            <a:off x="1396179" y="3654923"/>
+            <a:ext cx="9399640" cy="1107996"/>
+          </a:xfrm>
+          <a:prstGeom prst="rect">
+            <a:avLst/>
+          </a:prstGeom>
+          <a:noFill/>
+        </p:spPr>
+        <p:txBody>
+          <a:bodyPr wrap="square" rtlCol="0">
+            <a:spAutoFit/>
+          </a:bodyPr>
+          <a:lstStyle/>
+          <a:p>
+            <a:r>
+              <a:rPr lang="it-IT" sz="6600" b="1" dirty="0">
+                <a:solidFill>
+                  <a:srgbClr val="990000"/>
+                </a:solidFill>
+              </a:rPr>
+              <a:t>MINIMUM VERTEX COVER</a:t>
+            </a:r>
+          </a:p>
+        </p:txBody>
+      </p:sp>
+      <p:sp>
+        <p:nvSpPr>
+          <p:cNvPr id="10" name="CasellaDiTesto 9">
+            <a:extLst>
+              <a:ext uri="{FF2B5EF4-FFF2-40B4-BE49-F238E27FC236}">
+                <a16:creationId xmlns:a16="http://schemas.microsoft.com/office/drawing/2014/main" id="{CBEEED13-D24E-CECE-E6F5-2C5FAD148501}"/>
+              </a:ext>
+            </a:extLst>
+          </p:cNvPr>
+          <p:cNvSpPr txBox="1"/>
+          <p:nvPr/>
+        </p:nvSpPr>
+        <p:spPr>
+          <a:xfrm>
+            <a:off x="8802356" y="6222490"/>
+            <a:ext cx="3285812" cy="400110"/>
+          </a:xfrm>
+          <a:prstGeom prst="rect">
+            <a:avLst/>
+          </a:prstGeom>
+          <a:noFill/>
+        </p:spPr>
+        <p:txBody>
+          <a:bodyPr wrap="square" rtlCol="0">
+            <a:spAutoFit/>
+          </a:bodyPr>
+          <a:lstStyle/>
+          <a:p>
+            <a:pPr algn="r"/>
+            <a:r>
+              <a:rPr lang="it-IT" sz="2000" b="1" dirty="0">
+                <a:solidFill>
+                  <a:schemeClr val="bg1"/>
+                </a:solidFill>
+              </a:rPr>
+              <a:t>Gianpaolo Pestilli (0386492) </a:t>
+            </a:r>
+          </a:p>
+        </p:txBody>
+      </p:sp>
+      <p:sp>
+        <p:nvSpPr>
+          <p:cNvPr id="11" name="CasellaDiTesto 10">
+            <a:extLst>
+              <a:ext uri="{FF2B5EF4-FFF2-40B4-BE49-F238E27FC236}">
+                <a16:creationId xmlns:a16="http://schemas.microsoft.com/office/drawing/2014/main" id="{074679B7-D32B-7777-B8F0-7F40911C8AE9}"/>
+              </a:ext>
+            </a:extLst>
+          </p:cNvPr>
+          <p:cNvSpPr txBox="1"/>
+          <p:nvPr/>
+        </p:nvSpPr>
+        <p:spPr>
+          <a:xfrm>
+            <a:off x="103832" y="6222490"/>
+            <a:ext cx="2126901" cy="400110"/>
+          </a:xfrm>
+          <a:prstGeom prst="rect">
+            <a:avLst/>
+          </a:prstGeom>
+          <a:noFill/>
+        </p:spPr>
+        <p:txBody>
+          <a:bodyPr wrap="square" rtlCol="0">
+            <a:spAutoFit/>
+          </a:bodyPr>
+          <a:lstStyle/>
+          <a:p>
+            <a:r>
+              <a:rPr lang="it-IT" sz="2000" b="1" dirty="0">
+                <a:solidFill>
+                  <a:schemeClr val="bg1"/>
+                </a:solidFill>
+              </a:rPr>
+              <a:t>AMOD 2025-2026</a:t>
+            </a:r>
           </a:p>
         </p:txBody>
       </p:sp>
@@ -3388,10 +3921,8875 @@
   <p:clrMapOvr>
     <a:masterClrMapping/>
   </p:clrMapOvr>
+  <mc:AlternateContent xmlns:mc="http://schemas.openxmlformats.org/markup-compatibility/2006" xmlns:p159="http://schemas.microsoft.com/office/powerpoint/2015/09/main">
+    <mc:Choice Requires="p159">
+      <p:transition xmlns:p14="http://schemas.microsoft.com/office/powerpoint/2010/main" spd="slow" p14:dur="2000">
+        <p159:morph option="byObject"/>
+      </p:transition>
+    </mc:Choice>
+    <mc:Fallback xmlns="">
+      <p:transition spd="slow">
+        <p:fade/>
+      </p:transition>
+    </mc:Fallback>
+  </mc:AlternateContent>
+</p:sld>
+</file>
+
+<file path=ppt/slides/slide10.xml><?xml version="1.0" encoding="utf-8"?>
+<p:sld xmlns:a="http://schemas.openxmlformats.org/drawingml/2006/main" xmlns:r="http://schemas.openxmlformats.org/officeDocument/2006/relationships" xmlns:p="http://schemas.openxmlformats.org/presentationml/2006/main">
+  <p:cSld>
+    <p:spTree>
+      <p:nvGrpSpPr>
+        <p:cNvPr id="1" name="">
+          <a:extLst>
+            <a:ext uri="{FF2B5EF4-FFF2-40B4-BE49-F238E27FC236}">
+              <a16:creationId xmlns:a16="http://schemas.microsoft.com/office/drawing/2014/main" id="{4C118003-55A9-082D-CD9A-AFFBCF162C96}"/>
+            </a:ext>
+          </a:extLst>
+        </p:cNvPr>
+        <p:cNvGrpSpPr/>
+        <p:nvPr/>
+      </p:nvGrpSpPr>
+      <p:grpSpPr>
+        <a:xfrm>
+          <a:off x="0" y="0"/>
+          <a:ext cx="0" cy="0"/>
+          <a:chOff x="0" y="0"/>
+          <a:chExt cx="0" cy="0"/>
+        </a:xfrm>
+      </p:grpSpPr>
+      <p:sp>
+        <p:nvSpPr>
+          <p:cNvPr id="5" name="Rettangolo 4">
+            <a:extLst>
+              <a:ext uri="{FF2B5EF4-FFF2-40B4-BE49-F238E27FC236}">
+                <a16:creationId xmlns:a16="http://schemas.microsoft.com/office/drawing/2014/main" id="{1B538783-DE3A-3257-3ABD-C216CEA1422F}"/>
+              </a:ext>
+            </a:extLst>
+          </p:cNvPr>
+          <p:cNvSpPr/>
+          <p:nvPr/>
+        </p:nvSpPr>
+        <p:spPr>
+          <a:xfrm rot="16200000">
+            <a:off x="5612871" y="326546"/>
+            <a:ext cx="966258" cy="12192000"/>
+          </a:xfrm>
+          <a:prstGeom prst="rect">
+            <a:avLst/>
+          </a:prstGeom>
+          <a:solidFill>
+            <a:srgbClr val="990000"/>
+          </a:solidFill>
+          <a:ln>
+            <a:solidFill>
+              <a:srgbClr val="990000"/>
+            </a:solidFill>
+          </a:ln>
+        </p:spPr>
+        <p:style>
+          <a:lnRef idx="2">
+            <a:schemeClr val="accent1">
+              <a:shade val="15000"/>
+            </a:schemeClr>
+          </a:lnRef>
+          <a:fillRef idx="1">
+            <a:schemeClr val="accent1"/>
+          </a:fillRef>
+          <a:effectRef idx="0">
+            <a:schemeClr val="accent1"/>
+          </a:effectRef>
+          <a:fontRef idx="minor">
+            <a:schemeClr val="lt1"/>
+          </a:fontRef>
+        </p:style>
+        <p:txBody>
+          <a:bodyPr rtlCol="0" anchor="ctr"/>
+          <a:lstStyle/>
+          <a:p>
+            <a:pPr algn="ctr"/>
+            <a:endParaRPr lang="it-IT" dirty="0"/>
+          </a:p>
+        </p:txBody>
+      </p:sp>
+      <p:sp>
+        <p:nvSpPr>
+          <p:cNvPr id="6" name="CasellaDiTesto 5">
+            <a:extLst>
+              <a:ext uri="{FF2B5EF4-FFF2-40B4-BE49-F238E27FC236}">
+                <a16:creationId xmlns:a16="http://schemas.microsoft.com/office/drawing/2014/main" id="{EBAEE5A3-78E6-3070-DBD3-ACD390230642}"/>
+              </a:ext>
+            </a:extLst>
+          </p:cNvPr>
+          <p:cNvSpPr txBox="1"/>
+          <p:nvPr/>
+        </p:nvSpPr>
+        <p:spPr>
+          <a:xfrm>
+            <a:off x="5086139" y="6222490"/>
+            <a:ext cx="2019720" cy="400110"/>
+          </a:xfrm>
+          <a:prstGeom prst="rect">
+            <a:avLst/>
+          </a:prstGeom>
+          <a:noFill/>
+        </p:spPr>
+        <p:txBody>
+          <a:bodyPr wrap="square" rtlCol="0">
+            <a:spAutoFit/>
+          </a:bodyPr>
+          <a:lstStyle/>
+          <a:p>
+            <a:pPr algn="r"/>
+            <a:r>
+              <a:rPr lang="it-IT" sz="2000" b="1" dirty="0">
+                <a:solidFill>
+                  <a:schemeClr val="bg1"/>
+                </a:solidFill>
+              </a:rPr>
+              <a:t>Gianpaolo Pestilli</a:t>
+            </a:r>
+          </a:p>
+        </p:txBody>
+      </p:sp>
+      <p:sp>
+        <p:nvSpPr>
+          <p:cNvPr id="7" name="CasellaDiTesto 6">
+            <a:extLst>
+              <a:ext uri="{FF2B5EF4-FFF2-40B4-BE49-F238E27FC236}">
+                <a16:creationId xmlns:a16="http://schemas.microsoft.com/office/drawing/2014/main" id="{E931D45D-1B95-84D2-0CF2-69AFBFE43ED1}"/>
+              </a:ext>
+            </a:extLst>
+          </p:cNvPr>
+          <p:cNvSpPr txBox="1"/>
+          <p:nvPr/>
+        </p:nvSpPr>
+        <p:spPr>
+          <a:xfrm>
+            <a:off x="11650283" y="6222490"/>
+            <a:ext cx="262013" cy="400110"/>
+          </a:xfrm>
+          <a:prstGeom prst="rect">
+            <a:avLst/>
+          </a:prstGeom>
+          <a:noFill/>
+        </p:spPr>
+        <p:txBody>
+          <a:bodyPr wrap="square" rtlCol="0">
+            <a:spAutoFit/>
+          </a:bodyPr>
+          <a:lstStyle/>
+          <a:p>
+            <a:r>
+              <a:rPr lang="it-IT" sz="2000" b="1" dirty="0">
+                <a:solidFill>
+                  <a:schemeClr val="bg1"/>
+                </a:solidFill>
+              </a:rPr>
+              <a:t>9</a:t>
+            </a:r>
+          </a:p>
+        </p:txBody>
+      </p:sp>
+      <p:sp>
+        <p:nvSpPr>
+          <p:cNvPr id="8" name="CasellaDiTesto 7">
+            <a:extLst>
+              <a:ext uri="{FF2B5EF4-FFF2-40B4-BE49-F238E27FC236}">
+                <a16:creationId xmlns:a16="http://schemas.microsoft.com/office/drawing/2014/main" id="{481F8678-4068-1A9F-94C2-9FFE09D94A98}"/>
+              </a:ext>
+            </a:extLst>
+          </p:cNvPr>
+          <p:cNvSpPr txBox="1"/>
+          <p:nvPr/>
+        </p:nvSpPr>
+        <p:spPr>
+          <a:xfrm>
+            <a:off x="533399" y="728069"/>
+            <a:ext cx="11116884" cy="1277273"/>
+          </a:xfrm>
+          <a:prstGeom prst="rect">
+            <a:avLst/>
+          </a:prstGeom>
+          <a:noFill/>
+        </p:spPr>
+        <p:txBody>
+          <a:bodyPr wrap="square" rtlCol="0">
+            <a:spAutoFit/>
+          </a:bodyPr>
+          <a:lstStyle/>
+          <a:p>
+            <a:pPr algn="just">
+              <a:spcAft>
+                <a:spcPts val="600"/>
+              </a:spcAft>
+            </a:pPr>
+            <a:r>
+              <a:rPr lang="it-IT" sz="4000" b="1" dirty="0">
+                <a:solidFill>
+                  <a:srgbClr val="990000"/>
+                </a:solidFill>
+              </a:rPr>
+              <a:t>VERTEX COVER NON PESATO</a:t>
+            </a:r>
+          </a:p>
+          <a:p>
+            <a:pPr algn="just">
+              <a:spcAft>
+                <a:spcPts val="600"/>
+              </a:spcAft>
+            </a:pPr>
+            <a:r>
+              <a:rPr lang="it-IT" sz="3200" b="1" dirty="0"/>
+              <a:t>Algoritmo 3 (basato sul matching massimale)</a:t>
+            </a:r>
+            <a:endParaRPr lang="it-IT" sz="3200" dirty="0"/>
+          </a:p>
+        </p:txBody>
+      </p:sp>
+      <p:pic>
+        <p:nvPicPr>
+          <p:cNvPr id="3" name="Immagine 2">
+            <a:extLst>
+              <a:ext uri="{FF2B5EF4-FFF2-40B4-BE49-F238E27FC236}">
+                <a16:creationId xmlns:a16="http://schemas.microsoft.com/office/drawing/2014/main" id="{AC71F03F-0223-D9DE-6028-1D25CF1E13B5}"/>
+              </a:ext>
+            </a:extLst>
+          </p:cNvPr>
+          <p:cNvPicPr>
+            <a:picLocks noChangeAspect="1"/>
+          </p:cNvPicPr>
+          <p:nvPr/>
+        </p:nvPicPr>
+        <p:blipFill>
+          <a:blip r:embed="rId2"/>
+          <a:srcRect b="36493"/>
+          <a:stretch>
+            <a:fillRect/>
+          </a:stretch>
+        </p:blipFill>
+        <p:spPr>
+          <a:xfrm>
+            <a:off x="533399" y="2314007"/>
+            <a:ext cx="4274575" cy="3316744"/>
+          </a:xfrm>
+          <a:prstGeom prst="rect">
+            <a:avLst/>
+          </a:prstGeom>
+        </p:spPr>
+      </p:pic>
+      <p:pic>
+        <p:nvPicPr>
+          <p:cNvPr id="9" name="Immagine 8">
+            <a:extLst>
+              <a:ext uri="{FF2B5EF4-FFF2-40B4-BE49-F238E27FC236}">
+                <a16:creationId xmlns:a16="http://schemas.microsoft.com/office/drawing/2014/main" id="{CC9B6F7E-3AD4-3CEE-DCD9-10BE279F49E9}"/>
+              </a:ext>
+            </a:extLst>
+          </p:cNvPr>
+          <p:cNvPicPr>
+            <a:picLocks noChangeAspect="1"/>
+          </p:cNvPicPr>
+          <p:nvPr/>
+        </p:nvPicPr>
+        <p:blipFill>
+          <a:blip r:embed="rId2"/>
+          <a:srcRect t="61380"/>
+          <a:stretch>
+            <a:fillRect/>
+          </a:stretch>
+        </p:blipFill>
+        <p:spPr>
+          <a:xfrm>
+            <a:off x="6091841" y="2314007"/>
+            <a:ext cx="4138438" cy="1952721"/>
+          </a:xfrm>
+          <a:prstGeom prst="rect">
+            <a:avLst/>
+          </a:prstGeom>
+        </p:spPr>
+      </p:pic>
+    </p:spTree>
+    <p:extLst>
+      <p:ext uri="{BB962C8B-B14F-4D97-AF65-F5344CB8AC3E}">
+        <p14:creationId xmlns:p14="http://schemas.microsoft.com/office/powerpoint/2010/main" val="3053941145"/>
+      </p:ext>
+    </p:extLst>
+  </p:cSld>
+  <p:clrMapOvr>
+    <a:masterClrMapping/>
+  </p:clrMapOvr>
+  <mc:AlternateContent xmlns:mc="http://schemas.openxmlformats.org/markup-compatibility/2006" xmlns:p159="http://schemas.microsoft.com/office/powerpoint/2015/09/main">
+    <mc:Choice Requires="p159">
+      <p:transition xmlns:p14="http://schemas.microsoft.com/office/powerpoint/2010/main" spd="slow" p14:dur="2000">
+        <p159:morph option="byObject"/>
+      </p:transition>
+    </mc:Choice>
+    <mc:Fallback xmlns="">
+      <p:transition spd="slow">
+        <p:fade/>
+      </p:transition>
+    </mc:Fallback>
+  </mc:AlternateContent>
+</p:sld>
+</file>
+
+<file path=ppt/slides/slide11.xml><?xml version="1.0" encoding="utf-8"?>
+<p:sld xmlns:a="http://schemas.openxmlformats.org/drawingml/2006/main" xmlns:r="http://schemas.openxmlformats.org/officeDocument/2006/relationships" xmlns:p="http://schemas.openxmlformats.org/presentationml/2006/main">
+  <p:cSld>
+    <p:spTree>
+      <p:nvGrpSpPr>
+        <p:cNvPr id="1" name="">
+          <a:extLst>
+            <a:ext uri="{FF2B5EF4-FFF2-40B4-BE49-F238E27FC236}">
+              <a16:creationId xmlns:a16="http://schemas.microsoft.com/office/drawing/2014/main" id="{967A2EAD-DFAF-31AF-5EAF-56B269B9C5AC}"/>
+            </a:ext>
+          </a:extLst>
+        </p:cNvPr>
+        <p:cNvGrpSpPr/>
+        <p:nvPr/>
+      </p:nvGrpSpPr>
+      <p:grpSpPr>
+        <a:xfrm>
+          <a:off x="0" y="0"/>
+          <a:ext cx="0" cy="0"/>
+          <a:chOff x="0" y="0"/>
+          <a:chExt cx="0" cy="0"/>
+        </a:xfrm>
+      </p:grpSpPr>
+      <p:sp>
+        <p:nvSpPr>
+          <p:cNvPr id="5" name="Rettangolo 4">
+            <a:extLst>
+              <a:ext uri="{FF2B5EF4-FFF2-40B4-BE49-F238E27FC236}">
+                <a16:creationId xmlns:a16="http://schemas.microsoft.com/office/drawing/2014/main" id="{A0219B91-BA4B-B5DD-25A5-C91EB616EE19}"/>
+              </a:ext>
+            </a:extLst>
+          </p:cNvPr>
+          <p:cNvSpPr/>
+          <p:nvPr/>
+        </p:nvSpPr>
+        <p:spPr>
+          <a:xfrm rot="16200000">
+            <a:off x="5612871" y="326546"/>
+            <a:ext cx="966258" cy="12192000"/>
+          </a:xfrm>
+          <a:prstGeom prst="rect">
+            <a:avLst/>
+          </a:prstGeom>
+          <a:solidFill>
+            <a:srgbClr val="990000"/>
+          </a:solidFill>
+          <a:ln>
+            <a:solidFill>
+              <a:srgbClr val="990000"/>
+            </a:solidFill>
+          </a:ln>
+        </p:spPr>
+        <p:style>
+          <a:lnRef idx="2">
+            <a:schemeClr val="accent1">
+              <a:shade val="15000"/>
+            </a:schemeClr>
+          </a:lnRef>
+          <a:fillRef idx="1">
+            <a:schemeClr val="accent1"/>
+          </a:fillRef>
+          <a:effectRef idx="0">
+            <a:schemeClr val="accent1"/>
+          </a:effectRef>
+          <a:fontRef idx="minor">
+            <a:schemeClr val="lt1"/>
+          </a:fontRef>
+        </p:style>
+        <p:txBody>
+          <a:bodyPr rtlCol="0" anchor="ctr"/>
+          <a:lstStyle/>
+          <a:p>
+            <a:pPr algn="ctr"/>
+            <a:endParaRPr lang="it-IT" dirty="0"/>
+          </a:p>
+        </p:txBody>
+      </p:sp>
+      <p:sp>
+        <p:nvSpPr>
+          <p:cNvPr id="6" name="CasellaDiTesto 5">
+            <a:extLst>
+              <a:ext uri="{FF2B5EF4-FFF2-40B4-BE49-F238E27FC236}">
+                <a16:creationId xmlns:a16="http://schemas.microsoft.com/office/drawing/2014/main" id="{D2C8A72E-054B-6A8F-E2BF-03F3E0A11CD8}"/>
+              </a:ext>
+            </a:extLst>
+          </p:cNvPr>
+          <p:cNvSpPr txBox="1"/>
+          <p:nvPr/>
+        </p:nvSpPr>
+        <p:spPr>
+          <a:xfrm>
+            <a:off x="5086139" y="6222490"/>
+            <a:ext cx="2019720" cy="400110"/>
+          </a:xfrm>
+          <a:prstGeom prst="rect">
+            <a:avLst/>
+          </a:prstGeom>
+          <a:noFill/>
+        </p:spPr>
+        <p:txBody>
+          <a:bodyPr wrap="square" rtlCol="0">
+            <a:spAutoFit/>
+          </a:bodyPr>
+          <a:lstStyle/>
+          <a:p>
+            <a:pPr algn="r"/>
+            <a:r>
+              <a:rPr lang="it-IT" sz="2000" b="1" dirty="0">
+                <a:solidFill>
+                  <a:schemeClr val="bg1"/>
+                </a:solidFill>
+              </a:rPr>
+              <a:t>Gianpaolo Pestilli</a:t>
+            </a:r>
+          </a:p>
+        </p:txBody>
+      </p:sp>
+      <p:sp>
+        <p:nvSpPr>
+          <p:cNvPr id="7" name="CasellaDiTesto 6">
+            <a:extLst>
+              <a:ext uri="{FF2B5EF4-FFF2-40B4-BE49-F238E27FC236}">
+                <a16:creationId xmlns:a16="http://schemas.microsoft.com/office/drawing/2014/main" id="{FAFC70D3-AB8C-0F39-FE80-2CE0E9280E96}"/>
+              </a:ext>
+            </a:extLst>
+          </p:cNvPr>
+          <p:cNvSpPr txBox="1"/>
+          <p:nvPr/>
+        </p:nvSpPr>
+        <p:spPr>
+          <a:xfrm>
+            <a:off x="11434917" y="6222490"/>
+            <a:ext cx="491612" cy="400110"/>
+          </a:xfrm>
+          <a:prstGeom prst="rect">
+            <a:avLst/>
+          </a:prstGeom>
+          <a:noFill/>
+        </p:spPr>
+        <p:txBody>
+          <a:bodyPr wrap="square" rtlCol="0">
+            <a:spAutoFit/>
+          </a:bodyPr>
+          <a:lstStyle/>
+          <a:p>
+            <a:pPr algn="r"/>
+            <a:r>
+              <a:rPr lang="it-IT" sz="2000" b="1" dirty="0">
+                <a:solidFill>
+                  <a:schemeClr val="bg1"/>
+                </a:solidFill>
+              </a:rPr>
+              <a:t>10</a:t>
+            </a:r>
+          </a:p>
+        </p:txBody>
+      </p:sp>
+      <p:sp>
+        <p:nvSpPr>
+          <p:cNvPr id="8" name="CasellaDiTesto 7">
+            <a:extLst>
+              <a:ext uri="{FF2B5EF4-FFF2-40B4-BE49-F238E27FC236}">
+                <a16:creationId xmlns:a16="http://schemas.microsoft.com/office/drawing/2014/main" id="{7CC36DE6-25D1-7331-99BC-060F84C277DF}"/>
+              </a:ext>
+            </a:extLst>
+          </p:cNvPr>
+          <p:cNvSpPr txBox="1"/>
+          <p:nvPr/>
+        </p:nvSpPr>
+        <p:spPr>
+          <a:xfrm>
+            <a:off x="533399" y="728069"/>
+            <a:ext cx="11116884" cy="3139321"/>
+          </a:xfrm>
+          <a:prstGeom prst="rect">
+            <a:avLst/>
+          </a:prstGeom>
+          <a:noFill/>
+        </p:spPr>
+        <p:txBody>
+          <a:bodyPr wrap="square" rtlCol="0">
+            <a:spAutoFit/>
+          </a:bodyPr>
+          <a:lstStyle/>
+          <a:p>
+            <a:pPr algn="just">
+              <a:spcAft>
+                <a:spcPts val="600"/>
+              </a:spcAft>
+            </a:pPr>
+            <a:r>
+              <a:rPr lang="it-IT" sz="4000" b="1" dirty="0">
+                <a:solidFill>
+                  <a:srgbClr val="990000"/>
+                </a:solidFill>
+              </a:rPr>
+              <a:t>VERTEX COVER NON PESATO</a:t>
+            </a:r>
+          </a:p>
+          <a:p>
+            <a:pPr algn="just">
+              <a:spcAft>
+                <a:spcPts val="1200"/>
+              </a:spcAft>
+            </a:pPr>
+            <a:r>
+              <a:rPr lang="it-IT" sz="3200" b="1" dirty="0"/>
+              <a:t>Algoritmo 4 (</a:t>
+            </a:r>
+            <a:r>
+              <a:rPr lang="it-IT" sz="3200" b="1" dirty="0" err="1"/>
+              <a:t>doubling</a:t>
+            </a:r>
+            <a:r>
+              <a:rPr lang="it-IT" sz="3200" b="1" dirty="0"/>
+              <a:t> and </a:t>
+            </a:r>
+            <a:r>
+              <a:rPr lang="it-IT" sz="3200" b="1" dirty="0" err="1"/>
+              <a:t>rounding</a:t>
+            </a:r>
+            <a:r>
+              <a:rPr lang="it-IT" sz="3200" b="1" dirty="0"/>
+              <a:t> down)</a:t>
+            </a:r>
+            <a:endParaRPr lang="it-IT" sz="3200" dirty="0"/>
+          </a:p>
+          <a:p>
+            <a:pPr algn="just">
+              <a:spcAft>
+                <a:spcPts val="1200"/>
+              </a:spcAft>
+            </a:pPr>
+            <a:r>
+              <a:rPr lang="it-IT" sz="3200" dirty="0" err="1"/>
+              <a:t>Doubling</a:t>
+            </a:r>
+            <a:r>
+              <a:rPr lang="it-IT" sz="3200" dirty="0"/>
+              <a:t> and </a:t>
+            </a:r>
+            <a:r>
+              <a:rPr lang="it-IT" sz="3200" dirty="0" err="1"/>
+              <a:t>rounding</a:t>
+            </a:r>
+            <a:r>
+              <a:rPr lang="it-IT" sz="3200" dirty="0"/>
+              <a:t> down effettuato dopo aver risolto:</a:t>
+            </a:r>
+          </a:p>
+          <a:p>
+            <a:pPr marL="457200" indent="-457200" algn="just">
+              <a:spcAft>
+                <a:spcPts val="600"/>
+              </a:spcAft>
+              <a:buFont typeface="Arial" panose="020B0604020202020204" pitchFamily="34" charset="0"/>
+              <a:buChar char="•"/>
+            </a:pPr>
+            <a:r>
+              <a:rPr lang="it-IT" sz="3200" b="1" dirty="0"/>
+              <a:t>Rilassamento lineare</a:t>
+            </a:r>
+          </a:p>
+          <a:p>
+            <a:pPr marL="457200" indent="-457200" algn="just">
+              <a:spcAft>
+                <a:spcPts val="600"/>
+              </a:spcAft>
+              <a:buFont typeface="Arial" panose="020B0604020202020204" pitchFamily="34" charset="0"/>
+              <a:buChar char="•"/>
+            </a:pPr>
+            <a:r>
+              <a:rPr lang="it-IT" sz="3200" dirty="0">
+                <a:solidFill>
+                  <a:schemeClr val="bg2">
+                    <a:lumMod val="75000"/>
+                  </a:schemeClr>
+                </a:solidFill>
+              </a:rPr>
+              <a:t>Rilassamento lineare con </a:t>
+            </a:r>
+            <a:r>
+              <a:rPr lang="it-IT" sz="3200" dirty="0" err="1">
+                <a:solidFill>
+                  <a:schemeClr val="bg2">
+                    <a:lumMod val="75000"/>
+                  </a:schemeClr>
+                </a:solidFill>
+              </a:rPr>
+              <a:t>odd</a:t>
+            </a:r>
+            <a:r>
+              <a:rPr lang="it-IT" sz="3200" dirty="0">
+                <a:solidFill>
+                  <a:schemeClr val="bg2">
+                    <a:lumMod val="75000"/>
+                  </a:schemeClr>
+                </a:solidFill>
+              </a:rPr>
+              <a:t> </a:t>
+            </a:r>
+            <a:r>
+              <a:rPr lang="it-IT" sz="3200" dirty="0" err="1">
+                <a:solidFill>
+                  <a:schemeClr val="bg2">
+                    <a:lumMod val="75000"/>
+                  </a:schemeClr>
+                </a:solidFill>
+              </a:rPr>
+              <a:t>cycle</a:t>
+            </a:r>
+            <a:r>
+              <a:rPr lang="it-IT" sz="3200" dirty="0">
+                <a:solidFill>
+                  <a:schemeClr val="bg2">
+                    <a:lumMod val="75000"/>
+                  </a:schemeClr>
+                </a:solidFill>
+              </a:rPr>
+              <a:t> </a:t>
+            </a:r>
+            <a:r>
+              <a:rPr lang="it-IT" sz="3200" dirty="0" err="1">
+                <a:solidFill>
+                  <a:schemeClr val="bg2">
+                    <a:lumMod val="75000"/>
+                  </a:schemeClr>
+                </a:solidFill>
+              </a:rPr>
+              <a:t>inequalities</a:t>
+            </a:r>
+            <a:endParaRPr lang="it-IT" sz="3200" dirty="0">
+              <a:solidFill>
+                <a:schemeClr val="bg2">
+                  <a:lumMod val="75000"/>
+                </a:schemeClr>
+              </a:solidFill>
+            </a:endParaRPr>
+          </a:p>
+        </p:txBody>
+      </p:sp>
+    </p:spTree>
+    <p:extLst>
+      <p:ext uri="{BB962C8B-B14F-4D97-AF65-F5344CB8AC3E}">
+        <p14:creationId xmlns:p14="http://schemas.microsoft.com/office/powerpoint/2010/main" val="388737269"/>
+      </p:ext>
+    </p:extLst>
+  </p:cSld>
+  <p:clrMapOvr>
+    <a:masterClrMapping/>
+  </p:clrMapOvr>
+  <mc:AlternateContent xmlns:mc="http://schemas.openxmlformats.org/markup-compatibility/2006" xmlns:p159="http://schemas.microsoft.com/office/powerpoint/2015/09/main">
+    <mc:Choice Requires="p159">
+      <p:transition xmlns:p14="http://schemas.microsoft.com/office/powerpoint/2010/main" spd="slow" p14:dur="2000">
+        <p159:morph option="byObject"/>
+      </p:transition>
+    </mc:Choice>
+    <mc:Fallback xmlns="">
+      <p:transition spd="slow">
+        <p:fade/>
+      </p:transition>
+    </mc:Fallback>
+  </mc:AlternateContent>
+</p:sld>
+</file>
+
+<file path=ppt/slides/slide12.xml><?xml version="1.0" encoding="utf-8"?>
+<p:sld xmlns:a="http://schemas.openxmlformats.org/drawingml/2006/main" xmlns:r="http://schemas.openxmlformats.org/officeDocument/2006/relationships" xmlns:p="http://schemas.openxmlformats.org/presentationml/2006/main">
+  <p:cSld>
+    <p:spTree>
+      <p:nvGrpSpPr>
+        <p:cNvPr id="1" name="">
+          <a:extLst>
+            <a:ext uri="{FF2B5EF4-FFF2-40B4-BE49-F238E27FC236}">
+              <a16:creationId xmlns:a16="http://schemas.microsoft.com/office/drawing/2014/main" id="{BF44F1F9-8FEB-6A8F-10A8-10D1C1276E03}"/>
+            </a:ext>
+          </a:extLst>
+        </p:cNvPr>
+        <p:cNvGrpSpPr/>
+        <p:nvPr/>
+      </p:nvGrpSpPr>
+      <p:grpSpPr>
+        <a:xfrm>
+          <a:off x="0" y="0"/>
+          <a:ext cx="0" cy="0"/>
+          <a:chOff x="0" y="0"/>
+          <a:chExt cx="0" cy="0"/>
+        </a:xfrm>
+      </p:grpSpPr>
+      <p:sp>
+        <p:nvSpPr>
+          <p:cNvPr id="5" name="Rettangolo 4">
+            <a:extLst>
+              <a:ext uri="{FF2B5EF4-FFF2-40B4-BE49-F238E27FC236}">
+                <a16:creationId xmlns:a16="http://schemas.microsoft.com/office/drawing/2014/main" id="{75C3883C-7764-0835-5410-F87964F83C2F}"/>
+              </a:ext>
+            </a:extLst>
+          </p:cNvPr>
+          <p:cNvSpPr/>
+          <p:nvPr/>
+        </p:nvSpPr>
+        <p:spPr>
+          <a:xfrm rot="16200000">
+            <a:off x="5612871" y="326546"/>
+            <a:ext cx="966258" cy="12192000"/>
+          </a:xfrm>
+          <a:prstGeom prst="rect">
+            <a:avLst/>
+          </a:prstGeom>
+          <a:solidFill>
+            <a:srgbClr val="990000"/>
+          </a:solidFill>
+          <a:ln>
+            <a:solidFill>
+              <a:srgbClr val="990000"/>
+            </a:solidFill>
+          </a:ln>
+        </p:spPr>
+        <p:style>
+          <a:lnRef idx="2">
+            <a:schemeClr val="accent1">
+              <a:shade val="15000"/>
+            </a:schemeClr>
+          </a:lnRef>
+          <a:fillRef idx="1">
+            <a:schemeClr val="accent1"/>
+          </a:fillRef>
+          <a:effectRef idx="0">
+            <a:schemeClr val="accent1"/>
+          </a:effectRef>
+          <a:fontRef idx="minor">
+            <a:schemeClr val="lt1"/>
+          </a:fontRef>
+        </p:style>
+        <p:txBody>
+          <a:bodyPr rtlCol="0" anchor="ctr"/>
+          <a:lstStyle/>
+          <a:p>
+            <a:pPr algn="ctr"/>
+            <a:endParaRPr lang="it-IT" dirty="0"/>
+          </a:p>
+        </p:txBody>
+      </p:sp>
+      <p:sp>
+        <p:nvSpPr>
+          <p:cNvPr id="6" name="CasellaDiTesto 5">
+            <a:extLst>
+              <a:ext uri="{FF2B5EF4-FFF2-40B4-BE49-F238E27FC236}">
+                <a16:creationId xmlns:a16="http://schemas.microsoft.com/office/drawing/2014/main" id="{3EEB942E-014D-1165-FD44-C9DBF2386F8E}"/>
+              </a:ext>
+            </a:extLst>
+          </p:cNvPr>
+          <p:cNvSpPr txBox="1"/>
+          <p:nvPr/>
+        </p:nvSpPr>
+        <p:spPr>
+          <a:xfrm>
+            <a:off x="5086139" y="6222490"/>
+            <a:ext cx="2019720" cy="400110"/>
+          </a:xfrm>
+          <a:prstGeom prst="rect">
+            <a:avLst/>
+          </a:prstGeom>
+          <a:noFill/>
+        </p:spPr>
+        <p:txBody>
+          <a:bodyPr wrap="square" rtlCol="0">
+            <a:spAutoFit/>
+          </a:bodyPr>
+          <a:lstStyle/>
+          <a:p>
+            <a:pPr algn="r"/>
+            <a:r>
+              <a:rPr lang="it-IT" sz="2000" b="1" dirty="0">
+                <a:solidFill>
+                  <a:schemeClr val="bg1"/>
+                </a:solidFill>
+              </a:rPr>
+              <a:t>Gianpaolo Pestilli</a:t>
+            </a:r>
+          </a:p>
+        </p:txBody>
+      </p:sp>
+      <p:sp>
+        <p:nvSpPr>
+          <p:cNvPr id="7" name="CasellaDiTesto 6">
+            <a:extLst>
+              <a:ext uri="{FF2B5EF4-FFF2-40B4-BE49-F238E27FC236}">
+                <a16:creationId xmlns:a16="http://schemas.microsoft.com/office/drawing/2014/main" id="{18252BC9-85D1-8131-8374-946EC819469B}"/>
+              </a:ext>
+            </a:extLst>
+          </p:cNvPr>
+          <p:cNvSpPr txBox="1"/>
+          <p:nvPr/>
+        </p:nvSpPr>
+        <p:spPr>
+          <a:xfrm>
+            <a:off x="11434917" y="6222490"/>
+            <a:ext cx="491612" cy="400110"/>
+          </a:xfrm>
+          <a:prstGeom prst="rect">
+            <a:avLst/>
+          </a:prstGeom>
+          <a:noFill/>
+        </p:spPr>
+        <p:txBody>
+          <a:bodyPr wrap="square" rtlCol="0">
+            <a:spAutoFit/>
+          </a:bodyPr>
+          <a:lstStyle/>
+          <a:p>
+            <a:pPr algn="r"/>
+            <a:r>
+              <a:rPr lang="it-IT" sz="2000" b="1" dirty="0">
+                <a:solidFill>
+                  <a:schemeClr val="bg1"/>
+                </a:solidFill>
+              </a:rPr>
+              <a:t>11</a:t>
+            </a:r>
+          </a:p>
+        </p:txBody>
+      </p:sp>
+      <p:sp>
+        <p:nvSpPr>
+          <p:cNvPr id="8" name="CasellaDiTesto 7">
+            <a:extLst>
+              <a:ext uri="{FF2B5EF4-FFF2-40B4-BE49-F238E27FC236}">
+                <a16:creationId xmlns:a16="http://schemas.microsoft.com/office/drawing/2014/main" id="{8831D7CC-6BA4-CDEF-10CE-9FDE3E5258BE}"/>
+              </a:ext>
+            </a:extLst>
+          </p:cNvPr>
+          <p:cNvSpPr txBox="1"/>
+          <p:nvPr/>
+        </p:nvSpPr>
+        <p:spPr>
+          <a:xfrm>
+            <a:off x="533399" y="728069"/>
+            <a:ext cx="11116884" cy="1277273"/>
+          </a:xfrm>
+          <a:prstGeom prst="rect">
+            <a:avLst/>
+          </a:prstGeom>
+          <a:noFill/>
+        </p:spPr>
+        <p:txBody>
+          <a:bodyPr wrap="square" rtlCol="0">
+            <a:spAutoFit/>
+          </a:bodyPr>
+          <a:lstStyle/>
+          <a:p>
+            <a:pPr algn="just">
+              <a:spcAft>
+                <a:spcPts val="600"/>
+              </a:spcAft>
+            </a:pPr>
+            <a:r>
+              <a:rPr lang="it-IT" sz="4000" b="1" dirty="0">
+                <a:solidFill>
+                  <a:srgbClr val="990000"/>
+                </a:solidFill>
+              </a:rPr>
+              <a:t>VERTEX COVER NON PESATO</a:t>
+            </a:r>
+          </a:p>
+          <a:p>
+            <a:pPr algn="just">
+              <a:spcAft>
+                <a:spcPts val="1200"/>
+              </a:spcAft>
+            </a:pPr>
+            <a:r>
+              <a:rPr lang="it-IT" sz="3200" b="1" dirty="0"/>
+              <a:t>Algoritmo 4 (</a:t>
+            </a:r>
+            <a:r>
+              <a:rPr lang="it-IT" sz="3200" b="1" dirty="0" err="1"/>
+              <a:t>doubling</a:t>
+            </a:r>
+            <a:r>
+              <a:rPr lang="it-IT" sz="3200" b="1" dirty="0"/>
+              <a:t> and </a:t>
+            </a:r>
+            <a:r>
+              <a:rPr lang="it-IT" sz="3200" b="1" dirty="0" err="1"/>
+              <a:t>rounding</a:t>
+            </a:r>
+            <a:r>
+              <a:rPr lang="it-IT" sz="3200" b="1" dirty="0"/>
+              <a:t> down)</a:t>
+            </a:r>
+            <a:endParaRPr lang="it-IT" sz="3200" dirty="0"/>
+          </a:p>
+        </p:txBody>
+      </p:sp>
+      <p:pic>
+        <p:nvPicPr>
+          <p:cNvPr id="3" name="Immagine 2">
+            <a:extLst>
+              <a:ext uri="{FF2B5EF4-FFF2-40B4-BE49-F238E27FC236}">
+                <a16:creationId xmlns:a16="http://schemas.microsoft.com/office/drawing/2014/main" id="{A980851D-AA83-0B2B-1DE7-25AA154B8771}"/>
+              </a:ext>
+            </a:extLst>
+          </p:cNvPr>
+          <p:cNvPicPr>
+            <a:picLocks noChangeAspect="1"/>
+          </p:cNvPicPr>
+          <p:nvPr/>
+        </p:nvPicPr>
+        <p:blipFill>
+          <a:blip r:embed="rId2"/>
+          <a:stretch>
+            <a:fillRect/>
+          </a:stretch>
+        </p:blipFill>
+        <p:spPr>
+          <a:xfrm>
+            <a:off x="533399" y="2276782"/>
+            <a:ext cx="3546988" cy="1726514"/>
+          </a:xfrm>
+          <a:prstGeom prst="rect">
+            <a:avLst/>
+          </a:prstGeom>
+        </p:spPr>
+      </p:pic>
+      <p:pic>
+        <p:nvPicPr>
+          <p:cNvPr id="11" name="Immagine 10">
+            <a:extLst>
+              <a:ext uri="{FF2B5EF4-FFF2-40B4-BE49-F238E27FC236}">
+                <a16:creationId xmlns:a16="http://schemas.microsoft.com/office/drawing/2014/main" id="{430162F0-99C4-B5E3-E14A-F143DFA70A5B}"/>
+              </a:ext>
+            </a:extLst>
+          </p:cNvPr>
+          <p:cNvPicPr>
+            <a:picLocks noChangeAspect="1"/>
+          </p:cNvPicPr>
+          <p:nvPr/>
+        </p:nvPicPr>
+        <p:blipFill>
+          <a:blip r:embed="rId3"/>
+          <a:stretch>
+            <a:fillRect/>
+          </a:stretch>
+        </p:blipFill>
+        <p:spPr>
+          <a:xfrm>
+            <a:off x="4829534" y="2276782"/>
+            <a:ext cx="5479505" cy="3391194"/>
+          </a:xfrm>
+          <a:prstGeom prst="rect">
+            <a:avLst/>
+          </a:prstGeom>
+        </p:spPr>
+      </p:pic>
+    </p:spTree>
+    <p:extLst>
+      <p:ext uri="{BB962C8B-B14F-4D97-AF65-F5344CB8AC3E}">
+        <p14:creationId xmlns:p14="http://schemas.microsoft.com/office/powerpoint/2010/main" val="2453806957"/>
+      </p:ext>
+    </p:extLst>
+  </p:cSld>
+  <p:clrMapOvr>
+    <a:masterClrMapping/>
+  </p:clrMapOvr>
+  <mc:AlternateContent xmlns:mc="http://schemas.openxmlformats.org/markup-compatibility/2006" xmlns:p159="http://schemas.microsoft.com/office/powerpoint/2015/09/main">
+    <mc:Choice Requires="p159">
+      <p:transition xmlns:p14="http://schemas.microsoft.com/office/powerpoint/2010/main" spd="slow" p14:dur="2000">
+        <p159:morph option="byObject"/>
+      </p:transition>
+    </mc:Choice>
+    <mc:Fallback xmlns="">
+      <p:transition spd="slow">
+        <p:fade/>
+      </p:transition>
+    </mc:Fallback>
+  </mc:AlternateContent>
+</p:sld>
+</file>
+
+<file path=ppt/slides/slide13.xml><?xml version="1.0" encoding="utf-8"?>
+<p:sld xmlns:a="http://schemas.openxmlformats.org/drawingml/2006/main" xmlns:r="http://schemas.openxmlformats.org/officeDocument/2006/relationships" xmlns:p="http://schemas.openxmlformats.org/presentationml/2006/main">
+  <p:cSld>
+    <p:spTree>
+      <p:nvGrpSpPr>
+        <p:cNvPr id="1" name="">
+          <a:extLst>
+            <a:ext uri="{FF2B5EF4-FFF2-40B4-BE49-F238E27FC236}">
+              <a16:creationId xmlns:a16="http://schemas.microsoft.com/office/drawing/2014/main" id="{E5FF22A7-A0C2-A43F-E9CA-238C15F88550}"/>
+            </a:ext>
+          </a:extLst>
+        </p:cNvPr>
+        <p:cNvGrpSpPr/>
+        <p:nvPr/>
+      </p:nvGrpSpPr>
+      <p:grpSpPr>
+        <a:xfrm>
+          <a:off x="0" y="0"/>
+          <a:ext cx="0" cy="0"/>
+          <a:chOff x="0" y="0"/>
+          <a:chExt cx="0" cy="0"/>
+        </a:xfrm>
+      </p:grpSpPr>
+      <p:sp>
+        <p:nvSpPr>
+          <p:cNvPr id="5" name="Rettangolo 4">
+            <a:extLst>
+              <a:ext uri="{FF2B5EF4-FFF2-40B4-BE49-F238E27FC236}">
+                <a16:creationId xmlns:a16="http://schemas.microsoft.com/office/drawing/2014/main" id="{6CA91E07-E52E-D621-867A-E481958FC752}"/>
+              </a:ext>
+            </a:extLst>
+          </p:cNvPr>
+          <p:cNvSpPr/>
+          <p:nvPr/>
+        </p:nvSpPr>
+        <p:spPr>
+          <a:xfrm rot="16200000">
+            <a:off x="5612871" y="326546"/>
+            <a:ext cx="966258" cy="12192000"/>
+          </a:xfrm>
+          <a:prstGeom prst="rect">
+            <a:avLst/>
+          </a:prstGeom>
+          <a:solidFill>
+            <a:srgbClr val="990000"/>
+          </a:solidFill>
+          <a:ln>
+            <a:solidFill>
+              <a:srgbClr val="990000"/>
+            </a:solidFill>
+          </a:ln>
+        </p:spPr>
+        <p:style>
+          <a:lnRef idx="2">
+            <a:schemeClr val="accent1">
+              <a:shade val="15000"/>
+            </a:schemeClr>
+          </a:lnRef>
+          <a:fillRef idx="1">
+            <a:schemeClr val="accent1"/>
+          </a:fillRef>
+          <a:effectRef idx="0">
+            <a:schemeClr val="accent1"/>
+          </a:effectRef>
+          <a:fontRef idx="minor">
+            <a:schemeClr val="lt1"/>
+          </a:fontRef>
+        </p:style>
+        <p:txBody>
+          <a:bodyPr rtlCol="0" anchor="ctr"/>
+          <a:lstStyle/>
+          <a:p>
+            <a:pPr algn="ctr"/>
+            <a:endParaRPr lang="it-IT" dirty="0"/>
+          </a:p>
+        </p:txBody>
+      </p:sp>
+      <p:sp>
+        <p:nvSpPr>
+          <p:cNvPr id="6" name="CasellaDiTesto 5">
+            <a:extLst>
+              <a:ext uri="{FF2B5EF4-FFF2-40B4-BE49-F238E27FC236}">
+                <a16:creationId xmlns:a16="http://schemas.microsoft.com/office/drawing/2014/main" id="{32C09B9C-8FA5-2E5F-2A04-C8D571A34BAE}"/>
+              </a:ext>
+            </a:extLst>
+          </p:cNvPr>
+          <p:cNvSpPr txBox="1"/>
+          <p:nvPr/>
+        </p:nvSpPr>
+        <p:spPr>
+          <a:xfrm>
+            <a:off x="5086139" y="6222490"/>
+            <a:ext cx="2019720" cy="400110"/>
+          </a:xfrm>
+          <a:prstGeom prst="rect">
+            <a:avLst/>
+          </a:prstGeom>
+          <a:noFill/>
+        </p:spPr>
+        <p:txBody>
+          <a:bodyPr wrap="square" rtlCol="0">
+            <a:spAutoFit/>
+          </a:bodyPr>
+          <a:lstStyle/>
+          <a:p>
+            <a:pPr algn="r"/>
+            <a:r>
+              <a:rPr lang="it-IT" sz="2000" b="1" dirty="0">
+                <a:solidFill>
+                  <a:schemeClr val="bg1"/>
+                </a:solidFill>
+              </a:rPr>
+              <a:t>Gianpaolo Pestilli</a:t>
+            </a:r>
+          </a:p>
+        </p:txBody>
+      </p:sp>
+      <p:sp>
+        <p:nvSpPr>
+          <p:cNvPr id="7" name="CasellaDiTesto 6">
+            <a:extLst>
+              <a:ext uri="{FF2B5EF4-FFF2-40B4-BE49-F238E27FC236}">
+                <a16:creationId xmlns:a16="http://schemas.microsoft.com/office/drawing/2014/main" id="{ED67676B-1BED-4C49-33C4-CF6AFF211F4C}"/>
+              </a:ext>
+            </a:extLst>
+          </p:cNvPr>
+          <p:cNvSpPr txBox="1"/>
+          <p:nvPr/>
+        </p:nvSpPr>
+        <p:spPr>
+          <a:xfrm>
+            <a:off x="11434917" y="6222490"/>
+            <a:ext cx="491612" cy="400110"/>
+          </a:xfrm>
+          <a:prstGeom prst="rect">
+            <a:avLst/>
+          </a:prstGeom>
+          <a:noFill/>
+        </p:spPr>
+        <p:txBody>
+          <a:bodyPr wrap="square" rtlCol="0">
+            <a:spAutoFit/>
+          </a:bodyPr>
+          <a:lstStyle/>
+          <a:p>
+            <a:pPr algn="r"/>
+            <a:r>
+              <a:rPr lang="it-IT" sz="2000" b="1" dirty="0">
+                <a:solidFill>
+                  <a:schemeClr val="bg1"/>
+                </a:solidFill>
+              </a:rPr>
+              <a:t>12</a:t>
+            </a:r>
+          </a:p>
+        </p:txBody>
+      </p:sp>
+      <p:sp>
+        <p:nvSpPr>
+          <p:cNvPr id="8" name="CasellaDiTesto 7">
+            <a:extLst>
+              <a:ext uri="{FF2B5EF4-FFF2-40B4-BE49-F238E27FC236}">
+                <a16:creationId xmlns:a16="http://schemas.microsoft.com/office/drawing/2014/main" id="{C380F41E-C28D-0125-496B-C5A8D378BD79}"/>
+              </a:ext>
+            </a:extLst>
+          </p:cNvPr>
+          <p:cNvSpPr txBox="1"/>
+          <p:nvPr/>
+        </p:nvSpPr>
+        <p:spPr>
+          <a:xfrm>
+            <a:off x="533399" y="728069"/>
+            <a:ext cx="11116884" cy="3139321"/>
+          </a:xfrm>
+          <a:prstGeom prst="rect">
+            <a:avLst/>
+          </a:prstGeom>
+          <a:noFill/>
+        </p:spPr>
+        <p:txBody>
+          <a:bodyPr wrap="square" rtlCol="0">
+            <a:spAutoFit/>
+          </a:bodyPr>
+          <a:lstStyle/>
+          <a:p>
+            <a:pPr algn="just">
+              <a:spcAft>
+                <a:spcPts val="600"/>
+              </a:spcAft>
+            </a:pPr>
+            <a:r>
+              <a:rPr lang="it-IT" sz="4000" b="1" dirty="0">
+                <a:solidFill>
+                  <a:srgbClr val="990000"/>
+                </a:solidFill>
+              </a:rPr>
+              <a:t>VERTEX COVER NON PESATO</a:t>
+            </a:r>
+          </a:p>
+          <a:p>
+            <a:pPr algn="just">
+              <a:spcAft>
+                <a:spcPts val="1200"/>
+              </a:spcAft>
+            </a:pPr>
+            <a:r>
+              <a:rPr lang="it-IT" sz="3200" b="1" dirty="0"/>
+              <a:t>Algoritmo 4 (</a:t>
+            </a:r>
+            <a:r>
+              <a:rPr lang="it-IT" sz="3200" b="1" dirty="0" err="1"/>
+              <a:t>doubling</a:t>
+            </a:r>
+            <a:r>
+              <a:rPr lang="it-IT" sz="3200" b="1" dirty="0"/>
+              <a:t> and </a:t>
+            </a:r>
+            <a:r>
+              <a:rPr lang="it-IT" sz="3200" b="1" dirty="0" err="1"/>
+              <a:t>rounding</a:t>
+            </a:r>
+            <a:r>
+              <a:rPr lang="it-IT" sz="3200" b="1" dirty="0"/>
+              <a:t> down)</a:t>
+            </a:r>
+            <a:endParaRPr lang="it-IT" sz="3200" dirty="0"/>
+          </a:p>
+          <a:p>
+            <a:pPr algn="just">
+              <a:spcAft>
+                <a:spcPts val="1200"/>
+              </a:spcAft>
+            </a:pPr>
+            <a:r>
+              <a:rPr lang="it-IT" sz="3200" dirty="0" err="1"/>
+              <a:t>Doubling</a:t>
+            </a:r>
+            <a:r>
+              <a:rPr lang="it-IT" sz="3200" dirty="0"/>
+              <a:t> and </a:t>
+            </a:r>
+            <a:r>
+              <a:rPr lang="it-IT" sz="3200" dirty="0" err="1"/>
+              <a:t>rounding</a:t>
+            </a:r>
+            <a:r>
+              <a:rPr lang="it-IT" sz="3200" dirty="0"/>
+              <a:t> down effettuato dopo aver risolto:</a:t>
+            </a:r>
+          </a:p>
+          <a:p>
+            <a:pPr marL="457200" indent="-457200" algn="just">
+              <a:spcAft>
+                <a:spcPts val="600"/>
+              </a:spcAft>
+              <a:buFont typeface="Arial" panose="020B0604020202020204" pitchFamily="34" charset="0"/>
+              <a:buChar char="•"/>
+            </a:pPr>
+            <a:r>
+              <a:rPr lang="it-IT" sz="3200" dirty="0">
+                <a:solidFill>
+                  <a:schemeClr val="bg2">
+                    <a:lumMod val="75000"/>
+                  </a:schemeClr>
+                </a:solidFill>
+              </a:rPr>
+              <a:t>Rilassamento lineare</a:t>
+            </a:r>
+          </a:p>
+          <a:p>
+            <a:pPr marL="457200" indent="-457200" algn="just">
+              <a:spcAft>
+                <a:spcPts val="600"/>
+              </a:spcAft>
+              <a:buFont typeface="Arial" panose="020B0604020202020204" pitchFamily="34" charset="0"/>
+              <a:buChar char="•"/>
+            </a:pPr>
+            <a:r>
+              <a:rPr lang="it-IT" sz="3200" b="1" dirty="0"/>
+              <a:t>Rilassamento lineare con </a:t>
+            </a:r>
+            <a:r>
+              <a:rPr lang="it-IT" sz="3200" b="1" dirty="0" err="1"/>
+              <a:t>odd</a:t>
+            </a:r>
+            <a:r>
+              <a:rPr lang="it-IT" sz="3200" b="1" dirty="0"/>
+              <a:t> </a:t>
+            </a:r>
+            <a:r>
+              <a:rPr lang="it-IT" sz="3200" b="1" dirty="0" err="1"/>
+              <a:t>cycle</a:t>
+            </a:r>
+            <a:r>
+              <a:rPr lang="it-IT" sz="3200" b="1" dirty="0"/>
+              <a:t> </a:t>
+            </a:r>
+            <a:r>
+              <a:rPr lang="it-IT" sz="3200" b="1" dirty="0" err="1"/>
+              <a:t>inequalities</a:t>
+            </a:r>
+            <a:endParaRPr lang="it-IT" sz="3200" b="1" dirty="0"/>
+          </a:p>
+        </p:txBody>
+      </p:sp>
+    </p:spTree>
+    <p:extLst>
+      <p:ext uri="{BB962C8B-B14F-4D97-AF65-F5344CB8AC3E}">
+        <p14:creationId xmlns:p14="http://schemas.microsoft.com/office/powerpoint/2010/main" val="4293837284"/>
+      </p:ext>
+    </p:extLst>
+  </p:cSld>
+  <p:clrMapOvr>
+    <a:masterClrMapping/>
+  </p:clrMapOvr>
+  <mc:AlternateContent xmlns:mc="http://schemas.openxmlformats.org/markup-compatibility/2006" xmlns:p159="http://schemas.microsoft.com/office/powerpoint/2015/09/main">
+    <mc:Choice Requires="p159">
+      <p:transition xmlns:p14="http://schemas.microsoft.com/office/powerpoint/2010/main" spd="slow" p14:dur="2000">
+        <p159:morph option="byObject"/>
+      </p:transition>
+    </mc:Choice>
+    <mc:Fallback xmlns="">
+      <p:transition spd="slow">
+        <p:fade/>
+      </p:transition>
+    </mc:Fallback>
+  </mc:AlternateContent>
+</p:sld>
+</file>
+
+<file path=ppt/slides/slide14.xml><?xml version="1.0" encoding="utf-8"?>
+<p:sld xmlns:a="http://schemas.openxmlformats.org/drawingml/2006/main" xmlns:r="http://schemas.openxmlformats.org/officeDocument/2006/relationships" xmlns:p="http://schemas.openxmlformats.org/presentationml/2006/main">
+  <p:cSld>
+    <p:spTree>
+      <p:nvGrpSpPr>
+        <p:cNvPr id="1" name="">
+          <a:extLst>
+            <a:ext uri="{FF2B5EF4-FFF2-40B4-BE49-F238E27FC236}">
+              <a16:creationId xmlns:a16="http://schemas.microsoft.com/office/drawing/2014/main" id="{2B7BF3E4-0529-3DE3-A8D0-B3530A429FB2}"/>
+            </a:ext>
+          </a:extLst>
+        </p:cNvPr>
+        <p:cNvGrpSpPr/>
+        <p:nvPr/>
+      </p:nvGrpSpPr>
+      <p:grpSpPr>
+        <a:xfrm>
+          <a:off x="0" y="0"/>
+          <a:ext cx="0" cy="0"/>
+          <a:chOff x="0" y="0"/>
+          <a:chExt cx="0" cy="0"/>
+        </a:xfrm>
+      </p:grpSpPr>
+      <p:sp>
+        <p:nvSpPr>
+          <p:cNvPr id="5" name="Rettangolo 4">
+            <a:extLst>
+              <a:ext uri="{FF2B5EF4-FFF2-40B4-BE49-F238E27FC236}">
+                <a16:creationId xmlns:a16="http://schemas.microsoft.com/office/drawing/2014/main" id="{BC0AC4A8-8E28-7AC7-447D-8AA369C568B4}"/>
+              </a:ext>
+            </a:extLst>
+          </p:cNvPr>
+          <p:cNvSpPr/>
+          <p:nvPr/>
+        </p:nvSpPr>
+        <p:spPr>
+          <a:xfrm rot="16200000">
+            <a:off x="5612871" y="326546"/>
+            <a:ext cx="966258" cy="12192000"/>
+          </a:xfrm>
+          <a:prstGeom prst="rect">
+            <a:avLst/>
+          </a:prstGeom>
+          <a:solidFill>
+            <a:srgbClr val="990000"/>
+          </a:solidFill>
+          <a:ln>
+            <a:solidFill>
+              <a:srgbClr val="990000"/>
+            </a:solidFill>
+          </a:ln>
+        </p:spPr>
+        <p:style>
+          <a:lnRef idx="2">
+            <a:schemeClr val="accent1">
+              <a:shade val="15000"/>
+            </a:schemeClr>
+          </a:lnRef>
+          <a:fillRef idx="1">
+            <a:schemeClr val="accent1"/>
+          </a:fillRef>
+          <a:effectRef idx="0">
+            <a:schemeClr val="accent1"/>
+          </a:effectRef>
+          <a:fontRef idx="minor">
+            <a:schemeClr val="lt1"/>
+          </a:fontRef>
+        </p:style>
+        <p:txBody>
+          <a:bodyPr rtlCol="0" anchor="ctr"/>
+          <a:lstStyle/>
+          <a:p>
+            <a:pPr algn="ctr"/>
+            <a:endParaRPr lang="it-IT" dirty="0"/>
+          </a:p>
+        </p:txBody>
+      </p:sp>
+      <p:sp>
+        <p:nvSpPr>
+          <p:cNvPr id="6" name="CasellaDiTesto 5">
+            <a:extLst>
+              <a:ext uri="{FF2B5EF4-FFF2-40B4-BE49-F238E27FC236}">
+                <a16:creationId xmlns:a16="http://schemas.microsoft.com/office/drawing/2014/main" id="{E01469AE-EACD-7505-1BDB-BE9B8236DD8E}"/>
+              </a:ext>
+            </a:extLst>
+          </p:cNvPr>
+          <p:cNvSpPr txBox="1"/>
+          <p:nvPr/>
+        </p:nvSpPr>
+        <p:spPr>
+          <a:xfrm>
+            <a:off x="5086139" y="6222490"/>
+            <a:ext cx="2019720" cy="400110"/>
+          </a:xfrm>
+          <a:prstGeom prst="rect">
+            <a:avLst/>
+          </a:prstGeom>
+          <a:noFill/>
+        </p:spPr>
+        <p:txBody>
+          <a:bodyPr wrap="square" rtlCol="0">
+            <a:spAutoFit/>
+          </a:bodyPr>
+          <a:lstStyle/>
+          <a:p>
+            <a:pPr algn="r"/>
+            <a:r>
+              <a:rPr lang="it-IT" sz="2000" b="1" dirty="0">
+                <a:solidFill>
+                  <a:schemeClr val="bg1"/>
+                </a:solidFill>
+              </a:rPr>
+              <a:t>Gianpaolo Pestilli</a:t>
+            </a:r>
+          </a:p>
+        </p:txBody>
+      </p:sp>
+      <p:sp>
+        <p:nvSpPr>
+          <p:cNvPr id="7" name="CasellaDiTesto 6">
+            <a:extLst>
+              <a:ext uri="{FF2B5EF4-FFF2-40B4-BE49-F238E27FC236}">
+                <a16:creationId xmlns:a16="http://schemas.microsoft.com/office/drawing/2014/main" id="{6FFC7E8C-F660-9258-FD25-C732E8FF18F3}"/>
+              </a:ext>
+            </a:extLst>
+          </p:cNvPr>
+          <p:cNvSpPr txBox="1"/>
+          <p:nvPr/>
+        </p:nvSpPr>
+        <p:spPr>
+          <a:xfrm>
+            <a:off x="11434917" y="6222490"/>
+            <a:ext cx="491612" cy="400110"/>
+          </a:xfrm>
+          <a:prstGeom prst="rect">
+            <a:avLst/>
+          </a:prstGeom>
+          <a:noFill/>
+        </p:spPr>
+        <p:txBody>
+          <a:bodyPr wrap="square" rtlCol="0">
+            <a:spAutoFit/>
+          </a:bodyPr>
+          <a:lstStyle/>
+          <a:p>
+            <a:pPr algn="r"/>
+            <a:r>
+              <a:rPr lang="it-IT" sz="2000" b="1" dirty="0">
+                <a:solidFill>
+                  <a:schemeClr val="bg1"/>
+                </a:solidFill>
+              </a:rPr>
+              <a:t>13</a:t>
+            </a:r>
+          </a:p>
+        </p:txBody>
+      </p:sp>
+      <p:sp>
+        <p:nvSpPr>
+          <p:cNvPr id="8" name="CasellaDiTesto 7">
+            <a:extLst>
+              <a:ext uri="{FF2B5EF4-FFF2-40B4-BE49-F238E27FC236}">
+                <a16:creationId xmlns:a16="http://schemas.microsoft.com/office/drawing/2014/main" id="{B1662036-A3D7-8F4E-F7A2-9B59F4519D19}"/>
+              </a:ext>
+            </a:extLst>
+          </p:cNvPr>
+          <p:cNvSpPr txBox="1"/>
+          <p:nvPr/>
+        </p:nvSpPr>
+        <p:spPr>
+          <a:xfrm>
+            <a:off x="533399" y="728069"/>
+            <a:ext cx="11116884" cy="4539704"/>
+          </a:xfrm>
+          <a:prstGeom prst="rect">
+            <a:avLst/>
+          </a:prstGeom>
+          <a:noFill/>
+        </p:spPr>
+        <p:txBody>
+          <a:bodyPr wrap="square" rtlCol="0">
+            <a:spAutoFit/>
+          </a:bodyPr>
+          <a:lstStyle/>
+          <a:p>
+            <a:pPr algn="just">
+              <a:spcAft>
+                <a:spcPts val="600"/>
+              </a:spcAft>
+            </a:pPr>
+            <a:r>
+              <a:rPr lang="it-IT" sz="4000" b="1" dirty="0">
+                <a:solidFill>
+                  <a:srgbClr val="990000"/>
+                </a:solidFill>
+              </a:rPr>
+              <a:t>ODD CYCLE INEQUALITIES</a:t>
+            </a:r>
+          </a:p>
+          <a:p>
+            <a:pPr algn="just">
+              <a:spcAft>
+                <a:spcPts val="1200"/>
+              </a:spcAft>
+            </a:pPr>
+            <a:r>
+              <a:rPr lang="it-IT" sz="3200" b="1" dirty="0"/>
+              <a:t>Concetto: </a:t>
+            </a:r>
+            <a:r>
+              <a:rPr lang="it-IT" sz="3200" dirty="0"/>
+              <a:t>a partire da un ciclo di lunghezza dispari (2k+1) non è possibile scegliere più di k vertici senza che ci sia almeno una coppia di vertici adiacenti tra quelli selezionati.</a:t>
+            </a:r>
+            <a:endParaRPr lang="it-IT" sz="3200" b="1" dirty="0"/>
+          </a:p>
+          <a:p>
+            <a:pPr algn="just">
+              <a:spcAft>
+                <a:spcPts val="1200"/>
+              </a:spcAft>
+            </a:pPr>
+            <a:endParaRPr lang="it-IT" sz="3200" dirty="0"/>
+          </a:p>
+          <a:p>
+            <a:pPr algn="just">
+              <a:spcAft>
+                <a:spcPts val="1200"/>
+              </a:spcAft>
+            </a:pPr>
+            <a:r>
+              <a:rPr lang="it-IT" sz="3200" b="1" dirty="0"/>
+              <a:t>Considerazione: </a:t>
+            </a:r>
+            <a:r>
+              <a:rPr lang="it-IT" sz="3200" dirty="0"/>
+              <a:t>nel modello di PLI la x[i] relativa al vertice i vale 1 se quel vertice è stato inserito nella cover. Nel modello rilassato la x[i] può assumere valori frazionari.</a:t>
+            </a:r>
+            <a:endParaRPr lang="it-IT" sz="3200" b="1" dirty="0"/>
+          </a:p>
+        </p:txBody>
+      </p:sp>
+    </p:spTree>
+    <p:extLst>
+      <p:ext uri="{BB962C8B-B14F-4D97-AF65-F5344CB8AC3E}">
+        <p14:creationId xmlns:p14="http://schemas.microsoft.com/office/powerpoint/2010/main" val="1611430496"/>
+      </p:ext>
+    </p:extLst>
+  </p:cSld>
+  <p:clrMapOvr>
+    <a:masterClrMapping/>
+  </p:clrMapOvr>
+  <mc:AlternateContent xmlns:mc="http://schemas.openxmlformats.org/markup-compatibility/2006" xmlns:p159="http://schemas.microsoft.com/office/powerpoint/2015/09/main">
+    <mc:Choice Requires="p159">
+      <p:transition xmlns:p14="http://schemas.microsoft.com/office/powerpoint/2010/main" spd="slow" p14:dur="2000">
+        <p159:morph option="byObject"/>
+      </p:transition>
+    </mc:Choice>
+    <mc:Fallback xmlns="">
+      <p:transition spd="slow">
+        <p:fade/>
+      </p:transition>
+    </mc:Fallback>
+  </mc:AlternateContent>
+</p:sld>
+</file>
+
+<file path=ppt/slides/slide15.xml><?xml version="1.0" encoding="utf-8"?>
+<p:sld xmlns:a="http://schemas.openxmlformats.org/drawingml/2006/main" xmlns:r="http://schemas.openxmlformats.org/officeDocument/2006/relationships" xmlns:p="http://schemas.openxmlformats.org/presentationml/2006/main">
+  <p:cSld>
+    <p:spTree>
+      <p:nvGrpSpPr>
+        <p:cNvPr id="1" name="">
+          <a:extLst>
+            <a:ext uri="{FF2B5EF4-FFF2-40B4-BE49-F238E27FC236}">
+              <a16:creationId xmlns:a16="http://schemas.microsoft.com/office/drawing/2014/main" id="{B94DB9C7-C12C-FB9E-BD5B-E6E1F6E72AC8}"/>
+            </a:ext>
+          </a:extLst>
+        </p:cNvPr>
+        <p:cNvGrpSpPr/>
+        <p:nvPr/>
+      </p:nvGrpSpPr>
+      <p:grpSpPr>
+        <a:xfrm>
+          <a:off x="0" y="0"/>
+          <a:ext cx="0" cy="0"/>
+          <a:chOff x="0" y="0"/>
+          <a:chExt cx="0" cy="0"/>
+        </a:xfrm>
+      </p:grpSpPr>
+      <p:sp>
+        <p:nvSpPr>
+          <p:cNvPr id="5" name="Rettangolo 4">
+            <a:extLst>
+              <a:ext uri="{FF2B5EF4-FFF2-40B4-BE49-F238E27FC236}">
+                <a16:creationId xmlns:a16="http://schemas.microsoft.com/office/drawing/2014/main" id="{80DE0A1C-D9FA-6552-EB65-8DB2236EF185}"/>
+              </a:ext>
+            </a:extLst>
+          </p:cNvPr>
+          <p:cNvSpPr/>
+          <p:nvPr/>
+        </p:nvSpPr>
+        <p:spPr>
+          <a:xfrm rot="16200000">
+            <a:off x="5612871" y="326546"/>
+            <a:ext cx="966258" cy="12192000"/>
+          </a:xfrm>
+          <a:prstGeom prst="rect">
+            <a:avLst/>
+          </a:prstGeom>
+          <a:solidFill>
+            <a:srgbClr val="990000"/>
+          </a:solidFill>
+          <a:ln>
+            <a:solidFill>
+              <a:srgbClr val="990000"/>
+            </a:solidFill>
+          </a:ln>
+        </p:spPr>
+        <p:style>
+          <a:lnRef idx="2">
+            <a:schemeClr val="accent1">
+              <a:shade val="15000"/>
+            </a:schemeClr>
+          </a:lnRef>
+          <a:fillRef idx="1">
+            <a:schemeClr val="accent1"/>
+          </a:fillRef>
+          <a:effectRef idx="0">
+            <a:schemeClr val="accent1"/>
+          </a:effectRef>
+          <a:fontRef idx="minor">
+            <a:schemeClr val="lt1"/>
+          </a:fontRef>
+        </p:style>
+        <p:txBody>
+          <a:bodyPr rtlCol="0" anchor="ctr"/>
+          <a:lstStyle/>
+          <a:p>
+            <a:pPr algn="ctr"/>
+            <a:endParaRPr lang="it-IT" dirty="0"/>
+          </a:p>
+        </p:txBody>
+      </p:sp>
+      <p:sp>
+        <p:nvSpPr>
+          <p:cNvPr id="6" name="CasellaDiTesto 5">
+            <a:extLst>
+              <a:ext uri="{FF2B5EF4-FFF2-40B4-BE49-F238E27FC236}">
+                <a16:creationId xmlns:a16="http://schemas.microsoft.com/office/drawing/2014/main" id="{069437A2-D929-025B-6C2E-6E6BFA10D4EC}"/>
+              </a:ext>
+            </a:extLst>
+          </p:cNvPr>
+          <p:cNvSpPr txBox="1"/>
+          <p:nvPr/>
+        </p:nvSpPr>
+        <p:spPr>
+          <a:xfrm>
+            <a:off x="5086139" y="6222490"/>
+            <a:ext cx="2019720" cy="400110"/>
+          </a:xfrm>
+          <a:prstGeom prst="rect">
+            <a:avLst/>
+          </a:prstGeom>
+          <a:noFill/>
+        </p:spPr>
+        <p:txBody>
+          <a:bodyPr wrap="square" rtlCol="0">
+            <a:spAutoFit/>
+          </a:bodyPr>
+          <a:lstStyle/>
+          <a:p>
+            <a:pPr algn="r"/>
+            <a:r>
+              <a:rPr lang="it-IT" sz="2000" b="1" dirty="0">
+                <a:solidFill>
+                  <a:schemeClr val="bg1"/>
+                </a:solidFill>
+              </a:rPr>
+              <a:t>Gianpaolo Pestilli</a:t>
+            </a:r>
+          </a:p>
+        </p:txBody>
+      </p:sp>
+      <p:sp>
+        <p:nvSpPr>
+          <p:cNvPr id="7" name="CasellaDiTesto 6">
+            <a:extLst>
+              <a:ext uri="{FF2B5EF4-FFF2-40B4-BE49-F238E27FC236}">
+                <a16:creationId xmlns:a16="http://schemas.microsoft.com/office/drawing/2014/main" id="{3B278B73-0778-D492-1F6C-87666990069B}"/>
+              </a:ext>
+            </a:extLst>
+          </p:cNvPr>
+          <p:cNvSpPr txBox="1"/>
+          <p:nvPr/>
+        </p:nvSpPr>
+        <p:spPr>
+          <a:xfrm>
+            <a:off x="11434917" y="6222490"/>
+            <a:ext cx="491612" cy="400110"/>
+          </a:xfrm>
+          <a:prstGeom prst="rect">
+            <a:avLst/>
+          </a:prstGeom>
+          <a:noFill/>
+        </p:spPr>
+        <p:txBody>
+          <a:bodyPr wrap="square" rtlCol="0">
+            <a:spAutoFit/>
+          </a:bodyPr>
+          <a:lstStyle/>
+          <a:p>
+            <a:pPr algn="r"/>
+            <a:r>
+              <a:rPr lang="it-IT" sz="2000" b="1" dirty="0">
+                <a:solidFill>
+                  <a:schemeClr val="bg1"/>
+                </a:solidFill>
+              </a:rPr>
+              <a:t>14</a:t>
+            </a:r>
+          </a:p>
+        </p:txBody>
+      </p:sp>
+      <p:sp>
+        <p:nvSpPr>
+          <p:cNvPr id="8" name="CasellaDiTesto 7">
+            <a:extLst>
+              <a:ext uri="{FF2B5EF4-FFF2-40B4-BE49-F238E27FC236}">
+                <a16:creationId xmlns:a16="http://schemas.microsoft.com/office/drawing/2014/main" id="{A50821A6-60A4-D071-9460-0357233E6C11}"/>
+              </a:ext>
+            </a:extLst>
+          </p:cNvPr>
+          <p:cNvSpPr txBox="1"/>
+          <p:nvPr/>
+        </p:nvSpPr>
+        <p:spPr>
+          <a:xfrm>
+            <a:off x="533399" y="728069"/>
+            <a:ext cx="11116884" cy="4693593"/>
+          </a:xfrm>
+          <a:prstGeom prst="rect">
+            <a:avLst/>
+          </a:prstGeom>
+          <a:noFill/>
+        </p:spPr>
+        <p:txBody>
+          <a:bodyPr wrap="square" rtlCol="0">
+            <a:spAutoFit/>
+          </a:bodyPr>
+          <a:lstStyle/>
+          <a:p>
+            <a:pPr algn="just">
+              <a:spcAft>
+                <a:spcPts val="600"/>
+              </a:spcAft>
+            </a:pPr>
+            <a:r>
+              <a:rPr lang="it-IT" sz="4000" b="1" dirty="0">
+                <a:solidFill>
+                  <a:srgbClr val="990000"/>
+                </a:solidFill>
+              </a:rPr>
+              <a:t>ODD CYCLE INEQUALITIES</a:t>
+            </a:r>
+          </a:p>
+          <a:p>
+            <a:pPr algn="just">
+              <a:spcAft>
+                <a:spcPts val="1200"/>
+              </a:spcAft>
+            </a:pPr>
+            <a:r>
+              <a:rPr lang="it-IT" sz="3200" b="1" dirty="0"/>
+              <a:t>Conseguenza: </a:t>
+            </a:r>
+            <a:r>
+              <a:rPr lang="it-IT" sz="3200" dirty="0"/>
+              <a:t>somme di x[i] a valore frazionario potrebbero violare le </a:t>
+            </a:r>
+            <a:r>
+              <a:rPr lang="it-IT" sz="3200" dirty="0" err="1"/>
+              <a:t>odd</a:t>
+            </a:r>
+            <a:r>
+              <a:rPr lang="it-IT" sz="3200" dirty="0"/>
+              <a:t> </a:t>
+            </a:r>
+            <a:r>
+              <a:rPr lang="it-IT" sz="3200" dirty="0" err="1"/>
+              <a:t>cycle</a:t>
+            </a:r>
+            <a:r>
+              <a:rPr lang="it-IT" sz="3200" dirty="0"/>
+              <a:t> </a:t>
+            </a:r>
+            <a:r>
+              <a:rPr lang="it-IT" sz="3200" dirty="0" err="1"/>
+              <a:t>inqualities</a:t>
+            </a:r>
+            <a:r>
+              <a:rPr lang="it-IT" sz="3200" dirty="0"/>
+              <a:t>.</a:t>
+            </a:r>
+          </a:p>
+          <a:p>
+            <a:pPr algn="just">
+              <a:spcAft>
+                <a:spcPts val="1200"/>
+              </a:spcAft>
+            </a:pPr>
+            <a:endParaRPr lang="it-IT" sz="3200" dirty="0"/>
+          </a:p>
+          <a:p>
+            <a:pPr algn="just">
+              <a:spcAft>
+                <a:spcPts val="1200"/>
+              </a:spcAft>
+            </a:pPr>
+            <a:r>
+              <a:rPr lang="it-IT" sz="3200" b="1" dirty="0"/>
+              <a:t>Applicazione: </a:t>
+            </a:r>
+            <a:r>
+              <a:rPr lang="it-IT" sz="3200" dirty="0"/>
+              <a:t>si potrebbe aggiungere un vincolo in più al modello di PL per ogni </a:t>
+            </a:r>
+            <a:r>
+              <a:rPr lang="it-IT" sz="3200" dirty="0" err="1"/>
+              <a:t>odd</a:t>
+            </a:r>
+            <a:r>
+              <a:rPr lang="it-IT" sz="3200" dirty="0"/>
+              <a:t> </a:t>
+            </a:r>
+            <a:r>
+              <a:rPr lang="it-IT" sz="3200" dirty="0" err="1"/>
+              <a:t>cycle</a:t>
+            </a:r>
+            <a:r>
+              <a:rPr lang="it-IT" sz="3200" dirty="0"/>
+              <a:t> </a:t>
+            </a:r>
+            <a:r>
+              <a:rPr lang="it-IT" sz="3200" dirty="0" err="1"/>
+              <a:t>inequality</a:t>
+            </a:r>
+            <a:r>
+              <a:rPr lang="it-IT" sz="3200" dirty="0"/>
+              <a:t> che deriva da un ciclo di lunghezza dispari.</a:t>
+            </a:r>
+            <a:endParaRPr lang="it-IT" sz="3200" b="1" dirty="0"/>
+          </a:p>
+          <a:p>
+            <a:pPr algn="just">
+              <a:spcAft>
+                <a:spcPts val="1200"/>
+              </a:spcAft>
+            </a:pPr>
+            <a:endParaRPr lang="it-IT" sz="3200" dirty="0"/>
+          </a:p>
+        </p:txBody>
+      </p:sp>
+    </p:spTree>
+    <p:extLst>
+      <p:ext uri="{BB962C8B-B14F-4D97-AF65-F5344CB8AC3E}">
+        <p14:creationId xmlns:p14="http://schemas.microsoft.com/office/powerpoint/2010/main" val="1229577184"/>
+      </p:ext>
+    </p:extLst>
+  </p:cSld>
+  <p:clrMapOvr>
+    <a:masterClrMapping/>
+  </p:clrMapOvr>
+  <mc:AlternateContent xmlns:mc="http://schemas.openxmlformats.org/markup-compatibility/2006" xmlns:p159="http://schemas.microsoft.com/office/powerpoint/2015/09/main">
+    <mc:Choice Requires="p159">
+      <p:transition xmlns:p14="http://schemas.microsoft.com/office/powerpoint/2010/main" spd="slow" p14:dur="2000">
+        <p159:morph option="byObject"/>
+      </p:transition>
+    </mc:Choice>
+    <mc:Fallback xmlns="">
+      <p:transition spd="slow">
+        <p:fade/>
+      </p:transition>
+    </mc:Fallback>
+  </mc:AlternateContent>
+</p:sld>
+</file>
+
+<file path=ppt/slides/slide16.xml><?xml version="1.0" encoding="utf-8"?>
+<p:sld xmlns:a="http://schemas.openxmlformats.org/drawingml/2006/main" xmlns:r="http://schemas.openxmlformats.org/officeDocument/2006/relationships" xmlns:p="http://schemas.openxmlformats.org/presentationml/2006/main">
+  <p:cSld>
+    <p:spTree>
+      <p:nvGrpSpPr>
+        <p:cNvPr id="1" name="">
+          <a:extLst>
+            <a:ext uri="{FF2B5EF4-FFF2-40B4-BE49-F238E27FC236}">
+              <a16:creationId xmlns:a16="http://schemas.microsoft.com/office/drawing/2014/main" id="{72230790-CA9E-46C8-B79E-2C880476D85E}"/>
+            </a:ext>
+          </a:extLst>
+        </p:cNvPr>
+        <p:cNvGrpSpPr/>
+        <p:nvPr/>
+      </p:nvGrpSpPr>
+      <p:grpSpPr>
+        <a:xfrm>
+          <a:off x="0" y="0"/>
+          <a:ext cx="0" cy="0"/>
+          <a:chOff x="0" y="0"/>
+          <a:chExt cx="0" cy="0"/>
+        </a:xfrm>
+      </p:grpSpPr>
+      <p:sp>
+        <p:nvSpPr>
+          <p:cNvPr id="5" name="Rettangolo 4">
+            <a:extLst>
+              <a:ext uri="{FF2B5EF4-FFF2-40B4-BE49-F238E27FC236}">
+                <a16:creationId xmlns:a16="http://schemas.microsoft.com/office/drawing/2014/main" id="{51A564E7-D61A-3689-0E67-C7CE0AADE608}"/>
+              </a:ext>
+            </a:extLst>
+          </p:cNvPr>
+          <p:cNvSpPr/>
+          <p:nvPr/>
+        </p:nvSpPr>
+        <p:spPr>
+          <a:xfrm rot="16200000">
+            <a:off x="5612871" y="326546"/>
+            <a:ext cx="966258" cy="12192000"/>
+          </a:xfrm>
+          <a:prstGeom prst="rect">
+            <a:avLst/>
+          </a:prstGeom>
+          <a:solidFill>
+            <a:srgbClr val="990000"/>
+          </a:solidFill>
+          <a:ln>
+            <a:solidFill>
+              <a:srgbClr val="990000"/>
+            </a:solidFill>
+          </a:ln>
+        </p:spPr>
+        <p:style>
+          <a:lnRef idx="2">
+            <a:schemeClr val="accent1">
+              <a:shade val="15000"/>
+            </a:schemeClr>
+          </a:lnRef>
+          <a:fillRef idx="1">
+            <a:schemeClr val="accent1"/>
+          </a:fillRef>
+          <a:effectRef idx="0">
+            <a:schemeClr val="accent1"/>
+          </a:effectRef>
+          <a:fontRef idx="minor">
+            <a:schemeClr val="lt1"/>
+          </a:fontRef>
+        </p:style>
+        <p:txBody>
+          <a:bodyPr rtlCol="0" anchor="ctr"/>
+          <a:lstStyle/>
+          <a:p>
+            <a:pPr algn="ctr"/>
+            <a:endParaRPr lang="it-IT" dirty="0"/>
+          </a:p>
+        </p:txBody>
+      </p:sp>
+      <p:sp>
+        <p:nvSpPr>
+          <p:cNvPr id="6" name="CasellaDiTesto 5">
+            <a:extLst>
+              <a:ext uri="{FF2B5EF4-FFF2-40B4-BE49-F238E27FC236}">
+                <a16:creationId xmlns:a16="http://schemas.microsoft.com/office/drawing/2014/main" id="{8305053A-FB04-3D98-B7E3-A6725328FDDB}"/>
+              </a:ext>
+            </a:extLst>
+          </p:cNvPr>
+          <p:cNvSpPr txBox="1"/>
+          <p:nvPr/>
+        </p:nvSpPr>
+        <p:spPr>
+          <a:xfrm>
+            <a:off x="5086139" y="6222490"/>
+            <a:ext cx="2019720" cy="400110"/>
+          </a:xfrm>
+          <a:prstGeom prst="rect">
+            <a:avLst/>
+          </a:prstGeom>
+          <a:noFill/>
+        </p:spPr>
+        <p:txBody>
+          <a:bodyPr wrap="square" rtlCol="0">
+            <a:spAutoFit/>
+          </a:bodyPr>
+          <a:lstStyle/>
+          <a:p>
+            <a:pPr algn="r"/>
+            <a:r>
+              <a:rPr lang="it-IT" sz="2000" b="1" dirty="0">
+                <a:solidFill>
+                  <a:schemeClr val="bg1"/>
+                </a:solidFill>
+              </a:rPr>
+              <a:t>Gianpaolo Pestilli</a:t>
+            </a:r>
+          </a:p>
+        </p:txBody>
+      </p:sp>
+      <p:sp>
+        <p:nvSpPr>
+          <p:cNvPr id="7" name="CasellaDiTesto 6">
+            <a:extLst>
+              <a:ext uri="{FF2B5EF4-FFF2-40B4-BE49-F238E27FC236}">
+                <a16:creationId xmlns:a16="http://schemas.microsoft.com/office/drawing/2014/main" id="{CFA4171D-448C-DEF1-81DC-A8E37FFA7899}"/>
+              </a:ext>
+            </a:extLst>
+          </p:cNvPr>
+          <p:cNvSpPr txBox="1"/>
+          <p:nvPr/>
+        </p:nvSpPr>
+        <p:spPr>
+          <a:xfrm>
+            <a:off x="11434917" y="6222490"/>
+            <a:ext cx="491612" cy="400110"/>
+          </a:xfrm>
+          <a:prstGeom prst="rect">
+            <a:avLst/>
+          </a:prstGeom>
+          <a:noFill/>
+        </p:spPr>
+        <p:txBody>
+          <a:bodyPr wrap="square" rtlCol="0">
+            <a:spAutoFit/>
+          </a:bodyPr>
+          <a:lstStyle/>
+          <a:p>
+            <a:pPr algn="r"/>
+            <a:r>
+              <a:rPr lang="it-IT" sz="2000" b="1" dirty="0">
+                <a:solidFill>
+                  <a:schemeClr val="bg1"/>
+                </a:solidFill>
+              </a:rPr>
+              <a:t>15</a:t>
+            </a:r>
+          </a:p>
+        </p:txBody>
+      </p:sp>
+      <p:sp>
+        <p:nvSpPr>
+          <p:cNvPr id="8" name="CasellaDiTesto 7">
+            <a:extLst>
+              <a:ext uri="{FF2B5EF4-FFF2-40B4-BE49-F238E27FC236}">
+                <a16:creationId xmlns:a16="http://schemas.microsoft.com/office/drawing/2014/main" id="{80316673-81A7-D354-1165-75AC074028F5}"/>
+              </a:ext>
+            </a:extLst>
+          </p:cNvPr>
+          <p:cNvSpPr txBox="1"/>
+          <p:nvPr/>
+        </p:nvSpPr>
+        <p:spPr>
+          <a:xfrm>
+            <a:off x="533399" y="728069"/>
+            <a:ext cx="11116884" cy="4047262"/>
+          </a:xfrm>
+          <a:prstGeom prst="rect">
+            <a:avLst/>
+          </a:prstGeom>
+          <a:noFill/>
+        </p:spPr>
+        <p:txBody>
+          <a:bodyPr wrap="square" rtlCol="0">
+            <a:spAutoFit/>
+          </a:bodyPr>
+          <a:lstStyle/>
+          <a:p>
+            <a:pPr algn="just">
+              <a:spcAft>
+                <a:spcPts val="600"/>
+              </a:spcAft>
+            </a:pPr>
+            <a:r>
+              <a:rPr lang="it-IT" sz="4000" b="1" dirty="0">
+                <a:solidFill>
+                  <a:srgbClr val="990000"/>
+                </a:solidFill>
+              </a:rPr>
+              <a:t>ODD CYCLE INEQUALITIES</a:t>
+            </a:r>
+          </a:p>
+          <a:p>
+            <a:pPr algn="just">
+              <a:spcAft>
+                <a:spcPts val="1200"/>
+              </a:spcAft>
+            </a:pPr>
+            <a:r>
+              <a:rPr lang="it-IT" sz="3200" b="1" dirty="0"/>
+              <a:t>Implementazione nel progetto: </a:t>
+            </a:r>
+            <a:r>
+              <a:rPr lang="it-IT" sz="3200" dirty="0"/>
+              <a:t>ci si è concentrati solo sui cicli dispari di lunghezza minore possibile (triangoli).</a:t>
+            </a:r>
+          </a:p>
+          <a:p>
+            <a:pPr algn="just">
+              <a:spcAft>
+                <a:spcPts val="1200"/>
+              </a:spcAft>
+            </a:pPr>
+            <a:endParaRPr lang="it-IT" sz="3200" dirty="0"/>
+          </a:p>
+          <a:p>
+            <a:pPr algn="just">
+              <a:spcAft>
+                <a:spcPts val="1200"/>
+              </a:spcAft>
+            </a:pPr>
+            <a:r>
+              <a:rPr lang="it-IT" sz="3200" b="1" dirty="0"/>
+              <a:t>Utilizzo: </a:t>
+            </a:r>
+            <a:r>
+              <a:rPr lang="it-IT" sz="3200" dirty="0"/>
+              <a:t>dato che il numero di vertici del grafo non è noto a priori, si preferisce inserire gruppi di </a:t>
+            </a:r>
+            <a:r>
+              <a:rPr lang="it-IT" sz="3200" dirty="0" err="1"/>
+              <a:t>odd</a:t>
+            </a:r>
+            <a:r>
+              <a:rPr lang="it-IT" sz="3200" dirty="0"/>
+              <a:t> </a:t>
+            </a:r>
+            <a:r>
+              <a:rPr lang="it-IT" sz="3200" dirty="0" err="1"/>
+              <a:t>cycle</a:t>
+            </a:r>
+            <a:r>
+              <a:rPr lang="it-IT" sz="3200" dirty="0"/>
+              <a:t> </a:t>
+            </a:r>
+            <a:r>
+              <a:rPr lang="it-IT" sz="3200" dirty="0" err="1"/>
+              <a:t>inequalities</a:t>
+            </a:r>
+            <a:r>
+              <a:rPr lang="it-IT" sz="3200" dirty="0"/>
+              <a:t> applicando uno schema simile al cutting </a:t>
+            </a:r>
+            <a:r>
+              <a:rPr lang="it-IT" sz="3200" dirty="0" err="1"/>
+              <a:t>plane</a:t>
+            </a:r>
+            <a:r>
+              <a:rPr lang="it-IT" sz="3200" dirty="0"/>
+              <a:t>.</a:t>
+            </a:r>
+          </a:p>
+        </p:txBody>
+      </p:sp>
+    </p:spTree>
+    <p:extLst>
+      <p:ext uri="{BB962C8B-B14F-4D97-AF65-F5344CB8AC3E}">
+        <p14:creationId xmlns:p14="http://schemas.microsoft.com/office/powerpoint/2010/main" val="932637983"/>
+      </p:ext>
+    </p:extLst>
+  </p:cSld>
+  <p:clrMapOvr>
+    <a:masterClrMapping/>
+  </p:clrMapOvr>
+  <mc:AlternateContent xmlns:mc="http://schemas.openxmlformats.org/markup-compatibility/2006" xmlns:p159="http://schemas.microsoft.com/office/powerpoint/2015/09/main">
+    <mc:Choice Requires="p159">
+      <p:transition xmlns:p14="http://schemas.microsoft.com/office/powerpoint/2010/main" spd="slow" p14:dur="2000">
+        <p159:morph option="byObject"/>
+      </p:transition>
+    </mc:Choice>
+    <mc:Fallback xmlns="">
+      <p:transition spd="slow">
+        <p:fade/>
+      </p:transition>
+    </mc:Fallback>
+  </mc:AlternateContent>
+</p:sld>
+</file>
+
+<file path=ppt/slides/slide17.xml><?xml version="1.0" encoding="utf-8"?>
+<p:sld xmlns:a="http://schemas.openxmlformats.org/drawingml/2006/main" xmlns:r="http://schemas.openxmlformats.org/officeDocument/2006/relationships" xmlns:p="http://schemas.openxmlformats.org/presentationml/2006/main">
+  <p:cSld>
+    <p:spTree>
+      <p:nvGrpSpPr>
+        <p:cNvPr id="1" name="">
+          <a:extLst>
+            <a:ext uri="{FF2B5EF4-FFF2-40B4-BE49-F238E27FC236}">
+              <a16:creationId xmlns:a16="http://schemas.microsoft.com/office/drawing/2014/main" id="{9DDE9BDE-A0B6-3742-345C-8ED85F34D976}"/>
+            </a:ext>
+          </a:extLst>
+        </p:cNvPr>
+        <p:cNvGrpSpPr/>
+        <p:nvPr/>
+      </p:nvGrpSpPr>
+      <p:grpSpPr>
+        <a:xfrm>
+          <a:off x="0" y="0"/>
+          <a:ext cx="0" cy="0"/>
+          <a:chOff x="0" y="0"/>
+          <a:chExt cx="0" cy="0"/>
+        </a:xfrm>
+      </p:grpSpPr>
+      <p:sp>
+        <p:nvSpPr>
+          <p:cNvPr id="5" name="Rettangolo 4">
+            <a:extLst>
+              <a:ext uri="{FF2B5EF4-FFF2-40B4-BE49-F238E27FC236}">
+                <a16:creationId xmlns:a16="http://schemas.microsoft.com/office/drawing/2014/main" id="{2562A1DD-93D0-1283-5099-CEDCAE30C001}"/>
+              </a:ext>
+            </a:extLst>
+          </p:cNvPr>
+          <p:cNvSpPr/>
+          <p:nvPr/>
+        </p:nvSpPr>
+        <p:spPr>
+          <a:xfrm rot="16200000">
+            <a:off x="5612871" y="326546"/>
+            <a:ext cx="966258" cy="12192000"/>
+          </a:xfrm>
+          <a:prstGeom prst="rect">
+            <a:avLst/>
+          </a:prstGeom>
+          <a:solidFill>
+            <a:srgbClr val="990000"/>
+          </a:solidFill>
+          <a:ln>
+            <a:solidFill>
+              <a:srgbClr val="990000"/>
+            </a:solidFill>
+          </a:ln>
+        </p:spPr>
+        <p:style>
+          <a:lnRef idx="2">
+            <a:schemeClr val="accent1">
+              <a:shade val="15000"/>
+            </a:schemeClr>
+          </a:lnRef>
+          <a:fillRef idx="1">
+            <a:schemeClr val="accent1"/>
+          </a:fillRef>
+          <a:effectRef idx="0">
+            <a:schemeClr val="accent1"/>
+          </a:effectRef>
+          <a:fontRef idx="minor">
+            <a:schemeClr val="lt1"/>
+          </a:fontRef>
+        </p:style>
+        <p:txBody>
+          <a:bodyPr rtlCol="0" anchor="ctr"/>
+          <a:lstStyle/>
+          <a:p>
+            <a:pPr algn="ctr"/>
+            <a:endParaRPr lang="it-IT" dirty="0"/>
+          </a:p>
+        </p:txBody>
+      </p:sp>
+      <p:sp>
+        <p:nvSpPr>
+          <p:cNvPr id="6" name="CasellaDiTesto 5">
+            <a:extLst>
+              <a:ext uri="{FF2B5EF4-FFF2-40B4-BE49-F238E27FC236}">
+                <a16:creationId xmlns:a16="http://schemas.microsoft.com/office/drawing/2014/main" id="{25BB24AD-AA98-DED7-6C5C-EBCCDB55CDBE}"/>
+              </a:ext>
+            </a:extLst>
+          </p:cNvPr>
+          <p:cNvSpPr txBox="1"/>
+          <p:nvPr/>
+        </p:nvSpPr>
+        <p:spPr>
+          <a:xfrm>
+            <a:off x="5086139" y="6222490"/>
+            <a:ext cx="2019720" cy="400110"/>
+          </a:xfrm>
+          <a:prstGeom prst="rect">
+            <a:avLst/>
+          </a:prstGeom>
+          <a:noFill/>
+        </p:spPr>
+        <p:txBody>
+          <a:bodyPr wrap="square" rtlCol="0">
+            <a:spAutoFit/>
+          </a:bodyPr>
+          <a:lstStyle/>
+          <a:p>
+            <a:pPr algn="r"/>
+            <a:r>
+              <a:rPr lang="it-IT" sz="2000" b="1" dirty="0">
+                <a:solidFill>
+                  <a:schemeClr val="bg1"/>
+                </a:solidFill>
+              </a:rPr>
+              <a:t>Gianpaolo Pestilli</a:t>
+            </a:r>
+          </a:p>
+        </p:txBody>
+      </p:sp>
+      <p:sp>
+        <p:nvSpPr>
+          <p:cNvPr id="7" name="CasellaDiTesto 6">
+            <a:extLst>
+              <a:ext uri="{FF2B5EF4-FFF2-40B4-BE49-F238E27FC236}">
+                <a16:creationId xmlns:a16="http://schemas.microsoft.com/office/drawing/2014/main" id="{A9F8CEEF-F5F0-9F75-81AC-63D515AEF5E0}"/>
+              </a:ext>
+            </a:extLst>
+          </p:cNvPr>
+          <p:cNvSpPr txBox="1"/>
+          <p:nvPr/>
+        </p:nvSpPr>
+        <p:spPr>
+          <a:xfrm>
+            <a:off x="11434917" y="6222490"/>
+            <a:ext cx="491612" cy="400110"/>
+          </a:xfrm>
+          <a:prstGeom prst="rect">
+            <a:avLst/>
+          </a:prstGeom>
+          <a:noFill/>
+        </p:spPr>
+        <p:txBody>
+          <a:bodyPr wrap="square" rtlCol="0">
+            <a:spAutoFit/>
+          </a:bodyPr>
+          <a:lstStyle/>
+          <a:p>
+            <a:pPr algn="r"/>
+            <a:r>
+              <a:rPr lang="it-IT" sz="2000" b="1" dirty="0">
+                <a:solidFill>
+                  <a:schemeClr val="bg1"/>
+                </a:solidFill>
+              </a:rPr>
+              <a:t>16</a:t>
+            </a:r>
+          </a:p>
+        </p:txBody>
+      </p:sp>
+      <p:sp>
+        <p:nvSpPr>
+          <p:cNvPr id="8" name="CasellaDiTesto 7">
+            <a:extLst>
+              <a:ext uri="{FF2B5EF4-FFF2-40B4-BE49-F238E27FC236}">
+                <a16:creationId xmlns:a16="http://schemas.microsoft.com/office/drawing/2014/main" id="{E1839A1B-9027-C69F-0555-D9716897EC96}"/>
+              </a:ext>
+            </a:extLst>
+          </p:cNvPr>
+          <p:cNvSpPr txBox="1"/>
+          <p:nvPr/>
+        </p:nvSpPr>
+        <p:spPr>
+          <a:xfrm>
+            <a:off x="533399" y="728069"/>
+            <a:ext cx="11116884" cy="2416046"/>
+          </a:xfrm>
+          <a:prstGeom prst="rect">
+            <a:avLst/>
+          </a:prstGeom>
+          <a:noFill/>
+        </p:spPr>
+        <p:txBody>
+          <a:bodyPr wrap="square" rtlCol="0">
+            <a:spAutoFit/>
+          </a:bodyPr>
+          <a:lstStyle/>
+          <a:p>
+            <a:pPr algn="just">
+              <a:spcAft>
+                <a:spcPts val="600"/>
+              </a:spcAft>
+            </a:pPr>
+            <a:r>
+              <a:rPr lang="it-IT" sz="4000" b="1" dirty="0">
+                <a:solidFill>
+                  <a:srgbClr val="990000"/>
+                </a:solidFill>
+              </a:rPr>
+              <a:t>VERTEX COVER NON PESATO</a:t>
+            </a:r>
+          </a:p>
+          <a:p>
+            <a:pPr algn="just">
+              <a:spcAft>
+                <a:spcPts val="1200"/>
+              </a:spcAft>
+            </a:pPr>
+            <a:r>
+              <a:rPr lang="it-IT" sz="3200" b="1" dirty="0"/>
+              <a:t>Algoritmo 4 (</a:t>
+            </a:r>
+            <a:r>
+              <a:rPr lang="it-IT" sz="3200" b="1" dirty="0" err="1"/>
+              <a:t>doubling</a:t>
+            </a:r>
+            <a:r>
+              <a:rPr lang="it-IT" sz="3200" b="1" dirty="0"/>
+              <a:t> and </a:t>
+            </a:r>
+            <a:r>
+              <a:rPr lang="it-IT" sz="3200" b="1" dirty="0" err="1"/>
+              <a:t>rounding</a:t>
+            </a:r>
+            <a:r>
+              <a:rPr lang="it-IT" sz="3200" b="1" dirty="0"/>
+              <a:t> down con </a:t>
+            </a:r>
+            <a:r>
+              <a:rPr lang="it-IT" sz="3200" b="1" dirty="0" err="1"/>
+              <a:t>odd</a:t>
+            </a:r>
+            <a:r>
+              <a:rPr lang="it-IT" sz="3200" b="1" dirty="0"/>
+              <a:t> </a:t>
+            </a:r>
+            <a:r>
+              <a:rPr lang="it-IT" sz="3200" b="1" dirty="0" err="1"/>
+              <a:t>cycle</a:t>
+            </a:r>
+            <a:r>
+              <a:rPr lang="it-IT" sz="3200" b="1" dirty="0"/>
+              <a:t> </a:t>
+            </a:r>
+            <a:r>
+              <a:rPr lang="it-IT" sz="3200" b="1" dirty="0" err="1"/>
+              <a:t>inequalities</a:t>
+            </a:r>
+            <a:r>
+              <a:rPr lang="it-IT" sz="3200" b="1" dirty="0"/>
+              <a:t>)</a:t>
+            </a:r>
+          </a:p>
+          <a:p>
+            <a:pPr algn="just">
+              <a:spcAft>
+                <a:spcPts val="1200"/>
+              </a:spcAft>
+            </a:pPr>
+            <a:endParaRPr lang="it-IT" sz="3200" dirty="0"/>
+          </a:p>
+        </p:txBody>
+      </p:sp>
+      <p:pic>
+        <p:nvPicPr>
+          <p:cNvPr id="4" name="Immagine 3">
+            <a:extLst>
+              <a:ext uri="{FF2B5EF4-FFF2-40B4-BE49-F238E27FC236}">
+                <a16:creationId xmlns:a16="http://schemas.microsoft.com/office/drawing/2014/main" id="{65AE0B3B-0EB5-2442-F012-75EBE81DB2C8}"/>
+              </a:ext>
+            </a:extLst>
+          </p:cNvPr>
+          <p:cNvPicPr>
+            <a:picLocks noChangeAspect="1"/>
+          </p:cNvPicPr>
+          <p:nvPr/>
+        </p:nvPicPr>
+        <p:blipFill>
+          <a:blip r:embed="rId2"/>
+          <a:srcRect b="49151"/>
+          <a:stretch>
+            <a:fillRect/>
+          </a:stretch>
+        </p:blipFill>
+        <p:spPr>
+          <a:xfrm>
+            <a:off x="533399" y="2672964"/>
+            <a:ext cx="4680000" cy="3175620"/>
+          </a:xfrm>
+          <a:prstGeom prst="rect">
+            <a:avLst/>
+          </a:prstGeom>
+        </p:spPr>
+      </p:pic>
+      <p:pic>
+        <p:nvPicPr>
+          <p:cNvPr id="10" name="Immagine 9">
+            <a:extLst>
+              <a:ext uri="{FF2B5EF4-FFF2-40B4-BE49-F238E27FC236}">
+                <a16:creationId xmlns:a16="http://schemas.microsoft.com/office/drawing/2014/main" id="{1859CCF3-79AE-EDF7-5912-5022FE835471}"/>
+              </a:ext>
+            </a:extLst>
+          </p:cNvPr>
+          <p:cNvPicPr>
+            <a:picLocks noChangeAspect="1"/>
+          </p:cNvPicPr>
+          <p:nvPr/>
+        </p:nvPicPr>
+        <p:blipFill>
+          <a:blip r:embed="rId2"/>
+          <a:srcRect t="49970"/>
+          <a:stretch>
+            <a:fillRect/>
+          </a:stretch>
+        </p:blipFill>
+        <p:spPr>
+          <a:xfrm>
+            <a:off x="6091841" y="2672964"/>
+            <a:ext cx="4680000" cy="3124468"/>
+          </a:xfrm>
+          <a:prstGeom prst="rect">
+            <a:avLst/>
+          </a:prstGeom>
+        </p:spPr>
+      </p:pic>
+    </p:spTree>
+    <p:extLst>
+      <p:ext uri="{BB962C8B-B14F-4D97-AF65-F5344CB8AC3E}">
+        <p14:creationId xmlns:p14="http://schemas.microsoft.com/office/powerpoint/2010/main" val="2659624309"/>
+      </p:ext>
+    </p:extLst>
+  </p:cSld>
+  <p:clrMapOvr>
+    <a:masterClrMapping/>
+  </p:clrMapOvr>
+  <mc:AlternateContent xmlns:mc="http://schemas.openxmlformats.org/markup-compatibility/2006" xmlns:p159="http://schemas.microsoft.com/office/powerpoint/2015/09/main">
+    <mc:Choice Requires="p159">
+      <p:transition xmlns:p14="http://schemas.microsoft.com/office/powerpoint/2010/main" spd="slow" p14:dur="2000">
+        <p159:morph option="byObject"/>
+      </p:transition>
+    </mc:Choice>
+    <mc:Fallback xmlns="">
+      <p:transition spd="slow">
+        <p:fade/>
+      </p:transition>
+    </mc:Fallback>
+  </mc:AlternateContent>
+</p:sld>
+</file>
+
+<file path=ppt/slides/slide18.xml><?xml version="1.0" encoding="utf-8"?>
+<p:sld xmlns:a="http://schemas.openxmlformats.org/drawingml/2006/main" xmlns:r="http://schemas.openxmlformats.org/officeDocument/2006/relationships" xmlns:p="http://schemas.openxmlformats.org/presentationml/2006/main">
+  <p:cSld>
+    <p:spTree>
+      <p:nvGrpSpPr>
+        <p:cNvPr id="1" name="">
+          <a:extLst>
+            <a:ext uri="{FF2B5EF4-FFF2-40B4-BE49-F238E27FC236}">
+              <a16:creationId xmlns:a16="http://schemas.microsoft.com/office/drawing/2014/main" id="{0330DBB2-FA59-3862-822E-8F22BB25AE74}"/>
+            </a:ext>
+          </a:extLst>
+        </p:cNvPr>
+        <p:cNvGrpSpPr/>
+        <p:nvPr/>
+      </p:nvGrpSpPr>
+      <p:grpSpPr>
+        <a:xfrm>
+          <a:off x="0" y="0"/>
+          <a:ext cx="0" cy="0"/>
+          <a:chOff x="0" y="0"/>
+          <a:chExt cx="0" cy="0"/>
+        </a:xfrm>
+      </p:grpSpPr>
+      <p:sp>
+        <p:nvSpPr>
+          <p:cNvPr id="5" name="Rettangolo 4">
+            <a:extLst>
+              <a:ext uri="{FF2B5EF4-FFF2-40B4-BE49-F238E27FC236}">
+                <a16:creationId xmlns:a16="http://schemas.microsoft.com/office/drawing/2014/main" id="{7434486F-E157-CE4B-8B76-606DE4779D14}"/>
+              </a:ext>
+            </a:extLst>
+          </p:cNvPr>
+          <p:cNvSpPr/>
+          <p:nvPr/>
+        </p:nvSpPr>
+        <p:spPr>
+          <a:xfrm rot="16200000">
+            <a:off x="5612871" y="326546"/>
+            <a:ext cx="966258" cy="12192000"/>
+          </a:xfrm>
+          <a:prstGeom prst="rect">
+            <a:avLst/>
+          </a:prstGeom>
+          <a:solidFill>
+            <a:srgbClr val="990000"/>
+          </a:solidFill>
+          <a:ln>
+            <a:solidFill>
+              <a:srgbClr val="990000"/>
+            </a:solidFill>
+          </a:ln>
+        </p:spPr>
+        <p:style>
+          <a:lnRef idx="2">
+            <a:schemeClr val="accent1">
+              <a:shade val="15000"/>
+            </a:schemeClr>
+          </a:lnRef>
+          <a:fillRef idx="1">
+            <a:schemeClr val="accent1"/>
+          </a:fillRef>
+          <a:effectRef idx="0">
+            <a:schemeClr val="accent1"/>
+          </a:effectRef>
+          <a:fontRef idx="minor">
+            <a:schemeClr val="lt1"/>
+          </a:fontRef>
+        </p:style>
+        <p:txBody>
+          <a:bodyPr rtlCol="0" anchor="ctr"/>
+          <a:lstStyle/>
+          <a:p>
+            <a:pPr algn="ctr"/>
+            <a:endParaRPr lang="it-IT" dirty="0"/>
+          </a:p>
+        </p:txBody>
+      </p:sp>
+      <p:sp>
+        <p:nvSpPr>
+          <p:cNvPr id="6" name="CasellaDiTesto 5">
+            <a:extLst>
+              <a:ext uri="{FF2B5EF4-FFF2-40B4-BE49-F238E27FC236}">
+                <a16:creationId xmlns:a16="http://schemas.microsoft.com/office/drawing/2014/main" id="{3D5ADA02-9D55-FE98-8218-A0A75A81E7C5}"/>
+              </a:ext>
+            </a:extLst>
+          </p:cNvPr>
+          <p:cNvSpPr txBox="1"/>
+          <p:nvPr/>
+        </p:nvSpPr>
+        <p:spPr>
+          <a:xfrm>
+            <a:off x="5086139" y="6222490"/>
+            <a:ext cx="2019720" cy="400110"/>
+          </a:xfrm>
+          <a:prstGeom prst="rect">
+            <a:avLst/>
+          </a:prstGeom>
+          <a:noFill/>
+        </p:spPr>
+        <p:txBody>
+          <a:bodyPr wrap="square" rtlCol="0">
+            <a:spAutoFit/>
+          </a:bodyPr>
+          <a:lstStyle/>
+          <a:p>
+            <a:pPr algn="r"/>
+            <a:r>
+              <a:rPr lang="it-IT" sz="2000" b="1" dirty="0">
+                <a:solidFill>
+                  <a:schemeClr val="bg1"/>
+                </a:solidFill>
+              </a:rPr>
+              <a:t>Gianpaolo Pestilli</a:t>
+            </a:r>
+          </a:p>
+        </p:txBody>
+      </p:sp>
+      <p:sp>
+        <p:nvSpPr>
+          <p:cNvPr id="8" name="CasellaDiTesto 7">
+            <a:extLst>
+              <a:ext uri="{FF2B5EF4-FFF2-40B4-BE49-F238E27FC236}">
+                <a16:creationId xmlns:a16="http://schemas.microsoft.com/office/drawing/2014/main" id="{55D07FC8-87DB-9EC9-C10E-896E8722AEDF}"/>
+              </a:ext>
+            </a:extLst>
+          </p:cNvPr>
+          <p:cNvSpPr txBox="1"/>
+          <p:nvPr/>
+        </p:nvSpPr>
+        <p:spPr>
+          <a:xfrm>
+            <a:off x="533399" y="728069"/>
+            <a:ext cx="11116884" cy="1277273"/>
+          </a:xfrm>
+          <a:prstGeom prst="rect">
+            <a:avLst/>
+          </a:prstGeom>
+          <a:noFill/>
+        </p:spPr>
+        <p:txBody>
+          <a:bodyPr wrap="square" rtlCol="0">
+            <a:spAutoFit/>
+          </a:bodyPr>
+          <a:lstStyle/>
+          <a:p>
+            <a:pPr algn="just">
+              <a:spcAft>
+                <a:spcPts val="600"/>
+              </a:spcAft>
+            </a:pPr>
+            <a:r>
+              <a:rPr lang="it-IT" sz="4000" b="1" dirty="0">
+                <a:solidFill>
+                  <a:srgbClr val="990000"/>
+                </a:solidFill>
+              </a:rPr>
+              <a:t>VERTEX COVER NON PESATO</a:t>
+            </a:r>
+          </a:p>
+          <a:p>
+            <a:pPr algn="just">
+              <a:spcAft>
+                <a:spcPts val="600"/>
+              </a:spcAft>
+            </a:pPr>
+            <a:r>
+              <a:rPr lang="it-IT" sz="3200" b="1" dirty="0"/>
+              <a:t>Algoritmo 5 (basato sul duale del rilassamento lineare)</a:t>
+            </a:r>
+          </a:p>
+        </p:txBody>
+      </p:sp>
+      <p:sp>
+        <p:nvSpPr>
+          <p:cNvPr id="2" name="CasellaDiTesto 1">
+            <a:extLst>
+              <a:ext uri="{FF2B5EF4-FFF2-40B4-BE49-F238E27FC236}">
+                <a16:creationId xmlns:a16="http://schemas.microsoft.com/office/drawing/2014/main" id="{23133AFF-CC31-2531-68B4-4AF1B4FDC8F4}"/>
+              </a:ext>
+            </a:extLst>
+          </p:cNvPr>
+          <p:cNvSpPr txBox="1"/>
+          <p:nvPr/>
+        </p:nvSpPr>
+        <p:spPr>
+          <a:xfrm>
+            <a:off x="11434917" y="6222490"/>
+            <a:ext cx="491612" cy="400110"/>
+          </a:xfrm>
+          <a:prstGeom prst="rect">
+            <a:avLst/>
+          </a:prstGeom>
+          <a:noFill/>
+        </p:spPr>
+        <p:txBody>
+          <a:bodyPr wrap="square" rtlCol="0">
+            <a:spAutoFit/>
+          </a:bodyPr>
+          <a:lstStyle/>
+          <a:p>
+            <a:pPr algn="r"/>
+            <a:r>
+              <a:rPr lang="it-IT" sz="2000" b="1" dirty="0">
+                <a:solidFill>
+                  <a:schemeClr val="bg1"/>
+                </a:solidFill>
+              </a:rPr>
+              <a:t>17</a:t>
+            </a:r>
+          </a:p>
+        </p:txBody>
+      </p:sp>
+      <p:pic>
+        <p:nvPicPr>
+          <p:cNvPr id="14" name="Immagine 13">
+            <a:extLst>
+              <a:ext uri="{FF2B5EF4-FFF2-40B4-BE49-F238E27FC236}">
+                <a16:creationId xmlns:a16="http://schemas.microsoft.com/office/drawing/2014/main" id="{660095E0-8889-C11E-725E-B986A93466B7}"/>
+              </a:ext>
+            </a:extLst>
+          </p:cNvPr>
+          <p:cNvPicPr>
+            <a:picLocks noChangeAspect="1"/>
+          </p:cNvPicPr>
+          <p:nvPr/>
+        </p:nvPicPr>
+        <p:blipFill>
+          <a:blip r:embed="rId2"/>
+          <a:stretch>
+            <a:fillRect/>
+          </a:stretch>
+        </p:blipFill>
+        <p:spPr>
+          <a:xfrm>
+            <a:off x="6091841" y="2488704"/>
+            <a:ext cx="4268117" cy="3132000"/>
+          </a:xfrm>
+          <a:prstGeom prst="rect">
+            <a:avLst/>
+          </a:prstGeom>
+        </p:spPr>
+      </p:pic>
+      <p:pic>
+        <p:nvPicPr>
+          <p:cNvPr id="16" name="Immagine 15">
+            <a:extLst>
+              <a:ext uri="{FF2B5EF4-FFF2-40B4-BE49-F238E27FC236}">
+                <a16:creationId xmlns:a16="http://schemas.microsoft.com/office/drawing/2014/main" id="{04C1D0E1-F2EE-4355-A35B-F27CE384F1FC}"/>
+              </a:ext>
+            </a:extLst>
+          </p:cNvPr>
+          <p:cNvPicPr>
+            <a:picLocks noChangeAspect="1"/>
+          </p:cNvPicPr>
+          <p:nvPr/>
+        </p:nvPicPr>
+        <p:blipFill>
+          <a:blip r:embed="rId3"/>
+          <a:stretch>
+            <a:fillRect/>
+          </a:stretch>
+        </p:blipFill>
+        <p:spPr>
+          <a:xfrm>
+            <a:off x="533399" y="2406379"/>
+            <a:ext cx="4474286" cy="3132000"/>
+          </a:xfrm>
+          <a:prstGeom prst="rect">
+            <a:avLst/>
+          </a:prstGeom>
+        </p:spPr>
+      </p:pic>
+    </p:spTree>
+    <p:extLst>
+      <p:ext uri="{BB962C8B-B14F-4D97-AF65-F5344CB8AC3E}">
+        <p14:creationId xmlns:p14="http://schemas.microsoft.com/office/powerpoint/2010/main" val="831557598"/>
+      </p:ext>
+    </p:extLst>
+  </p:cSld>
+  <p:clrMapOvr>
+    <a:masterClrMapping/>
+  </p:clrMapOvr>
+  <mc:AlternateContent xmlns:mc="http://schemas.openxmlformats.org/markup-compatibility/2006" xmlns:p159="http://schemas.microsoft.com/office/powerpoint/2015/09/main">
+    <mc:Choice Requires="p159">
+      <p:transition xmlns:p14="http://schemas.microsoft.com/office/powerpoint/2010/main" spd="slow" p14:dur="2000">
+        <p159:morph option="byObject"/>
+      </p:transition>
+    </mc:Choice>
+    <mc:Fallback xmlns="">
+      <p:transition spd="slow">
+        <p:fade/>
+      </p:transition>
+    </mc:Fallback>
+  </mc:AlternateContent>
+</p:sld>
+</file>
+
+<file path=ppt/slides/slide19.xml><?xml version="1.0" encoding="utf-8"?>
+<p:sld xmlns:a="http://schemas.openxmlformats.org/drawingml/2006/main" xmlns:r="http://schemas.openxmlformats.org/officeDocument/2006/relationships" xmlns:p="http://schemas.openxmlformats.org/presentationml/2006/main">
+  <p:cSld>
+    <p:spTree>
+      <p:nvGrpSpPr>
+        <p:cNvPr id="1" name="">
+          <a:extLst>
+            <a:ext uri="{FF2B5EF4-FFF2-40B4-BE49-F238E27FC236}">
+              <a16:creationId xmlns:a16="http://schemas.microsoft.com/office/drawing/2014/main" id="{90B4DC3E-B905-A214-A6A7-C5438E643E84}"/>
+            </a:ext>
+          </a:extLst>
+        </p:cNvPr>
+        <p:cNvGrpSpPr/>
+        <p:nvPr/>
+      </p:nvGrpSpPr>
+      <p:grpSpPr>
+        <a:xfrm>
+          <a:off x="0" y="0"/>
+          <a:ext cx="0" cy="0"/>
+          <a:chOff x="0" y="0"/>
+          <a:chExt cx="0" cy="0"/>
+        </a:xfrm>
+      </p:grpSpPr>
+      <p:sp>
+        <p:nvSpPr>
+          <p:cNvPr id="5" name="Rettangolo 4">
+            <a:extLst>
+              <a:ext uri="{FF2B5EF4-FFF2-40B4-BE49-F238E27FC236}">
+                <a16:creationId xmlns:a16="http://schemas.microsoft.com/office/drawing/2014/main" id="{D0E96AE6-E07F-6876-69A4-EFCB475313E9}"/>
+              </a:ext>
+            </a:extLst>
+          </p:cNvPr>
+          <p:cNvSpPr/>
+          <p:nvPr/>
+        </p:nvSpPr>
+        <p:spPr>
+          <a:xfrm rot="16200000">
+            <a:off x="5612871" y="326546"/>
+            <a:ext cx="966258" cy="12192000"/>
+          </a:xfrm>
+          <a:prstGeom prst="rect">
+            <a:avLst/>
+          </a:prstGeom>
+          <a:solidFill>
+            <a:srgbClr val="990000"/>
+          </a:solidFill>
+          <a:ln>
+            <a:solidFill>
+              <a:srgbClr val="990000"/>
+            </a:solidFill>
+          </a:ln>
+        </p:spPr>
+        <p:style>
+          <a:lnRef idx="2">
+            <a:schemeClr val="accent1">
+              <a:shade val="15000"/>
+            </a:schemeClr>
+          </a:lnRef>
+          <a:fillRef idx="1">
+            <a:schemeClr val="accent1"/>
+          </a:fillRef>
+          <a:effectRef idx="0">
+            <a:schemeClr val="accent1"/>
+          </a:effectRef>
+          <a:fontRef idx="minor">
+            <a:schemeClr val="lt1"/>
+          </a:fontRef>
+        </p:style>
+        <p:txBody>
+          <a:bodyPr rtlCol="0" anchor="ctr"/>
+          <a:lstStyle/>
+          <a:p>
+            <a:pPr algn="ctr"/>
+            <a:endParaRPr lang="it-IT" dirty="0"/>
+          </a:p>
+        </p:txBody>
+      </p:sp>
+      <p:sp>
+        <p:nvSpPr>
+          <p:cNvPr id="6" name="CasellaDiTesto 5">
+            <a:extLst>
+              <a:ext uri="{FF2B5EF4-FFF2-40B4-BE49-F238E27FC236}">
+                <a16:creationId xmlns:a16="http://schemas.microsoft.com/office/drawing/2014/main" id="{3706235A-D864-01E9-5926-7D9B39940F67}"/>
+              </a:ext>
+            </a:extLst>
+          </p:cNvPr>
+          <p:cNvSpPr txBox="1"/>
+          <p:nvPr/>
+        </p:nvSpPr>
+        <p:spPr>
+          <a:xfrm>
+            <a:off x="5086139" y="6222490"/>
+            <a:ext cx="2019720" cy="400110"/>
+          </a:xfrm>
+          <a:prstGeom prst="rect">
+            <a:avLst/>
+          </a:prstGeom>
+          <a:noFill/>
+        </p:spPr>
+        <p:txBody>
+          <a:bodyPr wrap="square" rtlCol="0">
+            <a:spAutoFit/>
+          </a:bodyPr>
+          <a:lstStyle/>
+          <a:p>
+            <a:pPr algn="r"/>
+            <a:r>
+              <a:rPr lang="it-IT" sz="2000" b="1" dirty="0">
+                <a:solidFill>
+                  <a:schemeClr val="bg1"/>
+                </a:solidFill>
+              </a:rPr>
+              <a:t>Gianpaolo Pestilli</a:t>
+            </a:r>
+          </a:p>
+        </p:txBody>
+      </p:sp>
+      <p:sp>
+        <p:nvSpPr>
+          <p:cNvPr id="8" name="CasellaDiTesto 7">
+            <a:extLst>
+              <a:ext uri="{FF2B5EF4-FFF2-40B4-BE49-F238E27FC236}">
+                <a16:creationId xmlns:a16="http://schemas.microsoft.com/office/drawing/2014/main" id="{8515F7E1-DD4F-96D7-9081-17AFB8A8B2B9}"/>
+              </a:ext>
+            </a:extLst>
+          </p:cNvPr>
+          <p:cNvSpPr txBox="1"/>
+          <p:nvPr/>
+        </p:nvSpPr>
+        <p:spPr>
+          <a:xfrm>
+            <a:off x="533399" y="728069"/>
+            <a:ext cx="11116884" cy="1277273"/>
+          </a:xfrm>
+          <a:prstGeom prst="rect">
+            <a:avLst/>
+          </a:prstGeom>
+          <a:noFill/>
+        </p:spPr>
+        <p:txBody>
+          <a:bodyPr wrap="square" rtlCol="0">
+            <a:spAutoFit/>
+          </a:bodyPr>
+          <a:lstStyle/>
+          <a:p>
+            <a:pPr algn="just">
+              <a:spcAft>
+                <a:spcPts val="600"/>
+              </a:spcAft>
+            </a:pPr>
+            <a:r>
+              <a:rPr lang="it-IT" sz="4000" b="1" dirty="0">
+                <a:solidFill>
+                  <a:srgbClr val="990000"/>
+                </a:solidFill>
+              </a:rPr>
+              <a:t>VERTEX COVER NON PESATO</a:t>
+            </a:r>
+          </a:p>
+          <a:p>
+            <a:pPr algn="just">
+              <a:spcAft>
+                <a:spcPts val="600"/>
+              </a:spcAft>
+            </a:pPr>
+            <a:r>
+              <a:rPr lang="it-IT" sz="3200" b="1" dirty="0"/>
+              <a:t>Algoritmo 5 (basato sul duale del rilassamento lineare)</a:t>
+            </a:r>
+          </a:p>
+        </p:txBody>
+      </p:sp>
+      <p:sp>
+        <p:nvSpPr>
+          <p:cNvPr id="2" name="CasellaDiTesto 1">
+            <a:extLst>
+              <a:ext uri="{FF2B5EF4-FFF2-40B4-BE49-F238E27FC236}">
+                <a16:creationId xmlns:a16="http://schemas.microsoft.com/office/drawing/2014/main" id="{62C8788C-EAF8-7049-F6C6-D4BD6A1471F7}"/>
+              </a:ext>
+            </a:extLst>
+          </p:cNvPr>
+          <p:cNvSpPr txBox="1"/>
+          <p:nvPr/>
+        </p:nvSpPr>
+        <p:spPr>
+          <a:xfrm>
+            <a:off x="11434917" y="6222490"/>
+            <a:ext cx="491612" cy="400110"/>
+          </a:xfrm>
+          <a:prstGeom prst="rect">
+            <a:avLst/>
+          </a:prstGeom>
+          <a:noFill/>
+        </p:spPr>
+        <p:txBody>
+          <a:bodyPr wrap="square" rtlCol="0">
+            <a:spAutoFit/>
+          </a:bodyPr>
+          <a:lstStyle/>
+          <a:p>
+            <a:pPr algn="r"/>
+            <a:r>
+              <a:rPr lang="it-IT" sz="2000" b="1" dirty="0">
+                <a:solidFill>
+                  <a:schemeClr val="bg1"/>
+                </a:solidFill>
+              </a:rPr>
+              <a:t>18</a:t>
+            </a:r>
+          </a:p>
+        </p:txBody>
+      </p:sp>
+      <p:pic>
+        <p:nvPicPr>
+          <p:cNvPr id="9" name="Immagine 8">
+            <a:extLst>
+              <a:ext uri="{FF2B5EF4-FFF2-40B4-BE49-F238E27FC236}">
+                <a16:creationId xmlns:a16="http://schemas.microsoft.com/office/drawing/2014/main" id="{1C00CDCF-54A7-249A-7039-FEAD102A0679}"/>
+              </a:ext>
+            </a:extLst>
+          </p:cNvPr>
+          <p:cNvPicPr>
+            <a:picLocks noChangeAspect="1"/>
+          </p:cNvPicPr>
+          <p:nvPr/>
+        </p:nvPicPr>
+        <p:blipFill>
+          <a:blip r:embed="rId2"/>
+          <a:stretch>
+            <a:fillRect/>
+          </a:stretch>
+        </p:blipFill>
+        <p:spPr>
+          <a:xfrm>
+            <a:off x="533399" y="2406379"/>
+            <a:ext cx="6036676" cy="3132000"/>
+          </a:xfrm>
+          <a:prstGeom prst="rect">
+            <a:avLst/>
+          </a:prstGeom>
+        </p:spPr>
+      </p:pic>
+      <p:pic>
+        <p:nvPicPr>
+          <p:cNvPr id="13" name="Immagine 12">
+            <a:extLst>
+              <a:ext uri="{FF2B5EF4-FFF2-40B4-BE49-F238E27FC236}">
+                <a16:creationId xmlns:a16="http://schemas.microsoft.com/office/drawing/2014/main" id="{FE2E4DD0-FD5A-A8CC-1501-388171D38F53}"/>
+              </a:ext>
+            </a:extLst>
+          </p:cNvPr>
+          <p:cNvPicPr>
+            <a:picLocks noChangeAspect="1"/>
+          </p:cNvPicPr>
+          <p:nvPr/>
+        </p:nvPicPr>
+        <p:blipFill>
+          <a:blip r:embed="rId3"/>
+          <a:stretch>
+            <a:fillRect/>
+          </a:stretch>
+        </p:blipFill>
+        <p:spPr>
+          <a:xfrm>
+            <a:off x="7105859" y="2406379"/>
+            <a:ext cx="2960383" cy="3132000"/>
+          </a:xfrm>
+          <a:prstGeom prst="rect">
+            <a:avLst/>
+          </a:prstGeom>
+        </p:spPr>
+      </p:pic>
+    </p:spTree>
+    <p:extLst>
+      <p:ext uri="{BB962C8B-B14F-4D97-AF65-F5344CB8AC3E}">
+        <p14:creationId xmlns:p14="http://schemas.microsoft.com/office/powerpoint/2010/main" val="3789693822"/>
+      </p:ext>
+    </p:extLst>
+  </p:cSld>
+  <p:clrMapOvr>
+    <a:masterClrMapping/>
+  </p:clrMapOvr>
+  <mc:AlternateContent xmlns:mc="http://schemas.openxmlformats.org/markup-compatibility/2006" xmlns:p159="http://schemas.microsoft.com/office/powerpoint/2015/09/main">
+    <mc:Choice Requires="p159">
+      <p:transition xmlns:p14="http://schemas.microsoft.com/office/powerpoint/2010/main" spd="slow" p14:dur="2000">
+        <p159:morph option="byObject"/>
+      </p:transition>
+    </mc:Choice>
+    <mc:Fallback xmlns="">
+      <p:transition spd="slow">
+        <p:fade/>
+      </p:transition>
+    </mc:Fallback>
+  </mc:AlternateContent>
+</p:sld>
+</file>
+
+<file path=ppt/slides/slide2.xml><?xml version="1.0" encoding="utf-8"?>
+<p:sld xmlns:a="http://schemas.openxmlformats.org/drawingml/2006/main" xmlns:r="http://schemas.openxmlformats.org/officeDocument/2006/relationships" xmlns:p="http://schemas.openxmlformats.org/presentationml/2006/main">
+  <p:cSld>
+    <p:spTree>
+      <p:nvGrpSpPr>
+        <p:cNvPr id="1" name="">
+          <a:extLst>
+            <a:ext uri="{FF2B5EF4-FFF2-40B4-BE49-F238E27FC236}">
+              <a16:creationId xmlns:a16="http://schemas.microsoft.com/office/drawing/2014/main" id="{59476725-92B5-3B1E-6F34-784FA2A2F19A}"/>
+            </a:ext>
+          </a:extLst>
+        </p:cNvPr>
+        <p:cNvGrpSpPr/>
+        <p:nvPr/>
+      </p:nvGrpSpPr>
+      <p:grpSpPr>
+        <a:xfrm>
+          <a:off x="0" y="0"/>
+          <a:ext cx="0" cy="0"/>
+          <a:chOff x="0" y="0"/>
+          <a:chExt cx="0" cy="0"/>
+        </a:xfrm>
+      </p:grpSpPr>
+      <p:sp>
+        <p:nvSpPr>
+          <p:cNvPr id="5" name="Rettangolo 4">
+            <a:extLst>
+              <a:ext uri="{FF2B5EF4-FFF2-40B4-BE49-F238E27FC236}">
+                <a16:creationId xmlns:a16="http://schemas.microsoft.com/office/drawing/2014/main" id="{123A58A5-7B62-B7C8-AB5A-3384C06A23B5}"/>
+              </a:ext>
+            </a:extLst>
+          </p:cNvPr>
+          <p:cNvSpPr/>
+          <p:nvPr/>
+        </p:nvSpPr>
+        <p:spPr>
+          <a:xfrm rot="16200000">
+            <a:off x="5612871" y="326546"/>
+            <a:ext cx="966258" cy="12192000"/>
+          </a:xfrm>
+          <a:prstGeom prst="rect">
+            <a:avLst/>
+          </a:prstGeom>
+          <a:solidFill>
+            <a:srgbClr val="990000"/>
+          </a:solidFill>
+          <a:ln>
+            <a:solidFill>
+              <a:srgbClr val="990000"/>
+            </a:solidFill>
+          </a:ln>
+        </p:spPr>
+        <p:style>
+          <a:lnRef idx="2">
+            <a:schemeClr val="accent1">
+              <a:shade val="15000"/>
+            </a:schemeClr>
+          </a:lnRef>
+          <a:fillRef idx="1">
+            <a:schemeClr val="accent1"/>
+          </a:fillRef>
+          <a:effectRef idx="0">
+            <a:schemeClr val="accent1"/>
+          </a:effectRef>
+          <a:fontRef idx="minor">
+            <a:schemeClr val="lt1"/>
+          </a:fontRef>
+        </p:style>
+        <p:txBody>
+          <a:bodyPr rtlCol="0" anchor="ctr"/>
+          <a:lstStyle/>
+          <a:p>
+            <a:pPr algn="ctr"/>
+            <a:endParaRPr lang="it-IT" dirty="0"/>
+          </a:p>
+        </p:txBody>
+      </p:sp>
+      <p:sp>
+        <p:nvSpPr>
+          <p:cNvPr id="6" name="CasellaDiTesto 5">
+            <a:extLst>
+              <a:ext uri="{FF2B5EF4-FFF2-40B4-BE49-F238E27FC236}">
+                <a16:creationId xmlns:a16="http://schemas.microsoft.com/office/drawing/2014/main" id="{846BBC47-0C05-6043-053E-9C532B262023}"/>
+              </a:ext>
+            </a:extLst>
+          </p:cNvPr>
+          <p:cNvSpPr txBox="1"/>
+          <p:nvPr/>
+        </p:nvSpPr>
+        <p:spPr>
+          <a:xfrm>
+            <a:off x="5086139" y="6222490"/>
+            <a:ext cx="2019720" cy="400110"/>
+          </a:xfrm>
+          <a:prstGeom prst="rect">
+            <a:avLst/>
+          </a:prstGeom>
+          <a:noFill/>
+        </p:spPr>
+        <p:txBody>
+          <a:bodyPr wrap="square" rtlCol="0">
+            <a:spAutoFit/>
+          </a:bodyPr>
+          <a:lstStyle/>
+          <a:p>
+            <a:pPr algn="r"/>
+            <a:r>
+              <a:rPr lang="it-IT" sz="2000" b="1" dirty="0">
+                <a:solidFill>
+                  <a:schemeClr val="bg1"/>
+                </a:solidFill>
+              </a:rPr>
+              <a:t>Gianpaolo Pestilli</a:t>
+            </a:r>
+          </a:p>
+        </p:txBody>
+      </p:sp>
+      <p:sp>
+        <p:nvSpPr>
+          <p:cNvPr id="7" name="CasellaDiTesto 6">
+            <a:extLst>
+              <a:ext uri="{FF2B5EF4-FFF2-40B4-BE49-F238E27FC236}">
+                <a16:creationId xmlns:a16="http://schemas.microsoft.com/office/drawing/2014/main" id="{508438DD-8FFC-A83F-4FDC-F7E451F078FA}"/>
+              </a:ext>
+            </a:extLst>
+          </p:cNvPr>
+          <p:cNvSpPr txBox="1"/>
+          <p:nvPr/>
+        </p:nvSpPr>
+        <p:spPr>
+          <a:xfrm>
+            <a:off x="11650283" y="6222490"/>
+            <a:ext cx="262013" cy="400110"/>
+          </a:xfrm>
+          <a:prstGeom prst="rect">
+            <a:avLst/>
+          </a:prstGeom>
+          <a:noFill/>
+        </p:spPr>
+        <p:txBody>
+          <a:bodyPr wrap="square" rtlCol="0">
+            <a:spAutoFit/>
+          </a:bodyPr>
+          <a:lstStyle/>
+          <a:p>
+            <a:r>
+              <a:rPr lang="it-IT" sz="2000" b="1" dirty="0">
+                <a:solidFill>
+                  <a:schemeClr val="bg1"/>
+                </a:solidFill>
+              </a:rPr>
+              <a:t>1</a:t>
+            </a:r>
+          </a:p>
+        </p:txBody>
+      </p:sp>
+      <p:sp>
+        <p:nvSpPr>
+          <p:cNvPr id="8" name="CasellaDiTesto 7">
+            <a:extLst>
+              <a:ext uri="{FF2B5EF4-FFF2-40B4-BE49-F238E27FC236}">
+                <a16:creationId xmlns:a16="http://schemas.microsoft.com/office/drawing/2014/main" id="{64862638-C662-D171-BA24-7BE83738BF0F}"/>
+              </a:ext>
+            </a:extLst>
+          </p:cNvPr>
+          <p:cNvSpPr txBox="1"/>
+          <p:nvPr/>
+        </p:nvSpPr>
+        <p:spPr>
+          <a:xfrm>
+            <a:off x="533399" y="728069"/>
+            <a:ext cx="6304281" cy="4324902"/>
+          </a:xfrm>
+          <a:prstGeom prst="rect">
+            <a:avLst/>
+          </a:prstGeom>
+          <a:noFill/>
+        </p:spPr>
+        <p:txBody>
+          <a:bodyPr wrap="square" rtlCol="0">
+            <a:spAutoFit/>
+          </a:bodyPr>
+          <a:lstStyle/>
+          <a:p>
+            <a:r>
+              <a:rPr lang="it-IT" sz="4000" b="1" dirty="0">
+                <a:solidFill>
+                  <a:srgbClr val="990000"/>
+                </a:solidFill>
+              </a:rPr>
+              <a:t>ROADMAP:</a:t>
+            </a:r>
+          </a:p>
+          <a:p>
+            <a:pPr marL="342900" indent="-342900">
+              <a:lnSpc>
+                <a:spcPct val="150000"/>
+              </a:lnSpc>
+              <a:buAutoNum type="arabicPeriod"/>
+            </a:pPr>
+            <a:r>
+              <a:rPr lang="it-IT" sz="3200" dirty="0"/>
+              <a:t>IDEA DEL PROGETTO</a:t>
+            </a:r>
+          </a:p>
+          <a:p>
+            <a:pPr marL="342900" indent="-342900">
+              <a:lnSpc>
+                <a:spcPct val="150000"/>
+              </a:lnSpc>
+              <a:buAutoNum type="arabicPeriod"/>
+            </a:pPr>
+            <a:r>
+              <a:rPr lang="it-IT" sz="3200" dirty="0"/>
+              <a:t>ALGORITMI CONFRONTATI</a:t>
+            </a:r>
+          </a:p>
+          <a:p>
+            <a:pPr marL="342900" indent="-342900">
+              <a:lnSpc>
+                <a:spcPct val="150000"/>
+              </a:lnSpc>
+              <a:buAutoNum type="arabicPeriod"/>
+            </a:pPr>
+            <a:r>
+              <a:rPr lang="it-IT" sz="3200" dirty="0"/>
+              <a:t>METODOLOGIA</a:t>
+            </a:r>
+          </a:p>
+          <a:p>
+            <a:pPr marL="342900" indent="-342900">
+              <a:lnSpc>
+                <a:spcPct val="150000"/>
+              </a:lnSpc>
+              <a:buAutoNum type="arabicPeriod"/>
+            </a:pPr>
+            <a:r>
+              <a:rPr lang="it-IT" sz="3200" dirty="0"/>
+              <a:t>RISULTATI PIÙ SIGNIFICATIVI</a:t>
+            </a:r>
+          </a:p>
+          <a:p>
+            <a:pPr marL="342900" indent="-342900">
+              <a:lnSpc>
+                <a:spcPct val="150000"/>
+              </a:lnSpc>
+              <a:buAutoNum type="arabicPeriod"/>
+            </a:pPr>
+            <a:r>
+              <a:rPr lang="it-IT" sz="3200" dirty="0"/>
+              <a:t>CONCLUSIONI</a:t>
+            </a:r>
+          </a:p>
+        </p:txBody>
+      </p:sp>
+    </p:spTree>
+    <p:extLst>
+      <p:ext uri="{BB962C8B-B14F-4D97-AF65-F5344CB8AC3E}">
+        <p14:creationId xmlns:p14="http://schemas.microsoft.com/office/powerpoint/2010/main" val="2331260819"/>
+      </p:ext>
+    </p:extLst>
+  </p:cSld>
+  <p:clrMapOvr>
+    <a:masterClrMapping/>
+  </p:clrMapOvr>
+  <mc:AlternateContent xmlns:mc="http://schemas.openxmlformats.org/markup-compatibility/2006" xmlns:p159="http://schemas.microsoft.com/office/powerpoint/2015/09/main">
+    <mc:Choice Requires="p159">
+      <p:transition xmlns:p14="http://schemas.microsoft.com/office/powerpoint/2010/main" spd="slow" p14:dur="2000">
+        <p159:morph option="byObject"/>
+      </p:transition>
+    </mc:Choice>
+    <mc:Fallback xmlns="">
+      <p:transition spd="slow">
+        <p:fade/>
+      </p:transition>
+    </mc:Fallback>
+  </mc:AlternateContent>
+</p:sld>
+</file>
+
+<file path=ppt/slides/slide20.xml><?xml version="1.0" encoding="utf-8"?>
+<p:sld xmlns:a="http://schemas.openxmlformats.org/drawingml/2006/main" xmlns:r="http://schemas.openxmlformats.org/officeDocument/2006/relationships" xmlns:p="http://schemas.openxmlformats.org/presentationml/2006/main">
+  <p:cSld>
+    <p:spTree>
+      <p:nvGrpSpPr>
+        <p:cNvPr id="1" name="">
+          <a:extLst>
+            <a:ext uri="{FF2B5EF4-FFF2-40B4-BE49-F238E27FC236}">
+              <a16:creationId xmlns:a16="http://schemas.microsoft.com/office/drawing/2014/main" id="{12A917E2-0E3E-CABB-EC49-58ABA6B49805}"/>
+            </a:ext>
+          </a:extLst>
+        </p:cNvPr>
+        <p:cNvGrpSpPr/>
+        <p:nvPr/>
+      </p:nvGrpSpPr>
+      <p:grpSpPr>
+        <a:xfrm>
+          <a:off x="0" y="0"/>
+          <a:ext cx="0" cy="0"/>
+          <a:chOff x="0" y="0"/>
+          <a:chExt cx="0" cy="0"/>
+        </a:xfrm>
+      </p:grpSpPr>
+      <p:sp>
+        <p:nvSpPr>
+          <p:cNvPr id="5" name="Rettangolo 4">
+            <a:extLst>
+              <a:ext uri="{FF2B5EF4-FFF2-40B4-BE49-F238E27FC236}">
+                <a16:creationId xmlns:a16="http://schemas.microsoft.com/office/drawing/2014/main" id="{30FD3871-534A-8E95-ACAF-56D3AD97998E}"/>
+              </a:ext>
+            </a:extLst>
+          </p:cNvPr>
+          <p:cNvSpPr/>
+          <p:nvPr/>
+        </p:nvSpPr>
+        <p:spPr>
+          <a:xfrm rot="16200000">
+            <a:off x="5612871" y="326546"/>
+            <a:ext cx="966258" cy="12192000"/>
+          </a:xfrm>
+          <a:prstGeom prst="rect">
+            <a:avLst/>
+          </a:prstGeom>
+          <a:solidFill>
+            <a:srgbClr val="990000"/>
+          </a:solidFill>
+          <a:ln>
+            <a:solidFill>
+              <a:srgbClr val="990000"/>
+            </a:solidFill>
+          </a:ln>
+        </p:spPr>
+        <p:style>
+          <a:lnRef idx="2">
+            <a:schemeClr val="accent1">
+              <a:shade val="15000"/>
+            </a:schemeClr>
+          </a:lnRef>
+          <a:fillRef idx="1">
+            <a:schemeClr val="accent1"/>
+          </a:fillRef>
+          <a:effectRef idx="0">
+            <a:schemeClr val="accent1"/>
+          </a:effectRef>
+          <a:fontRef idx="minor">
+            <a:schemeClr val="lt1"/>
+          </a:fontRef>
+        </p:style>
+        <p:txBody>
+          <a:bodyPr rtlCol="0" anchor="ctr"/>
+          <a:lstStyle/>
+          <a:p>
+            <a:pPr algn="ctr"/>
+            <a:endParaRPr lang="it-IT" dirty="0"/>
+          </a:p>
+        </p:txBody>
+      </p:sp>
+      <p:sp>
+        <p:nvSpPr>
+          <p:cNvPr id="6" name="CasellaDiTesto 5">
+            <a:extLst>
+              <a:ext uri="{FF2B5EF4-FFF2-40B4-BE49-F238E27FC236}">
+                <a16:creationId xmlns:a16="http://schemas.microsoft.com/office/drawing/2014/main" id="{D4A89934-52C4-4247-B668-047FA8F5ABF1}"/>
+              </a:ext>
+            </a:extLst>
+          </p:cNvPr>
+          <p:cNvSpPr txBox="1"/>
+          <p:nvPr/>
+        </p:nvSpPr>
+        <p:spPr>
+          <a:xfrm>
+            <a:off x="5086139" y="6222490"/>
+            <a:ext cx="2019720" cy="400110"/>
+          </a:xfrm>
+          <a:prstGeom prst="rect">
+            <a:avLst/>
+          </a:prstGeom>
+          <a:noFill/>
+        </p:spPr>
+        <p:txBody>
+          <a:bodyPr wrap="square" rtlCol="0">
+            <a:spAutoFit/>
+          </a:bodyPr>
+          <a:lstStyle/>
+          <a:p>
+            <a:pPr algn="r"/>
+            <a:r>
+              <a:rPr lang="it-IT" sz="2000" b="1" dirty="0">
+                <a:solidFill>
+                  <a:schemeClr val="bg1"/>
+                </a:solidFill>
+              </a:rPr>
+              <a:t>Gianpaolo Pestilli</a:t>
+            </a:r>
+          </a:p>
+        </p:txBody>
+      </p:sp>
+      <p:sp>
+        <p:nvSpPr>
+          <p:cNvPr id="8" name="CasellaDiTesto 7">
+            <a:extLst>
+              <a:ext uri="{FF2B5EF4-FFF2-40B4-BE49-F238E27FC236}">
+                <a16:creationId xmlns:a16="http://schemas.microsoft.com/office/drawing/2014/main" id="{FB5714A1-BAAE-C1E4-5192-8105E7641735}"/>
+              </a:ext>
+            </a:extLst>
+          </p:cNvPr>
+          <p:cNvSpPr txBox="1"/>
+          <p:nvPr/>
+        </p:nvSpPr>
+        <p:spPr>
+          <a:xfrm>
+            <a:off x="533399" y="728069"/>
+            <a:ext cx="11116884" cy="1277273"/>
+          </a:xfrm>
+          <a:prstGeom prst="rect">
+            <a:avLst/>
+          </a:prstGeom>
+          <a:noFill/>
+        </p:spPr>
+        <p:txBody>
+          <a:bodyPr wrap="square" rtlCol="0">
+            <a:spAutoFit/>
+          </a:bodyPr>
+          <a:lstStyle/>
+          <a:p>
+            <a:pPr algn="just">
+              <a:spcAft>
+                <a:spcPts val="600"/>
+              </a:spcAft>
+            </a:pPr>
+            <a:r>
+              <a:rPr lang="it-IT" sz="4000" b="1" dirty="0">
+                <a:solidFill>
+                  <a:srgbClr val="990000"/>
+                </a:solidFill>
+              </a:rPr>
+              <a:t>VERTEX COVER PESATO</a:t>
+            </a:r>
+          </a:p>
+          <a:p>
+            <a:pPr algn="just">
+              <a:spcAft>
+                <a:spcPts val="600"/>
+              </a:spcAft>
+            </a:pPr>
+            <a:r>
+              <a:rPr lang="it-IT" sz="3200" b="1" dirty="0"/>
+              <a:t>Algoritmo 1 (si ordinano i vertici per peso crescente)</a:t>
+            </a:r>
+          </a:p>
+        </p:txBody>
+      </p:sp>
+      <p:sp>
+        <p:nvSpPr>
+          <p:cNvPr id="2" name="CasellaDiTesto 1">
+            <a:extLst>
+              <a:ext uri="{FF2B5EF4-FFF2-40B4-BE49-F238E27FC236}">
+                <a16:creationId xmlns:a16="http://schemas.microsoft.com/office/drawing/2014/main" id="{43D5DB99-C127-942B-151C-6B5EEADEA745}"/>
+              </a:ext>
+            </a:extLst>
+          </p:cNvPr>
+          <p:cNvSpPr txBox="1"/>
+          <p:nvPr/>
+        </p:nvSpPr>
+        <p:spPr>
+          <a:xfrm>
+            <a:off x="11434917" y="6222490"/>
+            <a:ext cx="491612" cy="400110"/>
+          </a:xfrm>
+          <a:prstGeom prst="rect">
+            <a:avLst/>
+          </a:prstGeom>
+          <a:noFill/>
+        </p:spPr>
+        <p:txBody>
+          <a:bodyPr wrap="square" rtlCol="0">
+            <a:spAutoFit/>
+          </a:bodyPr>
+          <a:lstStyle/>
+          <a:p>
+            <a:pPr algn="r"/>
+            <a:r>
+              <a:rPr lang="it-IT" sz="2000" b="1" dirty="0">
+                <a:solidFill>
+                  <a:schemeClr val="bg1"/>
+                </a:solidFill>
+              </a:rPr>
+              <a:t>19</a:t>
+            </a:r>
+          </a:p>
+        </p:txBody>
+      </p:sp>
+      <p:pic>
+        <p:nvPicPr>
+          <p:cNvPr id="4" name="Immagine 3">
+            <a:extLst>
+              <a:ext uri="{FF2B5EF4-FFF2-40B4-BE49-F238E27FC236}">
+                <a16:creationId xmlns:a16="http://schemas.microsoft.com/office/drawing/2014/main" id="{200539F8-7AB2-1A90-F9A4-4F1C9890AA9F}"/>
+              </a:ext>
+            </a:extLst>
+          </p:cNvPr>
+          <p:cNvPicPr>
+            <a:picLocks noChangeAspect="1"/>
+          </p:cNvPicPr>
+          <p:nvPr/>
+        </p:nvPicPr>
+        <p:blipFill>
+          <a:blip r:embed="rId2"/>
+          <a:stretch>
+            <a:fillRect/>
+          </a:stretch>
+        </p:blipFill>
+        <p:spPr>
+          <a:xfrm>
+            <a:off x="533399" y="2288416"/>
+            <a:ext cx="6272014" cy="3615345"/>
+          </a:xfrm>
+          <a:prstGeom prst="rect">
+            <a:avLst/>
+          </a:prstGeom>
+        </p:spPr>
+      </p:pic>
+    </p:spTree>
+    <p:extLst>
+      <p:ext uri="{BB962C8B-B14F-4D97-AF65-F5344CB8AC3E}">
+        <p14:creationId xmlns:p14="http://schemas.microsoft.com/office/powerpoint/2010/main" val="2293460485"/>
+      </p:ext>
+    </p:extLst>
+  </p:cSld>
+  <p:clrMapOvr>
+    <a:masterClrMapping/>
+  </p:clrMapOvr>
+  <mc:AlternateContent xmlns:mc="http://schemas.openxmlformats.org/markup-compatibility/2006" xmlns:p159="http://schemas.microsoft.com/office/powerpoint/2015/09/main">
+    <mc:Choice Requires="p159">
+      <p:transition xmlns:p14="http://schemas.microsoft.com/office/powerpoint/2010/main" spd="slow" p14:dur="2000">
+        <p159:morph option="byObject"/>
+      </p:transition>
+    </mc:Choice>
+    <mc:Fallback xmlns="">
+      <p:transition spd="slow">
+        <p:fade/>
+      </p:transition>
+    </mc:Fallback>
+  </mc:AlternateContent>
+</p:sld>
+</file>
+
+<file path=ppt/slides/slide21.xml><?xml version="1.0" encoding="utf-8"?>
+<p:sld xmlns:a="http://schemas.openxmlformats.org/drawingml/2006/main" xmlns:r="http://schemas.openxmlformats.org/officeDocument/2006/relationships" xmlns:p="http://schemas.openxmlformats.org/presentationml/2006/main">
+  <p:cSld>
+    <p:spTree>
+      <p:nvGrpSpPr>
+        <p:cNvPr id="1" name="">
+          <a:extLst>
+            <a:ext uri="{FF2B5EF4-FFF2-40B4-BE49-F238E27FC236}">
+              <a16:creationId xmlns:a16="http://schemas.microsoft.com/office/drawing/2014/main" id="{D2B2EA7B-DC77-71F4-A489-EB7970040794}"/>
+            </a:ext>
+          </a:extLst>
+        </p:cNvPr>
+        <p:cNvGrpSpPr/>
+        <p:nvPr/>
+      </p:nvGrpSpPr>
+      <p:grpSpPr>
+        <a:xfrm>
+          <a:off x="0" y="0"/>
+          <a:ext cx="0" cy="0"/>
+          <a:chOff x="0" y="0"/>
+          <a:chExt cx="0" cy="0"/>
+        </a:xfrm>
+      </p:grpSpPr>
+      <p:sp>
+        <p:nvSpPr>
+          <p:cNvPr id="5" name="Rettangolo 4">
+            <a:extLst>
+              <a:ext uri="{FF2B5EF4-FFF2-40B4-BE49-F238E27FC236}">
+                <a16:creationId xmlns:a16="http://schemas.microsoft.com/office/drawing/2014/main" id="{D4B287D7-EAFC-DCFC-0C1F-D5B2DBCF2A81}"/>
+              </a:ext>
+            </a:extLst>
+          </p:cNvPr>
+          <p:cNvSpPr/>
+          <p:nvPr/>
+        </p:nvSpPr>
+        <p:spPr>
+          <a:xfrm rot="16200000">
+            <a:off x="5612871" y="326546"/>
+            <a:ext cx="966258" cy="12192000"/>
+          </a:xfrm>
+          <a:prstGeom prst="rect">
+            <a:avLst/>
+          </a:prstGeom>
+          <a:solidFill>
+            <a:srgbClr val="990000"/>
+          </a:solidFill>
+          <a:ln>
+            <a:solidFill>
+              <a:srgbClr val="990000"/>
+            </a:solidFill>
+          </a:ln>
+        </p:spPr>
+        <p:style>
+          <a:lnRef idx="2">
+            <a:schemeClr val="accent1">
+              <a:shade val="15000"/>
+            </a:schemeClr>
+          </a:lnRef>
+          <a:fillRef idx="1">
+            <a:schemeClr val="accent1"/>
+          </a:fillRef>
+          <a:effectRef idx="0">
+            <a:schemeClr val="accent1"/>
+          </a:effectRef>
+          <a:fontRef idx="minor">
+            <a:schemeClr val="lt1"/>
+          </a:fontRef>
+        </p:style>
+        <p:txBody>
+          <a:bodyPr rtlCol="0" anchor="ctr"/>
+          <a:lstStyle/>
+          <a:p>
+            <a:pPr algn="ctr"/>
+            <a:endParaRPr lang="it-IT" dirty="0"/>
+          </a:p>
+        </p:txBody>
+      </p:sp>
+      <p:sp>
+        <p:nvSpPr>
+          <p:cNvPr id="6" name="CasellaDiTesto 5">
+            <a:extLst>
+              <a:ext uri="{FF2B5EF4-FFF2-40B4-BE49-F238E27FC236}">
+                <a16:creationId xmlns:a16="http://schemas.microsoft.com/office/drawing/2014/main" id="{D6BF57AC-FEA7-92B9-CF09-3C1EF6FD8851}"/>
+              </a:ext>
+            </a:extLst>
+          </p:cNvPr>
+          <p:cNvSpPr txBox="1"/>
+          <p:nvPr/>
+        </p:nvSpPr>
+        <p:spPr>
+          <a:xfrm>
+            <a:off x="5086139" y="6222490"/>
+            <a:ext cx="2019720" cy="400110"/>
+          </a:xfrm>
+          <a:prstGeom prst="rect">
+            <a:avLst/>
+          </a:prstGeom>
+          <a:noFill/>
+        </p:spPr>
+        <p:txBody>
+          <a:bodyPr wrap="square" rtlCol="0">
+            <a:spAutoFit/>
+          </a:bodyPr>
+          <a:lstStyle/>
+          <a:p>
+            <a:pPr algn="r"/>
+            <a:r>
+              <a:rPr lang="it-IT" sz="2000" b="1" dirty="0">
+                <a:solidFill>
+                  <a:schemeClr val="bg1"/>
+                </a:solidFill>
+              </a:rPr>
+              <a:t>Gianpaolo Pestilli</a:t>
+            </a:r>
+          </a:p>
+        </p:txBody>
+      </p:sp>
+      <p:sp>
+        <p:nvSpPr>
+          <p:cNvPr id="8" name="CasellaDiTesto 7">
+            <a:extLst>
+              <a:ext uri="{FF2B5EF4-FFF2-40B4-BE49-F238E27FC236}">
+                <a16:creationId xmlns:a16="http://schemas.microsoft.com/office/drawing/2014/main" id="{372CD3A2-892B-E2D1-DE23-984C2628EF77}"/>
+              </a:ext>
+            </a:extLst>
+          </p:cNvPr>
+          <p:cNvSpPr txBox="1"/>
+          <p:nvPr/>
+        </p:nvSpPr>
+        <p:spPr>
+          <a:xfrm>
+            <a:off x="533399" y="728069"/>
+            <a:ext cx="11116884" cy="1769715"/>
+          </a:xfrm>
+          <a:prstGeom prst="rect">
+            <a:avLst/>
+          </a:prstGeom>
+          <a:noFill/>
+        </p:spPr>
+        <p:txBody>
+          <a:bodyPr wrap="square" rtlCol="0">
+            <a:spAutoFit/>
+          </a:bodyPr>
+          <a:lstStyle/>
+          <a:p>
+            <a:pPr algn="just">
+              <a:spcAft>
+                <a:spcPts val="600"/>
+              </a:spcAft>
+            </a:pPr>
+            <a:r>
+              <a:rPr lang="it-IT" sz="4000" b="1" dirty="0">
+                <a:solidFill>
+                  <a:srgbClr val="990000"/>
+                </a:solidFill>
+              </a:rPr>
+              <a:t>VERTEX COVER PESATO</a:t>
+            </a:r>
+          </a:p>
+          <a:p>
+            <a:pPr algn="just">
+              <a:spcAft>
+                <a:spcPts val="600"/>
+              </a:spcAft>
+            </a:pPr>
+            <a:r>
+              <a:rPr lang="it-IT" sz="3200" b="1" dirty="0"/>
+              <a:t>Algoritmo 2 (si ordinano i vertici per rapporto peso/grado crescente)</a:t>
+            </a:r>
+          </a:p>
+        </p:txBody>
+      </p:sp>
+      <p:sp>
+        <p:nvSpPr>
+          <p:cNvPr id="2" name="CasellaDiTesto 1">
+            <a:extLst>
+              <a:ext uri="{FF2B5EF4-FFF2-40B4-BE49-F238E27FC236}">
+                <a16:creationId xmlns:a16="http://schemas.microsoft.com/office/drawing/2014/main" id="{31F72936-B423-792D-6842-AEA081856A92}"/>
+              </a:ext>
+            </a:extLst>
+          </p:cNvPr>
+          <p:cNvSpPr txBox="1"/>
+          <p:nvPr/>
+        </p:nvSpPr>
+        <p:spPr>
+          <a:xfrm>
+            <a:off x="11434917" y="6222490"/>
+            <a:ext cx="491612" cy="400110"/>
+          </a:xfrm>
+          <a:prstGeom prst="rect">
+            <a:avLst/>
+          </a:prstGeom>
+          <a:noFill/>
+        </p:spPr>
+        <p:txBody>
+          <a:bodyPr wrap="square" rtlCol="0">
+            <a:spAutoFit/>
+          </a:bodyPr>
+          <a:lstStyle/>
+          <a:p>
+            <a:pPr algn="r"/>
+            <a:r>
+              <a:rPr lang="it-IT" sz="2000" b="1" dirty="0">
+                <a:solidFill>
+                  <a:schemeClr val="bg1"/>
+                </a:solidFill>
+              </a:rPr>
+              <a:t>20</a:t>
+            </a:r>
+          </a:p>
+        </p:txBody>
+      </p:sp>
+      <p:pic>
+        <p:nvPicPr>
+          <p:cNvPr id="7" name="Immagine 6">
+            <a:extLst>
+              <a:ext uri="{FF2B5EF4-FFF2-40B4-BE49-F238E27FC236}">
+                <a16:creationId xmlns:a16="http://schemas.microsoft.com/office/drawing/2014/main" id="{A5C7F1FD-810F-89A9-47DC-C2318D1746E6}"/>
+              </a:ext>
+            </a:extLst>
+          </p:cNvPr>
+          <p:cNvPicPr>
+            <a:picLocks noChangeAspect="1"/>
+          </p:cNvPicPr>
+          <p:nvPr/>
+        </p:nvPicPr>
+        <p:blipFill>
+          <a:blip r:embed="rId2"/>
+          <a:stretch>
+            <a:fillRect/>
+          </a:stretch>
+        </p:blipFill>
+        <p:spPr>
+          <a:xfrm>
+            <a:off x="533399" y="2497784"/>
+            <a:ext cx="3771652" cy="3441632"/>
+          </a:xfrm>
+          <a:prstGeom prst="rect">
+            <a:avLst/>
+          </a:prstGeom>
+        </p:spPr>
+      </p:pic>
+    </p:spTree>
+    <p:extLst>
+      <p:ext uri="{BB962C8B-B14F-4D97-AF65-F5344CB8AC3E}">
+        <p14:creationId xmlns:p14="http://schemas.microsoft.com/office/powerpoint/2010/main" val="1779889665"/>
+      </p:ext>
+    </p:extLst>
+  </p:cSld>
+  <p:clrMapOvr>
+    <a:masterClrMapping/>
+  </p:clrMapOvr>
+  <mc:AlternateContent xmlns:mc="http://schemas.openxmlformats.org/markup-compatibility/2006" xmlns:p159="http://schemas.microsoft.com/office/powerpoint/2015/09/main">
+    <mc:Choice Requires="p159">
+      <p:transition xmlns:p14="http://schemas.microsoft.com/office/powerpoint/2010/main" spd="slow" p14:dur="2000">
+        <p159:morph option="byObject"/>
+      </p:transition>
+    </mc:Choice>
+    <mc:Fallback xmlns="">
+      <p:transition spd="slow">
+        <p:fade/>
+      </p:transition>
+    </mc:Fallback>
+  </mc:AlternateContent>
+</p:sld>
+</file>
+
+<file path=ppt/slides/slide22.xml><?xml version="1.0" encoding="utf-8"?>
+<p:sld xmlns:a="http://schemas.openxmlformats.org/drawingml/2006/main" xmlns:r="http://schemas.openxmlformats.org/officeDocument/2006/relationships" xmlns:p="http://schemas.openxmlformats.org/presentationml/2006/main">
+  <p:cSld>
+    <p:spTree>
+      <p:nvGrpSpPr>
+        <p:cNvPr id="1" name="">
+          <a:extLst>
+            <a:ext uri="{FF2B5EF4-FFF2-40B4-BE49-F238E27FC236}">
+              <a16:creationId xmlns:a16="http://schemas.microsoft.com/office/drawing/2014/main" id="{4A4B65F2-BF6C-D3ED-14C7-FDBB3C373050}"/>
+            </a:ext>
+          </a:extLst>
+        </p:cNvPr>
+        <p:cNvGrpSpPr/>
+        <p:nvPr/>
+      </p:nvGrpSpPr>
+      <p:grpSpPr>
+        <a:xfrm>
+          <a:off x="0" y="0"/>
+          <a:ext cx="0" cy="0"/>
+          <a:chOff x="0" y="0"/>
+          <a:chExt cx="0" cy="0"/>
+        </a:xfrm>
+      </p:grpSpPr>
+      <p:sp>
+        <p:nvSpPr>
+          <p:cNvPr id="5" name="Rettangolo 4">
+            <a:extLst>
+              <a:ext uri="{FF2B5EF4-FFF2-40B4-BE49-F238E27FC236}">
+                <a16:creationId xmlns:a16="http://schemas.microsoft.com/office/drawing/2014/main" id="{74CECEE7-5915-6A91-9ECA-771A3BEC21BB}"/>
+              </a:ext>
+            </a:extLst>
+          </p:cNvPr>
+          <p:cNvSpPr/>
+          <p:nvPr/>
+        </p:nvSpPr>
+        <p:spPr>
+          <a:xfrm rot="16200000">
+            <a:off x="5612871" y="326546"/>
+            <a:ext cx="966258" cy="12192000"/>
+          </a:xfrm>
+          <a:prstGeom prst="rect">
+            <a:avLst/>
+          </a:prstGeom>
+          <a:solidFill>
+            <a:srgbClr val="990000"/>
+          </a:solidFill>
+          <a:ln>
+            <a:solidFill>
+              <a:srgbClr val="990000"/>
+            </a:solidFill>
+          </a:ln>
+        </p:spPr>
+        <p:style>
+          <a:lnRef idx="2">
+            <a:schemeClr val="accent1">
+              <a:shade val="15000"/>
+            </a:schemeClr>
+          </a:lnRef>
+          <a:fillRef idx="1">
+            <a:schemeClr val="accent1"/>
+          </a:fillRef>
+          <a:effectRef idx="0">
+            <a:schemeClr val="accent1"/>
+          </a:effectRef>
+          <a:fontRef idx="minor">
+            <a:schemeClr val="lt1"/>
+          </a:fontRef>
+        </p:style>
+        <p:txBody>
+          <a:bodyPr rtlCol="0" anchor="ctr"/>
+          <a:lstStyle/>
+          <a:p>
+            <a:pPr algn="ctr"/>
+            <a:endParaRPr lang="it-IT" dirty="0"/>
+          </a:p>
+        </p:txBody>
+      </p:sp>
+      <p:sp>
+        <p:nvSpPr>
+          <p:cNvPr id="6" name="CasellaDiTesto 5">
+            <a:extLst>
+              <a:ext uri="{FF2B5EF4-FFF2-40B4-BE49-F238E27FC236}">
+                <a16:creationId xmlns:a16="http://schemas.microsoft.com/office/drawing/2014/main" id="{A787D36D-2875-48C9-1784-0C64D157A074}"/>
+              </a:ext>
+            </a:extLst>
+          </p:cNvPr>
+          <p:cNvSpPr txBox="1"/>
+          <p:nvPr/>
+        </p:nvSpPr>
+        <p:spPr>
+          <a:xfrm>
+            <a:off x="5086139" y="6222490"/>
+            <a:ext cx="2019720" cy="400110"/>
+          </a:xfrm>
+          <a:prstGeom prst="rect">
+            <a:avLst/>
+          </a:prstGeom>
+          <a:noFill/>
+        </p:spPr>
+        <p:txBody>
+          <a:bodyPr wrap="square" rtlCol="0">
+            <a:spAutoFit/>
+          </a:bodyPr>
+          <a:lstStyle/>
+          <a:p>
+            <a:pPr algn="r"/>
+            <a:r>
+              <a:rPr lang="it-IT" sz="2000" b="1" dirty="0">
+                <a:solidFill>
+                  <a:schemeClr val="bg1"/>
+                </a:solidFill>
+              </a:rPr>
+              <a:t>Gianpaolo Pestilli</a:t>
+            </a:r>
+          </a:p>
+        </p:txBody>
+      </p:sp>
+      <p:sp>
+        <p:nvSpPr>
+          <p:cNvPr id="8" name="CasellaDiTesto 7">
+            <a:extLst>
+              <a:ext uri="{FF2B5EF4-FFF2-40B4-BE49-F238E27FC236}">
+                <a16:creationId xmlns:a16="http://schemas.microsoft.com/office/drawing/2014/main" id="{5950AA2C-363F-16BD-AA56-3CEF0315EDFB}"/>
+              </a:ext>
+            </a:extLst>
+          </p:cNvPr>
+          <p:cNvSpPr txBox="1"/>
+          <p:nvPr/>
+        </p:nvSpPr>
+        <p:spPr>
+          <a:xfrm>
+            <a:off x="533399" y="728069"/>
+            <a:ext cx="11116884" cy="1277273"/>
+          </a:xfrm>
+          <a:prstGeom prst="rect">
+            <a:avLst/>
+          </a:prstGeom>
+          <a:noFill/>
+        </p:spPr>
+        <p:txBody>
+          <a:bodyPr wrap="square" rtlCol="0">
+            <a:spAutoFit/>
+          </a:bodyPr>
+          <a:lstStyle/>
+          <a:p>
+            <a:pPr algn="just">
+              <a:spcAft>
+                <a:spcPts val="600"/>
+              </a:spcAft>
+            </a:pPr>
+            <a:r>
+              <a:rPr lang="it-IT" sz="4000" b="1" dirty="0">
+                <a:solidFill>
+                  <a:srgbClr val="990000"/>
+                </a:solidFill>
+              </a:rPr>
+              <a:t>VERTEX COVER PESATO</a:t>
+            </a:r>
+          </a:p>
+          <a:p>
+            <a:pPr algn="just">
+              <a:spcAft>
+                <a:spcPts val="600"/>
+              </a:spcAft>
+            </a:pPr>
+            <a:r>
+              <a:rPr lang="it-IT" sz="3200" b="1" dirty="0"/>
+              <a:t>Algoritmo 3 (si ordinano gli archi per costo)</a:t>
+            </a:r>
+          </a:p>
+        </p:txBody>
+      </p:sp>
+      <p:sp>
+        <p:nvSpPr>
+          <p:cNvPr id="2" name="CasellaDiTesto 1">
+            <a:extLst>
+              <a:ext uri="{FF2B5EF4-FFF2-40B4-BE49-F238E27FC236}">
+                <a16:creationId xmlns:a16="http://schemas.microsoft.com/office/drawing/2014/main" id="{2DFEFDB8-79BF-FCDD-5542-69986AA237B9}"/>
+              </a:ext>
+            </a:extLst>
+          </p:cNvPr>
+          <p:cNvSpPr txBox="1"/>
+          <p:nvPr/>
+        </p:nvSpPr>
+        <p:spPr>
+          <a:xfrm>
+            <a:off x="11434917" y="6222490"/>
+            <a:ext cx="491612" cy="400110"/>
+          </a:xfrm>
+          <a:prstGeom prst="rect">
+            <a:avLst/>
+          </a:prstGeom>
+          <a:noFill/>
+        </p:spPr>
+        <p:txBody>
+          <a:bodyPr wrap="square" rtlCol="0">
+            <a:spAutoFit/>
+          </a:bodyPr>
+          <a:lstStyle/>
+          <a:p>
+            <a:pPr algn="r"/>
+            <a:r>
+              <a:rPr lang="it-IT" sz="2000" b="1" dirty="0">
+                <a:solidFill>
+                  <a:schemeClr val="bg1"/>
+                </a:solidFill>
+              </a:rPr>
+              <a:t>21</a:t>
+            </a:r>
+          </a:p>
+        </p:txBody>
+      </p:sp>
+      <p:pic>
+        <p:nvPicPr>
+          <p:cNvPr id="4" name="Immagine 3">
+            <a:extLst>
+              <a:ext uri="{FF2B5EF4-FFF2-40B4-BE49-F238E27FC236}">
+                <a16:creationId xmlns:a16="http://schemas.microsoft.com/office/drawing/2014/main" id="{D5D73F98-DD41-D930-6857-00C6A5295F18}"/>
+              </a:ext>
+            </a:extLst>
+          </p:cNvPr>
+          <p:cNvPicPr>
+            <a:picLocks noChangeAspect="1"/>
+          </p:cNvPicPr>
+          <p:nvPr/>
+        </p:nvPicPr>
+        <p:blipFill>
+          <a:blip r:embed="rId2"/>
+          <a:stretch>
+            <a:fillRect/>
+          </a:stretch>
+        </p:blipFill>
+        <p:spPr>
+          <a:xfrm>
+            <a:off x="533399" y="2080659"/>
+            <a:ext cx="8504628" cy="2772000"/>
+          </a:xfrm>
+          <a:prstGeom prst="rect">
+            <a:avLst/>
+          </a:prstGeom>
+        </p:spPr>
+      </p:pic>
+      <p:pic>
+        <p:nvPicPr>
+          <p:cNvPr id="10" name="Immagine 9">
+            <a:extLst>
+              <a:ext uri="{FF2B5EF4-FFF2-40B4-BE49-F238E27FC236}">
+                <a16:creationId xmlns:a16="http://schemas.microsoft.com/office/drawing/2014/main" id="{356D9A61-982F-6D0D-5155-A15ABB634741}"/>
+              </a:ext>
+            </a:extLst>
+          </p:cNvPr>
+          <p:cNvPicPr>
+            <a:picLocks noChangeAspect="1"/>
+          </p:cNvPicPr>
+          <p:nvPr/>
+        </p:nvPicPr>
+        <p:blipFill>
+          <a:blip r:embed="rId3"/>
+          <a:stretch>
+            <a:fillRect/>
+          </a:stretch>
+        </p:blipFill>
+        <p:spPr>
+          <a:xfrm>
+            <a:off x="9038027" y="2080659"/>
+            <a:ext cx="2932573" cy="2772000"/>
+          </a:xfrm>
+          <a:prstGeom prst="rect">
+            <a:avLst/>
+          </a:prstGeom>
+        </p:spPr>
+      </p:pic>
+    </p:spTree>
+    <p:extLst>
+      <p:ext uri="{BB962C8B-B14F-4D97-AF65-F5344CB8AC3E}">
+        <p14:creationId xmlns:p14="http://schemas.microsoft.com/office/powerpoint/2010/main" val="2381498675"/>
+      </p:ext>
+    </p:extLst>
+  </p:cSld>
+  <p:clrMapOvr>
+    <a:masterClrMapping/>
+  </p:clrMapOvr>
+  <mc:AlternateContent xmlns:mc="http://schemas.openxmlformats.org/markup-compatibility/2006" xmlns:p159="http://schemas.microsoft.com/office/powerpoint/2015/09/main">
+    <mc:Choice Requires="p159">
+      <p:transition xmlns:p14="http://schemas.microsoft.com/office/powerpoint/2010/main" spd="slow" p14:dur="2000">
+        <p159:morph option="byObject"/>
+      </p:transition>
+    </mc:Choice>
+    <mc:Fallback xmlns="">
+      <p:transition spd="slow">
+        <p:fade/>
+      </p:transition>
+    </mc:Fallback>
+  </mc:AlternateContent>
+</p:sld>
+</file>
+
+<file path=ppt/slides/slide23.xml><?xml version="1.0" encoding="utf-8"?>
+<p:sld xmlns:a="http://schemas.openxmlformats.org/drawingml/2006/main" xmlns:r="http://schemas.openxmlformats.org/officeDocument/2006/relationships" xmlns:p="http://schemas.openxmlformats.org/presentationml/2006/main">
+  <p:cSld>
+    <p:spTree>
+      <p:nvGrpSpPr>
+        <p:cNvPr id="1" name="">
+          <a:extLst>
+            <a:ext uri="{FF2B5EF4-FFF2-40B4-BE49-F238E27FC236}">
+              <a16:creationId xmlns:a16="http://schemas.microsoft.com/office/drawing/2014/main" id="{92585D05-94E8-544E-86AD-DE03E7A1F3EC}"/>
+            </a:ext>
+          </a:extLst>
+        </p:cNvPr>
+        <p:cNvGrpSpPr/>
+        <p:nvPr/>
+      </p:nvGrpSpPr>
+      <p:grpSpPr>
+        <a:xfrm>
+          <a:off x="0" y="0"/>
+          <a:ext cx="0" cy="0"/>
+          <a:chOff x="0" y="0"/>
+          <a:chExt cx="0" cy="0"/>
+        </a:xfrm>
+      </p:grpSpPr>
+      <p:sp>
+        <p:nvSpPr>
+          <p:cNvPr id="5" name="Rettangolo 4">
+            <a:extLst>
+              <a:ext uri="{FF2B5EF4-FFF2-40B4-BE49-F238E27FC236}">
+                <a16:creationId xmlns:a16="http://schemas.microsoft.com/office/drawing/2014/main" id="{13892DE5-1DDB-59F0-B6B9-5E21842CBCC9}"/>
+              </a:ext>
+            </a:extLst>
+          </p:cNvPr>
+          <p:cNvSpPr/>
+          <p:nvPr/>
+        </p:nvSpPr>
+        <p:spPr>
+          <a:xfrm rot="16200000">
+            <a:off x="5612871" y="326546"/>
+            <a:ext cx="966258" cy="12192000"/>
+          </a:xfrm>
+          <a:prstGeom prst="rect">
+            <a:avLst/>
+          </a:prstGeom>
+          <a:solidFill>
+            <a:srgbClr val="990000"/>
+          </a:solidFill>
+          <a:ln>
+            <a:solidFill>
+              <a:srgbClr val="990000"/>
+            </a:solidFill>
+          </a:ln>
+        </p:spPr>
+        <p:style>
+          <a:lnRef idx="2">
+            <a:schemeClr val="accent1">
+              <a:shade val="15000"/>
+            </a:schemeClr>
+          </a:lnRef>
+          <a:fillRef idx="1">
+            <a:schemeClr val="accent1"/>
+          </a:fillRef>
+          <a:effectRef idx="0">
+            <a:schemeClr val="accent1"/>
+          </a:effectRef>
+          <a:fontRef idx="minor">
+            <a:schemeClr val="lt1"/>
+          </a:fontRef>
+        </p:style>
+        <p:txBody>
+          <a:bodyPr rtlCol="0" anchor="ctr"/>
+          <a:lstStyle/>
+          <a:p>
+            <a:pPr algn="ctr"/>
+            <a:endParaRPr lang="it-IT" dirty="0"/>
+          </a:p>
+        </p:txBody>
+      </p:sp>
+      <p:sp>
+        <p:nvSpPr>
+          <p:cNvPr id="6" name="CasellaDiTesto 5">
+            <a:extLst>
+              <a:ext uri="{FF2B5EF4-FFF2-40B4-BE49-F238E27FC236}">
+                <a16:creationId xmlns:a16="http://schemas.microsoft.com/office/drawing/2014/main" id="{9ACAD12B-3C9B-FC5E-E6B7-E4D5CB24BACF}"/>
+              </a:ext>
+            </a:extLst>
+          </p:cNvPr>
+          <p:cNvSpPr txBox="1"/>
+          <p:nvPr/>
+        </p:nvSpPr>
+        <p:spPr>
+          <a:xfrm>
+            <a:off x="5086139" y="6222490"/>
+            <a:ext cx="2019720" cy="400110"/>
+          </a:xfrm>
+          <a:prstGeom prst="rect">
+            <a:avLst/>
+          </a:prstGeom>
+          <a:noFill/>
+        </p:spPr>
+        <p:txBody>
+          <a:bodyPr wrap="square" rtlCol="0">
+            <a:spAutoFit/>
+          </a:bodyPr>
+          <a:lstStyle/>
+          <a:p>
+            <a:pPr algn="r"/>
+            <a:r>
+              <a:rPr lang="it-IT" sz="2000" b="1" dirty="0">
+                <a:solidFill>
+                  <a:schemeClr val="bg1"/>
+                </a:solidFill>
+              </a:rPr>
+              <a:t>Gianpaolo Pestilli</a:t>
+            </a:r>
+          </a:p>
+        </p:txBody>
+      </p:sp>
+      <p:sp>
+        <p:nvSpPr>
+          <p:cNvPr id="7" name="CasellaDiTesto 6">
+            <a:extLst>
+              <a:ext uri="{FF2B5EF4-FFF2-40B4-BE49-F238E27FC236}">
+                <a16:creationId xmlns:a16="http://schemas.microsoft.com/office/drawing/2014/main" id="{B5D37131-EA1B-6341-0D15-06A5596D905E}"/>
+              </a:ext>
+            </a:extLst>
+          </p:cNvPr>
+          <p:cNvSpPr txBox="1"/>
+          <p:nvPr/>
+        </p:nvSpPr>
+        <p:spPr>
+          <a:xfrm>
+            <a:off x="11434917" y="6222490"/>
+            <a:ext cx="491612" cy="400110"/>
+          </a:xfrm>
+          <a:prstGeom prst="rect">
+            <a:avLst/>
+          </a:prstGeom>
+          <a:noFill/>
+        </p:spPr>
+        <p:txBody>
+          <a:bodyPr wrap="square" rtlCol="0">
+            <a:spAutoFit/>
+          </a:bodyPr>
+          <a:lstStyle/>
+          <a:p>
+            <a:pPr algn="r"/>
+            <a:r>
+              <a:rPr lang="it-IT" sz="2000" b="1" dirty="0">
+                <a:solidFill>
+                  <a:schemeClr val="bg1"/>
+                </a:solidFill>
+              </a:rPr>
+              <a:t>22</a:t>
+            </a:r>
+          </a:p>
+        </p:txBody>
+      </p:sp>
+      <p:sp>
+        <p:nvSpPr>
+          <p:cNvPr id="8" name="CasellaDiTesto 7">
+            <a:extLst>
+              <a:ext uri="{FF2B5EF4-FFF2-40B4-BE49-F238E27FC236}">
+                <a16:creationId xmlns:a16="http://schemas.microsoft.com/office/drawing/2014/main" id="{4C49666B-5587-CE81-68CA-76A0BABC4B42}"/>
+              </a:ext>
+            </a:extLst>
+          </p:cNvPr>
+          <p:cNvSpPr txBox="1"/>
+          <p:nvPr/>
+        </p:nvSpPr>
+        <p:spPr>
+          <a:xfrm>
+            <a:off x="533399" y="728069"/>
+            <a:ext cx="11116884" cy="3139321"/>
+          </a:xfrm>
+          <a:prstGeom prst="rect">
+            <a:avLst/>
+          </a:prstGeom>
+          <a:noFill/>
+        </p:spPr>
+        <p:txBody>
+          <a:bodyPr wrap="square" rtlCol="0">
+            <a:spAutoFit/>
+          </a:bodyPr>
+          <a:lstStyle/>
+          <a:p>
+            <a:pPr algn="just">
+              <a:spcAft>
+                <a:spcPts val="600"/>
+              </a:spcAft>
+            </a:pPr>
+            <a:r>
+              <a:rPr lang="it-IT" sz="4000" b="1" dirty="0">
+                <a:solidFill>
+                  <a:srgbClr val="990000"/>
+                </a:solidFill>
+              </a:rPr>
+              <a:t>VERTEX COVER PESATO</a:t>
+            </a:r>
+          </a:p>
+          <a:p>
+            <a:pPr algn="just">
+              <a:spcAft>
+                <a:spcPts val="1200"/>
+              </a:spcAft>
+            </a:pPr>
+            <a:r>
+              <a:rPr lang="it-IT" sz="3200" b="1" dirty="0"/>
+              <a:t>Algoritmo 4 (</a:t>
+            </a:r>
+            <a:r>
+              <a:rPr lang="it-IT" sz="3200" b="1" dirty="0" err="1"/>
+              <a:t>doubling</a:t>
+            </a:r>
+            <a:r>
+              <a:rPr lang="it-IT" sz="3200" b="1" dirty="0"/>
+              <a:t> and </a:t>
+            </a:r>
+            <a:r>
+              <a:rPr lang="it-IT" sz="3200" b="1" dirty="0" err="1"/>
+              <a:t>rounding</a:t>
+            </a:r>
+            <a:r>
+              <a:rPr lang="it-IT" sz="3200" b="1" dirty="0"/>
+              <a:t> down)</a:t>
+            </a:r>
+            <a:endParaRPr lang="it-IT" sz="3200" dirty="0"/>
+          </a:p>
+          <a:p>
+            <a:pPr algn="just">
+              <a:spcAft>
+                <a:spcPts val="1200"/>
+              </a:spcAft>
+            </a:pPr>
+            <a:r>
+              <a:rPr lang="it-IT" sz="3200" dirty="0" err="1"/>
+              <a:t>Doubling</a:t>
+            </a:r>
+            <a:r>
+              <a:rPr lang="it-IT" sz="3200" dirty="0"/>
+              <a:t> and </a:t>
+            </a:r>
+            <a:r>
+              <a:rPr lang="it-IT" sz="3200" dirty="0" err="1"/>
+              <a:t>rounding</a:t>
+            </a:r>
+            <a:r>
+              <a:rPr lang="it-IT" sz="3200" dirty="0"/>
+              <a:t> down effettuato dopo aver risolto:</a:t>
+            </a:r>
+          </a:p>
+          <a:p>
+            <a:pPr marL="457200" indent="-457200" algn="just">
+              <a:spcAft>
+                <a:spcPts val="600"/>
+              </a:spcAft>
+              <a:buFont typeface="Arial" panose="020B0604020202020204" pitchFamily="34" charset="0"/>
+              <a:buChar char="•"/>
+            </a:pPr>
+            <a:r>
+              <a:rPr lang="it-IT" sz="3200" b="1" dirty="0"/>
+              <a:t>Rilassamento lineare</a:t>
+            </a:r>
+          </a:p>
+          <a:p>
+            <a:pPr marL="457200" indent="-457200" algn="just">
+              <a:spcAft>
+                <a:spcPts val="600"/>
+              </a:spcAft>
+              <a:buFont typeface="Arial" panose="020B0604020202020204" pitchFamily="34" charset="0"/>
+              <a:buChar char="•"/>
+            </a:pPr>
+            <a:r>
+              <a:rPr lang="it-IT" sz="3200" dirty="0">
+                <a:solidFill>
+                  <a:schemeClr val="bg2">
+                    <a:lumMod val="75000"/>
+                  </a:schemeClr>
+                </a:solidFill>
+              </a:rPr>
+              <a:t>Rilassamento lineare con </a:t>
+            </a:r>
+            <a:r>
+              <a:rPr lang="it-IT" sz="3200" dirty="0" err="1">
+                <a:solidFill>
+                  <a:schemeClr val="bg2">
+                    <a:lumMod val="75000"/>
+                  </a:schemeClr>
+                </a:solidFill>
+              </a:rPr>
+              <a:t>odd</a:t>
+            </a:r>
+            <a:r>
+              <a:rPr lang="it-IT" sz="3200" dirty="0">
+                <a:solidFill>
+                  <a:schemeClr val="bg2">
+                    <a:lumMod val="75000"/>
+                  </a:schemeClr>
+                </a:solidFill>
+              </a:rPr>
+              <a:t> </a:t>
+            </a:r>
+            <a:r>
+              <a:rPr lang="it-IT" sz="3200" dirty="0" err="1">
+                <a:solidFill>
+                  <a:schemeClr val="bg2">
+                    <a:lumMod val="75000"/>
+                  </a:schemeClr>
+                </a:solidFill>
+              </a:rPr>
+              <a:t>cycle</a:t>
+            </a:r>
+            <a:r>
+              <a:rPr lang="it-IT" sz="3200" dirty="0">
+                <a:solidFill>
+                  <a:schemeClr val="bg2">
+                    <a:lumMod val="75000"/>
+                  </a:schemeClr>
+                </a:solidFill>
+              </a:rPr>
+              <a:t> </a:t>
+            </a:r>
+            <a:r>
+              <a:rPr lang="it-IT" sz="3200" dirty="0" err="1">
+                <a:solidFill>
+                  <a:schemeClr val="bg2">
+                    <a:lumMod val="75000"/>
+                  </a:schemeClr>
+                </a:solidFill>
+              </a:rPr>
+              <a:t>inequalities</a:t>
+            </a:r>
+            <a:endParaRPr lang="it-IT" sz="3200" dirty="0">
+              <a:solidFill>
+                <a:schemeClr val="bg2">
+                  <a:lumMod val="75000"/>
+                </a:schemeClr>
+              </a:solidFill>
+            </a:endParaRPr>
+          </a:p>
+        </p:txBody>
+      </p:sp>
+    </p:spTree>
+    <p:extLst>
+      <p:ext uri="{BB962C8B-B14F-4D97-AF65-F5344CB8AC3E}">
+        <p14:creationId xmlns:p14="http://schemas.microsoft.com/office/powerpoint/2010/main" val="2519505089"/>
+      </p:ext>
+    </p:extLst>
+  </p:cSld>
+  <p:clrMapOvr>
+    <a:masterClrMapping/>
+  </p:clrMapOvr>
+  <mc:AlternateContent xmlns:mc="http://schemas.openxmlformats.org/markup-compatibility/2006" xmlns:p159="http://schemas.microsoft.com/office/powerpoint/2015/09/main">
+    <mc:Choice Requires="p159">
+      <p:transition xmlns:p14="http://schemas.microsoft.com/office/powerpoint/2010/main" spd="slow" p14:dur="2000">
+        <p159:morph option="byObject"/>
+      </p:transition>
+    </mc:Choice>
+    <mc:Fallback xmlns="">
+      <p:transition spd="slow">
+        <p:fade/>
+      </p:transition>
+    </mc:Fallback>
+  </mc:AlternateContent>
+</p:sld>
+</file>
+
+<file path=ppt/slides/slide24.xml><?xml version="1.0" encoding="utf-8"?>
+<p:sld xmlns:a="http://schemas.openxmlformats.org/drawingml/2006/main" xmlns:r="http://schemas.openxmlformats.org/officeDocument/2006/relationships" xmlns:p="http://schemas.openxmlformats.org/presentationml/2006/main">
+  <p:cSld>
+    <p:spTree>
+      <p:nvGrpSpPr>
+        <p:cNvPr id="1" name="">
+          <a:extLst>
+            <a:ext uri="{FF2B5EF4-FFF2-40B4-BE49-F238E27FC236}">
+              <a16:creationId xmlns:a16="http://schemas.microsoft.com/office/drawing/2014/main" id="{450E61DF-9781-8898-73DD-1666AFCEE830}"/>
+            </a:ext>
+          </a:extLst>
+        </p:cNvPr>
+        <p:cNvGrpSpPr/>
+        <p:nvPr/>
+      </p:nvGrpSpPr>
+      <p:grpSpPr>
+        <a:xfrm>
+          <a:off x="0" y="0"/>
+          <a:ext cx="0" cy="0"/>
+          <a:chOff x="0" y="0"/>
+          <a:chExt cx="0" cy="0"/>
+        </a:xfrm>
+      </p:grpSpPr>
+      <p:sp>
+        <p:nvSpPr>
+          <p:cNvPr id="5" name="Rettangolo 4">
+            <a:extLst>
+              <a:ext uri="{FF2B5EF4-FFF2-40B4-BE49-F238E27FC236}">
+                <a16:creationId xmlns:a16="http://schemas.microsoft.com/office/drawing/2014/main" id="{853DEB75-A96E-59FF-3FB3-D247D4CB4597}"/>
+              </a:ext>
+            </a:extLst>
+          </p:cNvPr>
+          <p:cNvSpPr/>
+          <p:nvPr/>
+        </p:nvSpPr>
+        <p:spPr>
+          <a:xfrm rot="16200000">
+            <a:off x="5612871" y="326546"/>
+            <a:ext cx="966258" cy="12192000"/>
+          </a:xfrm>
+          <a:prstGeom prst="rect">
+            <a:avLst/>
+          </a:prstGeom>
+          <a:solidFill>
+            <a:srgbClr val="990000"/>
+          </a:solidFill>
+          <a:ln>
+            <a:solidFill>
+              <a:srgbClr val="990000"/>
+            </a:solidFill>
+          </a:ln>
+        </p:spPr>
+        <p:style>
+          <a:lnRef idx="2">
+            <a:schemeClr val="accent1">
+              <a:shade val="15000"/>
+            </a:schemeClr>
+          </a:lnRef>
+          <a:fillRef idx="1">
+            <a:schemeClr val="accent1"/>
+          </a:fillRef>
+          <a:effectRef idx="0">
+            <a:schemeClr val="accent1"/>
+          </a:effectRef>
+          <a:fontRef idx="minor">
+            <a:schemeClr val="lt1"/>
+          </a:fontRef>
+        </p:style>
+        <p:txBody>
+          <a:bodyPr rtlCol="0" anchor="ctr"/>
+          <a:lstStyle/>
+          <a:p>
+            <a:pPr algn="ctr"/>
+            <a:endParaRPr lang="it-IT" dirty="0"/>
+          </a:p>
+        </p:txBody>
+      </p:sp>
+      <p:sp>
+        <p:nvSpPr>
+          <p:cNvPr id="6" name="CasellaDiTesto 5">
+            <a:extLst>
+              <a:ext uri="{FF2B5EF4-FFF2-40B4-BE49-F238E27FC236}">
+                <a16:creationId xmlns:a16="http://schemas.microsoft.com/office/drawing/2014/main" id="{71B8DC77-076E-FEF9-0D5B-0B5B8C00D898}"/>
+              </a:ext>
+            </a:extLst>
+          </p:cNvPr>
+          <p:cNvSpPr txBox="1"/>
+          <p:nvPr/>
+        </p:nvSpPr>
+        <p:spPr>
+          <a:xfrm>
+            <a:off x="5086139" y="6222490"/>
+            <a:ext cx="2019720" cy="400110"/>
+          </a:xfrm>
+          <a:prstGeom prst="rect">
+            <a:avLst/>
+          </a:prstGeom>
+          <a:noFill/>
+        </p:spPr>
+        <p:txBody>
+          <a:bodyPr wrap="square" rtlCol="0">
+            <a:spAutoFit/>
+          </a:bodyPr>
+          <a:lstStyle/>
+          <a:p>
+            <a:pPr algn="r"/>
+            <a:r>
+              <a:rPr lang="it-IT" sz="2000" b="1" dirty="0">
+                <a:solidFill>
+                  <a:schemeClr val="bg1"/>
+                </a:solidFill>
+              </a:rPr>
+              <a:t>Gianpaolo Pestilli</a:t>
+            </a:r>
+          </a:p>
+        </p:txBody>
+      </p:sp>
+      <p:sp>
+        <p:nvSpPr>
+          <p:cNvPr id="7" name="CasellaDiTesto 6">
+            <a:extLst>
+              <a:ext uri="{FF2B5EF4-FFF2-40B4-BE49-F238E27FC236}">
+                <a16:creationId xmlns:a16="http://schemas.microsoft.com/office/drawing/2014/main" id="{DBEC9EDE-ACF9-2E4B-F74E-F2C2CF913D02}"/>
+              </a:ext>
+            </a:extLst>
+          </p:cNvPr>
+          <p:cNvSpPr txBox="1"/>
+          <p:nvPr/>
+        </p:nvSpPr>
+        <p:spPr>
+          <a:xfrm>
+            <a:off x="11434917" y="6222490"/>
+            <a:ext cx="491612" cy="400110"/>
+          </a:xfrm>
+          <a:prstGeom prst="rect">
+            <a:avLst/>
+          </a:prstGeom>
+          <a:noFill/>
+        </p:spPr>
+        <p:txBody>
+          <a:bodyPr wrap="square" rtlCol="0">
+            <a:spAutoFit/>
+          </a:bodyPr>
+          <a:lstStyle/>
+          <a:p>
+            <a:pPr algn="r"/>
+            <a:r>
+              <a:rPr lang="it-IT" sz="2000" b="1" dirty="0">
+                <a:solidFill>
+                  <a:schemeClr val="bg1"/>
+                </a:solidFill>
+              </a:rPr>
+              <a:t>23</a:t>
+            </a:r>
+          </a:p>
+        </p:txBody>
+      </p:sp>
+      <p:sp>
+        <p:nvSpPr>
+          <p:cNvPr id="8" name="CasellaDiTesto 7">
+            <a:extLst>
+              <a:ext uri="{FF2B5EF4-FFF2-40B4-BE49-F238E27FC236}">
+                <a16:creationId xmlns:a16="http://schemas.microsoft.com/office/drawing/2014/main" id="{0A615C6A-89AE-4ABE-5FA9-ABAF76C546F2}"/>
+              </a:ext>
+            </a:extLst>
+          </p:cNvPr>
+          <p:cNvSpPr txBox="1"/>
+          <p:nvPr/>
+        </p:nvSpPr>
+        <p:spPr>
+          <a:xfrm>
+            <a:off x="533399" y="728069"/>
+            <a:ext cx="11116884" cy="1277273"/>
+          </a:xfrm>
+          <a:prstGeom prst="rect">
+            <a:avLst/>
+          </a:prstGeom>
+          <a:noFill/>
+        </p:spPr>
+        <p:txBody>
+          <a:bodyPr wrap="square" rtlCol="0">
+            <a:spAutoFit/>
+          </a:bodyPr>
+          <a:lstStyle/>
+          <a:p>
+            <a:pPr algn="just">
+              <a:spcAft>
+                <a:spcPts val="600"/>
+              </a:spcAft>
+            </a:pPr>
+            <a:r>
+              <a:rPr lang="it-IT" sz="4000" b="1" dirty="0">
+                <a:solidFill>
+                  <a:srgbClr val="990000"/>
+                </a:solidFill>
+              </a:rPr>
+              <a:t>VERTEX COVER PESATO</a:t>
+            </a:r>
+          </a:p>
+          <a:p>
+            <a:pPr algn="just">
+              <a:spcAft>
+                <a:spcPts val="1200"/>
+              </a:spcAft>
+            </a:pPr>
+            <a:r>
+              <a:rPr lang="it-IT" sz="3200" b="1" dirty="0"/>
+              <a:t>Algoritmo 4 (</a:t>
+            </a:r>
+            <a:r>
+              <a:rPr lang="it-IT" sz="3200" b="1" dirty="0" err="1"/>
+              <a:t>doubling</a:t>
+            </a:r>
+            <a:r>
+              <a:rPr lang="it-IT" sz="3200" b="1" dirty="0"/>
+              <a:t> and </a:t>
+            </a:r>
+            <a:r>
+              <a:rPr lang="it-IT" sz="3200" b="1" dirty="0" err="1"/>
+              <a:t>rounding</a:t>
+            </a:r>
+            <a:r>
+              <a:rPr lang="it-IT" sz="3200" b="1" dirty="0"/>
+              <a:t> down)</a:t>
+            </a:r>
+            <a:endParaRPr lang="it-IT" sz="3200" dirty="0"/>
+          </a:p>
+        </p:txBody>
+      </p:sp>
+      <p:pic>
+        <p:nvPicPr>
+          <p:cNvPr id="11" name="Immagine 10">
+            <a:extLst>
+              <a:ext uri="{FF2B5EF4-FFF2-40B4-BE49-F238E27FC236}">
+                <a16:creationId xmlns:a16="http://schemas.microsoft.com/office/drawing/2014/main" id="{0DC28201-4F7B-BF55-CF75-F14240234EB9}"/>
+              </a:ext>
+            </a:extLst>
+          </p:cNvPr>
+          <p:cNvPicPr>
+            <a:picLocks noChangeAspect="1"/>
+          </p:cNvPicPr>
+          <p:nvPr/>
+        </p:nvPicPr>
+        <p:blipFill>
+          <a:blip r:embed="rId2"/>
+          <a:stretch>
+            <a:fillRect/>
+          </a:stretch>
+        </p:blipFill>
+        <p:spPr>
+          <a:xfrm>
+            <a:off x="4829534" y="2276782"/>
+            <a:ext cx="5479505" cy="3391194"/>
+          </a:xfrm>
+          <a:prstGeom prst="rect">
+            <a:avLst/>
+          </a:prstGeom>
+        </p:spPr>
+      </p:pic>
+      <p:pic>
+        <p:nvPicPr>
+          <p:cNvPr id="4" name="Immagine 3">
+            <a:extLst>
+              <a:ext uri="{FF2B5EF4-FFF2-40B4-BE49-F238E27FC236}">
+                <a16:creationId xmlns:a16="http://schemas.microsoft.com/office/drawing/2014/main" id="{DF3DA32B-B0B8-0D8F-ACA6-4F1556447FE3}"/>
+              </a:ext>
+            </a:extLst>
+          </p:cNvPr>
+          <p:cNvPicPr>
+            <a:picLocks noChangeAspect="1"/>
+          </p:cNvPicPr>
+          <p:nvPr/>
+        </p:nvPicPr>
+        <p:blipFill>
+          <a:blip r:embed="rId3"/>
+          <a:stretch>
+            <a:fillRect/>
+          </a:stretch>
+        </p:blipFill>
+        <p:spPr>
+          <a:xfrm>
+            <a:off x="533399" y="2276782"/>
+            <a:ext cx="3958154" cy="1960921"/>
+          </a:xfrm>
+          <a:prstGeom prst="rect">
+            <a:avLst/>
+          </a:prstGeom>
+        </p:spPr>
+      </p:pic>
+    </p:spTree>
+    <p:extLst>
+      <p:ext uri="{BB962C8B-B14F-4D97-AF65-F5344CB8AC3E}">
+        <p14:creationId xmlns:p14="http://schemas.microsoft.com/office/powerpoint/2010/main" val="500617675"/>
+      </p:ext>
+    </p:extLst>
+  </p:cSld>
+  <p:clrMapOvr>
+    <a:masterClrMapping/>
+  </p:clrMapOvr>
+  <mc:AlternateContent xmlns:mc="http://schemas.openxmlformats.org/markup-compatibility/2006" xmlns:p159="http://schemas.microsoft.com/office/powerpoint/2015/09/main">
+    <mc:Choice Requires="p159">
+      <p:transition xmlns:p14="http://schemas.microsoft.com/office/powerpoint/2010/main" spd="slow" p14:dur="2000">
+        <p159:morph option="byObject"/>
+      </p:transition>
+    </mc:Choice>
+    <mc:Fallback xmlns="">
+      <p:transition spd="slow">
+        <p:fade/>
+      </p:transition>
+    </mc:Fallback>
+  </mc:AlternateContent>
+</p:sld>
+</file>
+
+<file path=ppt/slides/slide25.xml><?xml version="1.0" encoding="utf-8"?>
+<p:sld xmlns:a="http://schemas.openxmlformats.org/drawingml/2006/main" xmlns:r="http://schemas.openxmlformats.org/officeDocument/2006/relationships" xmlns:p="http://schemas.openxmlformats.org/presentationml/2006/main">
+  <p:cSld>
+    <p:spTree>
+      <p:nvGrpSpPr>
+        <p:cNvPr id="1" name="">
+          <a:extLst>
+            <a:ext uri="{FF2B5EF4-FFF2-40B4-BE49-F238E27FC236}">
+              <a16:creationId xmlns:a16="http://schemas.microsoft.com/office/drawing/2014/main" id="{037F655E-E848-A4C0-562A-268D00091FBE}"/>
+            </a:ext>
+          </a:extLst>
+        </p:cNvPr>
+        <p:cNvGrpSpPr/>
+        <p:nvPr/>
+      </p:nvGrpSpPr>
+      <p:grpSpPr>
+        <a:xfrm>
+          <a:off x="0" y="0"/>
+          <a:ext cx="0" cy="0"/>
+          <a:chOff x="0" y="0"/>
+          <a:chExt cx="0" cy="0"/>
+        </a:xfrm>
+      </p:grpSpPr>
+      <p:sp>
+        <p:nvSpPr>
+          <p:cNvPr id="5" name="Rettangolo 4">
+            <a:extLst>
+              <a:ext uri="{FF2B5EF4-FFF2-40B4-BE49-F238E27FC236}">
+                <a16:creationId xmlns:a16="http://schemas.microsoft.com/office/drawing/2014/main" id="{D506995B-2D0A-2DDD-BB1A-2DA88C2A0CCC}"/>
+              </a:ext>
+            </a:extLst>
+          </p:cNvPr>
+          <p:cNvSpPr/>
+          <p:nvPr/>
+        </p:nvSpPr>
+        <p:spPr>
+          <a:xfrm rot="16200000">
+            <a:off x="5612871" y="326546"/>
+            <a:ext cx="966258" cy="12192000"/>
+          </a:xfrm>
+          <a:prstGeom prst="rect">
+            <a:avLst/>
+          </a:prstGeom>
+          <a:solidFill>
+            <a:srgbClr val="990000"/>
+          </a:solidFill>
+          <a:ln>
+            <a:solidFill>
+              <a:srgbClr val="990000"/>
+            </a:solidFill>
+          </a:ln>
+        </p:spPr>
+        <p:style>
+          <a:lnRef idx="2">
+            <a:schemeClr val="accent1">
+              <a:shade val="15000"/>
+            </a:schemeClr>
+          </a:lnRef>
+          <a:fillRef idx="1">
+            <a:schemeClr val="accent1"/>
+          </a:fillRef>
+          <a:effectRef idx="0">
+            <a:schemeClr val="accent1"/>
+          </a:effectRef>
+          <a:fontRef idx="minor">
+            <a:schemeClr val="lt1"/>
+          </a:fontRef>
+        </p:style>
+        <p:txBody>
+          <a:bodyPr rtlCol="0" anchor="ctr"/>
+          <a:lstStyle/>
+          <a:p>
+            <a:pPr algn="ctr"/>
+            <a:endParaRPr lang="it-IT" dirty="0"/>
+          </a:p>
+        </p:txBody>
+      </p:sp>
+      <p:sp>
+        <p:nvSpPr>
+          <p:cNvPr id="6" name="CasellaDiTesto 5">
+            <a:extLst>
+              <a:ext uri="{FF2B5EF4-FFF2-40B4-BE49-F238E27FC236}">
+                <a16:creationId xmlns:a16="http://schemas.microsoft.com/office/drawing/2014/main" id="{F4056FEB-76F0-3B13-C9B8-8AF6B4E48685}"/>
+              </a:ext>
+            </a:extLst>
+          </p:cNvPr>
+          <p:cNvSpPr txBox="1"/>
+          <p:nvPr/>
+        </p:nvSpPr>
+        <p:spPr>
+          <a:xfrm>
+            <a:off x="5086139" y="6222490"/>
+            <a:ext cx="2019720" cy="400110"/>
+          </a:xfrm>
+          <a:prstGeom prst="rect">
+            <a:avLst/>
+          </a:prstGeom>
+          <a:noFill/>
+        </p:spPr>
+        <p:txBody>
+          <a:bodyPr wrap="square" rtlCol="0">
+            <a:spAutoFit/>
+          </a:bodyPr>
+          <a:lstStyle/>
+          <a:p>
+            <a:pPr algn="r"/>
+            <a:r>
+              <a:rPr lang="it-IT" sz="2000" b="1" dirty="0">
+                <a:solidFill>
+                  <a:schemeClr val="bg1"/>
+                </a:solidFill>
+              </a:rPr>
+              <a:t>Gianpaolo Pestilli</a:t>
+            </a:r>
+          </a:p>
+        </p:txBody>
+      </p:sp>
+      <p:sp>
+        <p:nvSpPr>
+          <p:cNvPr id="7" name="CasellaDiTesto 6">
+            <a:extLst>
+              <a:ext uri="{FF2B5EF4-FFF2-40B4-BE49-F238E27FC236}">
+                <a16:creationId xmlns:a16="http://schemas.microsoft.com/office/drawing/2014/main" id="{539A8D05-F370-195A-12F5-3D4F7879D819}"/>
+              </a:ext>
+            </a:extLst>
+          </p:cNvPr>
+          <p:cNvSpPr txBox="1"/>
+          <p:nvPr/>
+        </p:nvSpPr>
+        <p:spPr>
+          <a:xfrm>
+            <a:off x="11434917" y="6222490"/>
+            <a:ext cx="491612" cy="400110"/>
+          </a:xfrm>
+          <a:prstGeom prst="rect">
+            <a:avLst/>
+          </a:prstGeom>
+          <a:noFill/>
+        </p:spPr>
+        <p:txBody>
+          <a:bodyPr wrap="square" rtlCol="0">
+            <a:spAutoFit/>
+          </a:bodyPr>
+          <a:lstStyle/>
+          <a:p>
+            <a:pPr algn="r"/>
+            <a:r>
+              <a:rPr lang="it-IT" sz="2000" b="1" dirty="0">
+                <a:solidFill>
+                  <a:schemeClr val="bg1"/>
+                </a:solidFill>
+              </a:rPr>
+              <a:t>24</a:t>
+            </a:r>
+          </a:p>
+        </p:txBody>
+      </p:sp>
+      <p:sp>
+        <p:nvSpPr>
+          <p:cNvPr id="8" name="CasellaDiTesto 7">
+            <a:extLst>
+              <a:ext uri="{FF2B5EF4-FFF2-40B4-BE49-F238E27FC236}">
+                <a16:creationId xmlns:a16="http://schemas.microsoft.com/office/drawing/2014/main" id="{FC4495C9-0AE1-8EF1-7BF8-47CF205DD6C9}"/>
+              </a:ext>
+            </a:extLst>
+          </p:cNvPr>
+          <p:cNvSpPr txBox="1"/>
+          <p:nvPr/>
+        </p:nvSpPr>
+        <p:spPr>
+          <a:xfrm>
+            <a:off x="533399" y="728069"/>
+            <a:ext cx="11116884" cy="3139321"/>
+          </a:xfrm>
+          <a:prstGeom prst="rect">
+            <a:avLst/>
+          </a:prstGeom>
+          <a:noFill/>
+        </p:spPr>
+        <p:txBody>
+          <a:bodyPr wrap="square" rtlCol="0">
+            <a:spAutoFit/>
+          </a:bodyPr>
+          <a:lstStyle/>
+          <a:p>
+            <a:pPr algn="just">
+              <a:spcAft>
+                <a:spcPts val="600"/>
+              </a:spcAft>
+            </a:pPr>
+            <a:r>
+              <a:rPr lang="it-IT" sz="4000" b="1" dirty="0">
+                <a:solidFill>
+                  <a:srgbClr val="990000"/>
+                </a:solidFill>
+              </a:rPr>
+              <a:t>VERTEX COVER PESATO</a:t>
+            </a:r>
+          </a:p>
+          <a:p>
+            <a:pPr algn="just">
+              <a:spcAft>
+                <a:spcPts val="1200"/>
+              </a:spcAft>
+            </a:pPr>
+            <a:r>
+              <a:rPr lang="it-IT" sz="3200" b="1" dirty="0"/>
+              <a:t>Algoritmo 4 (</a:t>
+            </a:r>
+            <a:r>
+              <a:rPr lang="it-IT" sz="3200" b="1" dirty="0" err="1"/>
+              <a:t>doubling</a:t>
+            </a:r>
+            <a:r>
+              <a:rPr lang="it-IT" sz="3200" b="1" dirty="0"/>
+              <a:t> and </a:t>
+            </a:r>
+            <a:r>
+              <a:rPr lang="it-IT" sz="3200" b="1" dirty="0" err="1"/>
+              <a:t>rounding</a:t>
+            </a:r>
+            <a:r>
+              <a:rPr lang="it-IT" sz="3200" b="1" dirty="0"/>
+              <a:t> down)</a:t>
+            </a:r>
+            <a:endParaRPr lang="it-IT" sz="3200" dirty="0"/>
+          </a:p>
+          <a:p>
+            <a:pPr algn="just">
+              <a:spcAft>
+                <a:spcPts val="1200"/>
+              </a:spcAft>
+            </a:pPr>
+            <a:r>
+              <a:rPr lang="it-IT" sz="3200" dirty="0" err="1"/>
+              <a:t>Doubling</a:t>
+            </a:r>
+            <a:r>
+              <a:rPr lang="it-IT" sz="3200" dirty="0"/>
+              <a:t> and </a:t>
+            </a:r>
+            <a:r>
+              <a:rPr lang="it-IT" sz="3200" dirty="0" err="1"/>
+              <a:t>rounding</a:t>
+            </a:r>
+            <a:r>
+              <a:rPr lang="it-IT" sz="3200" dirty="0"/>
+              <a:t> down effettuato dopo aver risolto:</a:t>
+            </a:r>
+          </a:p>
+          <a:p>
+            <a:pPr marL="457200" indent="-457200" algn="just">
+              <a:spcAft>
+                <a:spcPts val="600"/>
+              </a:spcAft>
+              <a:buFont typeface="Arial" panose="020B0604020202020204" pitchFamily="34" charset="0"/>
+              <a:buChar char="•"/>
+            </a:pPr>
+            <a:r>
+              <a:rPr lang="it-IT" sz="3200" dirty="0">
+                <a:solidFill>
+                  <a:schemeClr val="bg2">
+                    <a:lumMod val="75000"/>
+                  </a:schemeClr>
+                </a:solidFill>
+              </a:rPr>
+              <a:t>Rilassamento lineare</a:t>
+            </a:r>
+          </a:p>
+          <a:p>
+            <a:pPr marL="457200" indent="-457200" algn="just">
+              <a:spcAft>
+                <a:spcPts val="600"/>
+              </a:spcAft>
+              <a:buFont typeface="Arial" panose="020B0604020202020204" pitchFamily="34" charset="0"/>
+              <a:buChar char="•"/>
+            </a:pPr>
+            <a:r>
+              <a:rPr lang="it-IT" sz="3200" b="1" dirty="0"/>
+              <a:t>Rilassamento lineare con </a:t>
+            </a:r>
+            <a:r>
+              <a:rPr lang="it-IT" sz="3200" b="1" dirty="0" err="1"/>
+              <a:t>odd</a:t>
+            </a:r>
+            <a:r>
+              <a:rPr lang="it-IT" sz="3200" b="1" dirty="0"/>
+              <a:t> </a:t>
+            </a:r>
+            <a:r>
+              <a:rPr lang="it-IT" sz="3200" b="1" dirty="0" err="1"/>
+              <a:t>cycle</a:t>
+            </a:r>
+            <a:r>
+              <a:rPr lang="it-IT" sz="3200" b="1" dirty="0"/>
+              <a:t> </a:t>
+            </a:r>
+            <a:r>
+              <a:rPr lang="it-IT" sz="3200" b="1" dirty="0" err="1"/>
+              <a:t>inequalities</a:t>
+            </a:r>
+            <a:endParaRPr lang="it-IT" sz="3200" b="1" dirty="0"/>
+          </a:p>
+        </p:txBody>
+      </p:sp>
+    </p:spTree>
+    <p:extLst>
+      <p:ext uri="{BB962C8B-B14F-4D97-AF65-F5344CB8AC3E}">
+        <p14:creationId xmlns:p14="http://schemas.microsoft.com/office/powerpoint/2010/main" val="407276628"/>
+      </p:ext>
+    </p:extLst>
+  </p:cSld>
+  <p:clrMapOvr>
+    <a:masterClrMapping/>
+  </p:clrMapOvr>
+  <mc:AlternateContent xmlns:mc="http://schemas.openxmlformats.org/markup-compatibility/2006" xmlns:p159="http://schemas.microsoft.com/office/powerpoint/2015/09/main">
+    <mc:Choice Requires="p159">
+      <p:transition xmlns:p14="http://schemas.microsoft.com/office/powerpoint/2010/main" spd="slow" p14:dur="2000">
+        <p159:morph option="byObject"/>
+      </p:transition>
+    </mc:Choice>
+    <mc:Fallback xmlns="">
+      <p:transition spd="slow">
+        <p:fade/>
+      </p:transition>
+    </mc:Fallback>
+  </mc:AlternateContent>
+</p:sld>
+</file>
+
+<file path=ppt/slides/slide26.xml><?xml version="1.0" encoding="utf-8"?>
+<p:sld xmlns:a="http://schemas.openxmlformats.org/drawingml/2006/main" xmlns:r="http://schemas.openxmlformats.org/officeDocument/2006/relationships" xmlns:p="http://schemas.openxmlformats.org/presentationml/2006/main">
+  <p:cSld>
+    <p:spTree>
+      <p:nvGrpSpPr>
+        <p:cNvPr id="1" name="">
+          <a:extLst>
+            <a:ext uri="{FF2B5EF4-FFF2-40B4-BE49-F238E27FC236}">
+              <a16:creationId xmlns:a16="http://schemas.microsoft.com/office/drawing/2014/main" id="{E26120F6-BA5B-C31F-C302-0C8C50BCFB60}"/>
+            </a:ext>
+          </a:extLst>
+        </p:cNvPr>
+        <p:cNvGrpSpPr/>
+        <p:nvPr/>
+      </p:nvGrpSpPr>
+      <p:grpSpPr>
+        <a:xfrm>
+          <a:off x="0" y="0"/>
+          <a:ext cx="0" cy="0"/>
+          <a:chOff x="0" y="0"/>
+          <a:chExt cx="0" cy="0"/>
+        </a:xfrm>
+      </p:grpSpPr>
+      <p:sp>
+        <p:nvSpPr>
+          <p:cNvPr id="5" name="Rettangolo 4">
+            <a:extLst>
+              <a:ext uri="{FF2B5EF4-FFF2-40B4-BE49-F238E27FC236}">
+                <a16:creationId xmlns:a16="http://schemas.microsoft.com/office/drawing/2014/main" id="{EEB7DA05-E429-4CC0-A0DD-02DE67481998}"/>
+              </a:ext>
+            </a:extLst>
+          </p:cNvPr>
+          <p:cNvSpPr/>
+          <p:nvPr/>
+        </p:nvSpPr>
+        <p:spPr>
+          <a:xfrm rot="16200000">
+            <a:off x="5612871" y="326546"/>
+            <a:ext cx="966258" cy="12192000"/>
+          </a:xfrm>
+          <a:prstGeom prst="rect">
+            <a:avLst/>
+          </a:prstGeom>
+          <a:solidFill>
+            <a:srgbClr val="990000"/>
+          </a:solidFill>
+          <a:ln>
+            <a:solidFill>
+              <a:srgbClr val="990000"/>
+            </a:solidFill>
+          </a:ln>
+        </p:spPr>
+        <p:style>
+          <a:lnRef idx="2">
+            <a:schemeClr val="accent1">
+              <a:shade val="15000"/>
+            </a:schemeClr>
+          </a:lnRef>
+          <a:fillRef idx="1">
+            <a:schemeClr val="accent1"/>
+          </a:fillRef>
+          <a:effectRef idx="0">
+            <a:schemeClr val="accent1"/>
+          </a:effectRef>
+          <a:fontRef idx="minor">
+            <a:schemeClr val="lt1"/>
+          </a:fontRef>
+        </p:style>
+        <p:txBody>
+          <a:bodyPr rtlCol="0" anchor="ctr"/>
+          <a:lstStyle/>
+          <a:p>
+            <a:pPr algn="ctr"/>
+            <a:endParaRPr lang="it-IT" dirty="0"/>
+          </a:p>
+        </p:txBody>
+      </p:sp>
+      <p:sp>
+        <p:nvSpPr>
+          <p:cNvPr id="6" name="CasellaDiTesto 5">
+            <a:extLst>
+              <a:ext uri="{FF2B5EF4-FFF2-40B4-BE49-F238E27FC236}">
+                <a16:creationId xmlns:a16="http://schemas.microsoft.com/office/drawing/2014/main" id="{97D2CBFC-BB8B-6C25-374C-47ABB2C71AB2}"/>
+              </a:ext>
+            </a:extLst>
+          </p:cNvPr>
+          <p:cNvSpPr txBox="1"/>
+          <p:nvPr/>
+        </p:nvSpPr>
+        <p:spPr>
+          <a:xfrm>
+            <a:off x="5086139" y="6222490"/>
+            <a:ext cx="2019720" cy="400110"/>
+          </a:xfrm>
+          <a:prstGeom prst="rect">
+            <a:avLst/>
+          </a:prstGeom>
+          <a:noFill/>
+        </p:spPr>
+        <p:txBody>
+          <a:bodyPr wrap="square" rtlCol="0">
+            <a:spAutoFit/>
+          </a:bodyPr>
+          <a:lstStyle/>
+          <a:p>
+            <a:pPr algn="r"/>
+            <a:r>
+              <a:rPr lang="it-IT" sz="2000" b="1" dirty="0">
+                <a:solidFill>
+                  <a:schemeClr val="bg1"/>
+                </a:solidFill>
+              </a:rPr>
+              <a:t>Gianpaolo Pestilli</a:t>
+            </a:r>
+          </a:p>
+        </p:txBody>
+      </p:sp>
+      <p:sp>
+        <p:nvSpPr>
+          <p:cNvPr id="7" name="CasellaDiTesto 6">
+            <a:extLst>
+              <a:ext uri="{FF2B5EF4-FFF2-40B4-BE49-F238E27FC236}">
+                <a16:creationId xmlns:a16="http://schemas.microsoft.com/office/drawing/2014/main" id="{DD32EFA0-15C5-74BE-D99C-F9F1D907B1C6}"/>
+              </a:ext>
+            </a:extLst>
+          </p:cNvPr>
+          <p:cNvSpPr txBox="1"/>
+          <p:nvPr/>
+        </p:nvSpPr>
+        <p:spPr>
+          <a:xfrm>
+            <a:off x="11434917" y="6222490"/>
+            <a:ext cx="491612" cy="400110"/>
+          </a:xfrm>
+          <a:prstGeom prst="rect">
+            <a:avLst/>
+          </a:prstGeom>
+          <a:noFill/>
+        </p:spPr>
+        <p:txBody>
+          <a:bodyPr wrap="square" rtlCol="0">
+            <a:spAutoFit/>
+          </a:bodyPr>
+          <a:lstStyle/>
+          <a:p>
+            <a:pPr algn="r"/>
+            <a:r>
+              <a:rPr lang="it-IT" sz="2000" b="1" dirty="0">
+                <a:solidFill>
+                  <a:schemeClr val="bg1"/>
+                </a:solidFill>
+              </a:rPr>
+              <a:t>25</a:t>
+            </a:r>
+          </a:p>
+        </p:txBody>
+      </p:sp>
+      <p:sp>
+        <p:nvSpPr>
+          <p:cNvPr id="8" name="CasellaDiTesto 7">
+            <a:extLst>
+              <a:ext uri="{FF2B5EF4-FFF2-40B4-BE49-F238E27FC236}">
+                <a16:creationId xmlns:a16="http://schemas.microsoft.com/office/drawing/2014/main" id="{D3DB798B-684B-B331-9678-CAF9CB170740}"/>
+              </a:ext>
+            </a:extLst>
+          </p:cNvPr>
+          <p:cNvSpPr txBox="1"/>
+          <p:nvPr/>
+        </p:nvSpPr>
+        <p:spPr>
+          <a:xfrm>
+            <a:off x="533399" y="728069"/>
+            <a:ext cx="11116884" cy="2416046"/>
+          </a:xfrm>
+          <a:prstGeom prst="rect">
+            <a:avLst/>
+          </a:prstGeom>
+          <a:noFill/>
+        </p:spPr>
+        <p:txBody>
+          <a:bodyPr wrap="square" rtlCol="0">
+            <a:spAutoFit/>
+          </a:bodyPr>
+          <a:lstStyle/>
+          <a:p>
+            <a:pPr algn="just">
+              <a:spcAft>
+                <a:spcPts val="600"/>
+              </a:spcAft>
+            </a:pPr>
+            <a:r>
+              <a:rPr lang="it-IT" sz="4000" b="1" dirty="0">
+                <a:solidFill>
+                  <a:srgbClr val="990000"/>
+                </a:solidFill>
+              </a:rPr>
+              <a:t>VERTEX COVER PESATO</a:t>
+            </a:r>
+          </a:p>
+          <a:p>
+            <a:pPr algn="just">
+              <a:spcAft>
+                <a:spcPts val="1200"/>
+              </a:spcAft>
+            </a:pPr>
+            <a:r>
+              <a:rPr lang="it-IT" sz="3200" b="1" dirty="0"/>
+              <a:t>Algoritmo 4 (</a:t>
+            </a:r>
+            <a:r>
+              <a:rPr lang="it-IT" sz="3200" b="1" dirty="0" err="1"/>
+              <a:t>doubling</a:t>
+            </a:r>
+            <a:r>
+              <a:rPr lang="it-IT" sz="3200" b="1" dirty="0"/>
+              <a:t> and </a:t>
+            </a:r>
+            <a:r>
+              <a:rPr lang="it-IT" sz="3200" b="1" dirty="0" err="1"/>
+              <a:t>rounding</a:t>
+            </a:r>
+            <a:r>
+              <a:rPr lang="it-IT" sz="3200" b="1" dirty="0"/>
+              <a:t> down con </a:t>
+            </a:r>
+            <a:r>
+              <a:rPr lang="it-IT" sz="3200" b="1" dirty="0" err="1"/>
+              <a:t>odd</a:t>
+            </a:r>
+            <a:r>
+              <a:rPr lang="it-IT" sz="3200" b="1" dirty="0"/>
+              <a:t> </a:t>
+            </a:r>
+            <a:r>
+              <a:rPr lang="it-IT" sz="3200" b="1" dirty="0" err="1"/>
+              <a:t>cycle</a:t>
+            </a:r>
+            <a:r>
+              <a:rPr lang="it-IT" sz="3200" b="1" dirty="0"/>
+              <a:t> </a:t>
+            </a:r>
+            <a:r>
+              <a:rPr lang="it-IT" sz="3200" b="1" dirty="0" err="1"/>
+              <a:t>inequalities</a:t>
+            </a:r>
+            <a:r>
+              <a:rPr lang="it-IT" sz="3200" b="1" dirty="0"/>
+              <a:t>)</a:t>
+            </a:r>
+          </a:p>
+          <a:p>
+            <a:pPr algn="just">
+              <a:spcAft>
+                <a:spcPts val="1200"/>
+              </a:spcAft>
+            </a:pPr>
+            <a:endParaRPr lang="it-IT" sz="3200" dirty="0"/>
+          </a:p>
+        </p:txBody>
+      </p:sp>
+      <p:pic>
+        <p:nvPicPr>
+          <p:cNvPr id="4" name="Immagine 3">
+            <a:extLst>
+              <a:ext uri="{FF2B5EF4-FFF2-40B4-BE49-F238E27FC236}">
+                <a16:creationId xmlns:a16="http://schemas.microsoft.com/office/drawing/2014/main" id="{9D5ABF5B-A1A5-11F2-5794-7EBB1E7E8059}"/>
+              </a:ext>
+            </a:extLst>
+          </p:cNvPr>
+          <p:cNvPicPr>
+            <a:picLocks noChangeAspect="1"/>
+          </p:cNvPicPr>
+          <p:nvPr/>
+        </p:nvPicPr>
+        <p:blipFill>
+          <a:blip r:embed="rId2"/>
+          <a:srcRect b="49151"/>
+          <a:stretch>
+            <a:fillRect/>
+          </a:stretch>
+        </p:blipFill>
+        <p:spPr>
+          <a:xfrm>
+            <a:off x="533399" y="2672964"/>
+            <a:ext cx="4680000" cy="3175620"/>
+          </a:xfrm>
+          <a:prstGeom prst="rect">
+            <a:avLst/>
+          </a:prstGeom>
+        </p:spPr>
+      </p:pic>
+      <p:pic>
+        <p:nvPicPr>
+          <p:cNvPr id="10" name="Immagine 9">
+            <a:extLst>
+              <a:ext uri="{FF2B5EF4-FFF2-40B4-BE49-F238E27FC236}">
+                <a16:creationId xmlns:a16="http://schemas.microsoft.com/office/drawing/2014/main" id="{D8F62357-C7EB-F48D-200F-26531087453F}"/>
+              </a:ext>
+            </a:extLst>
+          </p:cNvPr>
+          <p:cNvPicPr>
+            <a:picLocks noChangeAspect="1"/>
+          </p:cNvPicPr>
+          <p:nvPr/>
+        </p:nvPicPr>
+        <p:blipFill>
+          <a:blip r:embed="rId2"/>
+          <a:srcRect t="49970"/>
+          <a:stretch>
+            <a:fillRect/>
+          </a:stretch>
+        </p:blipFill>
+        <p:spPr>
+          <a:xfrm>
+            <a:off x="6091841" y="2672964"/>
+            <a:ext cx="4680000" cy="3124468"/>
+          </a:xfrm>
+          <a:prstGeom prst="rect">
+            <a:avLst/>
+          </a:prstGeom>
+        </p:spPr>
+      </p:pic>
+    </p:spTree>
+    <p:extLst>
+      <p:ext uri="{BB962C8B-B14F-4D97-AF65-F5344CB8AC3E}">
+        <p14:creationId xmlns:p14="http://schemas.microsoft.com/office/powerpoint/2010/main" val="3376622235"/>
+      </p:ext>
+    </p:extLst>
+  </p:cSld>
+  <p:clrMapOvr>
+    <a:masterClrMapping/>
+  </p:clrMapOvr>
+  <mc:AlternateContent xmlns:mc="http://schemas.openxmlformats.org/markup-compatibility/2006" xmlns:p159="http://schemas.microsoft.com/office/powerpoint/2015/09/main">
+    <mc:Choice Requires="p159">
+      <p:transition xmlns:p14="http://schemas.microsoft.com/office/powerpoint/2010/main" spd="slow" p14:dur="2000">
+        <p159:morph option="byObject"/>
+      </p:transition>
+    </mc:Choice>
+    <mc:Fallback xmlns="">
+      <p:transition spd="slow">
+        <p:fade/>
+      </p:transition>
+    </mc:Fallback>
+  </mc:AlternateContent>
+</p:sld>
+</file>
+
+<file path=ppt/slides/slide27.xml><?xml version="1.0" encoding="utf-8"?>
+<p:sld xmlns:a="http://schemas.openxmlformats.org/drawingml/2006/main" xmlns:r="http://schemas.openxmlformats.org/officeDocument/2006/relationships" xmlns:p="http://schemas.openxmlformats.org/presentationml/2006/main">
+  <p:cSld>
+    <p:spTree>
+      <p:nvGrpSpPr>
+        <p:cNvPr id="1" name="">
+          <a:extLst>
+            <a:ext uri="{FF2B5EF4-FFF2-40B4-BE49-F238E27FC236}">
+              <a16:creationId xmlns:a16="http://schemas.microsoft.com/office/drawing/2014/main" id="{53AC9B5B-0D95-EBB0-95BA-A82BA4A1A977}"/>
+            </a:ext>
+          </a:extLst>
+        </p:cNvPr>
+        <p:cNvGrpSpPr/>
+        <p:nvPr/>
+      </p:nvGrpSpPr>
+      <p:grpSpPr>
+        <a:xfrm>
+          <a:off x="0" y="0"/>
+          <a:ext cx="0" cy="0"/>
+          <a:chOff x="0" y="0"/>
+          <a:chExt cx="0" cy="0"/>
+        </a:xfrm>
+      </p:grpSpPr>
+      <p:sp>
+        <p:nvSpPr>
+          <p:cNvPr id="5" name="Rettangolo 4">
+            <a:extLst>
+              <a:ext uri="{FF2B5EF4-FFF2-40B4-BE49-F238E27FC236}">
+                <a16:creationId xmlns:a16="http://schemas.microsoft.com/office/drawing/2014/main" id="{445A0D36-379D-1F02-8C3D-FBE995A5CD40}"/>
+              </a:ext>
+            </a:extLst>
+          </p:cNvPr>
+          <p:cNvSpPr/>
+          <p:nvPr/>
+        </p:nvSpPr>
+        <p:spPr>
+          <a:xfrm rot="16200000">
+            <a:off x="5612871" y="326546"/>
+            <a:ext cx="966258" cy="12192000"/>
+          </a:xfrm>
+          <a:prstGeom prst="rect">
+            <a:avLst/>
+          </a:prstGeom>
+          <a:solidFill>
+            <a:srgbClr val="990000"/>
+          </a:solidFill>
+          <a:ln>
+            <a:solidFill>
+              <a:srgbClr val="990000"/>
+            </a:solidFill>
+          </a:ln>
+        </p:spPr>
+        <p:style>
+          <a:lnRef idx="2">
+            <a:schemeClr val="accent1">
+              <a:shade val="15000"/>
+            </a:schemeClr>
+          </a:lnRef>
+          <a:fillRef idx="1">
+            <a:schemeClr val="accent1"/>
+          </a:fillRef>
+          <a:effectRef idx="0">
+            <a:schemeClr val="accent1"/>
+          </a:effectRef>
+          <a:fontRef idx="minor">
+            <a:schemeClr val="lt1"/>
+          </a:fontRef>
+        </p:style>
+        <p:txBody>
+          <a:bodyPr rtlCol="0" anchor="ctr"/>
+          <a:lstStyle/>
+          <a:p>
+            <a:pPr algn="ctr"/>
+            <a:endParaRPr lang="it-IT" dirty="0"/>
+          </a:p>
+        </p:txBody>
+      </p:sp>
+      <p:sp>
+        <p:nvSpPr>
+          <p:cNvPr id="6" name="CasellaDiTesto 5">
+            <a:extLst>
+              <a:ext uri="{FF2B5EF4-FFF2-40B4-BE49-F238E27FC236}">
+                <a16:creationId xmlns:a16="http://schemas.microsoft.com/office/drawing/2014/main" id="{24F1BEB0-EC82-1584-9EBC-96894BAA4B96}"/>
+              </a:ext>
+            </a:extLst>
+          </p:cNvPr>
+          <p:cNvSpPr txBox="1"/>
+          <p:nvPr/>
+        </p:nvSpPr>
+        <p:spPr>
+          <a:xfrm>
+            <a:off x="5086139" y="6222490"/>
+            <a:ext cx="2019720" cy="400110"/>
+          </a:xfrm>
+          <a:prstGeom prst="rect">
+            <a:avLst/>
+          </a:prstGeom>
+          <a:noFill/>
+        </p:spPr>
+        <p:txBody>
+          <a:bodyPr wrap="square" rtlCol="0">
+            <a:spAutoFit/>
+          </a:bodyPr>
+          <a:lstStyle/>
+          <a:p>
+            <a:pPr algn="r"/>
+            <a:r>
+              <a:rPr lang="it-IT" sz="2000" b="1" dirty="0">
+                <a:solidFill>
+                  <a:schemeClr val="bg1"/>
+                </a:solidFill>
+              </a:rPr>
+              <a:t>Gianpaolo Pestilli</a:t>
+            </a:r>
+          </a:p>
+        </p:txBody>
+      </p:sp>
+      <p:sp>
+        <p:nvSpPr>
+          <p:cNvPr id="8" name="CasellaDiTesto 7">
+            <a:extLst>
+              <a:ext uri="{FF2B5EF4-FFF2-40B4-BE49-F238E27FC236}">
+                <a16:creationId xmlns:a16="http://schemas.microsoft.com/office/drawing/2014/main" id="{6D346DA7-3FE8-47E9-1A4F-8D34543E9046}"/>
+              </a:ext>
+            </a:extLst>
+          </p:cNvPr>
+          <p:cNvSpPr txBox="1"/>
+          <p:nvPr/>
+        </p:nvSpPr>
+        <p:spPr>
+          <a:xfrm>
+            <a:off x="533399" y="728069"/>
+            <a:ext cx="11116884" cy="1277273"/>
+          </a:xfrm>
+          <a:prstGeom prst="rect">
+            <a:avLst/>
+          </a:prstGeom>
+          <a:noFill/>
+        </p:spPr>
+        <p:txBody>
+          <a:bodyPr wrap="square" rtlCol="0">
+            <a:spAutoFit/>
+          </a:bodyPr>
+          <a:lstStyle/>
+          <a:p>
+            <a:pPr algn="just">
+              <a:spcAft>
+                <a:spcPts val="600"/>
+              </a:spcAft>
+            </a:pPr>
+            <a:r>
+              <a:rPr lang="it-IT" sz="4000" b="1" dirty="0">
+                <a:solidFill>
+                  <a:srgbClr val="990000"/>
+                </a:solidFill>
+              </a:rPr>
+              <a:t>VERTEX COVER PESATO</a:t>
+            </a:r>
+          </a:p>
+          <a:p>
+            <a:pPr algn="just">
+              <a:spcAft>
+                <a:spcPts val="600"/>
+              </a:spcAft>
+            </a:pPr>
+            <a:r>
+              <a:rPr lang="it-IT" sz="3200" b="1" dirty="0"/>
+              <a:t>Algoritmo 5 (basato sul duale del rilassamento lineare)</a:t>
+            </a:r>
+          </a:p>
+        </p:txBody>
+      </p:sp>
+      <p:sp>
+        <p:nvSpPr>
+          <p:cNvPr id="2" name="CasellaDiTesto 1">
+            <a:extLst>
+              <a:ext uri="{FF2B5EF4-FFF2-40B4-BE49-F238E27FC236}">
+                <a16:creationId xmlns:a16="http://schemas.microsoft.com/office/drawing/2014/main" id="{90BB1ACC-6158-6845-0028-176E0DCAD8F5}"/>
+              </a:ext>
+            </a:extLst>
+          </p:cNvPr>
+          <p:cNvSpPr txBox="1"/>
+          <p:nvPr/>
+        </p:nvSpPr>
+        <p:spPr>
+          <a:xfrm>
+            <a:off x="11434917" y="6222490"/>
+            <a:ext cx="491612" cy="400110"/>
+          </a:xfrm>
+          <a:prstGeom prst="rect">
+            <a:avLst/>
+          </a:prstGeom>
+          <a:noFill/>
+        </p:spPr>
+        <p:txBody>
+          <a:bodyPr wrap="square" rtlCol="0">
+            <a:spAutoFit/>
+          </a:bodyPr>
+          <a:lstStyle/>
+          <a:p>
+            <a:pPr algn="r"/>
+            <a:r>
+              <a:rPr lang="it-IT" sz="2000" b="1" dirty="0">
+                <a:solidFill>
+                  <a:schemeClr val="bg1"/>
+                </a:solidFill>
+              </a:rPr>
+              <a:t>26</a:t>
+            </a:r>
+          </a:p>
+        </p:txBody>
+      </p:sp>
+      <p:pic>
+        <p:nvPicPr>
+          <p:cNvPr id="4" name="Immagine 3">
+            <a:extLst>
+              <a:ext uri="{FF2B5EF4-FFF2-40B4-BE49-F238E27FC236}">
+                <a16:creationId xmlns:a16="http://schemas.microsoft.com/office/drawing/2014/main" id="{C0A85566-7F2D-28B6-F154-91C8B93F87CB}"/>
+              </a:ext>
+            </a:extLst>
+          </p:cNvPr>
+          <p:cNvPicPr>
+            <a:picLocks noChangeAspect="1"/>
+          </p:cNvPicPr>
+          <p:nvPr/>
+        </p:nvPicPr>
+        <p:blipFill>
+          <a:blip r:embed="rId2"/>
+          <a:stretch>
+            <a:fillRect/>
+          </a:stretch>
+        </p:blipFill>
+        <p:spPr>
+          <a:xfrm>
+            <a:off x="533399" y="2005342"/>
+            <a:ext cx="4851814" cy="3569548"/>
+          </a:xfrm>
+          <a:prstGeom prst="rect">
+            <a:avLst/>
+          </a:prstGeom>
+        </p:spPr>
+      </p:pic>
+      <p:pic>
+        <p:nvPicPr>
+          <p:cNvPr id="9" name="Immagine 8">
+            <a:extLst>
+              <a:ext uri="{FF2B5EF4-FFF2-40B4-BE49-F238E27FC236}">
+                <a16:creationId xmlns:a16="http://schemas.microsoft.com/office/drawing/2014/main" id="{1272809F-97B0-E473-8B28-AB00369E5A33}"/>
+              </a:ext>
+            </a:extLst>
+          </p:cNvPr>
+          <p:cNvPicPr>
+            <a:picLocks noChangeAspect="1"/>
+          </p:cNvPicPr>
+          <p:nvPr/>
+        </p:nvPicPr>
+        <p:blipFill>
+          <a:blip r:embed="rId3"/>
+          <a:stretch>
+            <a:fillRect/>
+          </a:stretch>
+        </p:blipFill>
+        <p:spPr>
+          <a:xfrm>
+            <a:off x="5828188" y="2004516"/>
+            <a:ext cx="5379120" cy="3571200"/>
+          </a:xfrm>
+          <a:prstGeom prst="rect">
+            <a:avLst/>
+          </a:prstGeom>
+        </p:spPr>
+      </p:pic>
+    </p:spTree>
+    <p:extLst>
+      <p:ext uri="{BB962C8B-B14F-4D97-AF65-F5344CB8AC3E}">
+        <p14:creationId xmlns:p14="http://schemas.microsoft.com/office/powerpoint/2010/main" val="2236982701"/>
+      </p:ext>
+    </p:extLst>
+  </p:cSld>
+  <p:clrMapOvr>
+    <a:masterClrMapping/>
+  </p:clrMapOvr>
+  <mc:AlternateContent xmlns:mc="http://schemas.openxmlformats.org/markup-compatibility/2006" xmlns:p159="http://schemas.microsoft.com/office/powerpoint/2015/09/main">
+    <mc:Choice Requires="p159">
+      <p:transition xmlns:p14="http://schemas.microsoft.com/office/powerpoint/2010/main" spd="slow" p14:dur="2000">
+        <p159:morph option="byObject"/>
+      </p:transition>
+    </mc:Choice>
+    <mc:Fallback xmlns="">
+      <p:transition spd="slow">
+        <p:fade/>
+      </p:transition>
+    </mc:Fallback>
+  </mc:AlternateContent>
+</p:sld>
+</file>
+
+<file path=ppt/slides/slide28.xml><?xml version="1.0" encoding="utf-8"?>
+<p:sld xmlns:a="http://schemas.openxmlformats.org/drawingml/2006/main" xmlns:r="http://schemas.openxmlformats.org/officeDocument/2006/relationships" xmlns:p="http://schemas.openxmlformats.org/presentationml/2006/main">
+  <p:cSld>
+    <p:spTree>
+      <p:nvGrpSpPr>
+        <p:cNvPr id="1" name="">
+          <a:extLst>
+            <a:ext uri="{FF2B5EF4-FFF2-40B4-BE49-F238E27FC236}">
+              <a16:creationId xmlns:a16="http://schemas.microsoft.com/office/drawing/2014/main" id="{04404597-F93E-821B-58E7-7AAFA50DC5D2}"/>
+            </a:ext>
+          </a:extLst>
+        </p:cNvPr>
+        <p:cNvGrpSpPr/>
+        <p:nvPr/>
+      </p:nvGrpSpPr>
+      <p:grpSpPr>
+        <a:xfrm>
+          <a:off x="0" y="0"/>
+          <a:ext cx="0" cy="0"/>
+          <a:chOff x="0" y="0"/>
+          <a:chExt cx="0" cy="0"/>
+        </a:xfrm>
+      </p:grpSpPr>
+      <p:sp>
+        <p:nvSpPr>
+          <p:cNvPr id="5" name="Rettangolo 4">
+            <a:extLst>
+              <a:ext uri="{FF2B5EF4-FFF2-40B4-BE49-F238E27FC236}">
+                <a16:creationId xmlns:a16="http://schemas.microsoft.com/office/drawing/2014/main" id="{045F5D7D-01D8-65B4-C04A-CF0DB742243E}"/>
+              </a:ext>
+            </a:extLst>
+          </p:cNvPr>
+          <p:cNvSpPr/>
+          <p:nvPr/>
+        </p:nvSpPr>
+        <p:spPr>
+          <a:xfrm rot="16200000">
+            <a:off x="5612871" y="326546"/>
+            <a:ext cx="966258" cy="12192000"/>
+          </a:xfrm>
+          <a:prstGeom prst="rect">
+            <a:avLst/>
+          </a:prstGeom>
+          <a:solidFill>
+            <a:srgbClr val="990000"/>
+          </a:solidFill>
+          <a:ln>
+            <a:solidFill>
+              <a:srgbClr val="990000"/>
+            </a:solidFill>
+          </a:ln>
+        </p:spPr>
+        <p:style>
+          <a:lnRef idx="2">
+            <a:schemeClr val="accent1">
+              <a:shade val="15000"/>
+            </a:schemeClr>
+          </a:lnRef>
+          <a:fillRef idx="1">
+            <a:schemeClr val="accent1"/>
+          </a:fillRef>
+          <a:effectRef idx="0">
+            <a:schemeClr val="accent1"/>
+          </a:effectRef>
+          <a:fontRef idx="minor">
+            <a:schemeClr val="lt1"/>
+          </a:fontRef>
+        </p:style>
+        <p:txBody>
+          <a:bodyPr rtlCol="0" anchor="ctr"/>
+          <a:lstStyle/>
+          <a:p>
+            <a:pPr algn="ctr"/>
+            <a:endParaRPr lang="it-IT" dirty="0"/>
+          </a:p>
+        </p:txBody>
+      </p:sp>
+      <p:sp>
+        <p:nvSpPr>
+          <p:cNvPr id="6" name="CasellaDiTesto 5">
+            <a:extLst>
+              <a:ext uri="{FF2B5EF4-FFF2-40B4-BE49-F238E27FC236}">
+                <a16:creationId xmlns:a16="http://schemas.microsoft.com/office/drawing/2014/main" id="{37AC21F6-602E-DF0B-5461-E52E88D16059}"/>
+              </a:ext>
+            </a:extLst>
+          </p:cNvPr>
+          <p:cNvSpPr txBox="1"/>
+          <p:nvPr/>
+        </p:nvSpPr>
+        <p:spPr>
+          <a:xfrm>
+            <a:off x="5086139" y="6222490"/>
+            <a:ext cx="2019720" cy="400110"/>
+          </a:xfrm>
+          <a:prstGeom prst="rect">
+            <a:avLst/>
+          </a:prstGeom>
+          <a:noFill/>
+        </p:spPr>
+        <p:txBody>
+          <a:bodyPr wrap="square" rtlCol="0">
+            <a:spAutoFit/>
+          </a:bodyPr>
+          <a:lstStyle/>
+          <a:p>
+            <a:pPr algn="r"/>
+            <a:r>
+              <a:rPr lang="it-IT" sz="2000" b="1" dirty="0">
+                <a:solidFill>
+                  <a:schemeClr val="bg1"/>
+                </a:solidFill>
+              </a:rPr>
+              <a:t>Gianpaolo Pestilli</a:t>
+            </a:r>
+          </a:p>
+        </p:txBody>
+      </p:sp>
+      <p:sp>
+        <p:nvSpPr>
+          <p:cNvPr id="8" name="CasellaDiTesto 7">
+            <a:extLst>
+              <a:ext uri="{FF2B5EF4-FFF2-40B4-BE49-F238E27FC236}">
+                <a16:creationId xmlns:a16="http://schemas.microsoft.com/office/drawing/2014/main" id="{4C2B4472-83AF-5CE5-2C37-37C816DC337D}"/>
+              </a:ext>
+            </a:extLst>
+          </p:cNvPr>
+          <p:cNvSpPr txBox="1"/>
+          <p:nvPr/>
+        </p:nvSpPr>
+        <p:spPr>
+          <a:xfrm>
+            <a:off x="533399" y="728069"/>
+            <a:ext cx="11116884" cy="1277273"/>
+          </a:xfrm>
+          <a:prstGeom prst="rect">
+            <a:avLst/>
+          </a:prstGeom>
+          <a:noFill/>
+        </p:spPr>
+        <p:txBody>
+          <a:bodyPr wrap="square" rtlCol="0">
+            <a:spAutoFit/>
+          </a:bodyPr>
+          <a:lstStyle/>
+          <a:p>
+            <a:pPr algn="just">
+              <a:spcAft>
+                <a:spcPts val="600"/>
+              </a:spcAft>
+            </a:pPr>
+            <a:r>
+              <a:rPr lang="it-IT" sz="4000" b="1" dirty="0">
+                <a:solidFill>
+                  <a:srgbClr val="990000"/>
+                </a:solidFill>
+              </a:rPr>
+              <a:t>VERTEX COVER PESATO</a:t>
+            </a:r>
+          </a:p>
+          <a:p>
+            <a:pPr algn="just">
+              <a:spcAft>
+                <a:spcPts val="600"/>
+              </a:spcAft>
+            </a:pPr>
+            <a:r>
+              <a:rPr lang="it-IT" sz="3200" b="1" dirty="0"/>
+              <a:t>Algoritmo 5 (basato sul duale del rilassamento lineare)</a:t>
+            </a:r>
+          </a:p>
+        </p:txBody>
+      </p:sp>
+      <p:sp>
+        <p:nvSpPr>
+          <p:cNvPr id="2" name="CasellaDiTesto 1">
+            <a:extLst>
+              <a:ext uri="{FF2B5EF4-FFF2-40B4-BE49-F238E27FC236}">
+                <a16:creationId xmlns:a16="http://schemas.microsoft.com/office/drawing/2014/main" id="{3E76F09A-D9DB-50A7-E2CB-F58F1109F216}"/>
+              </a:ext>
+            </a:extLst>
+          </p:cNvPr>
+          <p:cNvSpPr txBox="1"/>
+          <p:nvPr/>
+        </p:nvSpPr>
+        <p:spPr>
+          <a:xfrm>
+            <a:off x="11434917" y="6222490"/>
+            <a:ext cx="491612" cy="400110"/>
+          </a:xfrm>
+          <a:prstGeom prst="rect">
+            <a:avLst/>
+          </a:prstGeom>
+          <a:noFill/>
+        </p:spPr>
+        <p:txBody>
+          <a:bodyPr wrap="square" rtlCol="0">
+            <a:spAutoFit/>
+          </a:bodyPr>
+          <a:lstStyle/>
+          <a:p>
+            <a:pPr algn="r"/>
+            <a:r>
+              <a:rPr lang="it-IT" sz="2000" b="1" dirty="0">
+                <a:solidFill>
+                  <a:schemeClr val="bg1"/>
+                </a:solidFill>
+              </a:rPr>
+              <a:t>27</a:t>
+            </a:r>
+          </a:p>
+        </p:txBody>
+      </p:sp>
+      <p:pic>
+        <p:nvPicPr>
+          <p:cNvPr id="7" name="Immagine 6">
+            <a:extLst>
+              <a:ext uri="{FF2B5EF4-FFF2-40B4-BE49-F238E27FC236}">
+                <a16:creationId xmlns:a16="http://schemas.microsoft.com/office/drawing/2014/main" id="{D766EBF9-DE25-D9D2-704E-92FFE5D62823}"/>
+              </a:ext>
+            </a:extLst>
+          </p:cNvPr>
+          <p:cNvPicPr>
+            <a:picLocks noChangeAspect="1"/>
+          </p:cNvPicPr>
+          <p:nvPr/>
+        </p:nvPicPr>
+        <p:blipFill>
+          <a:blip r:embed="rId2"/>
+          <a:stretch>
+            <a:fillRect/>
+          </a:stretch>
+        </p:blipFill>
+        <p:spPr>
+          <a:xfrm>
+            <a:off x="533399" y="2186779"/>
+            <a:ext cx="3251093" cy="3571200"/>
+          </a:xfrm>
+          <a:prstGeom prst="rect">
+            <a:avLst/>
+          </a:prstGeom>
+        </p:spPr>
+      </p:pic>
+    </p:spTree>
+    <p:extLst>
+      <p:ext uri="{BB962C8B-B14F-4D97-AF65-F5344CB8AC3E}">
+        <p14:creationId xmlns:p14="http://schemas.microsoft.com/office/powerpoint/2010/main" val="3263946993"/>
+      </p:ext>
+    </p:extLst>
+  </p:cSld>
+  <p:clrMapOvr>
+    <a:masterClrMapping/>
+  </p:clrMapOvr>
+  <mc:AlternateContent xmlns:mc="http://schemas.openxmlformats.org/markup-compatibility/2006" xmlns:p159="http://schemas.microsoft.com/office/powerpoint/2015/09/main">
+    <mc:Choice Requires="p159">
+      <p:transition xmlns:p14="http://schemas.microsoft.com/office/powerpoint/2010/main" spd="slow" p14:dur="2000">
+        <p159:morph option="byObject"/>
+      </p:transition>
+    </mc:Choice>
+    <mc:Fallback xmlns="">
+      <p:transition spd="slow">
+        <p:fade/>
+      </p:transition>
+    </mc:Fallback>
+  </mc:AlternateContent>
+</p:sld>
+</file>
+
+<file path=ppt/slides/slide29.xml><?xml version="1.0" encoding="utf-8"?>
+<p:sld xmlns:a="http://schemas.openxmlformats.org/drawingml/2006/main" xmlns:r="http://schemas.openxmlformats.org/officeDocument/2006/relationships" xmlns:p="http://schemas.openxmlformats.org/presentationml/2006/main">
+  <p:cSld>
+    <p:spTree>
+      <p:nvGrpSpPr>
+        <p:cNvPr id="1" name="">
+          <a:extLst>
+            <a:ext uri="{FF2B5EF4-FFF2-40B4-BE49-F238E27FC236}">
+              <a16:creationId xmlns:a16="http://schemas.microsoft.com/office/drawing/2014/main" id="{B10C0F47-A07E-AD5D-8C78-66A34A857663}"/>
+            </a:ext>
+          </a:extLst>
+        </p:cNvPr>
+        <p:cNvGrpSpPr/>
+        <p:nvPr/>
+      </p:nvGrpSpPr>
+      <p:grpSpPr>
+        <a:xfrm>
+          <a:off x="0" y="0"/>
+          <a:ext cx="0" cy="0"/>
+          <a:chOff x="0" y="0"/>
+          <a:chExt cx="0" cy="0"/>
+        </a:xfrm>
+      </p:grpSpPr>
+      <p:sp>
+        <p:nvSpPr>
+          <p:cNvPr id="5" name="Rettangolo 4">
+            <a:extLst>
+              <a:ext uri="{FF2B5EF4-FFF2-40B4-BE49-F238E27FC236}">
+                <a16:creationId xmlns:a16="http://schemas.microsoft.com/office/drawing/2014/main" id="{3BD5D540-9466-62B5-C501-26F6DFB5F09A}"/>
+              </a:ext>
+            </a:extLst>
+          </p:cNvPr>
+          <p:cNvSpPr/>
+          <p:nvPr/>
+        </p:nvSpPr>
+        <p:spPr>
+          <a:xfrm rot="16200000">
+            <a:off x="5612871" y="326546"/>
+            <a:ext cx="966258" cy="12192000"/>
+          </a:xfrm>
+          <a:prstGeom prst="rect">
+            <a:avLst/>
+          </a:prstGeom>
+          <a:solidFill>
+            <a:srgbClr val="990000"/>
+          </a:solidFill>
+          <a:ln>
+            <a:solidFill>
+              <a:srgbClr val="990000"/>
+            </a:solidFill>
+          </a:ln>
+        </p:spPr>
+        <p:style>
+          <a:lnRef idx="2">
+            <a:schemeClr val="accent1">
+              <a:shade val="15000"/>
+            </a:schemeClr>
+          </a:lnRef>
+          <a:fillRef idx="1">
+            <a:schemeClr val="accent1"/>
+          </a:fillRef>
+          <a:effectRef idx="0">
+            <a:schemeClr val="accent1"/>
+          </a:effectRef>
+          <a:fontRef idx="minor">
+            <a:schemeClr val="lt1"/>
+          </a:fontRef>
+        </p:style>
+        <p:txBody>
+          <a:bodyPr rtlCol="0" anchor="ctr"/>
+          <a:lstStyle/>
+          <a:p>
+            <a:pPr algn="ctr"/>
+            <a:endParaRPr lang="it-IT" dirty="0"/>
+          </a:p>
+        </p:txBody>
+      </p:sp>
+      <p:sp>
+        <p:nvSpPr>
+          <p:cNvPr id="6" name="CasellaDiTesto 5">
+            <a:extLst>
+              <a:ext uri="{FF2B5EF4-FFF2-40B4-BE49-F238E27FC236}">
+                <a16:creationId xmlns:a16="http://schemas.microsoft.com/office/drawing/2014/main" id="{AD4A2B94-EA1F-EDC7-476E-0FB7EB6749B1}"/>
+              </a:ext>
+            </a:extLst>
+          </p:cNvPr>
+          <p:cNvSpPr txBox="1"/>
+          <p:nvPr/>
+        </p:nvSpPr>
+        <p:spPr>
+          <a:xfrm>
+            <a:off x="5086139" y="6222490"/>
+            <a:ext cx="2019720" cy="400110"/>
+          </a:xfrm>
+          <a:prstGeom prst="rect">
+            <a:avLst/>
+          </a:prstGeom>
+          <a:noFill/>
+        </p:spPr>
+        <p:txBody>
+          <a:bodyPr wrap="square" rtlCol="0">
+            <a:spAutoFit/>
+          </a:bodyPr>
+          <a:lstStyle/>
+          <a:p>
+            <a:pPr algn="r"/>
+            <a:r>
+              <a:rPr lang="it-IT" sz="2000" b="1" dirty="0">
+                <a:solidFill>
+                  <a:schemeClr val="bg1"/>
+                </a:solidFill>
+              </a:rPr>
+              <a:t>Gianpaolo Pestilli</a:t>
+            </a:r>
+          </a:p>
+        </p:txBody>
+      </p:sp>
+      <p:sp>
+        <p:nvSpPr>
+          <p:cNvPr id="8" name="CasellaDiTesto 7">
+            <a:extLst>
+              <a:ext uri="{FF2B5EF4-FFF2-40B4-BE49-F238E27FC236}">
+                <a16:creationId xmlns:a16="http://schemas.microsoft.com/office/drawing/2014/main" id="{79BD82AE-AF79-0B74-63F1-59BB1B09301F}"/>
+              </a:ext>
+            </a:extLst>
+          </p:cNvPr>
+          <p:cNvSpPr txBox="1"/>
+          <p:nvPr/>
+        </p:nvSpPr>
+        <p:spPr>
+          <a:xfrm>
+            <a:off x="533399" y="728069"/>
+            <a:ext cx="6304281" cy="4324902"/>
+          </a:xfrm>
+          <a:prstGeom prst="rect">
+            <a:avLst/>
+          </a:prstGeom>
+          <a:noFill/>
+        </p:spPr>
+        <p:txBody>
+          <a:bodyPr wrap="square" rtlCol="0">
+            <a:spAutoFit/>
+          </a:bodyPr>
+          <a:lstStyle/>
+          <a:p>
+            <a:r>
+              <a:rPr lang="it-IT" sz="4000" b="1" dirty="0">
+                <a:solidFill>
+                  <a:srgbClr val="990000"/>
+                </a:solidFill>
+              </a:rPr>
+              <a:t>ROADMAP:</a:t>
+            </a:r>
+          </a:p>
+          <a:p>
+            <a:pPr marL="342900" indent="-342900">
+              <a:lnSpc>
+                <a:spcPct val="150000"/>
+              </a:lnSpc>
+              <a:buAutoNum type="arabicPeriod"/>
+            </a:pPr>
+            <a:r>
+              <a:rPr lang="it-IT" sz="3200" dirty="0">
+                <a:solidFill>
+                  <a:schemeClr val="bg2">
+                    <a:lumMod val="75000"/>
+                  </a:schemeClr>
+                </a:solidFill>
+              </a:rPr>
+              <a:t>IDEA DEL PROGETTO</a:t>
+            </a:r>
+          </a:p>
+          <a:p>
+            <a:pPr marL="342900" indent="-342900">
+              <a:lnSpc>
+                <a:spcPct val="150000"/>
+              </a:lnSpc>
+              <a:buAutoNum type="arabicPeriod"/>
+            </a:pPr>
+            <a:r>
+              <a:rPr lang="it-IT" sz="3200" dirty="0">
+                <a:solidFill>
+                  <a:schemeClr val="bg2">
+                    <a:lumMod val="75000"/>
+                  </a:schemeClr>
+                </a:solidFill>
+              </a:rPr>
+              <a:t>ALGORITMI CONFRONTATI</a:t>
+            </a:r>
+          </a:p>
+          <a:p>
+            <a:pPr marL="342900" indent="-342900">
+              <a:lnSpc>
+                <a:spcPct val="150000"/>
+              </a:lnSpc>
+              <a:buAutoNum type="arabicPeriod"/>
+            </a:pPr>
+            <a:r>
+              <a:rPr lang="it-IT" sz="3200" b="1" dirty="0"/>
+              <a:t>METODOLOGIA</a:t>
+            </a:r>
+          </a:p>
+          <a:p>
+            <a:pPr marL="342900" indent="-342900">
+              <a:lnSpc>
+                <a:spcPct val="150000"/>
+              </a:lnSpc>
+              <a:buAutoNum type="arabicPeriod"/>
+            </a:pPr>
+            <a:r>
+              <a:rPr lang="it-IT" sz="3200" dirty="0">
+                <a:solidFill>
+                  <a:schemeClr val="bg2">
+                    <a:lumMod val="75000"/>
+                  </a:schemeClr>
+                </a:solidFill>
+              </a:rPr>
+              <a:t>RISULTATI PIÙ SIGNIFICATIVI</a:t>
+            </a:r>
+          </a:p>
+          <a:p>
+            <a:pPr marL="342900" indent="-342900">
+              <a:lnSpc>
+                <a:spcPct val="150000"/>
+              </a:lnSpc>
+              <a:buAutoNum type="arabicPeriod"/>
+            </a:pPr>
+            <a:r>
+              <a:rPr lang="it-IT" sz="3200" dirty="0">
+                <a:solidFill>
+                  <a:schemeClr val="bg2">
+                    <a:lumMod val="75000"/>
+                  </a:schemeClr>
+                </a:solidFill>
+              </a:rPr>
+              <a:t>CONCLUSIONI</a:t>
+            </a:r>
+          </a:p>
+        </p:txBody>
+      </p:sp>
+      <p:sp>
+        <p:nvSpPr>
+          <p:cNvPr id="2" name="CasellaDiTesto 1">
+            <a:extLst>
+              <a:ext uri="{FF2B5EF4-FFF2-40B4-BE49-F238E27FC236}">
+                <a16:creationId xmlns:a16="http://schemas.microsoft.com/office/drawing/2014/main" id="{6FF0CC2D-250E-43D1-8C8E-CFA9E7DF5D4D}"/>
+              </a:ext>
+            </a:extLst>
+          </p:cNvPr>
+          <p:cNvSpPr txBox="1"/>
+          <p:nvPr/>
+        </p:nvSpPr>
+        <p:spPr>
+          <a:xfrm>
+            <a:off x="11434917" y="6222490"/>
+            <a:ext cx="491612" cy="400110"/>
+          </a:xfrm>
+          <a:prstGeom prst="rect">
+            <a:avLst/>
+          </a:prstGeom>
+          <a:noFill/>
+        </p:spPr>
+        <p:txBody>
+          <a:bodyPr wrap="square" rtlCol="0">
+            <a:spAutoFit/>
+          </a:bodyPr>
+          <a:lstStyle/>
+          <a:p>
+            <a:pPr algn="r"/>
+            <a:r>
+              <a:rPr lang="it-IT" sz="2000" b="1" dirty="0">
+                <a:solidFill>
+                  <a:schemeClr val="bg1"/>
+                </a:solidFill>
+              </a:rPr>
+              <a:t>28</a:t>
+            </a:r>
+          </a:p>
+        </p:txBody>
+      </p:sp>
+    </p:spTree>
+    <p:extLst>
+      <p:ext uri="{BB962C8B-B14F-4D97-AF65-F5344CB8AC3E}">
+        <p14:creationId xmlns:p14="http://schemas.microsoft.com/office/powerpoint/2010/main" val="2573229877"/>
+      </p:ext>
+    </p:extLst>
+  </p:cSld>
+  <p:clrMapOvr>
+    <a:masterClrMapping/>
+  </p:clrMapOvr>
+  <mc:AlternateContent xmlns:mc="http://schemas.openxmlformats.org/markup-compatibility/2006" xmlns:p159="http://schemas.microsoft.com/office/powerpoint/2015/09/main">
+    <mc:Choice Requires="p159">
+      <p:transition xmlns:p14="http://schemas.microsoft.com/office/powerpoint/2010/main" spd="slow" p14:dur="2000">
+        <p159:morph option="byObject"/>
+      </p:transition>
+    </mc:Choice>
+    <mc:Fallback xmlns="">
+      <p:transition spd="slow">
+        <p:fade/>
+      </p:transition>
+    </mc:Fallback>
+  </mc:AlternateContent>
+</p:sld>
+</file>
+
+<file path=ppt/slides/slide3.xml><?xml version="1.0" encoding="utf-8"?>
+<p:sld xmlns:a="http://schemas.openxmlformats.org/drawingml/2006/main" xmlns:r="http://schemas.openxmlformats.org/officeDocument/2006/relationships" xmlns:p="http://schemas.openxmlformats.org/presentationml/2006/main">
+  <p:cSld>
+    <p:spTree>
+      <p:nvGrpSpPr>
+        <p:cNvPr id="1" name="">
+          <a:extLst>
+            <a:ext uri="{FF2B5EF4-FFF2-40B4-BE49-F238E27FC236}">
+              <a16:creationId xmlns:a16="http://schemas.microsoft.com/office/drawing/2014/main" id="{45041291-74B8-7E05-0F50-FFEEA4622393}"/>
+            </a:ext>
+          </a:extLst>
+        </p:cNvPr>
+        <p:cNvGrpSpPr/>
+        <p:nvPr/>
+      </p:nvGrpSpPr>
+      <p:grpSpPr>
+        <a:xfrm>
+          <a:off x="0" y="0"/>
+          <a:ext cx="0" cy="0"/>
+          <a:chOff x="0" y="0"/>
+          <a:chExt cx="0" cy="0"/>
+        </a:xfrm>
+      </p:grpSpPr>
+      <p:sp>
+        <p:nvSpPr>
+          <p:cNvPr id="5" name="Rettangolo 4">
+            <a:extLst>
+              <a:ext uri="{FF2B5EF4-FFF2-40B4-BE49-F238E27FC236}">
+                <a16:creationId xmlns:a16="http://schemas.microsoft.com/office/drawing/2014/main" id="{09CEE577-B151-FB0C-F1B2-4E68BBD26850}"/>
+              </a:ext>
+            </a:extLst>
+          </p:cNvPr>
+          <p:cNvSpPr/>
+          <p:nvPr/>
+        </p:nvSpPr>
+        <p:spPr>
+          <a:xfrm rot="16200000">
+            <a:off x="5612871" y="326546"/>
+            <a:ext cx="966258" cy="12192000"/>
+          </a:xfrm>
+          <a:prstGeom prst="rect">
+            <a:avLst/>
+          </a:prstGeom>
+          <a:solidFill>
+            <a:srgbClr val="990000"/>
+          </a:solidFill>
+          <a:ln>
+            <a:solidFill>
+              <a:srgbClr val="990000"/>
+            </a:solidFill>
+          </a:ln>
+        </p:spPr>
+        <p:style>
+          <a:lnRef idx="2">
+            <a:schemeClr val="accent1">
+              <a:shade val="15000"/>
+            </a:schemeClr>
+          </a:lnRef>
+          <a:fillRef idx="1">
+            <a:schemeClr val="accent1"/>
+          </a:fillRef>
+          <a:effectRef idx="0">
+            <a:schemeClr val="accent1"/>
+          </a:effectRef>
+          <a:fontRef idx="minor">
+            <a:schemeClr val="lt1"/>
+          </a:fontRef>
+        </p:style>
+        <p:txBody>
+          <a:bodyPr rtlCol="0" anchor="ctr"/>
+          <a:lstStyle/>
+          <a:p>
+            <a:pPr algn="ctr"/>
+            <a:endParaRPr lang="it-IT" dirty="0"/>
+          </a:p>
+        </p:txBody>
+      </p:sp>
+      <p:sp>
+        <p:nvSpPr>
+          <p:cNvPr id="6" name="CasellaDiTesto 5">
+            <a:extLst>
+              <a:ext uri="{FF2B5EF4-FFF2-40B4-BE49-F238E27FC236}">
+                <a16:creationId xmlns:a16="http://schemas.microsoft.com/office/drawing/2014/main" id="{CA90F200-4F12-E9F5-F6CC-9F77401E41E5}"/>
+              </a:ext>
+            </a:extLst>
+          </p:cNvPr>
+          <p:cNvSpPr txBox="1"/>
+          <p:nvPr/>
+        </p:nvSpPr>
+        <p:spPr>
+          <a:xfrm>
+            <a:off x="5086139" y="6222490"/>
+            <a:ext cx="2019720" cy="400110"/>
+          </a:xfrm>
+          <a:prstGeom prst="rect">
+            <a:avLst/>
+          </a:prstGeom>
+          <a:noFill/>
+        </p:spPr>
+        <p:txBody>
+          <a:bodyPr wrap="square" rtlCol="0">
+            <a:spAutoFit/>
+          </a:bodyPr>
+          <a:lstStyle/>
+          <a:p>
+            <a:pPr algn="r"/>
+            <a:r>
+              <a:rPr lang="it-IT" sz="2000" b="1" dirty="0">
+                <a:solidFill>
+                  <a:schemeClr val="bg1"/>
+                </a:solidFill>
+              </a:rPr>
+              <a:t>Gianpaolo Pestilli</a:t>
+            </a:r>
+          </a:p>
+        </p:txBody>
+      </p:sp>
+      <p:sp>
+        <p:nvSpPr>
+          <p:cNvPr id="7" name="CasellaDiTesto 6">
+            <a:extLst>
+              <a:ext uri="{FF2B5EF4-FFF2-40B4-BE49-F238E27FC236}">
+                <a16:creationId xmlns:a16="http://schemas.microsoft.com/office/drawing/2014/main" id="{8E97F6DF-BC58-7414-0FC5-90B555528674}"/>
+              </a:ext>
+            </a:extLst>
+          </p:cNvPr>
+          <p:cNvSpPr txBox="1"/>
+          <p:nvPr/>
+        </p:nvSpPr>
+        <p:spPr>
+          <a:xfrm>
+            <a:off x="11650283" y="6222490"/>
+            <a:ext cx="262013" cy="400110"/>
+          </a:xfrm>
+          <a:prstGeom prst="rect">
+            <a:avLst/>
+          </a:prstGeom>
+          <a:noFill/>
+        </p:spPr>
+        <p:txBody>
+          <a:bodyPr wrap="square" rtlCol="0">
+            <a:spAutoFit/>
+          </a:bodyPr>
+          <a:lstStyle/>
+          <a:p>
+            <a:r>
+              <a:rPr lang="it-IT" sz="2000" b="1" dirty="0">
+                <a:solidFill>
+                  <a:schemeClr val="bg1"/>
+                </a:solidFill>
+              </a:rPr>
+              <a:t>2</a:t>
+            </a:r>
+          </a:p>
+        </p:txBody>
+      </p:sp>
+      <p:sp>
+        <p:nvSpPr>
+          <p:cNvPr id="8" name="CasellaDiTesto 7">
+            <a:extLst>
+              <a:ext uri="{FF2B5EF4-FFF2-40B4-BE49-F238E27FC236}">
+                <a16:creationId xmlns:a16="http://schemas.microsoft.com/office/drawing/2014/main" id="{77192AA6-47F9-1040-6EF7-F1EE767A7D5B}"/>
+              </a:ext>
+            </a:extLst>
+          </p:cNvPr>
+          <p:cNvSpPr txBox="1"/>
+          <p:nvPr/>
+        </p:nvSpPr>
+        <p:spPr>
+          <a:xfrm>
+            <a:off x="533399" y="728069"/>
+            <a:ext cx="6304281" cy="4324902"/>
+          </a:xfrm>
+          <a:prstGeom prst="rect">
+            <a:avLst/>
+          </a:prstGeom>
+          <a:noFill/>
+        </p:spPr>
+        <p:txBody>
+          <a:bodyPr wrap="square" rtlCol="0">
+            <a:spAutoFit/>
+          </a:bodyPr>
+          <a:lstStyle/>
+          <a:p>
+            <a:r>
+              <a:rPr lang="it-IT" sz="4000" b="1" dirty="0">
+                <a:solidFill>
+                  <a:srgbClr val="990000"/>
+                </a:solidFill>
+              </a:rPr>
+              <a:t>ROADMAP:</a:t>
+            </a:r>
+          </a:p>
+          <a:p>
+            <a:pPr marL="342900" indent="-342900">
+              <a:lnSpc>
+                <a:spcPct val="150000"/>
+              </a:lnSpc>
+              <a:buAutoNum type="arabicPeriod"/>
+            </a:pPr>
+            <a:r>
+              <a:rPr lang="it-IT" sz="3200" b="1" dirty="0"/>
+              <a:t>IDEA DEL PROGETTO</a:t>
+            </a:r>
+          </a:p>
+          <a:p>
+            <a:pPr marL="342900" indent="-342900">
+              <a:lnSpc>
+                <a:spcPct val="150000"/>
+              </a:lnSpc>
+              <a:buAutoNum type="arabicPeriod"/>
+            </a:pPr>
+            <a:r>
+              <a:rPr lang="it-IT" sz="3200" dirty="0">
+                <a:solidFill>
+                  <a:schemeClr val="bg2">
+                    <a:lumMod val="75000"/>
+                  </a:schemeClr>
+                </a:solidFill>
+              </a:rPr>
+              <a:t>ALGORITMI CONFRONTATI</a:t>
+            </a:r>
+          </a:p>
+          <a:p>
+            <a:pPr marL="342900" indent="-342900">
+              <a:lnSpc>
+                <a:spcPct val="150000"/>
+              </a:lnSpc>
+              <a:buAutoNum type="arabicPeriod"/>
+            </a:pPr>
+            <a:r>
+              <a:rPr lang="it-IT" sz="3200" dirty="0">
+                <a:solidFill>
+                  <a:schemeClr val="bg2">
+                    <a:lumMod val="75000"/>
+                  </a:schemeClr>
+                </a:solidFill>
+              </a:rPr>
+              <a:t>METODOLOGIA</a:t>
+            </a:r>
+          </a:p>
+          <a:p>
+            <a:pPr marL="342900" indent="-342900">
+              <a:lnSpc>
+                <a:spcPct val="150000"/>
+              </a:lnSpc>
+              <a:buAutoNum type="arabicPeriod"/>
+            </a:pPr>
+            <a:r>
+              <a:rPr lang="it-IT" sz="3200" dirty="0">
+                <a:solidFill>
+                  <a:schemeClr val="bg2">
+                    <a:lumMod val="75000"/>
+                  </a:schemeClr>
+                </a:solidFill>
+              </a:rPr>
+              <a:t>RISULTATI PIÙ SIGNIFICATIVI</a:t>
+            </a:r>
+          </a:p>
+          <a:p>
+            <a:pPr marL="342900" indent="-342900">
+              <a:lnSpc>
+                <a:spcPct val="150000"/>
+              </a:lnSpc>
+              <a:buAutoNum type="arabicPeriod"/>
+            </a:pPr>
+            <a:r>
+              <a:rPr lang="it-IT" sz="3200" dirty="0">
+                <a:solidFill>
+                  <a:schemeClr val="bg2">
+                    <a:lumMod val="75000"/>
+                  </a:schemeClr>
+                </a:solidFill>
+              </a:rPr>
+              <a:t>CONCLUSIONI</a:t>
+            </a:r>
+          </a:p>
+        </p:txBody>
+      </p:sp>
+    </p:spTree>
+    <p:extLst>
+      <p:ext uri="{BB962C8B-B14F-4D97-AF65-F5344CB8AC3E}">
+        <p14:creationId xmlns:p14="http://schemas.microsoft.com/office/powerpoint/2010/main" val="3015291891"/>
+      </p:ext>
+    </p:extLst>
+  </p:cSld>
+  <p:clrMapOvr>
+    <a:masterClrMapping/>
+  </p:clrMapOvr>
+  <mc:AlternateContent xmlns:mc="http://schemas.openxmlformats.org/markup-compatibility/2006" xmlns:p159="http://schemas.microsoft.com/office/powerpoint/2015/09/main">
+    <mc:Choice Requires="p159">
+      <p:transition xmlns:p14="http://schemas.microsoft.com/office/powerpoint/2010/main" spd="slow" p14:dur="2000">
+        <p159:morph option="byObject"/>
+      </p:transition>
+    </mc:Choice>
+    <mc:Fallback xmlns="">
+      <p:transition spd="slow">
+        <p:fade/>
+      </p:transition>
+    </mc:Fallback>
+  </mc:AlternateContent>
+</p:sld>
+</file>
+
+<file path=ppt/slides/slide4.xml><?xml version="1.0" encoding="utf-8"?>
+<p:sld xmlns:a="http://schemas.openxmlformats.org/drawingml/2006/main" xmlns:r="http://schemas.openxmlformats.org/officeDocument/2006/relationships" xmlns:p="http://schemas.openxmlformats.org/presentationml/2006/main">
+  <p:cSld>
+    <p:spTree>
+      <p:nvGrpSpPr>
+        <p:cNvPr id="1" name="">
+          <a:extLst>
+            <a:ext uri="{FF2B5EF4-FFF2-40B4-BE49-F238E27FC236}">
+              <a16:creationId xmlns:a16="http://schemas.microsoft.com/office/drawing/2014/main" id="{1ADFF0FC-BD09-BF0F-AD7B-5F31CE0ACDB4}"/>
+            </a:ext>
+          </a:extLst>
+        </p:cNvPr>
+        <p:cNvGrpSpPr/>
+        <p:nvPr/>
+      </p:nvGrpSpPr>
+      <p:grpSpPr>
+        <a:xfrm>
+          <a:off x="0" y="0"/>
+          <a:ext cx="0" cy="0"/>
+          <a:chOff x="0" y="0"/>
+          <a:chExt cx="0" cy="0"/>
+        </a:xfrm>
+      </p:grpSpPr>
+      <p:sp>
+        <p:nvSpPr>
+          <p:cNvPr id="5" name="Rettangolo 4">
+            <a:extLst>
+              <a:ext uri="{FF2B5EF4-FFF2-40B4-BE49-F238E27FC236}">
+                <a16:creationId xmlns:a16="http://schemas.microsoft.com/office/drawing/2014/main" id="{F3CB05E6-11E7-2515-0DB5-AEB005B33A52}"/>
+              </a:ext>
+            </a:extLst>
+          </p:cNvPr>
+          <p:cNvSpPr/>
+          <p:nvPr/>
+        </p:nvSpPr>
+        <p:spPr>
+          <a:xfrm rot="16200000">
+            <a:off x="5612871" y="326546"/>
+            <a:ext cx="966258" cy="12192000"/>
+          </a:xfrm>
+          <a:prstGeom prst="rect">
+            <a:avLst/>
+          </a:prstGeom>
+          <a:solidFill>
+            <a:srgbClr val="990000"/>
+          </a:solidFill>
+          <a:ln>
+            <a:solidFill>
+              <a:srgbClr val="990000"/>
+            </a:solidFill>
+          </a:ln>
+        </p:spPr>
+        <p:style>
+          <a:lnRef idx="2">
+            <a:schemeClr val="accent1">
+              <a:shade val="15000"/>
+            </a:schemeClr>
+          </a:lnRef>
+          <a:fillRef idx="1">
+            <a:schemeClr val="accent1"/>
+          </a:fillRef>
+          <a:effectRef idx="0">
+            <a:schemeClr val="accent1"/>
+          </a:effectRef>
+          <a:fontRef idx="minor">
+            <a:schemeClr val="lt1"/>
+          </a:fontRef>
+        </p:style>
+        <p:txBody>
+          <a:bodyPr rtlCol="0" anchor="ctr"/>
+          <a:lstStyle/>
+          <a:p>
+            <a:pPr algn="ctr"/>
+            <a:endParaRPr lang="it-IT" dirty="0"/>
+          </a:p>
+        </p:txBody>
+      </p:sp>
+      <p:sp>
+        <p:nvSpPr>
+          <p:cNvPr id="6" name="CasellaDiTesto 5">
+            <a:extLst>
+              <a:ext uri="{FF2B5EF4-FFF2-40B4-BE49-F238E27FC236}">
+                <a16:creationId xmlns:a16="http://schemas.microsoft.com/office/drawing/2014/main" id="{A9A7C265-2507-930E-62A1-73A525945943}"/>
+              </a:ext>
+            </a:extLst>
+          </p:cNvPr>
+          <p:cNvSpPr txBox="1"/>
+          <p:nvPr/>
+        </p:nvSpPr>
+        <p:spPr>
+          <a:xfrm>
+            <a:off x="5086139" y="6222490"/>
+            <a:ext cx="2019720" cy="400110"/>
+          </a:xfrm>
+          <a:prstGeom prst="rect">
+            <a:avLst/>
+          </a:prstGeom>
+          <a:noFill/>
+        </p:spPr>
+        <p:txBody>
+          <a:bodyPr wrap="square" rtlCol="0">
+            <a:spAutoFit/>
+          </a:bodyPr>
+          <a:lstStyle/>
+          <a:p>
+            <a:pPr algn="r"/>
+            <a:r>
+              <a:rPr lang="it-IT" sz="2000" b="1" dirty="0">
+                <a:solidFill>
+                  <a:schemeClr val="bg1"/>
+                </a:solidFill>
+              </a:rPr>
+              <a:t>Gianpaolo Pestilli</a:t>
+            </a:r>
+          </a:p>
+        </p:txBody>
+      </p:sp>
+      <p:sp>
+        <p:nvSpPr>
+          <p:cNvPr id="7" name="CasellaDiTesto 6">
+            <a:extLst>
+              <a:ext uri="{FF2B5EF4-FFF2-40B4-BE49-F238E27FC236}">
+                <a16:creationId xmlns:a16="http://schemas.microsoft.com/office/drawing/2014/main" id="{98081FC8-AEE9-F1BB-2240-0076E5727DCD}"/>
+              </a:ext>
+            </a:extLst>
+          </p:cNvPr>
+          <p:cNvSpPr txBox="1"/>
+          <p:nvPr/>
+        </p:nvSpPr>
+        <p:spPr>
+          <a:xfrm>
+            <a:off x="11650283" y="6222490"/>
+            <a:ext cx="262013" cy="400110"/>
+          </a:xfrm>
+          <a:prstGeom prst="rect">
+            <a:avLst/>
+          </a:prstGeom>
+          <a:noFill/>
+        </p:spPr>
+        <p:txBody>
+          <a:bodyPr wrap="square" rtlCol="0">
+            <a:spAutoFit/>
+          </a:bodyPr>
+          <a:lstStyle/>
+          <a:p>
+            <a:r>
+              <a:rPr lang="it-IT" sz="2000" b="1" dirty="0">
+                <a:solidFill>
+                  <a:schemeClr val="bg1"/>
+                </a:solidFill>
+              </a:rPr>
+              <a:t>3</a:t>
+            </a:r>
+          </a:p>
+        </p:txBody>
+      </p:sp>
+      <p:sp>
+        <p:nvSpPr>
+          <p:cNvPr id="8" name="CasellaDiTesto 7">
+            <a:extLst>
+              <a:ext uri="{FF2B5EF4-FFF2-40B4-BE49-F238E27FC236}">
+                <a16:creationId xmlns:a16="http://schemas.microsoft.com/office/drawing/2014/main" id="{68B15BBA-CB7D-CFC3-8A68-1B568777BC59}"/>
+              </a:ext>
+            </a:extLst>
+          </p:cNvPr>
+          <p:cNvSpPr txBox="1"/>
+          <p:nvPr/>
+        </p:nvSpPr>
+        <p:spPr>
+          <a:xfrm>
+            <a:off x="533399" y="728069"/>
+            <a:ext cx="11116884" cy="4770537"/>
+          </a:xfrm>
+          <a:prstGeom prst="rect">
+            <a:avLst/>
+          </a:prstGeom>
+          <a:noFill/>
+        </p:spPr>
+        <p:txBody>
+          <a:bodyPr wrap="square" rtlCol="0">
+            <a:spAutoFit/>
+          </a:bodyPr>
+          <a:lstStyle/>
+          <a:p>
+            <a:pPr algn="just"/>
+            <a:r>
+              <a:rPr lang="it-IT" sz="4000" b="1" dirty="0">
+                <a:solidFill>
+                  <a:srgbClr val="990000"/>
+                </a:solidFill>
+              </a:rPr>
+              <a:t>IDEA</a:t>
+            </a:r>
+            <a:endParaRPr lang="it-IT" sz="3200" dirty="0"/>
+          </a:p>
+          <a:p>
+            <a:pPr algn="just"/>
+            <a:endParaRPr lang="it-IT" sz="3200" dirty="0"/>
+          </a:p>
+          <a:p>
+            <a:pPr algn="just"/>
+            <a:r>
+              <a:rPr lang="it-IT" sz="3200" dirty="0"/>
+              <a:t>Il progetto si pone l’obiettivo di analizzare e confrontare le performance di vari algoritmi per il problema del </a:t>
+            </a:r>
+            <a:r>
+              <a:rPr lang="it-IT" sz="3200" b="1" dirty="0"/>
+              <a:t>minimum vertex cover </a:t>
+            </a:r>
+            <a:r>
+              <a:rPr lang="it-IT" sz="3200" dirty="0"/>
+              <a:t>su grafo non orientato.</a:t>
+            </a:r>
+          </a:p>
+          <a:p>
+            <a:pPr algn="just"/>
+            <a:endParaRPr lang="it-IT" sz="3200" dirty="0"/>
+          </a:p>
+          <a:p>
+            <a:pPr algn="just"/>
+            <a:r>
+              <a:rPr lang="it-IT" sz="3200" dirty="0"/>
+              <a:t>Vengono presi in esame sia la variante originale del problema che il </a:t>
+            </a:r>
+            <a:r>
+              <a:rPr lang="it-IT" sz="3200" b="1" dirty="0"/>
+              <a:t>minimum </a:t>
+            </a:r>
+            <a:r>
+              <a:rPr lang="it-IT" sz="3200" b="1" dirty="0" err="1"/>
+              <a:t>weighted</a:t>
+            </a:r>
+            <a:r>
+              <a:rPr lang="it-IT" sz="3200" b="1" dirty="0"/>
+              <a:t> vertex cover</a:t>
+            </a:r>
+            <a:r>
+              <a:rPr lang="it-IT" sz="3200" dirty="0"/>
+              <a:t>.</a:t>
+            </a:r>
+          </a:p>
+          <a:p>
+            <a:endParaRPr lang="it-IT" sz="4000" b="1" dirty="0">
+              <a:solidFill>
+                <a:srgbClr val="990000"/>
+              </a:solidFill>
+            </a:endParaRPr>
+          </a:p>
+        </p:txBody>
+      </p:sp>
+    </p:spTree>
+    <p:extLst>
+      <p:ext uri="{BB962C8B-B14F-4D97-AF65-F5344CB8AC3E}">
+        <p14:creationId xmlns:p14="http://schemas.microsoft.com/office/powerpoint/2010/main" val="2040321174"/>
+      </p:ext>
+    </p:extLst>
+  </p:cSld>
+  <p:clrMapOvr>
+    <a:masterClrMapping/>
+  </p:clrMapOvr>
+  <mc:AlternateContent xmlns:mc="http://schemas.openxmlformats.org/markup-compatibility/2006" xmlns:p159="http://schemas.microsoft.com/office/powerpoint/2015/09/main">
+    <mc:Choice Requires="p159">
+      <p:transition xmlns:p14="http://schemas.microsoft.com/office/powerpoint/2010/main" spd="slow" p14:dur="2000">
+        <p159:morph option="byObject"/>
+      </p:transition>
+    </mc:Choice>
+    <mc:Fallback xmlns="">
+      <p:transition spd="slow">
+        <p:fade/>
+      </p:transition>
+    </mc:Fallback>
+  </mc:AlternateContent>
+</p:sld>
+</file>
+
+<file path=ppt/slides/slide5.xml><?xml version="1.0" encoding="utf-8"?>
+<p:sld xmlns:a="http://schemas.openxmlformats.org/drawingml/2006/main" xmlns:r="http://schemas.openxmlformats.org/officeDocument/2006/relationships" xmlns:p="http://schemas.openxmlformats.org/presentationml/2006/main">
+  <p:cSld>
+    <p:spTree>
+      <p:nvGrpSpPr>
+        <p:cNvPr id="1" name="">
+          <a:extLst>
+            <a:ext uri="{FF2B5EF4-FFF2-40B4-BE49-F238E27FC236}">
+              <a16:creationId xmlns:a16="http://schemas.microsoft.com/office/drawing/2014/main" id="{A089C0AC-FA4D-E6C8-1228-983A03BAB577}"/>
+            </a:ext>
+          </a:extLst>
+        </p:cNvPr>
+        <p:cNvGrpSpPr/>
+        <p:nvPr/>
+      </p:nvGrpSpPr>
+      <p:grpSpPr>
+        <a:xfrm>
+          <a:off x="0" y="0"/>
+          <a:ext cx="0" cy="0"/>
+          <a:chOff x="0" y="0"/>
+          <a:chExt cx="0" cy="0"/>
+        </a:xfrm>
+      </p:grpSpPr>
+      <p:sp>
+        <p:nvSpPr>
+          <p:cNvPr id="5" name="Rettangolo 4">
+            <a:extLst>
+              <a:ext uri="{FF2B5EF4-FFF2-40B4-BE49-F238E27FC236}">
+                <a16:creationId xmlns:a16="http://schemas.microsoft.com/office/drawing/2014/main" id="{D6EB3C69-F5B7-DDCC-E656-FA278C44211E}"/>
+              </a:ext>
+            </a:extLst>
+          </p:cNvPr>
+          <p:cNvSpPr/>
+          <p:nvPr/>
+        </p:nvSpPr>
+        <p:spPr>
+          <a:xfrm rot="16200000">
+            <a:off x="5612871" y="326546"/>
+            <a:ext cx="966258" cy="12192000"/>
+          </a:xfrm>
+          <a:prstGeom prst="rect">
+            <a:avLst/>
+          </a:prstGeom>
+          <a:solidFill>
+            <a:srgbClr val="990000"/>
+          </a:solidFill>
+          <a:ln>
+            <a:solidFill>
+              <a:srgbClr val="990000"/>
+            </a:solidFill>
+          </a:ln>
+        </p:spPr>
+        <p:style>
+          <a:lnRef idx="2">
+            <a:schemeClr val="accent1">
+              <a:shade val="15000"/>
+            </a:schemeClr>
+          </a:lnRef>
+          <a:fillRef idx="1">
+            <a:schemeClr val="accent1"/>
+          </a:fillRef>
+          <a:effectRef idx="0">
+            <a:schemeClr val="accent1"/>
+          </a:effectRef>
+          <a:fontRef idx="minor">
+            <a:schemeClr val="lt1"/>
+          </a:fontRef>
+        </p:style>
+        <p:txBody>
+          <a:bodyPr rtlCol="0" anchor="ctr"/>
+          <a:lstStyle/>
+          <a:p>
+            <a:pPr algn="ctr"/>
+            <a:endParaRPr lang="it-IT" dirty="0"/>
+          </a:p>
+        </p:txBody>
+      </p:sp>
+      <p:sp>
+        <p:nvSpPr>
+          <p:cNvPr id="6" name="CasellaDiTesto 5">
+            <a:extLst>
+              <a:ext uri="{FF2B5EF4-FFF2-40B4-BE49-F238E27FC236}">
+                <a16:creationId xmlns:a16="http://schemas.microsoft.com/office/drawing/2014/main" id="{8BBD3796-118F-480D-76CF-4CFD0DFA1D9A}"/>
+              </a:ext>
+            </a:extLst>
+          </p:cNvPr>
+          <p:cNvSpPr txBox="1"/>
+          <p:nvPr/>
+        </p:nvSpPr>
+        <p:spPr>
+          <a:xfrm>
+            <a:off x="5086139" y="6222490"/>
+            <a:ext cx="2019720" cy="400110"/>
+          </a:xfrm>
+          <a:prstGeom prst="rect">
+            <a:avLst/>
+          </a:prstGeom>
+          <a:noFill/>
+        </p:spPr>
+        <p:txBody>
+          <a:bodyPr wrap="square" rtlCol="0">
+            <a:spAutoFit/>
+          </a:bodyPr>
+          <a:lstStyle/>
+          <a:p>
+            <a:pPr algn="r"/>
+            <a:r>
+              <a:rPr lang="it-IT" sz="2000" b="1" dirty="0">
+                <a:solidFill>
+                  <a:schemeClr val="bg1"/>
+                </a:solidFill>
+              </a:rPr>
+              <a:t>Gianpaolo Pestilli</a:t>
+            </a:r>
+          </a:p>
+        </p:txBody>
+      </p:sp>
+      <p:sp>
+        <p:nvSpPr>
+          <p:cNvPr id="7" name="CasellaDiTesto 6">
+            <a:extLst>
+              <a:ext uri="{FF2B5EF4-FFF2-40B4-BE49-F238E27FC236}">
+                <a16:creationId xmlns:a16="http://schemas.microsoft.com/office/drawing/2014/main" id="{791901B9-69F8-627F-4415-BF73A605FE9C}"/>
+              </a:ext>
+            </a:extLst>
+          </p:cNvPr>
+          <p:cNvSpPr txBox="1"/>
+          <p:nvPr/>
+        </p:nvSpPr>
+        <p:spPr>
+          <a:xfrm>
+            <a:off x="11650283" y="6222490"/>
+            <a:ext cx="262013" cy="400110"/>
+          </a:xfrm>
+          <a:prstGeom prst="rect">
+            <a:avLst/>
+          </a:prstGeom>
+          <a:noFill/>
+        </p:spPr>
+        <p:txBody>
+          <a:bodyPr wrap="square" rtlCol="0">
+            <a:spAutoFit/>
+          </a:bodyPr>
+          <a:lstStyle/>
+          <a:p>
+            <a:r>
+              <a:rPr lang="it-IT" sz="2000" b="1" dirty="0">
+                <a:solidFill>
+                  <a:schemeClr val="bg1"/>
+                </a:solidFill>
+              </a:rPr>
+              <a:t>4</a:t>
+            </a:r>
+          </a:p>
+        </p:txBody>
+      </p:sp>
+      <mc:AlternateContent xmlns:mc="http://schemas.openxmlformats.org/markup-compatibility/2006">
+        <mc:Choice xmlns:a14="http://schemas.microsoft.com/office/drawing/2010/main" Requires="a14">
+          <p:sp>
+            <p:nvSpPr>
+              <p:cNvPr id="8" name="CasellaDiTesto 7">
+                <a:extLst>
+                  <a:ext uri="{FF2B5EF4-FFF2-40B4-BE49-F238E27FC236}">
+                    <a16:creationId xmlns:a16="http://schemas.microsoft.com/office/drawing/2014/main" id="{95C98985-4886-6DA9-9D3E-AC25AAE49838}"/>
+                  </a:ext>
+                </a:extLst>
+              </p:cNvPr>
+              <p:cNvSpPr txBox="1"/>
+              <p:nvPr/>
+            </p:nvSpPr>
+            <p:spPr>
+              <a:xfrm>
+                <a:off x="533399" y="728069"/>
+                <a:ext cx="11116884" cy="4647426"/>
+              </a:xfrm>
+              <a:prstGeom prst="rect">
+                <a:avLst/>
+              </a:prstGeom>
+              <a:noFill/>
+            </p:spPr>
+            <p:txBody>
+              <a:bodyPr wrap="square" rtlCol="0">
+                <a:spAutoFit/>
+              </a:bodyPr>
+              <a:lstStyle/>
+              <a:p>
+                <a:pPr algn="just"/>
+                <a:r>
+                  <a:rPr lang="it-IT" sz="4000" b="1" dirty="0">
+                    <a:solidFill>
+                      <a:srgbClr val="990000"/>
+                    </a:solidFill>
+                  </a:rPr>
+                  <a:t>CONCETTO DI COVER</a:t>
+                </a:r>
+                <a:endParaRPr lang="it-IT" sz="3200" dirty="0"/>
+              </a:p>
+              <a:p>
+                <a:pPr algn="just"/>
+                <a:endParaRPr lang="it-IT" sz="3200" dirty="0"/>
+              </a:p>
+              <a:p>
+                <a:pPr algn="just"/>
+                <a:r>
+                  <a:rPr lang="it-IT" sz="3200" dirty="0"/>
+                  <a:t>Dato un grafo, una </a:t>
+                </a:r>
+                <a:r>
+                  <a:rPr lang="it-IT" sz="3200" b="1" dirty="0"/>
+                  <a:t>cover</a:t>
+                </a:r>
+                <a:r>
+                  <a:rPr lang="it-IT" sz="3200" dirty="0"/>
+                  <a:t> è un </a:t>
+                </a:r>
+                <a:r>
+                  <a:rPr lang="it-IT" sz="3200" b="1" dirty="0"/>
+                  <a:t>sottoinsieme S dei vertici </a:t>
+                </a:r>
+                <a:r>
+                  <a:rPr lang="it-IT" sz="3200" dirty="0"/>
+                  <a:t>tale che, per ogni arco del grafo, </a:t>
+                </a:r>
+                <a:r>
+                  <a:rPr lang="it-IT" sz="3200" b="1" dirty="0"/>
+                  <a:t>almeno uno dei suoi vertici </a:t>
+                </a:r>
+                <a:r>
+                  <a:rPr lang="it-IT" sz="3200" dirty="0"/>
+                  <a:t>appartiene ad S.</a:t>
+                </a:r>
+              </a:p>
+              <a:p>
+                <a:pPr algn="just"/>
+                <a:endParaRPr lang="it-IT" sz="3200" dirty="0"/>
+              </a:p>
+              <a:p>
+                <a:pPr algn="just"/>
+                <a:r>
+                  <a:rPr lang="it-IT" sz="3200" dirty="0"/>
+                  <a:t>G = (V,E)</a:t>
+                </a:r>
+              </a:p>
+              <a:p>
+                <a:pPr algn="just"/>
+                <a:r>
+                  <a:rPr lang="it-IT" sz="3200" b="1" dirty="0"/>
+                  <a:t>S </a:t>
+                </a:r>
+                <a14:m>
+                  <m:oMath xmlns:m="http://schemas.openxmlformats.org/officeDocument/2006/math">
+                    <m:r>
+                      <a:rPr lang="it-IT" sz="3200" b="1" i="0"/>
+                      <m:t>⊆</m:t>
+                    </m:r>
+                  </m:oMath>
+                </a14:m>
+                <a:r>
+                  <a:rPr lang="it-IT" sz="3200" b="1" dirty="0"/>
+                  <a:t> V : </a:t>
+                </a:r>
+                <a14:m>
+                  <m:oMath xmlns:m="http://schemas.openxmlformats.org/officeDocument/2006/math">
+                    <m:r>
+                      <a:rPr lang="it-IT" sz="3200" b="1" i="1">
+                        <a:latin typeface="Cambria Math" panose="02040503050406030204" pitchFamily="18" charset="0"/>
+                      </a:rPr>
+                      <m:t>∀</m:t>
+                    </m:r>
+                  </m:oMath>
+                </a14:m>
+                <a:r>
+                  <a:rPr lang="it-IT" sz="3200" b="1" dirty="0"/>
+                  <a:t> e = {</a:t>
+                </a:r>
+                <a:r>
+                  <a:rPr lang="it-IT" sz="3200" b="1" dirty="0" err="1"/>
+                  <a:t>u,v</a:t>
+                </a:r>
+                <a:r>
+                  <a:rPr lang="it-IT" sz="3200" b="1" dirty="0"/>
+                  <a:t>} </a:t>
+                </a:r>
+                <a14:m>
+                  <m:oMath xmlns:m="http://schemas.openxmlformats.org/officeDocument/2006/math">
+                    <m:r>
+                      <a:rPr lang="it-IT" sz="3200" b="1" dirty="0">
+                        <a:latin typeface="Cambria Math" panose="02040503050406030204" pitchFamily="18" charset="0"/>
+                      </a:rPr>
+                      <m:t>∈</m:t>
+                    </m:r>
+                  </m:oMath>
+                </a14:m>
+                <a:r>
+                  <a:rPr lang="it-IT" sz="3200" b="1" dirty="0"/>
+                  <a:t> E </a:t>
+                </a:r>
+                <a14:m>
+                  <m:oMath xmlns:m="http://schemas.openxmlformats.org/officeDocument/2006/math">
+                    <m:r>
+                      <a:rPr lang="it-IT" sz="3200" b="1" dirty="0" smtClean="0">
+                        <a:latin typeface="Cambria Math" panose="02040503050406030204" pitchFamily="18" charset="0"/>
+                      </a:rPr>
+                      <m:t>⇒</m:t>
+                    </m:r>
+                  </m:oMath>
+                </a14:m>
+                <a:r>
+                  <a:rPr lang="it-IT" sz="3200" b="1" dirty="0"/>
+                  <a:t> (u </a:t>
+                </a:r>
+                <a14:m>
+                  <m:oMath xmlns:m="http://schemas.openxmlformats.org/officeDocument/2006/math">
+                    <m:r>
+                      <a:rPr lang="it-IT" sz="3200" b="1" dirty="0">
+                        <a:latin typeface="Cambria Math" panose="02040503050406030204" pitchFamily="18" charset="0"/>
+                      </a:rPr>
+                      <m:t>∈</m:t>
+                    </m:r>
+                  </m:oMath>
+                </a14:m>
+                <a:r>
+                  <a:rPr lang="it-IT" sz="3200" b="1" dirty="0"/>
+                  <a:t> S) v (v </a:t>
+                </a:r>
+                <a14:m>
+                  <m:oMath xmlns:m="http://schemas.openxmlformats.org/officeDocument/2006/math">
+                    <m:r>
+                      <a:rPr lang="it-IT" sz="3200" b="1" dirty="0">
+                        <a:latin typeface="Cambria Math" panose="02040503050406030204" pitchFamily="18" charset="0"/>
+                      </a:rPr>
+                      <m:t>∈</m:t>
+                    </m:r>
+                  </m:oMath>
+                </a14:m>
+                <a:r>
+                  <a:rPr lang="it-IT" sz="3200" b="1" dirty="0"/>
+                  <a:t> S)</a:t>
+                </a:r>
+              </a:p>
+              <a:p>
+                <a:pPr algn="just"/>
+                <a:endParaRPr lang="it-IT" sz="3200" dirty="0"/>
+              </a:p>
+            </p:txBody>
+          </p:sp>
+        </mc:Choice>
+        <mc:Fallback>
+          <p:sp>
+            <p:nvSpPr>
+              <p:cNvPr id="8" name="CasellaDiTesto 7">
+                <a:extLst>
+                  <a:ext uri="{FF2B5EF4-FFF2-40B4-BE49-F238E27FC236}">
+                    <a16:creationId xmlns:a16="http://schemas.microsoft.com/office/drawing/2014/main" id="{95C98985-4886-6DA9-9D3E-AC25AAE49838}"/>
+                  </a:ext>
+                </a:extLst>
+              </p:cNvPr>
+              <p:cNvSpPr txBox="1">
+                <a:spLocks noRot="1" noChangeAspect="1" noMove="1" noResize="1" noEditPoints="1" noAdjustHandles="1" noChangeArrowheads="1" noChangeShapeType="1" noTextEdit="1"/>
+              </p:cNvSpPr>
+              <p:nvPr/>
+            </p:nvSpPr>
+            <p:spPr>
+              <a:xfrm>
+                <a:off x="533399" y="728069"/>
+                <a:ext cx="11116884" cy="4647426"/>
+              </a:xfrm>
+              <a:prstGeom prst="rect">
+                <a:avLst/>
+              </a:prstGeom>
+              <a:blipFill>
+                <a:blip r:embed="rId2"/>
+                <a:stretch>
+                  <a:fillRect l="-1919" t="-2359" r="-1371"/>
+                </a:stretch>
+              </a:blipFill>
+            </p:spPr>
+            <p:txBody>
+              <a:bodyPr/>
+              <a:lstStyle/>
+              <a:p>
+                <a:r>
+                  <a:rPr lang="it-IT">
+                    <a:noFill/>
+                  </a:rPr>
+                  <a:t> </a:t>
+                </a:r>
+              </a:p>
+            </p:txBody>
+          </p:sp>
+        </mc:Fallback>
+      </mc:AlternateContent>
+    </p:spTree>
+    <p:extLst>
+      <p:ext uri="{BB962C8B-B14F-4D97-AF65-F5344CB8AC3E}">
+        <p14:creationId xmlns:p14="http://schemas.microsoft.com/office/powerpoint/2010/main" val="2539481606"/>
+      </p:ext>
+    </p:extLst>
+  </p:cSld>
+  <p:clrMapOvr>
+    <a:masterClrMapping/>
+  </p:clrMapOvr>
+  <mc:AlternateContent xmlns:mc="http://schemas.openxmlformats.org/markup-compatibility/2006" xmlns:p159="http://schemas.microsoft.com/office/powerpoint/2015/09/main">
+    <mc:Choice Requires="p159">
+      <p:transition xmlns:p14="http://schemas.microsoft.com/office/powerpoint/2010/main" spd="slow" p14:dur="2000">
+        <p159:morph option="byObject"/>
+      </p:transition>
+    </mc:Choice>
+    <mc:Fallback xmlns="">
+      <p:transition spd="slow">
+        <p:fade/>
+      </p:transition>
+    </mc:Fallback>
+  </mc:AlternateContent>
+</p:sld>
+</file>
+
+<file path=ppt/slides/slide6.xml><?xml version="1.0" encoding="utf-8"?>
+<p:sld xmlns:a="http://schemas.openxmlformats.org/drawingml/2006/main" xmlns:r="http://schemas.openxmlformats.org/officeDocument/2006/relationships" xmlns:p="http://schemas.openxmlformats.org/presentationml/2006/main">
+  <p:cSld>
+    <p:spTree>
+      <p:nvGrpSpPr>
+        <p:cNvPr id="1" name="">
+          <a:extLst>
+            <a:ext uri="{FF2B5EF4-FFF2-40B4-BE49-F238E27FC236}">
+              <a16:creationId xmlns:a16="http://schemas.microsoft.com/office/drawing/2014/main" id="{04D3839F-864E-14C9-4A97-722F96667C8E}"/>
+            </a:ext>
+          </a:extLst>
+        </p:cNvPr>
+        <p:cNvGrpSpPr/>
+        <p:nvPr/>
+      </p:nvGrpSpPr>
+      <p:grpSpPr>
+        <a:xfrm>
+          <a:off x="0" y="0"/>
+          <a:ext cx="0" cy="0"/>
+          <a:chOff x="0" y="0"/>
+          <a:chExt cx="0" cy="0"/>
+        </a:xfrm>
+      </p:grpSpPr>
+      <p:sp>
+        <p:nvSpPr>
+          <p:cNvPr id="5" name="Rettangolo 4">
+            <a:extLst>
+              <a:ext uri="{FF2B5EF4-FFF2-40B4-BE49-F238E27FC236}">
+                <a16:creationId xmlns:a16="http://schemas.microsoft.com/office/drawing/2014/main" id="{BA7A7000-CE1C-3198-9679-EB84A67CB0ED}"/>
+              </a:ext>
+            </a:extLst>
+          </p:cNvPr>
+          <p:cNvSpPr/>
+          <p:nvPr/>
+        </p:nvSpPr>
+        <p:spPr>
+          <a:xfrm rot="16200000">
+            <a:off x="5612871" y="326546"/>
+            <a:ext cx="966258" cy="12192000"/>
+          </a:xfrm>
+          <a:prstGeom prst="rect">
+            <a:avLst/>
+          </a:prstGeom>
+          <a:solidFill>
+            <a:srgbClr val="990000"/>
+          </a:solidFill>
+          <a:ln>
+            <a:solidFill>
+              <a:srgbClr val="990000"/>
+            </a:solidFill>
+          </a:ln>
+        </p:spPr>
+        <p:style>
+          <a:lnRef idx="2">
+            <a:schemeClr val="accent1">
+              <a:shade val="15000"/>
+            </a:schemeClr>
+          </a:lnRef>
+          <a:fillRef idx="1">
+            <a:schemeClr val="accent1"/>
+          </a:fillRef>
+          <a:effectRef idx="0">
+            <a:schemeClr val="accent1"/>
+          </a:effectRef>
+          <a:fontRef idx="minor">
+            <a:schemeClr val="lt1"/>
+          </a:fontRef>
+        </p:style>
+        <p:txBody>
+          <a:bodyPr rtlCol="0" anchor="ctr"/>
+          <a:lstStyle/>
+          <a:p>
+            <a:pPr algn="ctr"/>
+            <a:endParaRPr lang="it-IT" dirty="0"/>
+          </a:p>
+        </p:txBody>
+      </p:sp>
+      <p:sp>
+        <p:nvSpPr>
+          <p:cNvPr id="6" name="CasellaDiTesto 5">
+            <a:extLst>
+              <a:ext uri="{FF2B5EF4-FFF2-40B4-BE49-F238E27FC236}">
+                <a16:creationId xmlns:a16="http://schemas.microsoft.com/office/drawing/2014/main" id="{E6518A9F-9EE6-4DA3-6D70-A197ACBCFC27}"/>
+              </a:ext>
+            </a:extLst>
+          </p:cNvPr>
+          <p:cNvSpPr txBox="1"/>
+          <p:nvPr/>
+        </p:nvSpPr>
+        <p:spPr>
+          <a:xfrm>
+            <a:off x="5086139" y="6222490"/>
+            <a:ext cx="2019720" cy="400110"/>
+          </a:xfrm>
+          <a:prstGeom prst="rect">
+            <a:avLst/>
+          </a:prstGeom>
+          <a:noFill/>
+        </p:spPr>
+        <p:txBody>
+          <a:bodyPr wrap="square" rtlCol="0">
+            <a:spAutoFit/>
+          </a:bodyPr>
+          <a:lstStyle/>
+          <a:p>
+            <a:pPr algn="r"/>
+            <a:r>
+              <a:rPr lang="it-IT" sz="2000" b="1" dirty="0">
+                <a:solidFill>
+                  <a:schemeClr val="bg1"/>
+                </a:solidFill>
+              </a:rPr>
+              <a:t>Gianpaolo Pestilli</a:t>
+            </a:r>
+          </a:p>
+        </p:txBody>
+      </p:sp>
+      <p:sp>
+        <p:nvSpPr>
+          <p:cNvPr id="7" name="CasellaDiTesto 6">
+            <a:extLst>
+              <a:ext uri="{FF2B5EF4-FFF2-40B4-BE49-F238E27FC236}">
+                <a16:creationId xmlns:a16="http://schemas.microsoft.com/office/drawing/2014/main" id="{A4E29D4F-5562-539C-9B36-7515B0F5EE6A}"/>
+              </a:ext>
+            </a:extLst>
+          </p:cNvPr>
+          <p:cNvSpPr txBox="1"/>
+          <p:nvPr/>
+        </p:nvSpPr>
+        <p:spPr>
+          <a:xfrm>
+            <a:off x="11650283" y="6222490"/>
+            <a:ext cx="262013" cy="400110"/>
+          </a:xfrm>
+          <a:prstGeom prst="rect">
+            <a:avLst/>
+          </a:prstGeom>
+          <a:noFill/>
+        </p:spPr>
+        <p:txBody>
+          <a:bodyPr wrap="square" rtlCol="0">
+            <a:spAutoFit/>
+          </a:bodyPr>
+          <a:lstStyle/>
+          <a:p>
+            <a:r>
+              <a:rPr lang="it-IT" sz="2000" b="1" dirty="0">
+                <a:solidFill>
+                  <a:schemeClr val="bg1"/>
+                </a:solidFill>
+              </a:rPr>
+              <a:t>5</a:t>
+            </a:r>
+          </a:p>
+        </p:txBody>
+      </p:sp>
+      <p:sp>
+        <p:nvSpPr>
+          <p:cNvPr id="8" name="CasellaDiTesto 7">
+            <a:extLst>
+              <a:ext uri="{FF2B5EF4-FFF2-40B4-BE49-F238E27FC236}">
+                <a16:creationId xmlns:a16="http://schemas.microsoft.com/office/drawing/2014/main" id="{9F03DD3B-EFDA-D9F9-B8C9-CC3ECD8F3E01}"/>
+              </a:ext>
+            </a:extLst>
+          </p:cNvPr>
+          <p:cNvSpPr txBox="1"/>
+          <p:nvPr/>
+        </p:nvSpPr>
+        <p:spPr>
+          <a:xfrm>
+            <a:off x="533399" y="728069"/>
+            <a:ext cx="11116884" cy="5755422"/>
+          </a:xfrm>
+          <a:prstGeom prst="rect">
+            <a:avLst/>
+          </a:prstGeom>
+          <a:noFill/>
+        </p:spPr>
+        <p:txBody>
+          <a:bodyPr wrap="square" rtlCol="0">
+            <a:spAutoFit/>
+          </a:bodyPr>
+          <a:lstStyle/>
+          <a:p>
+            <a:pPr algn="just"/>
+            <a:r>
+              <a:rPr lang="it-IT" sz="4000" b="1" dirty="0">
+                <a:solidFill>
+                  <a:srgbClr val="990000"/>
+                </a:solidFill>
+              </a:rPr>
+              <a:t>COVER MINIMA</a:t>
+            </a:r>
+          </a:p>
+          <a:p>
+            <a:pPr algn="just"/>
+            <a:endParaRPr lang="it-IT" sz="4000" b="1" dirty="0">
+              <a:solidFill>
+                <a:srgbClr val="990000"/>
+              </a:solidFill>
+            </a:endParaRPr>
+          </a:p>
+          <a:p>
+            <a:pPr marL="457200" indent="-457200" algn="just">
+              <a:buFont typeface="Arial" panose="020B0604020202020204" pitchFamily="34" charset="0"/>
+              <a:buChar char="•"/>
+            </a:pPr>
+            <a:r>
+              <a:rPr lang="it-IT" sz="3200" b="1" dirty="0"/>
+              <a:t>Sottoinsieme S di cardinalità minima</a:t>
+            </a:r>
+          </a:p>
+          <a:p>
+            <a:pPr marL="457200" indent="-457200" algn="just">
+              <a:buFont typeface="Arial" panose="020B0604020202020204" pitchFamily="34" charset="0"/>
+              <a:buChar char="•"/>
+            </a:pPr>
+            <a:endParaRPr lang="it-IT" sz="3200" b="1" dirty="0"/>
+          </a:p>
+          <a:p>
+            <a:pPr marL="457200" indent="-457200" algn="just">
+              <a:buFont typeface="Arial" panose="020B0604020202020204" pitchFamily="34" charset="0"/>
+              <a:buChar char="•"/>
+            </a:pPr>
+            <a:endParaRPr lang="it-IT" sz="3200" b="1" dirty="0"/>
+          </a:p>
+          <a:p>
+            <a:pPr marL="457200" indent="-457200" algn="just">
+              <a:buFont typeface="Arial" panose="020B0604020202020204" pitchFamily="34" charset="0"/>
+              <a:buChar char="•"/>
+            </a:pPr>
+            <a:r>
+              <a:rPr lang="it-IT" sz="3200" b="1" dirty="0"/>
+              <a:t>Sottoinsieme S di peso totale minore</a:t>
+            </a:r>
+          </a:p>
+          <a:p>
+            <a:pPr marL="914400" lvl="1" indent="-457200" algn="just">
+              <a:buFont typeface="Arial" panose="020B0604020202020204" pitchFamily="34" charset="0"/>
+              <a:buChar char="•"/>
+            </a:pPr>
+            <a:r>
+              <a:rPr lang="it-IT" sz="3200" dirty="0"/>
+              <a:t>Peso totale = somma dei pesi di tutti i vertici presenti nella cover</a:t>
+            </a:r>
+          </a:p>
+          <a:p>
+            <a:pPr marL="457200" indent="-457200" algn="just">
+              <a:buFont typeface="Arial" panose="020B0604020202020204" pitchFamily="34" charset="0"/>
+              <a:buChar char="•"/>
+            </a:pPr>
+            <a:endParaRPr lang="it-IT" sz="3200" dirty="0"/>
+          </a:p>
+          <a:p>
+            <a:pPr algn="just"/>
+            <a:endParaRPr lang="it-IT" sz="3200" b="1" dirty="0"/>
+          </a:p>
+          <a:p>
+            <a:pPr algn="just"/>
+            <a:endParaRPr lang="it-IT" sz="3200" dirty="0"/>
+          </a:p>
+        </p:txBody>
+      </p:sp>
+    </p:spTree>
+    <p:extLst>
+      <p:ext uri="{BB962C8B-B14F-4D97-AF65-F5344CB8AC3E}">
+        <p14:creationId xmlns:p14="http://schemas.microsoft.com/office/powerpoint/2010/main" val="1552696109"/>
+      </p:ext>
+    </p:extLst>
+  </p:cSld>
+  <p:clrMapOvr>
+    <a:masterClrMapping/>
+  </p:clrMapOvr>
+  <mc:AlternateContent xmlns:mc="http://schemas.openxmlformats.org/markup-compatibility/2006" xmlns:p159="http://schemas.microsoft.com/office/powerpoint/2015/09/main">
+    <mc:Choice Requires="p159">
+      <p:transition xmlns:p14="http://schemas.microsoft.com/office/powerpoint/2010/main" spd="slow" p14:dur="2000">
+        <p159:morph option="byObject"/>
+      </p:transition>
+    </mc:Choice>
+    <mc:Fallback xmlns="">
+      <p:transition spd="slow">
+        <p:fade/>
+      </p:transition>
+    </mc:Fallback>
+  </mc:AlternateContent>
+</p:sld>
+</file>
+
+<file path=ppt/slides/slide7.xml><?xml version="1.0" encoding="utf-8"?>
+<p:sld xmlns:a="http://schemas.openxmlformats.org/drawingml/2006/main" xmlns:r="http://schemas.openxmlformats.org/officeDocument/2006/relationships" xmlns:p="http://schemas.openxmlformats.org/presentationml/2006/main">
+  <p:cSld>
+    <p:spTree>
+      <p:nvGrpSpPr>
+        <p:cNvPr id="1" name="">
+          <a:extLst>
+            <a:ext uri="{FF2B5EF4-FFF2-40B4-BE49-F238E27FC236}">
+              <a16:creationId xmlns:a16="http://schemas.microsoft.com/office/drawing/2014/main" id="{EB03D11F-D29B-4911-9725-49539C093976}"/>
+            </a:ext>
+          </a:extLst>
+        </p:cNvPr>
+        <p:cNvGrpSpPr/>
+        <p:nvPr/>
+      </p:nvGrpSpPr>
+      <p:grpSpPr>
+        <a:xfrm>
+          <a:off x="0" y="0"/>
+          <a:ext cx="0" cy="0"/>
+          <a:chOff x="0" y="0"/>
+          <a:chExt cx="0" cy="0"/>
+        </a:xfrm>
+      </p:grpSpPr>
+      <p:sp>
+        <p:nvSpPr>
+          <p:cNvPr id="5" name="Rettangolo 4">
+            <a:extLst>
+              <a:ext uri="{FF2B5EF4-FFF2-40B4-BE49-F238E27FC236}">
+                <a16:creationId xmlns:a16="http://schemas.microsoft.com/office/drawing/2014/main" id="{2FD7E69A-FBCD-B7E2-31CA-4366C7E18B38}"/>
+              </a:ext>
+            </a:extLst>
+          </p:cNvPr>
+          <p:cNvSpPr/>
+          <p:nvPr/>
+        </p:nvSpPr>
+        <p:spPr>
+          <a:xfrm rot="16200000">
+            <a:off x="5612871" y="326546"/>
+            <a:ext cx="966258" cy="12192000"/>
+          </a:xfrm>
+          <a:prstGeom prst="rect">
+            <a:avLst/>
+          </a:prstGeom>
+          <a:solidFill>
+            <a:srgbClr val="990000"/>
+          </a:solidFill>
+          <a:ln>
+            <a:solidFill>
+              <a:srgbClr val="990000"/>
+            </a:solidFill>
+          </a:ln>
+        </p:spPr>
+        <p:style>
+          <a:lnRef idx="2">
+            <a:schemeClr val="accent1">
+              <a:shade val="15000"/>
+            </a:schemeClr>
+          </a:lnRef>
+          <a:fillRef idx="1">
+            <a:schemeClr val="accent1"/>
+          </a:fillRef>
+          <a:effectRef idx="0">
+            <a:schemeClr val="accent1"/>
+          </a:effectRef>
+          <a:fontRef idx="minor">
+            <a:schemeClr val="lt1"/>
+          </a:fontRef>
+        </p:style>
+        <p:txBody>
+          <a:bodyPr rtlCol="0" anchor="ctr"/>
+          <a:lstStyle/>
+          <a:p>
+            <a:pPr algn="ctr"/>
+            <a:endParaRPr lang="it-IT" dirty="0"/>
+          </a:p>
+        </p:txBody>
+      </p:sp>
+      <p:sp>
+        <p:nvSpPr>
+          <p:cNvPr id="6" name="CasellaDiTesto 5">
+            <a:extLst>
+              <a:ext uri="{FF2B5EF4-FFF2-40B4-BE49-F238E27FC236}">
+                <a16:creationId xmlns:a16="http://schemas.microsoft.com/office/drawing/2014/main" id="{D13F7D9B-8386-6CDA-EF67-A39F516B5056}"/>
+              </a:ext>
+            </a:extLst>
+          </p:cNvPr>
+          <p:cNvSpPr txBox="1"/>
+          <p:nvPr/>
+        </p:nvSpPr>
+        <p:spPr>
+          <a:xfrm>
+            <a:off x="5086139" y="6222490"/>
+            <a:ext cx="2019720" cy="400110"/>
+          </a:xfrm>
+          <a:prstGeom prst="rect">
+            <a:avLst/>
+          </a:prstGeom>
+          <a:noFill/>
+        </p:spPr>
+        <p:txBody>
+          <a:bodyPr wrap="square" rtlCol="0">
+            <a:spAutoFit/>
+          </a:bodyPr>
+          <a:lstStyle/>
+          <a:p>
+            <a:pPr algn="r"/>
+            <a:r>
+              <a:rPr lang="it-IT" sz="2000" b="1" dirty="0">
+                <a:solidFill>
+                  <a:schemeClr val="bg1"/>
+                </a:solidFill>
+              </a:rPr>
+              <a:t>Gianpaolo Pestilli</a:t>
+            </a:r>
+          </a:p>
+        </p:txBody>
+      </p:sp>
+      <p:sp>
+        <p:nvSpPr>
+          <p:cNvPr id="7" name="CasellaDiTesto 6">
+            <a:extLst>
+              <a:ext uri="{FF2B5EF4-FFF2-40B4-BE49-F238E27FC236}">
+                <a16:creationId xmlns:a16="http://schemas.microsoft.com/office/drawing/2014/main" id="{161EC2B6-336C-1F38-2575-BDD5C5488E8C}"/>
+              </a:ext>
+            </a:extLst>
+          </p:cNvPr>
+          <p:cNvSpPr txBox="1"/>
+          <p:nvPr/>
+        </p:nvSpPr>
+        <p:spPr>
+          <a:xfrm>
+            <a:off x="11650283" y="6222490"/>
+            <a:ext cx="262013" cy="400110"/>
+          </a:xfrm>
+          <a:prstGeom prst="rect">
+            <a:avLst/>
+          </a:prstGeom>
+          <a:noFill/>
+        </p:spPr>
+        <p:txBody>
+          <a:bodyPr wrap="square" rtlCol="0">
+            <a:spAutoFit/>
+          </a:bodyPr>
+          <a:lstStyle/>
+          <a:p>
+            <a:r>
+              <a:rPr lang="it-IT" sz="2000" b="1" dirty="0">
+                <a:solidFill>
+                  <a:schemeClr val="bg1"/>
+                </a:solidFill>
+              </a:rPr>
+              <a:t>6</a:t>
+            </a:r>
+          </a:p>
+        </p:txBody>
+      </p:sp>
+      <p:sp>
+        <p:nvSpPr>
+          <p:cNvPr id="8" name="CasellaDiTesto 7">
+            <a:extLst>
+              <a:ext uri="{FF2B5EF4-FFF2-40B4-BE49-F238E27FC236}">
+                <a16:creationId xmlns:a16="http://schemas.microsoft.com/office/drawing/2014/main" id="{4A8F6C2F-DF59-78F3-10AF-6F012DBF3E48}"/>
+              </a:ext>
+            </a:extLst>
+          </p:cNvPr>
+          <p:cNvSpPr txBox="1"/>
+          <p:nvPr/>
+        </p:nvSpPr>
+        <p:spPr>
+          <a:xfrm>
+            <a:off x="533399" y="728069"/>
+            <a:ext cx="6304281" cy="4324902"/>
+          </a:xfrm>
+          <a:prstGeom prst="rect">
+            <a:avLst/>
+          </a:prstGeom>
+          <a:noFill/>
+        </p:spPr>
+        <p:txBody>
+          <a:bodyPr wrap="square" rtlCol="0">
+            <a:spAutoFit/>
+          </a:bodyPr>
+          <a:lstStyle/>
+          <a:p>
+            <a:r>
+              <a:rPr lang="it-IT" sz="4000" b="1" dirty="0">
+                <a:solidFill>
+                  <a:srgbClr val="990000"/>
+                </a:solidFill>
+              </a:rPr>
+              <a:t>ROADMAP:</a:t>
+            </a:r>
+          </a:p>
+          <a:p>
+            <a:pPr marL="342900" indent="-342900">
+              <a:lnSpc>
+                <a:spcPct val="150000"/>
+              </a:lnSpc>
+              <a:buAutoNum type="arabicPeriod"/>
+            </a:pPr>
+            <a:r>
+              <a:rPr lang="it-IT" sz="3200" dirty="0">
+                <a:solidFill>
+                  <a:schemeClr val="bg2">
+                    <a:lumMod val="75000"/>
+                  </a:schemeClr>
+                </a:solidFill>
+              </a:rPr>
+              <a:t>IDEA DEL PROGETTO</a:t>
+            </a:r>
+          </a:p>
+          <a:p>
+            <a:pPr marL="342900" indent="-342900">
+              <a:lnSpc>
+                <a:spcPct val="150000"/>
+              </a:lnSpc>
+              <a:buAutoNum type="arabicPeriod"/>
+            </a:pPr>
+            <a:r>
+              <a:rPr lang="it-IT" sz="3200" b="1" dirty="0"/>
+              <a:t>ALGORITMI CONFRONTATI</a:t>
+            </a:r>
+          </a:p>
+          <a:p>
+            <a:pPr marL="342900" indent="-342900">
+              <a:lnSpc>
+                <a:spcPct val="150000"/>
+              </a:lnSpc>
+              <a:buAutoNum type="arabicPeriod"/>
+            </a:pPr>
+            <a:r>
+              <a:rPr lang="it-IT" sz="3200" dirty="0">
+                <a:solidFill>
+                  <a:schemeClr val="bg2">
+                    <a:lumMod val="75000"/>
+                  </a:schemeClr>
+                </a:solidFill>
+              </a:rPr>
+              <a:t>METODOLOGIA</a:t>
+            </a:r>
+          </a:p>
+          <a:p>
+            <a:pPr marL="342900" indent="-342900">
+              <a:lnSpc>
+                <a:spcPct val="150000"/>
+              </a:lnSpc>
+              <a:buAutoNum type="arabicPeriod"/>
+            </a:pPr>
+            <a:r>
+              <a:rPr lang="it-IT" sz="3200" dirty="0">
+                <a:solidFill>
+                  <a:schemeClr val="bg2">
+                    <a:lumMod val="75000"/>
+                  </a:schemeClr>
+                </a:solidFill>
+              </a:rPr>
+              <a:t>RISULTATI PIÙ SIGNIFICATIVI</a:t>
+            </a:r>
+          </a:p>
+          <a:p>
+            <a:pPr marL="342900" indent="-342900">
+              <a:lnSpc>
+                <a:spcPct val="150000"/>
+              </a:lnSpc>
+              <a:buAutoNum type="arabicPeriod"/>
+            </a:pPr>
+            <a:r>
+              <a:rPr lang="it-IT" sz="3200" dirty="0">
+                <a:solidFill>
+                  <a:schemeClr val="bg2">
+                    <a:lumMod val="75000"/>
+                  </a:schemeClr>
+                </a:solidFill>
+              </a:rPr>
+              <a:t>CONCLUSIONI</a:t>
+            </a:r>
+          </a:p>
+        </p:txBody>
+      </p:sp>
+    </p:spTree>
+    <p:extLst>
+      <p:ext uri="{BB962C8B-B14F-4D97-AF65-F5344CB8AC3E}">
+        <p14:creationId xmlns:p14="http://schemas.microsoft.com/office/powerpoint/2010/main" val="1244029088"/>
+      </p:ext>
+    </p:extLst>
+  </p:cSld>
+  <p:clrMapOvr>
+    <a:masterClrMapping/>
+  </p:clrMapOvr>
+  <mc:AlternateContent xmlns:mc="http://schemas.openxmlformats.org/markup-compatibility/2006" xmlns:p159="http://schemas.microsoft.com/office/powerpoint/2015/09/main">
+    <mc:Choice Requires="p159">
+      <p:transition xmlns:p14="http://schemas.microsoft.com/office/powerpoint/2010/main" spd="slow" p14:dur="2000">
+        <p159:morph option="byObject"/>
+      </p:transition>
+    </mc:Choice>
+    <mc:Fallback xmlns="">
+      <p:transition spd="slow">
+        <p:fade/>
+      </p:transition>
+    </mc:Fallback>
+  </mc:AlternateContent>
+</p:sld>
+</file>
+
+<file path=ppt/slides/slide8.xml><?xml version="1.0" encoding="utf-8"?>
+<p:sld xmlns:a="http://schemas.openxmlformats.org/drawingml/2006/main" xmlns:r="http://schemas.openxmlformats.org/officeDocument/2006/relationships" xmlns:p="http://schemas.openxmlformats.org/presentationml/2006/main">
+  <p:cSld>
+    <p:spTree>
+      <p:nvGrpSpPr>
+        <p:cNvPr id="1" name="">
+          <a:extLst>
+            <a:ext uri="{FF2B5EF4-FFF2-40B4-BE49-F238E27FC236}">
+              <a16:creationId xmlns:a16="http://schemas.microsoft.com/office/drawing/2014/main" id="{01C7C550-5246-62F8-642A-7062A379B2C8}"/>
+            </a:ext>
+          </a:extLst>
+        </p:cNvPr>
+        <p:cNvGrpSpPr/>
+        <p:nvPr/>
+      </p:nvGrpSpPr>
+      <p:grpSpPr>
+        <a:xfrm>
+          <a:off x="0" y="0"/>
+          <a:ext cx="0" cy="0"/>
+          <a:chOff x="0" y="0"/>
+          <a:chExt cx="0" cy="0"/>
+        </a:xfrm>
+      </p:grpSpPr>
+      <p:sp>
+        <p:nvSpPr>
+          <p:cNvPr id="5" name="Rettangolo 4">
+            <a:extLst>
+              <a:ext uri="{FF2B5EF4-FFF2-40B4-BE49-F238E27FC236}">
+                <a16:creationId xmlns:a16="http://schemas.microsoft.com/office/drawing/2014/main" id="{12AC18B2-2919-5EE3-CEC1-A1233CE1FD63}"/>
+              </a:ext>
+            </a:extLst>
+          </p:cNvPr>
+          <p:cNvSpPr/>
+          <p:nvPr/>
+        </p:nvSpPr>
+        <p:spPr>
+          <a:xfrm rot="16200000">
+            <a:off x="5612871" y="326546"/>
+            <a:ext cx="966258" cy="12192000"/>
+          </a:xfrm>
+          <a:prstGeom prst="rect">
+            <a:avLst/>
+          </a:prstGeom>
+          <a:solidFill>
+            <a:srgbClr val="990000"/>
+          </a:solidFill>
+          <a:ln>
+            <a:solidFill>
+              <a:srgbClr val="990000"/>
+            </a:solidFill>
+          </a:ln>
+        </p:spPr>
+        <p:style>
+          <a:lnRef idx="2">
+            <a:schemeClr val="accent1">
+              <a:shade val="15000"/>
+            </a:schemeClr>
+          </a:lnRef>
+          <a:fillRef idx="1">
+            <a:schemeClr val="accent1"/>
+          </a:fillRef>
+          <a:effectRef idx="0">
+            <a:schemeClr val="accent1"/>
+          </a:effectRef>
+          <a:fontRef idx="minor">
+            <a:schemeClr val="lt1"/>
+          </a:fontRef>
+        </p:style>
+        <p:txBody>
+          <a:bodyPr rtlCol="0" anchor="ctr"/>
+          <a:lstStyle/>
+          <a:p>
+            <a:pPr algn="ctr"/>
+            <a:endParaRPr lang="it-IT" dirty="0"/>
+          </a:p>
+        </p:txBody>
+      </p:sp>
+      <p:sp>
+        <p:nvSpPr>
+          <p:cNvPr id="6" name="CasellaDiTesto 5">
+            <a:extLst>
+              <a:ext uri="{FF2B5EF4-FFF2-40B4-BE49-F238E27FC236}">
+                <a16:creationId xmlns:a16="http://schemas.microsoft.com/office/drawing/2014/main" id="{5247A63D-EB98-4FCC-C824-9F5D2D67C622}"/>
+              </a:ext>
+            </a:extLst>
+          </p:cNvPr>
+          <p:cNvSpPr txBox="1"/>
+          <p:nvPr/>
+        </p:nvSpPr>
+        <p:spPr>
+          <a:xfrm>
+            <a:off x="5086139" y="6222490"/>
+            <a:ext cx="2019720" cy="400110"/>
+          </a:xfrm>
+          <a:prstGeom prst="rect">
+            <a:avLst/>
+          </a:prstGeom>
+          <a:noFill/>
+        </p:spPr>
+        <p:txBody>
+          <a:bodyPr wrap="square" rtlCol="0">
+            <a:spAutoFit/>
+          </a:bodyPr>
+          <a:lstStyle/>
+          <a:p>
+            <a:pPr algn="r"/>
+            <a:r>
+              <a:rPr lang="it-IT" sz="2000" b="1" dirty="0">
+                <a:solidFill>
+                  <a:schemeClr val="bg1"/>
+                </a:solidFill>
+              </a:rPr>
+              <a:t>Gianpaolo Pestilli</a:t>
+            </a:r>
+          </a:p>
+        </p:txBody>
+      </p:sp>
+      <p:sp>
+        <p:nvSpPr>
+          <p:cNvPr id="7" name="CasellaDiTesto 6">
+            <a:extLst>
+              <a:ext uri="{FF2B5EF4-FFF2-40B4-BE49-F238E27FC236}">
+                <a16:creationId xmlns:a16="http://schemas.microsoft.com/office/drawing/2014/main" id="{0A12123A-9F44-697E-1F75-975F82D7BAA6}"/>
+              </a:ext>
+            </a:extLst>
+          </p:cNvPr>
+          <p:cNvSpPr txBox="1"/>
+          <p:nvPr/>
+        </p:nvSpPr>
+        <p:spPr>
+          <a:xfrm>
+            <a:off x="11650283" y="6222490"/>
+            <a:ext cx="262013" cy="400110"/>
+          </a:xfrm>
+          <a:prstGeom prst="rect">
+            <a:avLst/>
+          </a:prstGeom>
+          <a:noFill/>
+        </p:spPr>
+        <p:txBody>
+          <a:bodyPr wrap="square" rtlCol="0">
+            <a:spAutoFit/>
+          </a:bodyPr>
+          <a:lstStyle/>
+          <a:p>
+            <a:r>
+              <a:rPr lang="it-IT" sz="2000" b="1" dirty="0">
+                <a:solidFill>
+                  <a:schemeClr val="bg1"/>
+                </a:solidFill>
+              </a:rPr>
+              <a:t>7</a:t>
+            </a:r>
+          </a:p>
+        </p:txBody>
+      </p:sp>
+      <p:sp>
+        <p:nvSpPr>
+          <p:cNvPr id="8" name="CasellaDiTesto 7">
+            <a:extLst>
+              <a:ext uri="{FF2B5EF4-FFF2-40B4-BE49-F238E27FC236}">
+                <a16:creationId xmlns:a16="http://schemas.microsoft.com/office/drawing/2014/main" id="{0C2E51A3-9F65-61AF-3FC4-BDFA9CD623F2}"/>
+              </a:ext>
+            </a:extLst>
+          </p:cNvPr>
+          <p:cNvSpPr txBox="1"/>
+          <p:nvPr/>
+        </p:nvSpPr>
+        <p:spPr>
+          <a:xfrm>
+            <a:off x="533399" y="728069"/>
+            <a:ext cx="11116884" cy="1277273"/>
+          </a:xfrm>
+          <a:prstGeom prst="rect">
+            <a:avLst/>
+          </a:prstGeom>
+          <a:noFill/>
+        </p:spPr>
+        <p:txBody>
+          <a:bodyPr wrap="square" rtlCol="0">
+            <a:spAutoFit/>
+          </a:bodyPr>
+          <a:lstStyle/>
+          <a:p>
+            <a:pPr algn="just">
+              <a:spcAft>
+                <a:spcPts val="600"/>
+              </a:spcAft>
+            </a:pPr>
+            <a:r>
+              <a:rPr lang="it-IT" sz="4000" b="1" dirty="0">
+                <a:solidFill>
+                  <a:srgbClr val="990000"/>
+                </a:solidFill>
+              </a:rPr>
+              <a:t>VERTEX COVER NON PESATO</a:t>
+            </a:r>
+          </a:p>
+          <a:p>
+            <a:pPr algn="just">
+              <a:spcAft>
+                <a:spcPts val="600"/>
+              </a:spcAft>
+            </a:pPr>
+            <a:r>
+              <a:rPr lang="it-IT" sz="3200" b="1" dirty="0"/>
+              <a:t>Algoritmo 1 (si parte da un vertice qualsiasi)</a:t>
+            </a:r>
+            <a:endParaRPr lang="it-IT" sz="3200" dirty="0"/>
+          </a:p>
+        </p:txBody>
+      </p:sp>
+      <p:pic>
+        <p:nvPicPr>
+          <p:cNvPr id="11" name="Immagine 10">
+            <a:extLst>
+              <a:ext uri="{FF2B5EF4-FFF2-40B4-BE49-F238E27FC236}">
+                <a16:creationId xmlns:a16="http://schemas.microsoft.com/office/drawing/2014/main" id="{355780FD-742B-FB21-690A-18D37ECBB647}"/>
+              </a:ext>
+            </a:extLst>
+          </p:cNvPr>
+          <p:cNvPicPr>
+            <a:picLocks noChangeAspect="1"/>
+          </p:cNvPicPr>
+          <p:nvPr/>
+        </p:nvPicPr>
+        <p:blipFill>
+          <a:blip r:embed="rId2"/>
+          <a:stretch>
+            <a:fillRect/>
+          </a:stretch>
+        </p:blipFill>
+        <p:spPr>
+          <a:xfrm>
+            <a:off x="533399" y="2118466"/>
+            <a:ext cx="4086373" cy="3707826"/>
+          </a:xfrm>
+          <a:prstGeom prst="rect">
+            <a:avLst/>
+          </a:prstGeom>
+        </p:spPr>
+      </p:pic>
+    </p:spTree>
+    <p:extLst>
+      <p:ext uri="{BB962C8B-B14F-4D97-AF65-F5344CB8AC3E}">
+        <p14:creationId xmlns:p14="http://schemas.microsoft.com/office/powerpoint/2010/main" val="3400680705"/>
+      </p:ext>
+    </p:extLst>
+  </p:cSld>
+  <p:clrMapOvr>
+    <a:masterClrMapping/>
+  </p:clrMapOvr>
+  <mc:AlternateContent xmlns:mc="http://schemas.openxmlformats.org/markup-compatibility/2006" xmlns:p159="http://schemas.microsoft.com/office/powerpoint/2015/09/main">
+    <mc:Choice Requires="p159">
+      <p:transition xmlns:p14="http://schemas.microsoft.com/office/powerpoint/2010/main" spd="slow" p14:dur="2000">
+        <p159:morph option="byObject"/>
+      </p:transition>
+    </mc:Choice>
+    <mc:Fallback xmlns="">
+      <p:transition spd="slow">
+        <p:fade/>
+      </p:transition>
+    </mc:Fallback>
+  </mc:AlternateContent>
+</p:sld>
+</file>
+
+<file path=ppt/slides/slide9.xml><?xml version="1.0" encoding="utf-8"?>
+<p:sld xmlns:a="http://schemas.openxmlformats.org/drawingml/2006/main" xmlns:r="http://schemas.openxmlformats.org/officeDocument/2006/relationships" xmlns:p="http://schemas.openxmlformats.org/presentationml/2006/main">
+  <p:cSld>
+    <p:spTree>
+      <p:nvGrpSpPr>
+        <p:cNvPr id="1" name="">
+          <a:extLst>
+            <a:ext uri="{FF2B5EF4-FFF2-40B4-BE49-F238E27FC236}">
+              <a16:creationId xmlns:a16="http://schemas.microsoft.com/office/drawing/2014/main" id="{497D1F40-733A-62AF-6B74-81746B8D4E51}"/>
+            </a:ext>
+          </a:extLst>
+        </p:cNvPr>
+        <p:cNvGrpSpPr/>
+        <p:nvPr/>
+      </p:nvGrpSpPr>
+      <p:grpSpPr>
+        <a:xfrm>
+          <a:off x="0" y="0"/>
+          <a:ext cx="0" cy="0"/>
+          <a:chOff x="0" y="0"/>
+          <a:chExt cx="0" cy="0"/>
+        </a:xfrm>
+      </p:grpSpPr>
+      <p:sp>
+        <p:nvSpPr>
+          <p:cNvPr id="5" name="Rettangolo 4">
+            <a:extLst>
+              <a:ext uri="{FF2B5EF4-FFF2-40B4-BE49-F238E27FC236}">
+                <a16:creationId xmlns:a16="http://schemas.microsoft.com/office/drawing/2014/main" id="{EBCF60E4-17F4-1A54-8512-7511AF8F6B4F}"/>
+              </a:ext>
+            </a:extLst>
+          </p:cNvPr>
+          <p:cNvSpPr/>
+          <p:nvPr/>
+        </p:nvSpPr>
+        <p:spPr>
+          <a:xfrm rot="16200000">
+            <a:off x="5612871" y="326546"/>
+            <a:ext cx="966258" cy="12192000"/>
+          </a:xfrm>
+          <a:prstGeom prst="rect">
+            <a:avLst/>
+          </a:prstGeom>
+          <a:solidFill>
+            <a:srgbClr val="990000"/>
+          </a:solidFill>
+          <a:ln>
+            <a:solidFill>
+              <a:srgbClr val="990000"/>
+            </a:solidFill>
+          </a:ln>
+        </p:spPr>
+        <p:style>
+          <a:lnRef idx="2">
+            <a:schemeClr val="accent1">
+              <a:shade val="15000"/>
+            </a:schemeClr>
+          </a:lnRef>
+          <a:fillRef idx="1">
+            <a:schemeClr val="accent1"/>
+          </a:fillRef>
+          <a:effectRef idx="0">
+            <a:schemeClr val="accent1"/>
+          </a:effectRef>
+          <a:fontRef idx="minor">
+            <a:schemeClr val="lt1"/>
+          </a:fontRef>
+        </p:style>
+        <p:txBody>
+          <a:bodyPr rtlCol="0" anchor="ctr"/>
+          <a:lstStyle/>
+          <a:p>
+            <a:pPr algn="ctr"/>
+            <a:endParaRPr lang="it-IT" dirty="0"/>
+          </a:p>
+        </p:txBody>
+      </p:sp>
+      <p:sp>
+        <p:nvSpPr>
+          <p:cNvPr id="6" name="CasellaDiTesto 5">
+            <a:extLst>
+              <a:ext uri="{FF2B5EF4-FFF2-40B4-BE49-F238E27FC236}">
+                <a16:creationId xmlns:a16="http://schemas.microsoft.com/office/drawing/2014/main" id="{F1145040-E22A-C851-EE32-409E28464A58}"/>
+              </a:ext>
+            </a:extLst>
+          </p:cNvPr>
+          <p:cNvSpPr txBox="1"/>
+          <p:nvPr/>
+        </p:nvSpPr>
+        <p:spPr>
+          <a:xfrm>
+            <a:off x="5086139" y="6222490"/>
+            <a:ext cx="2019720" cy="400110"/>
+          </a:xfrm>
+          <a:prstGeom prst="rect">
+            <a:avLst/>
+          </a:prstGeom>
+          <a:noFill/>
+        </p:spPr>
+        <p:txBody>
+          <a:bodyPr wrap="square" rtlCol="0">
+            <a:spAutoFit/>
+          </a:bodyPr>
+          <a:lstStyle/>
+          <a:p>
+            <a:pPr algn="r"/>
+            <a:r>
+              <a:rPr lang="it-IT" sz="2000" b="1" dirty="0">
+                <a:solidFill>
+                  <a:schemeClr val="bg1"/>
+                </a:solidFill>
+              </a:rPr>
+              <a:t>Gianpaolo Pestilli</a:t>
+            </a:r>
+          </a:p>
+        </p:txBody>
+      </p:sp>
+      <p:sp>
+        <p:nvSpPr>
+          <p:cNvPr id="7" name="CasellaDiTesto 6">
+            <a:extLst>
+              <a:ext uri="{FF2B5EF4-FFF2-40B4-BE49-F238E27FC236}">
+                <a16:creationId xmlns:a16="http://schemas.microsoft.com/office/drawing/2014/main" id="{385185F7-104C-35DD-ED4D-0D9B0AA5017E}"/>
+              </a:ext>
+            </a:extLst>
+          </p:cNvPr>
+          <p:cNvSpPr txBox="1"/>
+          <p:nvPr/>
+        </p:nvSpPr>
+        <p:spPr>
+          <a:xfrm>
+            <a:off x="11650283" y="6222490"/>
+            <a:ext cx="262013" cy="400110"/>
+          </a:xfrm>
+          <a:prstGeom prst="rect">
+            <a:avLst/>
+          </a:prstGeom>
+          <a:noFill/>
+        </p:spPr>
+        <p:txBody>
+          <a:bodyPr wrap="square" rtlCol="0">
+            <a:spAutoFit/>
+          </a:bodyPr>
+          <a:lstStyle/>
+          <a:p>
+            <a:r>
+              <a:rPr lang="it-IT" sz="2000" b="1" dirty="0">
+                <a:solidFill>
+                  <a:schemeClr val="bg1"/>
+                </a:solidFill>
+              </a:rPr>
+              <a:t>8</a:t>
+            </a:r>
+          </a:p>
+        </p:txBody>
+      </p:sp>
+      <p:sp>
+        <p:nvSpPr>
+          <p:cNvPr id="8" name="CasellaDiTesto 7">
+            <a:extLst>
+              <a:ext uri="{FF2B5EF4-FFF2-40B4-BE49-F238E27FC236}">
+                <a16:creationId xmlns:a16="http://schemas.microsoft.com/office/drawing/2014/main" id="{DA72BB08-D902-CAAF-19F1-8448A26EE065}"/>
+              </a:ext>
+            </a:extLst>
+          </p:cNvPr>
+          <p:cNvSpPr txBox="1"/>
+          <p:nvPr/>
+        </p:nvSpPr>
+        <p:spPr>
+          <a:xfrm>
+            <a:off x="533399" y="728069"/>
+            <a:ext cx="11116884" cy="1277273"/>
+          </a:xfrm>
+          <a:prstGeom prst="rect">
+            <a:avLst/>
+          </a:prstGeom>
+          <a:noFill/>
+        </p:spPr>
+        <p:txBody>
+          <a:bodyPr wrap="square" rtlCol="0">
+            <a:spAutoFit/>
+          </a:bodyPr>
+          <a:lstStyle/>
+          <a:p>
+            <a:pPr algn="just">
+              <a:spcAft>
+                <a:spcPts val="600"/>
+              </a:spcAft>
+            </a:pPr>
+            <a:r>
+              <a:rPr lang="it-IT" sz="4000" b="1" dirty="0">
+                <a:solidFill>
+                  <a:srgbClr val="990000"/>
+                </a:solidFill>
+              </a:rPr>
+              <a:t>VERTEX COVER NON PESATO</a:t>
+            </a:r>
+          </a:p>
+          <a:p>
+            <a:pPr algn="just">
+              <a:spcAft>
+                <a:spcPts val="600"/>
+              </a:spcAft>
+            </a:pPr>
+            <a:r>
+              <a:rPr lang="it-IT" sz="3200" b="1" dirty="0"/>
+              <a:t>Algoritmo 2 (si ordinano i vertici per grado decrescente)</a:t>
+            </a:r>
+            <a:endParaRPr lang="it-IT" sz="3200" dirty="0"/>
+          </a:p>
+        </p:txBody>
+      </p:sp>
+      <p:pic>
+        <p:nvPicPr>
+          <p:cNvPr id="4" name="Immagine 3">
+            <a:extLst>
+              <a:ext uri="{FF2B5EF4-FFF2-40B4-BE49-F238E27FC236}">
+                <a16:creationId xmlns:a16="http://schemas.microsoft.com/office/drawing/2014/main" id="{A50EEEDA-C7CD-E7E5-F6D6-70B4BF2B4BE5}"/>
+              </a:ext>
+            </a:extLst>
+          </p:cNvPr>
+          <p:cNvPicPr>
+            <a:picLocks noChangeAspect="1"/>
+          </p:cNvPicPr>
+          <p:nvPr/>
+        </p:nvPicPr>
+        <p:blipFill>
+          <a:blip r:embed="rId2"/>
+          <a:stretch>
+            <a:fillRect/>
+          </a:stretch>
+        </p:blipFill>
+        <p:spPr>
+          <a:xfrm>
+            <a:off x="533399" y="2288416"/>
+            <a:ext cx="8560586" cy="1815882"/>
+          </a:xfrm>
+          <a:prstGeom prst="rect">
+            <a:avLst/>
+          </a:prstGeom>
+        </p:spPr>
+      </p:pic>
+    </p:spTree>
+    <p:extLst>
+      <p:ext uri="{BB962C8B-B14F-4D97-AF65-F5344CB8AC3E}">
+        <p14:creationId xmlns:p14="http://schemas.microsoft.com/office/powerpoint/2010/main" val="2903252380"/>
+      </p:ext>
+    </p:extLst>
+  </p:cSld>
+  <p:clrMapOvr>
+    <a:masterClrMapping/>
+  </p:clrMapOvr>
+  <mc:AlternateContent xmlns:mc="http://schemas.openxmlformats.org/markup-compatibility/2006" xmlns:p159="http://schemas.microsoft.com/office/powerpoint/2015/09/main">
+    <mc:Choice Requires="p159">
+      <p:transition xmlns:p14="http://schemas.microsoft.com/office/powerpoint/2010/main" spd="slow" p14:dur="2000">
+        <p159:morph option="byObject"/>
+      </p:transition>
+    </mc:Choice>
+    <mc:Fallback xmlns="">
+      <p:transition spd="slow">
+        <p:fade/>
+      </p:transition>
+    </mc:Fallback>
+  </mc:AlternateContent>
 </p:sld>
 </file>
 
 <file path=ppt/theme/theme1.xml><?xml version="1.0" encoding="utf-8"?>
+<a:theme xmlns:a="http://schemas.openxmlformats.org/drawingml/2006/main" name="Tema di Office">
+  <a:themeElements>
+    <a:clrScheme name="Office">
+      <a:dk1>
+        <a:sysClr val="windowText" lastClr="000000"/>
+      </a:dk1>
+      <a:lt1>
+        <a:sysClr val="window" lastClr="FFFFFF"/>
+      </a:lt1>
+      <a:dk2>
+        <a:srgbClr val="44546A"/>
+      </a:dk2>
+      <a:lt2>
+        <a:srgbClr val="E7E6E6"/>
+      </a:lt2>
+      <a:accent1>
+        <a:srgbClr val="4472C4"/>
+      </a:accent1>
+      <a:accent2>
+        <a:srgbClr val="ED7D31"/>
+      </a:accent2>
+      <a:accent3>
+        <a:srgbClr val="A5A5A5"/>
+      </a:accent3>
+      <a:accent4>
+        <a:srgbClr val="FFC000"/>
+      </a:accent4>
+      <a:accent5>
+        <a:srgbClr val="5B9BD5"/>
+      </a:accent5>
+      <a:accent6>
+        <a:srgbClr val="70AD47"/>
+      </a:accent6>
+      <a:hlink>
+        <a:srgbClr val="0563C1"/>
+      </a:hlink>
+      <a:folHlink>
+        <a:srgbClr val="954F72"/>
+      </a:folHlink>
+    </a:clrScheme>
+    <a:fontScheme name="Office 2007 - 2010">
+      <a:majorFont>
+        <a:latin typeface="Calibri"/>
+        <a:ea typeface=""/>
+        <a:cs typeface=""/>
+        <a:font script="Jpan" typeface="ＭＳ Ｐゴシック"/>
+        <a:font script="Hang" typeface="맑은 고딕"/>
+        <a:font script="Hans" typeface="宋体"/>
+        <a:font script="Hant" typeface="新細明體"/>
+        <a:font script="Arab" typeface="Times New Roman"/>
+        <a:font script="Hebr" typeface="Times New Roman"/>
+        <a:font script="Thai" typeface="Angsana New"/>
+        <a:font script="Ethi" typeface="Nyala"/>
+        <a:font script="Beng" typeface="Vrinda"/>
+        <a:font script="Gujr" typeface="Shruti"/>
+        <a:font script="Khmr" typeface="MoolBoran"/>
+        <a:font script="Knda" typeface="Tunga"/>
+        <a:font script="Guru" typeface="Raavi"/>
+        <a:font script="Cans" typeface="Euphemia"/>
+        <a:font script="Cher" typeface="Plantagenet Cherokee"/>
+        <a:font script="Yiii" typeface="Microsoft Yi Baiti"/>
+        <a:font script="Tibt" typeface="Microsoft Himalaya"/>
+        <a:font script="Thaa" typeface="MV Boli"/>
+        <a:font script="Deva" typeface="Mangal"/>
+        <a:font script="Telu" typeface="Gautami"/>
+        <a:font script="Taml" typeface="Latha"/>
+        <a:font script="Syrc" typeface="Estrangelo Edessa"/>
+        <a:font script="Orya" typeface="Kalinga"/>
+        <a:font script="Mlym" typeface="Kartika"/>
+        <a:font script="Laoo" typeface="DokChampa"/>
+        <a:font script="Sinh" typeface="Iskoola Pota"/>
+        <a:font script="Mong" typeface="Mongolian Baiti"/>
+        <a:font script="Viet" typeface="Times New Roman"/>
+        <a:font script="Uigh" typeface="Microsoft Uighur"/>
+        <a:font script="Geor" typeface="Sylfaen"/>
+      </a:majorFont>
+      <a:minorFont>
+        <a:latin typeface="Calibri"/>
+        <a:ea typeface=""/>
+        <a:cs typeface=""/>
+        <a:font script="Jpan" typeface="ＭＳ Ｐゴシック"/>
+        <a:font script="Hang" typeface="맑은 고딕"/>
+        <a:font script="Hans" typeface="宋体"/>
+        <a:font script="Hant" typeface="新細明體"/>
+        <a:font script="Arab" typeface="Arial"/>
+        <a:font script="Hebr" typeface="Arial"/>
+        <a:font script="Thai" typeface="Cordia New"/>
+        <a:font script="Ethi" typeface="Nyala"/>
+        <a:font script="Beng" typeface="Vrinda"/>
+        <a:font script="Gujr" typeface="Shruti"/>
+        <a:font script="Khmr" typeface="DaunPenh"/>
+        <a:font script="Knda" typeface="Tunga"/>
+        <a:font script="Guru" typeface="Raavi"/>
+        <a:font script="Cans" typeface="Euphemia"/>
+        <a:font script="Cher" typeface="Plantagenet Cherokee"/>
+        <a:font script="Yiii" typeface="Microsoft Yi Baiti"/>
+        <a:font script="Tibt" typeface="Microsoft Himalaya"/>
+        <a:font script="Thaa" typeface="MV Boli"/>
+        <a:font script="Deva" typeface="Mangal"/>
+        <a:font script="Telu" typeface="Gautami"/>
+        <a:font script="Taml" typeface="Latha"/>
+        <a:font script="Syrc" typeface="Estrangelo Edessa"/>
+        <a:font script="Orya" typeface="Kalinga"/>
+        <a:font script="Mlym" typeface="Kartika"/>
+        <a:font script="Laoo" typeface="DokChampa"/>
+        <a:font script="Sinh" typeface="Iskoola Pota"/>
+        <a:font script="Mong" typeface="Mongolian Baiti"/>
+        <a:font script="Viet" typeface="Arial"/>
+        <a:font script="Uigh" typeface="Microsoft Uighur"/>
+        <a:font script="Geor" typeface="Sylfaen"/>
+      </a:minorFont>
+    </a:fontScheme>
+    <a:fmtScheme name="Office">
+      <a:fillStyleLst>
+        <a:solidFill>
+          <a:schemeClr val="phClr"/>
+        </a:solidFill>
+        <a:gradFill rotWithShape="1">
+          <a:gsLst>
+            <a:gs pos="0">
+              <a:schemeClr val="phClr">
+                <a:lumMod val="110000"/>
+                <a:satMod val="105000"/>
+                <a:tint val="67000"/>
+              </a:schemeClr>
+            </a:gs>
+            <a:gs pos="50000">
+              <a:schemeClr val="phClr">
+                <a:lumMod val="105000"/>
+                <a:satMod val="103000"/>
+                <a:tint val="73000"/>
+              </a:schemeClr>
+            </a:gs>
+            <a:gs pos="100000">
+              <a:schemeClr val="phClr">
+                <a:lumMod val="105000"/>
+                <a:satMod val="109000"/>
+                <a:tint val="81000"/>
+              </a:schemeClr>
+            </a:gs>
+          </a:gsLst>
+          <a:lin ang="5400000" scaled="0"/>
+        </a:gradFill>
+        <a:gradFill rotWithShape="1">
+          <a:gsLst>
+            <a:gs pos="0">
+              <a:schemeClr val="phClr">
+                <a:satMod val="103000"/>
+                <a:lumMod val="102000"/>
+                <a:tint val="94000"/>
+              </a:schemeClr>
+            </a:gs>
+            <a:gs pos="50000">
+              <a:schemeClr val="phClr">
+                <a:satMod val="110000"/>
+                <a:lumMod val="100000"/>
+                <a:shade val="100000"/>
+              </a:schemeClr>
+            </a:gs>
+            <a:gs pos="100000">
+              <a:schemeClr val="phClr">
+                <a:lumMod val="99000"/>
+                <a:satMod val="120000"/>
+                <a:shade val="78000"/>
+              </a:schemeClr>
+            </a:gs>
+          </a:gsLst>
+          <a:lin ang="5400000" scaled="0"/>
+        </a:gradFill>
+      </a:fillStyleLst>
+      <a:lnStyleLst>
+        <a:ln w="6350" cap="flat" cmpd="sng" algn="ctr">
+          <a:solidFill>
+            <a:schemeClr val="phClr"/>
+          </a:solidFill>
+          <a:prstDash val="solid"/>
+          <a:miter lim="800000"/>
+        </a:ln>
+        <a:ln w="12700" cap="flat" cmpd="sng" algn="ctr">
+          <a:solidFill>
+            <a:schemeClr val="phClr"/>
+          </a:solidFill>
+          <a:prstDash val="solid"/>
+          <a:miter lim="800000"/>
+        </a:ln>
+        <a:ln w="19050" cap="flat" cmpd="sng" algn="ctr">
+          <a:solidFill>
+            <a:schemeClr val="phClr"/>
+          </a:solidFill>
+          <a:prstDash val="solid"/>
+          <a:miter lim="800000"/>
+        </a:ln>
+      </a:lnStyleLst>
+      <a:effectStyleLst>
+        <a:effectStyle>
+          <a:effectLst/>
+        </a:effectStyle>
+        <a:effectStyle>
+          <a:effectLst/>
+        </a:effectStyle>
+        <a:effectStyle>
+          <a:effectLst>
+            <a:outerShdw blurRad="57150" dist="19050" dir="5400000" algn="ctr" rotWithShape="0">
+              <a:srgbClr val="000000">
+                <a:alpha val="63000"/>
+              </a:srgbClr>
+            </a:outerShdw>
+          </a:effectLst>
+        </a:effectStyle>
+      </a:effectStyleLst>
+      <a:bgFillStyleLst>
+        <a:solidFill>
+          <a:schemeClr val="phClr"/>
+        </a:solidFill>
+        <a:solidFill>
+          <a:schemeClr val="phClr">
+            <a:tint val="95000"/>
+            <a:satMod val="170000"/>
+          </a:schemeClr>
+        </a:solidFill>
+        <a:gradFill rotWithShape="1">
+          <a:gsLst>
+            <a:gs pos="0">
+              <a:schemeClr val="phClr">
+                <a:tint val="93000"/>
+                <a:satMod val="150000"/>
+                <a:shade val="98000"/>
+                <a:lumMod val="102000"/>
+              </a:schemeClr>
+            </a:gs>
+            <a:gs pos="50000">
+              <a:schemeClr val="phClr">
+                <a:tint val="98000"/>
+                <a:satMod val="130000"/>
+                <a:shade val="90000"/>
+                <a:lumMod val="103000"/>
+              </a:schemeClr>
+            </a:gs>
+            <a:gs pos="100000">
+              <a:schemeClr val="phClr">
+                <a:shade val="63000"/>
+                <a:satMod val="120000"/>
+              </a:schemeClr>
+            </a:gs>
+          </a:gsLst>
+          <a:lin ang="5400000" scaled="0"/>
+        </a:gradFill>
+      </a:bgFillStyleLst>
+    </a:fmtScheme>
+  </a:themeElements>
+  <a:objectDefaults/>
+  <a:extraClrSchemeLst/>
+  <a:extLst>
+    <a:ext uri="{05A4C25C-085E-4340-85A3-A5531E510DB2}">
+      <thm15:themeFamily xmlns:thm15="http://schemas.microsoft.com/office/thememl/2012/main" name="Office Theme" id="{62F939B6-93AF-4DB8-9C6B-D6C7DFDC589F}" vid="{4A3C46E8-61CC-4603-A589-7422A47A8E4A}"/>
+    </a:ext>
+  </a:extLst>
+</a:theme>
+</file>
+
+<file path=ppt/theme/theme2.xml><?xml version="1.0" encoding="utf-8"?>
 <a:theme xmlns:a="http://schemas.openxmlformats.org/drawingml/2006/main" name="Tema di Office">
   <a:themeElements>
     <a:clrScheme name="Office">

--- a/Risultati_0386492.pptx
+++ b/Risultati_0386492.pptx
@@ -5,7 +5,7 @@
     <p:sldMasterId id="2147483648" r:id="rId1"/>
   </p:sldMasterIdLst>
   <p:notesMasterIdLst>
-    <p:notesMasterId r:id="rId62"/>
+    <p:notesMasterId r:id="rId65"/>
   </p:notesMasterIdLst>
   <p:sldIdLst>
     <p:sldId id="256" r:id="rId2"/>
@@ -61,13 +61,16 @@
     <p:sldId id="307" r:id="rId52"/>
     <p:sldId id="311" r:id="rId53"/>
     <p:sldId id="312" r:id="rId54"/>
-    <p:sldId id="315" r:id="rId55"/>
-    <p:sldId id="316" r:id="rId56"/>
-    <p:sldId id="313" r:id="rId57"/>
+    <p:sldId id="313" r:id="rId55"/>
+    <p:sldId id="315" r:id="rId56"/>
+    <p:sldId id="316" r:id="rId57"/>
     <p:sldId id="314" r:id="rId58"/>
     <p:sldId id="317" r:id="rId59"/>
     <p:sldId id="303" r:id="rId60"/>
     <p:sldId id="304" r:id="rId61"/>
+    <p:sldId id="318" r:id="rId62"/>
+    <p:sldId id="319" r:id="rId63"/>
+    <p:sldId id="320" r:id="rId64"/>
   </p:sldIdLst>
   <p:sldSz cx="12192000" cy="6858000"/>
   <p:notesSz cx="6858000" cy="9144000"/>
@@ -11731,8 +11734,8 @@
           </a:p>
         </p:txBody>
       </p:sp>
-      <mc:AlternateContent xmlns:mc="http://schemas.openxmlformats.org/markup-compatibility/2006">
-        <mc:Choice xmlns:a14="http://schemas.microsoft.com/office/drawing/2010/main" Requires="a14">
+      <mc:AlternateContent xmlns:mc="http://schemas.openxmlformats.org/markup-compatibility/2006" xmlns:a14="http://schemas.microsoft.com/office/drawing/2010/main">
+        <mc:Choice Requires="a14">
           <p:sp>
             <p:nvSpPr>
               <p:cNvPr id="8" name="CasellaDiTesto 7">
@@ -11841,6 +11844,7 @@
                       <m:sSupPr>
                         <m:ctrlPr>
                           <a:rPr lang="it-IT" sz="3200" i="1" smtClean="0">
+                            <a:latin typeface="Cambria Math" panose="02040503050406030204" pitchFamily="18" charset="0"/>
                             <a:ea typeface="Cambria Math" panose="02040503050406030204" pitchFamily="18" charset="0"/>
                           </a:rPr>
                         </m:ctrlPr>
@@ -11848,6 +11852,7 @@
                       <m:e>
                         <m:r>
                           <a:rPr lang="it-IT" sz="3200" b="0" i="1" smtClean="0">
+                            <a:latin typeface="Cambria Math" panose="02040503050406030204" pitchFamily="18" charset="0"/>
                             <a:ea typeface="Cambria Math" panose="02040503050406030204" pitchFamily="18" charset="0"/>
                           </a:rPr>
                           <m:t>2</m:t>
@@ -11856,6 +11861,7 @@
                       <m:sup>
                         <m:r>
                           <a:rPr lang="it-IT" sz="3200" b="0" i="1" smtClean="0">
+                            <a:latin typeface="Cambria Math" panose="02040503050406030204" pitchFamily="18" charset="0"/>
                             <a:ea typeface="Cambria Math" panose="02040503050406030204" pitchFamily="18" charset="0"/>
                           </a:rPr>
                           <m:t>𝑖</m:t>
@@ -11871,7 +11877,7 @@
             </p:txBody>
           </p:sp>
         </mc:Choice>
-        <mc:Fallback>
+        <mc:Fallback xmlns="">
           <p:sp>
             <p:nvSpPr>
               <p:cNvPr id="8" name="CasellaDiTesto 7">
@@ -12400,8 +12406,8 @@
           </a:p>
         </p:txBody>
       </p:sp>
-      <mc:AlternateContent xmlns:mc="http://schemas.openxmlformats.org/markup-compatibility/2006">
-        <mc:Choice xmlns:a14="http://schemas.microsoft.com/office/drawing/2010/main" Requires="a14">
+      <mc:AlternateContent xmlns:mc="http://schemas.openxmlformats.org/markup-compatibility/2006" xmlns:a14="http://schemas.microsoft.com/office/drawing/2010/main">
+        <mc:Choice Requires="a14">
           <p:sp>
             <p:nvSpPr>
               <p:cNvPr id="8" name="CasellaDiTesto 7">
@@ -12475,7 +12481,8 @@
                     <m:f>
                       <m:fPr>
                         <m:ctrlPr>
-                          <a:rPr lang="it-IT" sz="3200" smtClean="0">
+                          <a:rPr lang="it-IT" sz="3200" i="1" smtClean="0">
+                            <a:latin typeface="Cambria Math" panose="02040503050406030204" pitchFamily="18" charset="0"/>
                             <a:ea typeface="Cambria Math" panose="02040503050406030204" pitchFamily="18" charset="0"/>
                           </a:rPr>
                         </m:ctrlPr>
@@ -12483,6 +12490,7 @@
                       <m:num>
                         <m:r>
                           <a:rPr lang="it-IT" sz="3200" b="0" i="0" smtClean="0">
+                            <a:latin typeface="Cambria Math" panose="02040503050406030204" pitchFamily="18" charset="0"/>
                             <a:ea typeface="Cambria Math" panose="02040503050406030204" pitchFamily="18" charset="0"/>
                           </a:rPr>
                           <m:t>|</m:t>
@@ -12492,12 +12500,14 @@
                             <m:sty m:val="p"/>
                           </m:rPr>
                           <a:rPr lang="it-IT" sz="3200" b="0" i="0" smtClean="0">
+                            <a:latin typeface="Cambria Math" panose="02040503050406030204" pitchFamily="18" charset="0"/>
                             <a:ea typeface="Cambria Math" panose="02040503050406030204" pitchFamily="18" charset="0"/>
                           </a:rPr>
                           <m:t>E</m:t>
                         </m:r>
                         <m:r>
                           <a:rPr lang="it-IT" sz="3200" b="0" i="0" smtClean="0">
+                            <a:latin typeface="Cambria Math" panose="02040503050406030204" pitchFamily="18" charset="0"/>
                             <a:ea typeface="Cambria Math" panose="02040503050406030204" pitchFamily="18" charset="0"/>
                           </a:rPr>
                           <m:t>|</m:t>
@@ -12507,7 +12517,8 @@
                         <m:d>
                           <m:dPr>
                             <m:ctrlPr>
-                              <a:rPr lang="it-IT" sz="3200" smtClean="0">
+                              <a:rPr lang="it-IT" sz="3200" i="1" smtClean="0">
+                                <a:latin typeface="Cambria Math" panose="02040503050406030204" pitchFamily="18" charset="0"/>
                                 <a:ea typeface="Cambria Math" panose="02040503050406030204" pitchFamily="18" charset="0"/>
                               </a:rPr>
                             </m:ctrlPr>
@@ -12525,7 +12536,8 @@
                                   </m:mc>
                                 </m:mcs>
                                 <m:ctrlPr>
-                                  <a:rPr lang="it-IT" sz="3200" smtClean="0">
+                                  <a:rPr lang="it-IT" sz="3200" i="1" smtClean="0">
+                                    <a:latin typeface="Cambria Math" panose="02040503050406030204" pitchFamily="18" charset="0"/>
                                     <a:ea typeface="Cambria Math" panose="02040503050406030204" pitchFamily="18" charset="0"/>
                                   </a:rPr>
                                 </m:ctrlPr>
@@ -12537,7 +12549,8 @@
                                       <m:begChr m:val="|"/>
                                       <m:endChr m:val="|"/>
                                       <m:ctrlPr>
-                                        <a:rPr lang="it-IT" sz="3200" smtClean="0">
+                                        <a:rPr lang="it-IT" sz="3200" i="1" smtClean="0">
+                                          <a:latin typeface="Cambria Math" panose="02040503050406030204" pitchFamily="18" charset="0"/>
                                           <a:ea typeface="Cambria Math" panose="02040503050406030204" pitchFamily="18" charset="0"/>
                                         </a:rPr>
                                       </m:ctrlPr>
@@ -12548,6 +12561,7 @@
                                           <m:sty m:val="p"/>
                                         </m:rPr>
                                         <a:rPr lang="it-IT" sz="3200" b="0" i="0" smtClean="0">
+                                          <a:latin typeface="Cambria Math" panose="02040503050406030204" pitchFamily="18" charset="0"/>
                                           <a:ea typeface="Cambria Math" panose="02040503050406030204" pitchFamily="18" charset="0"/>
                                         </a:rPr>
                                         <m:t>V</m:t>
@@ -12560,6 +12574,7 @@
                                 <m:e>
                                   <m:r>
                                     <a:rPr lang="it-IT" sz="3200" b="0" i="0" smtClean="0">
+                                      <a:latin typeface="Cambria Math" panose="02040503050406030204" pitchFamily="18" charset="0"/>
                                       <a:ea typeface="Cambria Math" panose="02040503050406030204" pitchFamily="18" charset="0"/>
                                     </a:rPr>
                                     <m:t>2</m:t>
@@ -12584,7 +12599,7 @@
                     <m:f>
                       <m:fPr>
                         <m:ctrlPr>
-                          <a:rPr lang="it-IT" sz="3200">
+                          <a:rPr lang="it-IT" sz="3200" i="1">
                             <a:latin typeface="Cambria Math" panose="02040503050406030204" pitchFamily="18" charset="0"/>
                             <a:ea typeface="Cambria Math" panose="02040503050406030204" pitchFamily="18" charset="0"/>
                           </a:rPr>
@@ -12629,7 +12644,7 @@
                             <m:begChr m:val="|"/>
                             <m:endChr m:val="|"/>
                             <m:ctrlPr>
-                              <a:rPr lang="it-IT" sz="3200" smtClean="0">
+                              <a:rPr lang="it-IT" sz="3200" i="1" smtClean="0">
                                 <a:latin typeface="Cambria Math" panose="02040503050406030204" pitchFamily="18" charset="0"/>
                                 <a:ea typeface="Cambria Math" panose="02040503050406030204" pitchFamily="18" charset="0"/>
                               </a:rPr>
@@ -12660,7 +12675,7 @@
                             <m:begChr m:val="|"/>
                             <m:endChr m:val="|"/>
                             <m:ctrlPr>
-                              <a:rPr lang="it-IT" sz="3200" smtClean="0">
+                              <a:rPr lang="it-IT" sz="3200" i="1" smtClean="0">
                                 <a:latin typeface="Cambria Math" panose="02040503050406030204" pitchFamily="18" charset="0"/>
                                 <a:ea typeface="Cambria Math" panose="02040503050406030204" pitchFamily="18" charset="0"/>
                               </a:rPr>
@@ -12758,7 +12773,7 @@
             </p:txBody>
           </p:sp>
         </mc:Choice>
-        <mc:Fallback>
+        <mc:Fallback xmlns="">
           <p:sp>
             <p:nvSpPr>
               <p:cNvPr id="8" name="CasellaDiTesto 7">
@@ -14432,8 +14447,8 @@
           </a:p>
         </p:txBody>
       </p:sp>
-      <mc:AlternateContent xmlns:mc="http://schemas.openxmlformats.org/markup-compatibility/2006">
-        <mc:Choice xmlns:a14="http://schemas.microsoft.com/office/drawing/2010/main" Requires="a14">
+      <mc:AlternateContent xmlns:mc="http://schemas.openxmlformats.org/markup-compatibility/2006" xmlns:a14="http://schemas.microsoft.com/office/drawing/2010/main">
+        <mc:Choice Requires="a14">
           <p:sp>
             <p:nvSpPr>
               <p:cNvPr id="8" name="CasellaDiTesto 7">
@@ -14519,7 +14534,9 @@
                     <m:f>
                       <m:fPr>
                         <m:ctrlPr>
-                          <a:rPr lang="it-IT" sz="3200" smtClean="0"/>
+                          <a:rPr lang="it-IT" sz="3200" i="1" smtClean="0">
+                            <a:latin typeface="Cambria Math" panose="02040503050406030204" pitchFamily="18" charset="0"/>
+                          </a:rPr>
                         </m:ctrlPr>
                       </m:fPr>
                       <m:num>
@@ -14527,16 +14544,14 @@
                           <a:rPr lang="it-IT" sz="3200" b="0" i="0" smtClean="0">
                             <a:latin typeface="Cambria Math" panose="02040503050406030204" pitchFamily="18" charset="0"/>
                           </a:rPr>
-                          <m:t> </m:t>
-                        </m:r>
-                        <m:r>
-                          <a:rPr lang="it-IT" sz="3200" b="0" i="0" smtClean="0"/>
-                          <m:t>(</m:t>
+                          <m:t> (</m:t>
                         </m:r>
                         <m:sSup>
                           <m:sSupPr>
                             <m:ctrlPr>
-                              <a:rPr lang="it-IT" sz="3200" smtClean="0"/>
+                              <a:rPr lang="it-IT" sz="3200" i="1" smtClean="0">
+                                <a:latin typeface="Cambria Math" panose="02040503050406030204" pitchFamily="18" charset="0"/>
+                              </a:rPr>
                             </m:ctrlPr>
                           </m:sSupPr>
                           <m:e>
@@ -14544,28 +14559,38 @@
                               <m:rPr>
                                 <m:sty m:val="p"/>
                               </m:rPr>
-                              <a:rPr lang="it-IT" sz="3200" b="0" i="0" smtClean="0"/>
+                              <a:rPr lang="it-IT" sz="3200" b="0" i="0" smtClean="0">
+                                <a:latin typeface="Cambria Math" panose="02040503050406030204" pitchFamily="18" charset="0"/>
+                              </a:rPr>
                               <m:t>b</m:t>
                             </m:r>
                             <m:r>
-                              <a:rPr lang="it-IT" sz="3200" b="0" i="0" smtClean="0"/>
+                              <a:rPr lang="it-IT" sz="3200" b="0" i="0" smtClean="0">
+                                <a:latin typeface="Cambria Math" panose="02040503050406030204" pitchFamily="18" charset="0"/>
+                              </a:rPr>
                               <m:t>−</m:t>
                             </m:r>
                             <m:r>
                               <m:rPr>
                                 <m:sty m:val="p"/>
                               </m:rPr>
-                              <a:rPr lang="it-IT" sz="3200" b="0" i="0" smtClean="0"/>
+                              <a:rPr lang="it-IT" sz="3200" b="0" i="0" smtClean="0">
+                                <a:latin typeface="Cambria Math" panose="02040503050406030204" pitchFamily="18" charset="0"/>
+                              </a:rPr>
                               <m:t>a</m:t>
                             </m:r>
                             <m:r>
-                              <a:rPr lang="it-IT" sz="3200" b="0" i="0" smtClean="0"/>
+                              <a:rPr lang="it-IT" sz="3200" b="0" i="0" smtClean="0">
+                                <a:latin typeface="Cambria Math" panose="02040503050406030204" pitchFamily="18" charset="0"/>
+                              </a:rPr>
                               <m:t>)</m:t>
                             </m:r>
                           </m:e>
                           <m:sup>
                             <m:r>
-                              <a:rPr lang="it-IT" sz="3200" b="0" i="0" smtClean="0"/>
+                              <a:rPr lang="it-IT" sz="3200" b="0" i="0" smtClean="0">
+                                <a:latin typeface="Cambria Math" panose="02040503050406030204" pitchFamily="18" charset="0"/>
+                              </a:rPr>
                               <m:t>2</m:t>
                             </m:r>
                           </m:sup>
@@ -14573,7 +14598,9 @@
                       </m:num>
                       <m:den>
                         <m:r>
-                          <a:rPr lang="it-IT" sz="3200" b="0" i="0" smtClean="0"/>
+                          <a:rPr lang="it-IT" sz="3200" b="0" i="0" smtClean="0">
+                            <a:latin typeface="Cambria Math" panose="02040503050406030204" pitchFamily="18" charset="0"/>
+                          </a:rPr>
                           <m:t>12</m:t>
                         </m:r>
                       </m:den>
@@ -14638,7 +14665,7 @@
             </p:txBody>
           </p:sp>
         </mc:Choice>
-        <mc:Fallback>
+        <mc:Fallback xmlns="">
           <p:sp>
             <p:nvSpPr>
               <p:cNvPr id="8" name="CasellaDiTesto 7">
@@ -16153,15 +16180,7 @@
             </a:pPr>
             <a:r>
               <a:rPr lang="it-IT" sz="3200" dirty="0"/>
-              <a:t>Sebbene matematicamente andrebbe inserito il &lt; 2, si è osservato che la tolleranza di </a:t>
-            </a:r>
-            <a:r>
-              <a:rPr lang="it-IT" sz="3200" dirty="0" err="1"/>
-              <a:t>Gurobi</a:t>
-            </a:r>
-            <a:r>
-              <a:rPr lang="it-IT" sz="3200" dirty="0"/>
-              <a:t> è di 6 cifre decimali, per evitare loop dovuti a quantità trascurabili si è deciso di considerarne solo 3.</a:t>
+              <a:t>Sebbene matematicamente andrebbe inserito il &lt; 2, si è osservato che la tolleranza del solver è di 6 cifre decimali, per evitare loop dovuti a quantità trascurabili si è deciso di considerarne solo 3.</a:t>
             </a:r>
           </a:p>
         </p:txBody>
@@ -16872,7 +16891,7 @@
                   <a:schemeClr val="bg1"/>
                 </a:solidFill>
               </a:rPr>
-              <a:t>41</a:t>
+              <a:t>45</a:t>
             </a:r>
           </a:p>
         </p:txBody>
@@ -17152,7 +17171,7 @@
                   <a:schemeClr val="bg1"/>
                 </a:solidFill>
               </a:rPr>
-              <a:t>41</a:t>
+              <a:t>46</a:t>
             </a:r>
           </a:p>
         </p:txBody>
@@ -17462,7 +17481,7 @@
                   <a:schemeClr val="bg1"/>
                 </a:solidFill>
               </a:rPr>
-              <a:t>41</a:t>
+              <a:t>47</a:t>
             </a:r>
           </a:p>
         </p:txBody>
@@ -18164,13 +18183,18 @@
           <a:p>
             <a:pPr algn="r"/>
             <a:r>
-              <a:rPr lang="it-IT" sz="2000" b="1" dirty="0">
+              <a:rPr lang="it-IT" sz="2000" b="1">
                 <a:solidFill>
                   <a:schemeClr val="bg1"/>
                 </a:solidFill>
               </a:rPr>
-              <a:t>44</a:t>
-            </a:r>
+              <a:t>48</a:t>
+            </a:r>
+            <a:endParaRPr lang="it-IT" sz="2000" b="1" dirty="0">
+              <a:solidFill>
+                <a:schemeClr val="bg1"/>
+              </a:solidFill>
+            </a:endParaRPr>
           </a:p>
         </p:txBody>
       </p:sp>
@@ -18445,13 +18469,18 @@
           <a:p>
             <a:pPr algn="r"/>
             <a:r>
-              <a:rPr lang="it-IT" sz="2000" b="1" dirty="0">
+              <a:rPr lang="it-IT" sz="2000" b="1">
                 <a:solidFill>
                   <a:schemeClr val="bg1"/>
                 </a:solidFill>
               </a:rPr>
-              <a:t>44</a:t>
-            </a:r>
+              <a:t>49</a:t>
+            </a:r>
+            <a:endParaRPr lang="it-IT" sz="2000" b="1" dirty="0">
+              <a:solidFill>
+                <a:schemeClr val="bg1"/>
+              </a:solidFill>
+            </a:endParaRPr>
           </a:p>
         </p:txBody>
       </p:sp>
@@ -18628,8 +18657,8 @@
           </a:p>
         </p:txBody>
       </p:sp>
-      <mc:AlternateContent xmlns:mc="http://schemas.openxmlformats.org/markup-compatibility/2006">
-        <mc:Choice xmlns:a14="http://schemas.microsoft.com/office/drawing/2010/main" Requires="a14">
+      <mc:AlternateContent xmlns:mc="http://schemas.openxmlformats.org/markup-compatibility/2006" xmlns:a14="http://schemas.microsoft.com/office/drawing/2010/main">
+        <mc:Choice Requires="a14">
           <p:sp>
             <p:nvSpPr>
               <p:cNvPr id="8" name="CasellaDiTesto 7">
@@ -18745,14 +18774,7 @@
                             <a:latin typeface="Cambria Math" panose="02040503050406030204" pitchFamily="18" charset="0"/>
                             <a:ea typeface="Cambria Math" panose="02040503050406030204" pitchFamily="18" charset="0"/>
                           </a:rPr>
-                          <m:t>2</m:t>
-                        </m:r>
-                        <m:r>
-                          <a:rPr lang="it-IT" sz="2800">
-                            <a:latin typeface="Cambria Math" panose="02040503050406030204" pitchFamily="18" charset="0"/>
-                            <a:ea typeface="Cambria Math" panose="02040503050406030204" pitchFamily="18" charset="0"/>
-                          </a:rPr>
-                          <m:t>|</m:t>
+                          <m:t>2|</m:t>
                         </m:r>
                         <m:r>
                           <m:rPr>
@@ -18961,7 +18983,7 @@
             </p:txBody>
           </p:sp>
         </mc:Choice>
-        <mc:Fallback>
+        <mc:Fallback xmlns="">
           <p:sp>
             <p:nvSpPr>
               <p:cNvPr id="8" name="CasellaDiTesto 7">
@@ -19041,7 +19063,7 @@
                   <a:schemeClr val="bg1"/>
                 </a:solidFill>
               </a:rPr>
-              <a:t>41</a:t>
+              <a:t>50</a:t>
             </a:r>
           </a:p>
         </p:txBody>
@@ -19322,7 +19344,7 @@
                   <a:schemeClr val="bg1"/>
                 </a:solidFill>
               </a:rPr>
-              <a:t>41</a:t>
+              <a:t>51</a:t>
             </a:r>
           </a:p>
         </p:txBody>
@@ -19391,7 +19413,7 @@
         <p:cNvPr id="1" name="">
           <a:extLst>
             <a:ext uri="{FF2B5EF4-FFF2-40B4-BE49-F238E27FC236}">
-              <a16:creationId xmlns:a16="http://schemas.microsoft.com/office/drawing/2014/main" id="{B3A19B3B-FB8E-C5A6-9BDE-D35B5983841C}"/>
+              <a16:creationId xmlns:a16="http://schemas.microsoft.com/office/drawing/2014/main" id="{BC703C0D-6076-EDDA-DA62-3FFD560D3070}"/>
             </a:ext>
           </a:extLst>
         </p:cNvPr>
@@ -19411,7 +19433,7 @@
           <p:cNvPr id="5" name="Rettangolo 4">
             <a:extLst>
               <a:ext uri="{FF2B5EF4-FFF2-40B4-BE49-F238E27FC236}">
-                <a16:creationId xmlns:a16="http://schemas.microsoft.com/office/drawing/2014/main" id="{DCB98510-44D4-2C4B-8DD1-C758BCCE5735}"/>
+                <a16:creationId xmlns:a16="http://schemas.microsoft.com/office/drawing/2014/main" id="{20DA4FF2-7B5D-EDBE-99E5-1CC39E1E32F6}"/>
               </a:ext>
             </a:extLst>
           </p:cNvPr>
@@ -19465,7 +19487,7 @@
           <p:cNvPr id="6" name="CasellaDiTesto 5">
             <a:extLst>
               <a:ext uri="{FF2B5EF4-FFF2-40B4-BE49-F238E27FC236}">
-                <a16:creationId xmlns:a16="http://schemas.microsoft.com/office/drawing/2014/main" id="{A94CDE8D-B5A2-F3F2-7BD8-9B307A68CA19}"/>
+                <a16:creationId xmlns:a16="http://schemas.microsoft.com/office/drawing/2014/main" id="{2A63AD9D-B169-C12A-2A0C-144AF23F63FC}"/>
               </a:ext>
             </a:extLst>
           </p:cNvPr>
@@ -19500,8 +19522,311 @@
           </a:p>
         </p:txBody>
       </p:sp>
-      <mc:AlternateContent xmlns:mc="http://schemas.openxmlformats.org/markup-compatibility/2006">
-        <mc:Choice xmlns:a14="http://schemas.microsoft.com/office/drawing/2010/main" Requires="a14">
+      <p:sp>
+        <p:nvSpPr>
+          <p:cNvPr id="8" name="CasellaDiTesto 7">
+            <a:extLst>
+              <a:ext uri="{FF2B5EF4-FFF2-40B4-BE49-F238E27FC236}">
+                <a16:creationId xmlns:a16="http://schemas.microsoft.com/office/drawing/2014/main" id="{D028465C-1A6E-7D80-5C6C-3E04F17A1A6B}"/>
+              </a:ext>
+            </a:extLst>
+          </p:cNvPr>
+          <p:cNvSpPr txBox="1"/>
+          <p:nvPr/>
+        </p:nvSpPr>
+        <p:spPr>
+          <a:xfrm>
+            <a:off x="533399" y="728069"/>
+            <a:ext cx="11116884" cy="5032147"/>
+          </a:xfrm>
+          <a:prstGeom prst="rect">
+            <a:avLst/>
+          </a:prstGeom>
+          <a:noFill/>
+        </p:spPr>
+        <p:txBody>
+          <a:bodyPr wrap="square" rtlCol="0">
+            <a:spAutoFit/>
+          </a:bodyPr>
+          <a:lstStyle/>
+          <a:p>
+            <a:pPr algn="just">
+              <a:spcAft>
+                <a:spcPts val="600"/>
+              </a:spcAft>
+            </a:pPr>
+            <a:r>
+              <a:rPr lang="it-IT" sz="4000" b="1" dirty="0">
+                <a:solidFill>
+                  <a:srgbClr val="990000"/>
+                </a:solidFill>
+              </a:rPr>
+              <a:t>GENERAZIONE DELLE ISTANZE</a:t>
+            </a:r>
+          </a:p>
+          <a:p>
+            <a:pPr algn="just">
+              <a:spcAft>
+                <a:spcPts val="600"/>
+              </a:spcAft>
+            </a:pPr>
+            <a:r>
+              <a:rPr lang="it-IT" sz="3200" b="1" dirty="0"/>
+              <a:t>Vertex cover non pesato – Istruzioni che vale la pena commentare:</a:t>
+            </a:r>
+          </a:p>
+          <a:p>
+            <a:pPr algn="just">
+              <a:spcAft>
+                <a:spcPts val="600"/>
+              </a:spcAft>
+            </a:pPr>
+            <a:endParaRPr lang="it-IT" sz="3200" b="1" dirty="0"/>
+          </a:p>
+          <a:p>
+            <a:pPr algn="just">
+              <a:spcAft>
+                <a:spcPts val="600"/>
+              </a:spcAft>
+            </a:pPr>
+            <a:endParaRPr lang="it-IT" sz="3200" b="1" dirty="0"/>
+          </a:p>
+          <a:p>
+            <a:pPr algn="just">
+              <a:spcAft>
+                <a:spcPts val="600"/>
+              </a:spcAft>
+            </a:pPr>
+            <a:endParaRPr lang="it-IT" sz="3200" b="1" dirty="0"/>
+          </a:p>
+          <a:p>
+            <a:pPr algn="just">
+              <a:spcAft>
+                <a:spcPts val="600"/>
+              </a:spcAft>
+            </a:pPr>
+            <a:r>
+              <a:rPr lang="it-IT" sz="3200" dirty="0"/>
+              <a:t>Si utilizza una normale perché è una variabile aleatoria la cui varianza non si ottiene in modo matematico a partire dalla media (si può modificare a piacimento mantenendo la media fissa).</a:t>
+            </a:r>
+          </a:p>
+        </p:txBody>
+      </p:sp>
+      <p:sp>
+        <p:nvSpPr>
+          <p:cNvPr id="2" name="CasellaDiTesto 1">
+            <a:extLst>
+              <a:ext uri="{FF2B5EF4-FFF2-40B4-BE49-F238E27FC236}">
+                <a16:creationId xmlns:a16="http://schemas.microsoft.com/office/drawing/2014/main" id="{BB63DFD3-C9E3-9EFF-F47F-CFF1391A6858}"/>
+              </a:ext>
+            </a:extLst>
+          </p:cNvPr>
+          <p:cNvSpPr txBox="1"/>
+          <p:nvPr/>
+        </p:nvSpPr>
+        <p:spPr>
+          <a:xfrm>
+            <a:off x="11434917" y="6222490"/>
+            <a:ext cx="491612" cy="400110"/>
+          </a:xfrm>
+          <a:prstGeom prst="rect">
+            <a:avLst/>
+          </a:prstGeom>
+          <a:noFill/>
+        </p:spPr>
+        <p:txBody>
+          <a:bodyPr wrap="square" rtlCol="0">
+            <a:spAutoFit/>
+          </a:bodyPr>
+          <a:lstStyle/>
+          <a:p>
+            <a:pPr algn="r"/>
+            <a:r>
+              <a:rPr lang="it-IT" sz="2000" b="1" dirty="0">
+                <a:solidFill>
+                  <a:schemeClr val="bg1"/>
+                </a:solidFill>
+              </a:rPr>
+              <a:t>52</a:t>
+            </a:r>
+          </a:p>
+        </p:txBody>
+      </p:sp>
+      <p:pic>
+        <p:nvPicPr>
+          <p:cNvPr id="7" name="Immagine 6">
+            <a:extLst>
+              <a:ext uri="{FF2B5EF4-FFF2-40B4-BE49-F238E27FC236}">
+                <a16:creationId xmlns:a16="http://schemas.microsoft.com/office/drawing/2014/main" id="{C1D6FA59-3C57-891A-8CE1-008016D91F4A}"/>
+              </a:ext>
+            </a:extLst>
+          </p:cNvPr>
+          <p:cNvPicPr>
+            <a:picLocks noChangeAspect="1"/>
+          </p:cNvPicPr>
+          <p:nvPr/>
+        </p:nvPicPr>
+        <p:blipFill>
+          <a:blip r:embed="rId2"/>
+          <a:srcRect t="47356" b="5339"/>
+          <a:stretch>
+            <a:fillRect/>
+          </a:stretch>
+        </p:blipFill>
+        <p:spPr>
+          <a:xfrm>
+            <a:off x="533399" y="2445773"/>
+            <a:ext cx="8708924" cy="1785979"/>
+          </a:xfrm>
+          <a:prstGeom prst="rect">
+            <a:avLst/>
+          </a:prstGeom>
+        </p:spPr>
+      </p:pic>
+    </p:spTree>
+    <p:extLst>
+      <p:ext uri="{BB962C8B-B14F-4D97-AF65-F5344CB8AC3E}">
+        <p14:creationId xmlns:p14="http://schemas.microsoft.com/office/powerpoint/2010/main" val="2990189964"/>
+      </p:ext>
+    </p:extLst>
+  </p:cSld>
+  <p:clrMapOvr>
+    <a:masterClrMapping/>
+  </p:clrMapOvr>
+  <mc:AlternateContent xmlns:mc="http://schemas.openxmlformats.org/markup-compatibility/2006" xmlns:p159="http://schemas.microsoft.com/office/powerpoint/2015/09/main">
+    <mc:Choice Requires="p159">
+      <p:transition xmlns:p14="http://schemas.microsoft.com/office/powerpoint/2010/main" spd="slow" p14:dur="2000">
+        <p159:morph option="byObject"/>
+      </p:transition>
+    </mc:Choice>
+    <mc:Fallback xmlns="">
+      <p:transition spd="slow">
+        <p:fade/>
+      </p:transition>
+    </mc:Fallback>
+  </mc:AlternateContent>
+</p:sld>
+</file>
+
+<file path=ppt/slides/slide55.xml><?xml version="1.0" encoding="utf-8"?>
+<p:sld xmlns:a="http://schemas.openxmlformats.org/drawingml/2006/main" xmlns:r="http://schemas.openxmlformats.org/officeDocument/2006/relationships" xmlns:p="http://schemas.openxmlformats.org/presentationml/2006/main">
+  <p:cSld>
+    <p:spTree>
+      <p:nvGrpSpPr>
+        <p:cNvPr id="1" name="">
+          <a:extLst>
+            <a:ext uri="{FF2B5EF4-FFF2-40B4-BE49-F238E27FC236}">
+              <a16:creationId xmlns:a16="http://schemas.microsoft.com/office/drawing/2014/main" id="{B3A19B3B-FB8E-C5A6-9BDE-D35B5983841C}"/>
+            </a:ext>
+          </a:extLst>
+        </p:cNvPr>
+        <p:cNvGrpSpPr/>
+        <p:nvPr/>
+      </p:nvGrpSpPr>
+      <p:grpSpPr>
+        <a:xfrm>
+          <a:off x="0" y="0"/>
+          <a:ext cx="0" cy="0"/>
+          <a:chOff x="0" y="0"/>
+          <a:chExt cx="0" cy="0"/>
+        </a:xfrm>
+      </p:grpSpPr>
+      <p:sp>
+        <p:nvSpPr>
+          <p:cNvPr id="5" name="Rettangolo 4">
+            <a:extLst>
+              <a:ext uri="{FF2B5EF4-FFF2-40B4-BE49-F238E27FC236}">
+                <a16:creationId xmlns:a16="http://schemas.microsoft.com/office/drawing/2014/main" id="{DCB98510-44D4-2C4B-8DD1-C758BCCE5735}"/>
+              </a:ext>
+            </a:extLst>
+          </p:cNvPr>
+          <p:cNvSpPr/>
+          <p:nvPr/>
+        </p:nvSpPr>
+        <p:spPr>
+          <a:xfrm rot="16200000">
+            <a:off x="5612871" y="326546"/>
+            <a:ext cx="966258" cy="12192000"/>
+          </a:xfrm>
+          <a:prstGeom prst="rect">
+            <a:avLst/>
+          </a:prstGeom>
+          <a:solidFill>
+            <a:srgbClr val="990000"/>
+          </a:solidFill>
+          <a:ln>
+            <a:solidFill>
+              <a:srgbClr val="990000"/>
+            </a:solidFill>
+          </a:ln>
+        </p:spPr>
+        <p:style>
+          <a:lnRef idx="2">
+            <a:schemeClr val="accent1">
+              <a:shade val="15000"/>
+            </a:schemeClr>
+          </a:lnRef>
+          <a:fillRef idx="1">
+            <a:schemeClr val="accent1"/>
+          </a:fillRef>
+          <a:effectRef idx="0">
+            <a:schemeClr val="accent1"/>
+          </a:effectRef>
+          <a:fontRef idx="minor">
+            <a:schemeClr val="lt1"/>
+          </a:fontRef>
+        </p:style>
+        <p:txBody>
+          <a:bodyPr rtlCol="0" anchor="ctr"/>
+          <a:lstStyle/>
+          <a:p>
+            <a:pPr algn="ctr"/>
+            <a:endParaRPr lang="it-IT" dirty="0"/>
+          </a:p>
+        </p:txBody>
+      </p:sp>
+      <p:sp>
+        <p:nvSpPr>
+          <p:cNvPr id="6" name="CasellaDiTesto 5">
+            <a:extLst>
+              <a:ext uri="{FF2B5EF4-FFF2-40B4-BE49-F238E27FC236}">
+                <a16:creationId xmlns:a16="http://schemas.microsoft.com/office/drawing/2014/main" id="{A94CDE8D-B5A2-F3F2-7BD8-9B307A68CA19}"/>
+              </a:ext>
+            </a:extLst>
+          </p:cNvPr>
+          <p:cNvSpPr txBox="1"/>
+          <p:nvPr/>
+        </p:nvSpPr>
+        <p:spPr>
+          <a:xfrm>
+            <a:off x="5086139" y="6222490"/>
+            <a:ext cx="2019720" cy="400110"/>
+          </a:xfrm>
+          <a:prstGeom prst="rect">
+            <a:avLst/>
+          </a:prstGeom>
+          <a:noFill/>
+        </p:spPr>
+        <p:txBody>
+          <a:bodyPr wrap="square" rtlCol="0">
+            <a:spAutoFit/>
+          </a:bodyPr>
+          <a:lstStyle/>
+          <a:p>
+            <a:pPr algn="r"/>
+            <a:r>
+              <a:rPr lang="it-IT" sz="2000" b="1" dirty="0">
+                <a:solidFill>
+                  <a:schemeClr val="bg1"/>
+                </a:solidFill>
+              </a:rPr>
+              <a:t>Gianpaolo Pestilli</a:t>
+            </a:r>
+          </a:p>
+        </p:txBody>
+      </p:sp>
+      <mc:AlternateContent xmlns:mc="http://schemas.openxmlformats.org/markup-compatibility/2006" xmlns:a14="http://schemas.microsoft.com/office/drawing/2010/main">
+        <mc:Choice Requires="a14">
           <p:sp>
             <p:nvSpPr>
               <p:cNvPr id="8" name="CasellaDiTesto 7">
@@ -19620,7 +19945,9 @@
                     <m:f>
                       <m:fPr>
                         <m:ctrlPr>
-                          <a:rPr lang="it-IT" sz="2800" smtClean="0"/>
+                          <a:rPr lang="it-IT" sz="2800" i="1" smtClean="0">
+                            <a:latin typeface="Cambria Math" panose="02040503050406030204" pitchFamily="18" charset="0"/>
+                          </a:rPr>
                         </m:ctrlPr>
                       </m:fPr>
                       <m:num>
@@ -19628,18 +19955,24 @@
                           <m:rPr>
                             <m:sty m:val="p"/>
                           </m:rPr>
-                          <a:rPr lang="it-IT" sz="2800" b="0" i="0" smtClean="0"/>
+                          <a:rPr lang="it-IT" sz="2800" b="0" i="0" smtClean="0">
+                            <a:latin typeface="Cambria Math" panose="02040503050406030204" pitchFamily="18" charset="0"/>
+                          </a:rPr>
                           <m:t>deg</m:t>
                         </m:r>
                         <m:r>
-                          <a:rPr lang="it-IT" sz="2800" b="0" i="0" smtClean="0"/>
+                          <a:rPr lang="it-IT" sz="2800" b="0" i="0" smtClean="0">
+                            <a:latin typeface="Cambria Math" panose="02040503050406030204" pitchFamily="18" charset="0"/>
+                          </a:rPr>
                           <m:t>_</m:t>
                         </m:r>
                         <m:r>
                           <m:rPr>
                             <m:sty m:val="p"/>
                           </m:rPr>
-                          <a:rPr lang="it-IT" sz="2800" b="0" i="0" smtClean="0"/>
+                          <a:rPr lang="it-IT" sz="2800" b="0" i="0" smtClean="0">
+                            <a:latin typeface="Cambria Math" panose="02040503050406030204" pitchFamily="18" charset="0"/>
+                          </a:rPr>
                           <m:t>max</m:t>
                         </m:r>
                       </m:num>
@@ -19648,18 +19981,24 @@
                           <m:rPr>
                             <m:sty m:val="p"/>
                           </m:rPr>
-                          <a:rPr lang="it-IT" sz="2800" b="0" i="0" smtClean="0"/>
+                          <a:rPr lang="it-IT" sz="2800" b="0" i="0" smtClean="0">
+                            <a:latin typeface="Cambria Math" panose="02040503050406030204" pitchFamily="18" charset="0"/>
+                          </a:rPr>
                           <m:t>deg</m:t>
                         </m:r>
                         <m:r>
-                          <a:rPr lang="it-IT" sz="2800" b="0" i="0" smtClean="0"/>
+                          <a:rPr lang="it-IT" sz="2800" b="0" i="0" smtClean="0">
+                            <a:latin typeface="Cambria Math" panose="02040503050406030204" pitchFamily="18" charset="0"/>
+                          </a:rPr>
                           <m:t>⁡_</m:t>
                         </m:r>
                         <m:r>
                           <m:rPr>
                             <m:sty m:val="p"/>
                           </m:rPr>
-                          <a:rPr lang="it-IT" sz="2800" b="0" i="0" smtClean="0"/>
+                          <a:rPr lang="it-IT" sz="2800" b="0" i="0" smtClean="0">
+                            <a:latin typeface="Cambria Math" panose="02040503050406030204" pitchFamily="18" charset="0"/>
+                          </a:rPr>
                           <m:t>medio</m:t>
                         </m:r>
                       </m:den>
@@ -19707,7 +20046,9 @@
                 <a14:m>
                   <m:oMath xmlns:m="http://schemas.openxmlformats.org/officeDocument/2006/math">
                     <m:r>
-                      <a:rPr lang="it-IT" sz="2800" i="1" dirty="0" smtClean="0"/>
+                      <a:rPr lang="it-IT" sz="2800" i="1" dirty="0" smtClean="0">
+                        <a:latin typeface="Cambria Math" panose="02040503050406030204" pitchFamily="18" charset="0"/>
+                      </a:rPr>
                       <m:t>𝜇</m:t>
                     </m:r>
                   </m:oMath>
@@ -19719,7 +20060,9 @@
                 <a14:m>
                   <m:oMath xmlns:m="http://schemas.openxmlformats.org/officeDocument/2006/math">
                     <m:r>
-                      <a:rPr lang="it-IT" sz="2800" i="1" dirty="0"/>
+                      <a:rPr lang="it-IT" sz="2800" i="1" dirty="0">
+                        <a:latin typeface="Cambria Math" panose="02040503050406030204" pitchFamily="18" charset="0"/>
+                      </a:rPr>
                       <m:t>𝜎</m:t>
                     </m:r>
                   </m:oMath>
@@ -19741,7 +20084,9 @@
                 <a14:m>
                   <m:oMath xmlns:m="http://schemas.openxmlformats.org/officeDocument/2006/math">
                     <m:r>
-                      <a:rPr lang="it-IT" sz="2800" dirty="0"/>
+                      <a:rPr lang="it-IT" sz="2800" dirty="0">
+                        <a:latin typeface="Cambria Math" panose="02040503050406030204" pitchFamily="18" charset="0"/>
+                      </a:rPr>
                       <m:t>≈</m:t>
                     </m:r>
                   </m:oMath>
@@ -19755,12 +20100,16 @@
                     <m:f>
                       <m:fPr>
                         <m:ctrlPr>
-                          <a:rPr lang="it-IT" sz="2800" i="1"/>
+                          <a:rPr lang="it-IT" sz="2800" i="1">
+                            <a:latin typeface="Cambria Math" panose="02040503050406030204" pitchFamily="18" charset="0"/>
+                          </a:rPr>
                         </m:ctrlPr>
                       </m:fPr>
                       <m:num>
                         <m:r>
-                          <a:rPr lang="it-IT" sz="2800" i="1" dirty="0"/>
+                          <a:rPr lang="it-IT" sz="2800" i="1" dirty="0">
+                            <a:latin typeface="Cambria Math" panose="02040503050406030204" pitchFamily="18" charset="0"/>
+                          </a:rPr>
                           <m:t>𝜇</m:t>
                         </m:r>
                         <m:r>
@@ -19771,7 +20120,9 @@
                           <m:t> + 3 </m:t>
                         </m:r>
                         <m:r>
-                          <a:rPr lang="it-IT" sz="2800" i="1" dirty="0"/>
+                          <a:rPr lang="it-IT" sz="2800" i="1" dirty="0">
+                            <a:latin typeface="Cambria Math" panose="02040503050406030204" pitchFamily="18" charset="0"/>
+                          </a:rPr>
                           <m:t>𝜎</m:t>
                         </m:r>
                         <m:r>
@@ -19784,7 +20135,9 @@
                       </m:num>
                       <m:den>
                         <m:r>
-                          <a:rPr lang="it-IT" sz="2800" i="1" dirty="0"/>
+                          <a:rPr lang="it-IT" sz="2800" i="1" dirty="0">
+                            <a:latin typeface="Cambria Math" panose="02040503050406030204" pitchFamily="18" charset="0"/>
+                          </a:rPr>
                           <m:t>𝜇</m:t>
                         </m:r>
                       </m:den>
@@ -19822,7 +20175,9 @@
                 <a14:m>
                   <m:oMath xmlns:m="http://schemas.openxmlformats.org/officeDocument/2006/math">
                     <m:r>
-                      <a:rPr lang="it-IT" sz="2800" dirty="0"/>
+                      <a:rPr lang="it-IT" sz="2800" dirty="0">
+                        <a:latin typeface="Cambria Math" panose="02040503050406030204" pitchFamily="18" charset="0"/>
+                      </a:rPr>
                       <m:t>≈</m:t>
                     </m:r>
                   </m:oMath>
@@ -19836,18 +20191,24 @@
                     <m:f>
                       <m:fPr>
                         <m:ctrlPr>
-                          <a:rPr lang="it-IT" sz="2800" i="1"/>
+                          <a:rPr lang="it-IT" sz="2800" i="1">
+                            <a:latin typeface="Cambria Math" panose="02040503050406030204" pitchFamily="18" charset="0"/>
+                          </a:rPr>
                         </m:ctrlPr>
                       </m:fPr>
                       <m:num>
                         <m:r>
-                          <a:rPr lang="it-IT" sz="2800" b="0" i="1" dirty="0" smtClean="0"/>
+                          <a:rPr lang="it-IT" sz="2800" b="0" i="1" dirty="0" smtClean="0">
+                            <a:latin typeface="Cambria Math" panose="02040503050406030204" pitchFamily="18" charset="0"/>
+                          </a:rPr>
                           <m:t>1.2+1.6</m:t>
                         </m:r>
                       </m:num>
                       <m:den>
                         <m:r>
-                          <a:rPr lang="it-IT" sz="2800" b="0" i="1" dirty="0" smtClean="0"/>
+                          <a:rPr lang="it-IT" sz="2800" b="0" i="1" dirty="0" smtClean="0">
+                            <a:latin typeface="Cambria Math" panose="02040503050406030204" pitchFamily="18" charset="0"/>
+                          </a:rPr>
                           <m:t>2</m:t>
                         </m:r>
                       </m:den>
@@ -19872,7 +20233,7 @@
             </p:txBody>
           </p:sp>
         </mc:Choice>
-        <mc:Fallback>
+        <mc:Fallback xmlns="">
           <p:sp>
             <p:nvSpPr>
               <p:cNvPr id="8" name="CasellaDiTesto 7">
@@ -19952,7 +20313,7 @@
                   <a:schemeClr val="bg1"/>
                 </a:solidFill>
               </a:rPr>
-              <a:t>41</a:t>
+              <a:t>53</a:t>
             </a:r>
           </a:p>
         </p:txBody>
@@ -19982,7 +20343,7 @@
 </p:sld>
 </file>
 
-<file path=ppt/slides/slide55.xml><?xml version="1.0" encoding="utf-8"?>
+<file path=ppt/slides/slide56.xml><?xml version="1.0" encoding="utf-8"?>
 <p:sld xmlns:a="http://schemas.openxmlformats.org/drawingml/2006/main" xmlns:r="http://schemas.openxmlformats.org/officeDocument/2006/relationships" xmlns:p="http://schemas.openxmlformats.org/presentationml/2006/main">
   <p:cSld>
     <p:spTree>
@@ -20099,8 +20460,8 @@
           </a:p>
         </p:txBody>
       </p:sp>
-      <mc:AlternateContent xmlns:mc="http://schemas.openxmlformats.org/markup-compatibility/2006">
-        <mc:Choice xmlns:a14="http://schemas.microsoft.com/office/drawing/2010/main" Requires="a14">
+      <mc:AlternateContent xmlns:mc="http://schemas.openxmlformats.org/markup-compatibility/2006" xmlns:a14="http://schemas.microsoft.com/office/drawing/2010/main">
+        <mc:Choice Requires="a14">
           <p:sp>
             <p:nvSpPr>
               <p:cNvPr id="8" name="CasellaDiTesto 7">
@@ -20217,7 +20578,9 @@
                 <a14:m>
                   <m:oMath xmlns:m="http://schemas.openxmlformats.org/officeDocument/2006/math">
                     <m:r>
-                      <a:rPr lang="it-IT" sz="2800" dirty="0"/>
+                      <a:rPr lang="it-IT" sz="2800" dirty="0">
+                        <a:latin typeface="Cambria Math" panose="02040503050406030204" pitchFamily="18" charset="0"/>
+                      </a:rPr>
                       <m:t>≈</m:t>
                     </m:r>
                   </m:oMath>
@@ -20231,12 +20594,16 @@
                     <m:f>
                       <m:fPr>
                         <m:ctrlPr>
-                          <a:rPr lang="it-IT" sz="2800" i="1"/>
+                          <a:rPr lang="it-IT" sz="2800" i="1">
+                            <a:latin typeface="Cambria Math" panose="02040503050406030204" pitchFamily="18" charset="0"/>
+                          </a:rPr>
                         </m:ctrlPr>
                       </m:fPr>
                       <m:num>
                         <m:r>
-                          <a:rPr lang="it-IT" sz="2800" i="1" dirty="0"/>
+                          <a:rPr lang="it-IT" sz="2800" i="1" dirty="0">
+                            <a:latin typeface="Cambria Math" panose="02040503050406030204" pitchFamily="18" charset="0"/>
+                          </a:rPr>
                           <m:t>𝜇</m:t>
                         </m:r>
                         <m:r>
@@ -20247,7 +20614,9 @@
                           <m:t> + 3 </m:t>
                         </m:r>
                         <m:r>
-                          <a:rPr lang="it-IT" sz="2800" i="1" dirty="0"/>
+                          <a:rPr lang="it-IT" sz="2800" i="1" dirty="0">
+                            <a:latin typeface="Cambria Math" panose="02040503050406030204" pitchFamily="18" charset="0"/>
+                          </a:rPr>
                           <m:t>𝜎</m:t>
                         </m:r>
                         <m:r>
@@ -20260,7 +20629,9 @@
                       </m:num>
                       <m:den>
                         <m:r>
-                          <a:rPr lang="it-IT" sz="2800" i="1" dirty="0"/>
+                          <a:rPr lang="it-IT" sz="2800" i="1" dirty="0">
+                            <a:latin typeface="Cambria Math" panose="02040503050406030204" pitchFamily="18" charset="0"/>
+                          </a:rPr>
                           <m:t>𝜇</m:t>
                         </m:r>
                       </m:den>
@@ -20316,7 +20687,7 @@
             </p:txBody>
           </p:sp>
         </mc:Choice>
-        <mc:Fallback>
+        <mc:Fallback xmlns="">
           <p:sp>
             <p:nvSpPr>
               <p:cNvPr id="8" name="CasellaDiTesto 7">
@@ -20396,7 +20767,7 @@
                   <a:schemeClr val="bg1"/>
                 </a:solidFill>
               </a:rPr>
-              <a:t>41</a:t>
+              <a:t>54</a:t>
             </a:r>
           </a:p>
         </p:txBody>
@@ -20405,309 +20776,6 @@
     <p:extLst>
       <p:ext uri="{BB962C8B-B14F-4D97-AF65-F5344CB8AC3E}">
         <p14:creationId xmlns:p14="http://schemas.microsoft.com/office/powerpoint/2010/main" val="3204728833"/>
-      </p:ext>
-    </p:extLst>
-  </p:cSld>
-  <p:clrMapOvr>
-    <a:masterClrMapping/>
-  </p:clrMapOvr>
-  <mc:AlternateContent xmlns:mc="http://schemas.openxmlformats.org/markup-compatibility/2006" xmlns:p159="http://schemas.microsoft.com/office/powerpoint/2015/09/main">
-    <mc:Choice Requires="p159">
-      <p:transition xmlns:p14="http://schemas.microsoft.com/office/powerpoint/2010/main" spd="slow" p14:dur="2000">
-        <p159:morph option="byObject"/>
-      </p:transition>
-    </mc:Choice>
-    <mc:Fallback xmlns="">
-      <p:transition spd="slow">
-        <p:fade/>
-      </p:transition>
-    </mc:Fallback>
-  </mc:AlternateContent>
-</p:sld>
-</file>
-
-<file path=ppt/slides/slide56.xml><?xml version="1.0" encoding="utf-8"?>
-<p:sld xmlns:a="http://schemas.openxmlformats.org/drawingml/2006/main" xmlns:r="http://schemas.openxmlformats.org/officeDocument/2006/relationships" xmlns:p="http://schemas.openxmlformats.org/presentationml/2006/main">
-  <p:cSld>
-    <p:spTree>
-      <p:nvGrpSpPr>
-        <p:cNvPr id="1" name="">
-          <a:extLst>
-            <a:ext uri="{FF2B5EF4-FFF2-40B4-BE49-F238E27FC236}">
-              <a16:creationId xmlns:a16="http://schemas.microsoft.com/office/drawing/2014/main" id="{BC703C0D-6076-EDDA-DA62-3FFD560D3070}"/>
-            </a:ext>
-          </a:extLst>
-        </p:cNvPr>
-        <p:cNvGrpSpPr/>
-        <p:nvPr/>
-      </p:nvGrpSpPr>
-      <p:grpSpPr>
-        <a:xfrm>
-          <a:off x="0" y="0"/>
-          <a:ext cx="0" cy="0"/>
-          <a:chOff x="0" y="0"/>
-          <a:chExt cx="0" cy="0"/>
-        </a:xfrm>
-      </p:grpSpPr>
-      <p:sp>
-        <p:nvSpPr>
-          <p:cNvPr id="5" name="Rettangolo 4">
-            <a:extLst>
-              <a:ext uri="{FF2B5EF4-FFF2-40B4-BE49-F238E27FC236}">
-                <a16:creationId xmlns:a16="http://schemas.microsoft.com/office/drawing/2014/main" id="{20DA4FF2-7B5D-EDBE-99E5-1CC39E1E32F6}"/>
-              </a:ext>
-            </a:extLst>
-          </p:cNvPr>
-          <p:cNvSpPr/>
-          <p:nvPr/>
-        </p:nvSpPr>
-        <p:spPr>
-          <a:xfrm rot="16200000">
-            <a:off x="5612871" y="326546"/>
-            <a:ext cx="966258" cy="12192000"/>
-          </a:xfrm>
-          <a:prstGeom prst="rect">
-            <a:avLst/>
-          </a:prstGeom>
-          <a:solidFill>
-            <a:srgbClr val="990000"/>
-          </a:solidFill>
-          <a:ln>
-            <a:solidFill>
-              <a:srgbClr val="990000"/>
-            </a:solidFill>
-          </a:ln>
-        </p:spPr>
-        <p:style>
-          <a:lnRef idx="2">
-            <a:schemeClr val="accent1">
-              <a:shade val="15000"/>
-            </a:schemeClr>
-          </a:lnRef>
-          <a:fillRef idx="1">
-            <a:schemeClr val="accent1"/>
-          </a:fillRef>
-          <a:effectRef idx="0">
-            <a:schemeClr val="accent1"/>
-          </a:effectRef>
-          <a:fontRef idx="minor">
-            <a:schemeClr val="lt1"/>
-          </a:fontRef>
-        </p:style>
-        <p:txBody>
-          <a:bodyPr rtlCol="0" anchor="ctr"/>
-          <a:lstStyle/>
-          <a:p>
-            <a:pPr algn="ctr"/>
-            <a:endParaRPr lang="it-IT" dirty="0"/>
-          </a:p>
-        </p:txBody>
-      </p:sp>
-      <p:sp>
-        <p:nvSpPr>
-          <p:cNvPr id="6" name="CasellaDiTesto 5">
-            <a:extLst>
-              <a:ext uri="{FF2B5EF4-FFF2-40B4-BE49-F238E27FC236}">
-                <a16:creationId xmlns:a16="http://schemas.microsoft.com/office/drawing/2014/main" id="{2A63AD9D-B169-C12A-2A0C-144AF23F63FC}"/>
-              </a:ext>
-            </a:extLst>
-          </p:cNvPr>
-          <p:cNvSpPr txBox="1"/>
-          <p:nvPr/>
-        </p:nvSpPr>
-        <p:spPr>
-          <a:xfrm>
-            <a:off x="5086139" y="6222490"/>
-            <a:ext cx="2019720" cy="400110"/>
-          </a:xfrm>
-          <a:prstGeom prst="rect">
-            <a:avLst/>
-          </a:prstGeom>
-          <a:noFill/>
-        </p:spPr>
-        <p:txBody>
-          <a:bodyPr wrap="square" rtlCol="0">
-            <a:spAutoFit/>
-          </a:bodyPr>
-          <a:lstStyle/>
-          <a:p>
-            <a:pPr algn="r"/>
-            <a:r>
-              <a:rPr lang="it-IT" sz="2000" b="1" dirty="0">
-                <a:solidFill>
-                  <a:schemeClr val="bg1"/>
-                </a:solidFill>
-              </a:rPr>
-              <a:t>Gianpaolo Pestilli</a:t>
-            </a:r>
-          </a:p>
-        </p:txBody>
-      </p:sp>
-      <p:sp>
-        <p:nvSpPr>
-          <p:cNvPr id="8" name="CasellaDiTesto 7">
-            <a:extLst>
-              <a:ext uri="{FF2B5EF4-FFF2-40B4-BE49-F238E27FC236}">
-                <a16:creationId xmlns:a16="http://schemas.microsoft.com/office/drawing/2014/main" id="{D028465C-1A6E-7D80-5C6C-3E04F17A1A6B}"/>
-              </a:ext>
-            </a:extLst>
-          </p:cNvPr>
-          <p:cNvSpPr txBox="1"/>
-          <p:nvPr/>
-        </p:nvSpPr>
-        <p:spPr>
-          <a:xfrm>
-            <a:off x="533399" y="728069"/>
-            <a:ext cx="11116884" cy="5032147"/>
-          </a:xfrm>
-          <a:prstGeom prst="rect">
-            <a:avLst/>
-          </a:prstGeom>
-          <a:noFill/>
-        </p:spPr>
-        <p:txBody>
-          <a:bodyPr wrap="square" rtlCol="0">
-            <a:spAutoFit/>
-          </a:bodyPr>
-          <a:lstStyle/>
-          <a:p>
-            <a:pPr algn="just">
-              <a:spcAft>
-                <a:spcPts val="600"/>
-              </a:spcAft>
-            </a:pPr>
-            <a:r>
-              <a:rPr lang="it-IT" sz="4000" b="1" dirty="0">
-                <a:solidFill>
-                  <a:srgbClr val="990000"/>
-                </a:solidFill>
-              </a:rPr>
-              <a:t>GENERAZIONE DELLE ISTANZE</a:t>
-            </a:r>
-          </a:p>
-          <a:p>
-            <a:pPr algn="just">
-              <a:spcAft>
-                <a:spcPts val="600"/>
-              </a:spcAft>
-            </a:pPr>
-            <a:r>
-              <a:rPr lang="it-IT" sz="3200" b="1" dirty="0"/>
-              <a:t>Vertex cover non pesato – Istruzioni che vale la pena commentare:</a:t>
-            </a:r>
-          </a:p>
-          <a:p>
-            <a:pPr algn="just">
-              <a:spcAft>
-                <a:spcPts val="600"/>
-              </a:spcAft>
-            </a:pPr>
-            <a:endParaRPr lang="it-IT" sz="3200" b="1" dirty="0"/>
-          </a:p>
-          <a:p>
-            <a:pPr algn="just">
-              <a:spcAft>
-                <a:spcPts val="600"/>
-              </a:spcAft>
-            </a:pPr>
-            <a:endParaRPr lang="it-IT" sz="3200" b="1" dirty="0"/>
-          </a:p>
-          <a:p>
-            <a:pPr algn="just">
-              <a:spcAft>
-                <a:spcPts val="600"/>
-              </a:spcAft>
-            </a:pPr>
-            <a:endParaRPr lang="it-IT" sz="3200" b="1" dirty="0"/>
-          </a:p>
-          <a:p>
-            <a:pPr algn="just">
-              <a:spcAft>
-                <a:spcPts val="600"/>
-              </a:spcAft>
-            </a:pPr>
-            <a:r>
-              <a:rPr lang="it-IT" sz="3200" dirty="0"/>
-              <a:t>Si utilizza una normale perché è una variabile aleatoria la cui varianza non si ottiene in modo matematico a partire dalla media (si può modificare a piacimento mantenendo la media fissa).</a:t>
-            </a:r>
-          </a:p>
-        </p:txBody>
-      </p:sp>
-      <p:sp>
-        <p:nvSpPr>
-          <p:cNvPr id="2" name="CasellaDiTesto 1">
-            <a:extLst>
-              <a:ext uri="{FF2B5EF4-FFF2-40B4-BE49-F238E27FC236}">
-                <a16:creationId xmlns:a16="http://schemas.microsoft.com/office/drawing/2014/main" id="{BB63DFD3-C9E3-9EFF-F47F-CFF1391A6858}"/>
-              </a:ext>
-            </a:extLst>
-          </p:cNvPr>
-          <p:cNvSpPr txBox="1"/>
-          <p:nvPr/>
-        </p:nvSpPr>
-        <p:spPr>
-          <a:xfrm>
-            <a:off x="11434917" y="6222490"/>
-            <a:ext cx="491612" cy="400110"/>
-          </a:xfrm>
-          <a:prstGeom prst="rect">
-            <a:avLst/>
-          </a:prstGeom>
-          <a:noFill/>
-        </p:spPr>
-        <p:txBody>
-          <a:bodyPr wrap="square" rtlCol="0">
-            <a:spAutoFit/>
-          </a:bodyPr>
-          <a:lstStyle/>
-          <a:p>
-            <a:pPr algn="r"/>
-            <a:r>
-              <a:rPr lang="it-IT" sz="2000" b="1" dirty="0">
-                <a:solidFill>
-                  <a:schemeClr val="bg1"/>
-                </a:solidFill>
-              </a:rPr>
-              <a:t>41</a:t>
-            </a:r>
-          </a:p>
-        </p:txBody>
-      </p:sp>
-      <p:pic>
-        <p:nvPicPr>
-          <p:cNvPr id="7" name="Immagine 6">
-            <a:extLst>
-              <a:ext uri="{FF2B5EF4-FFF2-40B4-BE49-F238E27FC236}">
-                <a16:creationId xmlns:a16="http://schemas.microsoft.com/office/drawing/2014/main" id="{C1D6FA59-3C57-891A-8CE1-008016D91F4A}"/>
-              </a:ext>
-            </a:extLst>
-          </p:cNvPr>
-          <p:cNvPicPr>
-            <a:picLocks noChangeAspect="1"/>
-          </p:cNvPicPr>
-          <p:nvPr/>
-        </p:nvPicPr>
-        <p:blipFill>
-          <a:blip r:embed="rId2"/>
-          <a:srcRect t="47356" b="5339"/>
-          <a:stretch>
-            <a:fillRect/>
-          </a:stretch>
-        </p:blipFill>
-        <p:spPr>
-          <a:xfrm>
-            <a:off x="533399" y="2445773"/>
-            <a:ext cx="8708924" cy="1785979"/>
-          </a:xfrm>
-          <a:prstGeom prst="rect">
-            <a:avLst/>
-          </a:prstGeom>
-        </p:spPr>
-      </p:pic>
-    </p:spTree>
-    <p:extLst>
-      <p:ext uri="{BB962C8B-B14F-4D97-AF65-F5344CB8AC3E}">
-        <p14:creationId xmlns:p14="http://schemas.microsoft.com/office/powerpoint/2010/main" val="2990189964"/>
       </p:ext>
     </p:extLst>
   </p:cSld>
@@ -20971,17 +21039,17 @@
                   <a:schemeClr val="bg1"/>
                 </a:solidFill>
               </a:rPr>
-              <a:t>41</a:t>
+              <a:t>55</a:t>
             </a:r>
           </a:p>
         </p:txBody>
       </p:sp>
       <p:pic>
         <p:nvPicPr>
-          <p:cNvPr id="4" name="Immagine 3">
-            <a:extLst>
-              <a:ext uri="{FF2B5EF4-FFF2-40B4-BE49-F238E27FC236}">
-                <a16:creationId xmlns:a16="http://schemas.microsoft.com/office/drawing/2014/main" id="{AC112F92-E2B2-5244-04DB-953F9DADC309}"/>
+          <p:cNvPr id="3" name="Immagine 2">
+            <a:extLst>
+              <a:ext uri="{FF2B5EF4-FFF2-40B4-BE49-F238E27FC236}">
+                <a16:creationId xmlns:a16="http://schemas.microsoft.com/office/drawing/2014/main" id="{B83BE23E-BF05-CA6D-375F-E427BDA7612B}"/>
               </a:ext>
             </a:extLst>
           </p:cNvPr>
@@ -20992,15 +21060,15 @@
         </p:nvPicPr>
         <p:blipFill>
           <a:blip r:embed="rId2"/>
-          <a:srcRect t="29532" b="42032"/>
+          <a:srcRect t="47356" b="5339"/>
           <a:stretch>
             <a:fillRect/>
           </a:stretch>
         </p:blipFill>
         <p:spPr>
           <a:xfrm>
-            <a:off x="533399" y="2400026"/>
-            <a:ext cx="8958013" cy="1825177"/>
+            <a:off x="533399" y="2445773"/>
+            <a:ext cx="8708924" cy="1785979"/>
           </a:xfrm>
           <a:prstGeom prst="rect">
             <a:avLst/>
@@ -21149,61 +21217,166 @@
           </a:p>
         </p:txBody>
       </p:sp>
-      <p:sp>
-        <p:nvSpPr>
-          <p:cNvPr id="8" name="CasellaDiTesto 7">
-            <a:extLst>
-              <a:ext uri="{FF2B5EF4-FFF2-40B4-BE49-F238E27FC236}">
-                <a16:creationId xmlns:a16="http://schemas.microsoft.com/office/drawing/2014/main" id="{83DB7FBF-CD28-FD5C-D5FA-07B80298E5EF}"/>
-              </a:ext>
-            </a:extLst>
-          </p:cNvPr>
-          <p:cNvSpPr txBox="1"/>
-          <p:nvPr/>
-        </p:nvSpPr>
-        <p:spPr>
-          <a:xfrm>
-            <a:off x="533399" y="728069"/>
-            <a:ext cx="11116884" cy="1769715"/>
-          </a:xfrm>
-          <a:prstGeom prst="rect">
-            <a:avLst/>
-          </a:prstGeom>
-          <a:noFill/>
-        </p:spPr>
-        <p:txBody>
-          <a:bodyPr wrap="square" rtlCol="0">
-            <a:spAutoFit/>
-          </a:bodyPr>
-          <a:lstStyle/>
-          <a:p>
-            <a:pPr algn="just">
-              <a:spcAft>
-                <a:spcPts val="600"/>
-              </a:spcAft>
-            </a:pPr>
-            <a:r>
-              <a:rPr lang="it-IT" sz="4000" b="1" dirty="0">
-                <a:solidFill>
-                  <a:srgbClr val="990000"/>
-                </a:solidFill>
-              </a:rPr>
-              <a:t>GENERAZIONE DELLE ISTANZE</a:t>
-            </a:r>
-          </a:p>
-          <a:p>
-            <a:pPr algn="just">
-              <a:spcAft>
-                <a:spcPts val="600"/>
-              </a:spcAft>
-            </a:pPr>
-            <a:r>
-              <a:rPr lang="it-IT" sz="3200" b="1" dirty="0"/>
-              <a:t>Vertex cover non pesato – Istruzioni che vale la pena commentare:</a:t>
-            </a:r>
-          </a:p>
-        </p:txBody>
-      </p:sp>
+      <mc:AlternateContent xmlns:mc="http://schemas.openxmlformats.org/markup-compatibility/2006">
+        <mc:Choice xmlns:a14="http://schemas.microsoft.com/office/drawing/2010/main" Requires="a14">
+          <p:sp>
+            <p:nvSpPr>
+              <p:cNvPr id="8" name="CasellaDiTesto 7">
+                <a:extLst>
+                  <a:ext uri="{FF2B5EF4-FFF2-40B4-BE49-F238E27FC236}">
+                    <a16:creationId xmlns:a16="http://schemas.microsoft.com/office/drawing/2014/main" id="{83DB7FBF-CD28-FD5C-D5FA-07B80298E5EF}"/>
+                  </a:ext>
+                </a:extLst>
+              </p:cNvPr>
+              <p:cNvSpPr txBox="1"/>
+              <p:nvPr/>
+            </p:nvSpPr>
+            <p:spPr>
+              <a:xfrm>
+                <a:off x="533399" y="728069"/>
+                <a:ext cx="11116884" cy="5139869"/>
+              </a:xfrm>
+              <a:prstGeom prst="rect">
+                <a:avLst/>
+              </a:prstGeom>
+              <a:noFill/>
+            </p:spPr>
+            <p:txBody>
+              <a:bodyPr wrap="square" rtlCol="0">
+                <a:spAutoFit/>
+              </a:bodyPr>
+              <a:lstStyle/>
+              <a:p>
+                <a:pPr algn="just">
+                  <a:spcAft>
+                    <a:spcPts val="600"/>
+                  </a:spcAft>
+                </a:pPr>
+                <a:r>
+                  <a:rPr lang="it-IT" sz="4000" b="1" dirty="0">
+                    <a:solidFill>
+                      <a:srgbClr val="990000"/>
+                    </a:solidFill>
+                  </a:rPr>
+                  <a:t>GENERAZIONE DELLE ISTANZE</a:t>
+                </a:r>
+              </a:p>
+              <a:p>
+                <a:pPr algn="just">
+                  <a:spcAft>
+                    <a:spcPts val="600"/>
+                  </a:spcAft>
+                </a:pPr>
+                <a:r>
+                  <a:rPr lang="it-IT" sz="3200" b="1" dirty="0"/>
+                  <a:t>Vertex cover non pesato – Istruzioni che vale la pena commentare:</a:t>
+                </a:r>
+              </a:p>
+              <a:p>
+                <a:pPr algn="just">
+                  <a:spcAft>
+                    <a:spcPts val="600"/>
+                  </a:spcAft>
+                </a:pPr>
+                <a:endParaRPr lang="it-IT" sz="3200" b="1" dirty="0"/>
+              </a:p>
+              <a:p>
+                <a:pPr algn="just">
+                  <a:spcAft>
+                    <a:spcPts val="600"/>
+                  </a:spcAft>
+                </a:pPr>
+                <a:endParaRPr lang="it-IT" sz="3200" b="1" dirty="0"/>
+              </a:p>
+              <a:p>
+                <a:pPr algn="just">
+                  <a:spcAft>
+                    <a:spcPts val="600"/>
+                  </a:spcAft>
+                </a:pPr>
+                <a:r>
+                  <a:rPr lang="it-IT" sz="2800" dirty="0"/>
+                  <a:t>Si usa una </a:t>
+                </a:r>
+                <a:r>
+                  <a:rPr lang="it-IT" sz="2800" dirty="0" err="1"/>
+                  <a:t>lognormale</a:t>
+                </a:r>
+                <a:r>
+                  <a:rPr lang="it-IT" sz="2800" dirty="0"/>
+                  <a:t> perché ha una heavy </a:t>
+                </a:r>
+                <a:r>
+                  <a:rPr lang="it-IT" sz="2800" dirty="0" err="1"/>
+                  <a:t>tail</a:t>
+                </a:r>
+                <a:r>
+                  <a:rPr lang="it-IT" sz="2800" dirty="0"/>
+                  <a:t> e permette di «sbilanciare» il grafo (alternando vertici di grado molto alto a vertici di grado molto basso). </a:t>
+                </a:r>
+                <a14:m>
+                  <m:oMath xmlns:m="http://schemas.openxmlformats.org/officeDocument/2006/math">
+                    <m:r>
+                      <a:rPr lang="it-IT" sz="2800" i="1" dirty="0">
+                        <a:latin typeface="Cambria Math" panose="02040503050406030204" pitchFamily="18" charset="0"/>
+                      </a:rPr>
+                      <m:t>𝜎</m:t>
+                    </m:r>
+                  </m:oMath>
+                </a14:m>
+                <a:r>
+                  <a:rPr lang="it-IT" sz="2800" dirty="0"/>
+                  <a:t> = 1 è stato ritenuto un valore coerente per evitare la formazione di pochissimi nodi con altissimo grado ma senza generare valori troppo simili a quelli di una normale.</a:t>
+                </a:r>
+              </a:p>
+            </p:txBody>
+          </p:sp>
+        </mc:Choice>
+        <mc:Fallback>
+          <p:sp>
+            <p:nvSpPr>
+              <p:cNvPr id="8" name="CasellaDiTesto 7">
+                <a:extLst>
+                  <a:ext uri="{FF2B5EF4-FFF2-40B4-BE49-F238E27FC236}">
+                    <a16:creationId xmlns:a16="http://schemas.microsoft.com/office/drawing/2014/main" id="{83DB7FBF-CD28-FD5C-D5FA-07B80298E5EF}"/>
+                  </a:ext>
+                </a:extLst>
+              </p:cNvPr>
+              <p:cNvSpPr txBox="1">
+                <a:spLocks noRot="1" noChangeAspect="1" noMove="1" noResize="1" noEditPoints="1" noAdjustHandles="1" noChangeArrowheads="1" noChangeShapeType="1" noTextEdit="1"/>
+              </p:cNvSpPr>
+              <p:nvPr/>
+            </p:nvSpPr>
+            <p:spPr>
+              <a:xfrm>
+                <a:off x="533399" y="728069"/>
+                <a:ext cx="11116884" cy="5139869"/>
+              </a:xfrm>
+              <a:prstGeom prst="rect">
+                <a:avLst/>
+              </a:prstGeom>
+              <a:blipFill>
+                <a:blip r:embed="rId2"/>
+                <a:stretch>
+                  <a:fillRect l="-1919" t="-2133" r="-1371" b="-2370"/>
+                </a:stretch>
+              </a:blipFill>
+            </p:spPr>
+            <p:txBody>
+              <a:bodyPr/>
+              <a:lstStyle/>
+              <a:p>
+                <a:r>
+                  <a:rPr lang="it-IT">
+                    <a:noFill/>
+                  </a:rPr>
+                  <a:t> </a:t>
+                </a:r>
+              </a:p>
+            </p:txBody>
+          </p:sp>
+        </mc:Fallback>
+      </mc:AlternateContent>
       <p:sp>
         <p:nvSpPr>
           <p:cNvPr id="2" name="CasellaDiTesto 1">
@@ -21239,7 +21412,7 @@
                   <a:schemeClr val="bg1"/>
                 </a:solidFill>
               </a:rPr>
-              <a:t>44</a:t>
+              <a:t>56</a:t>
             </a:r>
           </a:p>
         </p:txBody>
@@ -21259,16 +21432,16 @@
           <p:nvPr/>
         </p:nvPicPr>
         <p:blipFill>
-          <a:blip r:embed="rId2"/>
-          <a:srcRect t="57169" b="9599"/>
+          <a:blip r:embed="rId3"/>
+          <a:srcRect t="65609" b="21897"/>
           <a:stretch>
             <a:fillRect/>
           </a:stretch>
         </p:blipFill>
         <p:spPr>
           <a:xfrm>
-            <a:off x="533399" y="2562423"/>
-            <a:ext cx="10793496" cy="2570016"/>
+            <a:off x="533399" y="2462740"/>
+            <a:ext cx="10793496" cy="966260"/>
           </a:xfrm>
           <a:prstGeom prst="rect">
             <a:avLst/>
@@ -21528,7 +21701,7 @@
                   <a:schemeClr val="bg1"/>
                 </a:solidFill>
               </a:rPr>
-              <a:t>41</a:t>
+              <a:t>57</a:t>
             </a:r>
           </a:p>
         </p:txBody>
@@ -22199,7 +22372,7 @@
                   <a:schemeClr val="bg1"/>
                 </a:solidFill>
               </a:rPr>
-              <a:t>41</a:t>
+              <a:t>58</a:t>
             </a:r>
           </a:p>
         </p:txBody>
@@ -22208,6 +22381,873 @@
     <p:extLst>
       <p:ext uri="{BB962C8B-B14F-4D97-AF65-F5344CB8AC3E}">
         <p14:creationId xmlns:p14="http://schemas.microsoft.com/office/powerpoint/2010/main" val="2845642612"/>
+      </p:ext>
+    </p:extLst>
+  </p:cSld>
+  <p:clrMapOvr>
+    <a:masterClrMapping/>
+  </p:clrMapOvr>
+  <mc:AlternateContent xmlns:mc="http://schemas.openxmlformats.org/markup-compatibility/2006" xmlns:p159="http://schemas.microsoft.com/office/powerpoint/2015/09/main">
+    <mc:Choice Requires="p159">
+      <p:transition xmlns:p14="http://schemas.microsoft.com/office/powerpoint/2010/main" spd="slow" p14:dur="2000">
+        <p159:morph option="byObject"/>
+      </p:transition>
+    </mc:Choice>
+    <mc:Fallback xmlns="">
+      <p:transition spd="slow">
+        <p:fade/>
+      </p:transition>
+    </mc:Fallback>
+  </mc:AlternateContent>
+</p:sld>
+</file>
+
+<file path=ppt/slides/slide61.xml><?xml version="1.0" encoding="utf-8"?>
+<p:sld xmlns:a="http://schemas.openxmlformats.org/drawingml/2006/main" xmlns:r="http://schemas.openxmlformats.org/officeDocument/2006/relationships" xmlns:p="http://schemas.openxmlformats.org/presentationml/2006/main">
+  <p:cSld>
+    <p:spTree>
+      <p:nvGrpSpPr>
+        <p:cNvPr id="1" name="">
+          <a:extLst>
+            <a:ext uri="{FF2B5EF4-FFF2-40B4-BE49-F238E27FC236}">
+              <a16:creationId xmlns:a16="http://schemas.microsoft.com/office/drawing/2014/main" id="{030AFE9A-BCC8-70C1-496F-54B85336AD27}"/>
+            </a:ext>
+          </a:extLst>
+        </p:cNvPr>
+        <p:cNvGrpSpPr/>
+        <p:nvPr/>
+      </p:nvGrpSpPr>
+      <p:grpSpPr>
+        <a:xfrm>
+          <a:off x="0" y="0"/>
+          <a:ext cx="0" cy="0"/>
+          <a:chOff x="0" y="0"/>
+          <a:chExt cx="0" cy="0"/>
+        </a:xfrm>
+      </p:grpSpPr>
+      <p:sp>
+        <p:nvSpPr>
+          <p:cNvPr id="5" name="Rettangolo 4">
+            <a:extLst>
+              <a:ext uri="{FF2B5EF4-FFF2-40B4-BE49-F238E27FC236}">
+                <a16:creationId xmlns:a16="http://schemas.microsoft.com/office/drawing/2014/main" id="{3820DDA9-78A9-0ABF-27D4-33F55C4EE0C0}"/>
+              </a:ext>
+            </a:extLst>
+          </p:cNvPr>
+          <p:cNvSpPr/>
+          <p:nvPr/>
+        </p:nvSpPr>
+        <p:spPr>
+          <a:xfrm rot="16200000">
+            <a:off x="5612871" y="326546"/>
+            <a:ext cx="966258" cy="12192000"/>
+          </a:xfrm>
+          <a:prstGeom prst="rect">
+            <a:avLst/>
+          </a:prstGeom>
+          <a:solidFill>
+            <a:srgbClr val="990000"/>
+          </a:solidFill>
+          <a:ln>
+            <a:solidFill>
+              <a:srgbClr val="990000"/>
+            </a:solidFill>
+          </a:ln>
+        </p:spPr>
+        <p:style>
+          <a:lnRef idx="2">
+            <a:schemeClr val="accent1">
+              <a:shade val="15000"/>
+            </a:schemeClr>
+          </a:lnRef>
+          <a:fillRef idx="1">
+            <a:schemeClr val="accent1"/>
+          </a:fillRef>
+          <a:effectRef idx="0">
+            <a:schemeClr val="accent1"/>
+          </a:effectRef>
+          <a:fontRef idx="minor">
+            <a:schemeClr val="lt1"/>
+          </a:fontRef>
+        </p:style>
+        <p:txBody>
+          <a:bodyPr rtlCol="0" anchor="ctr"/>
+          <a:lstStyle/>
+          <a:p>
+            <a:pPr algn="ctr"/>
+            <a:endParaRPr lang="it-IT" dirty="0"/>
+          </a:p>
+        </p:txBody>
+      </p:sp>
+      <p:sp>
+        <p:nvSpPr>
+          <p:cNvPr id="6" name="CasellaDiTesto 5">
+            <a:extLst>
+              <a:ext uri="{FF2B5EF4-FFF2-40B4-BE49-F238E27FC236}">
+                <a16:creationId xmlns:a16="http://schemas.microsoft.com/office/drawing/2014/main" id="{7ECC10BB-DD57-0ABC-E3E8-FF4533EBF85B}"/>
+              </a:ext>
+            </a:extLst>
+          </p:cNvPr>
+          <p:cNvSpPr txBox="1"/>
+          <p:nvPr/>
+        </p:nvSpPr>
+        <p:spPr>
+          <a:xfrm>
+            <a:off x="5086139" y="6222490"/>
+            <a:ext cx="2019720" cy="400110"/>
+          </a:xfrm>
+          <a:prstGeom prst="rect">
+            <a:avLst/>
+          </a:prstGeom>
+          <a:noFill/>
+        </p:spPr>
+        <p:txBody>
+          <a:bodyPr wrap="square" rtlCol="0">
+            <a:spAutoFit/>
+          </a:bodyPr>
+          <a:lstStyle/>
+          <a:p>
+            <a:pPr algn="r"/>
+            <a:r>
+              <a:rPr lang="it-IT" sz="2000" b="1" dirty="0">
+                <a:solidFill>
+                  <a:schemeClr val="bg1"/>
+                </a:solidFill>
+              </a:rPr>
+              <a:t>Gianpaolo Pestilli</a:t>
+            </a:r>
+          </a:p>
+        </p:txBody>
+      </p:sp>
+      <p:sp>
+        <p:nvSpPr>
+          <p:cNvPr id="8" name="CasellaDiTesto 7">
+            <a:extLst>
+              <a:ext uri="{FF2B5EF4-FFF2-40B4-BE49-F238E27FC236}">
+                <a16:creationId xmlns:a16="http://schemas.microsoft.com/office/drawing/2014/main" id="{FDA3B9C9-BFB8-5291-FB1C-266AC197D900}"/>
+              </a:ext>
+            </a:extLst>
+          </p:cNvPr>
+          <p:cNvSpPr txBox="1"/>
+          <p:nvPr/>
+        </p:nvSpPr>
+        <p:spPr>
+          <a:xfrm>
+            <a:off x="533399" y="728069"/>
+            <a:ext cx="11116884" cy="4955203"/>
+          </a:xfrm>
+          <a:prstGeom prst="rect">
+            <a:avLst/>
+          </a:prstGeom>
+          <a:noFill/>
+        </p:spPr>
+        <p:txBody>
+          <a:bodyPr wrap="square" rtlCol="0">
+            <a:spAutoFit/>
+          </a:bodyPr>
+          <a:lstStyle/>
+          <a:p>
+            <a:pPr algn="just">
+              <a:spcAft>
+                <a:spcPts val="600"/>
+              </a:spcAft>
+            </a:pPr>
+            <a:r>
+              <a:rPr lang="it-IT" sz="4000" b="1" dirty="0">
+                <a:solidFill>
+                  <a:srgbClr val="990000"/>
+                </a:solidFill>
+              </a:rPr>
+              <a:t>ESECUZIONE</a:t>
+            </a:r>
+          </a:p>
+          <a:p>
+            <a:pPr algn="just">
+              <a:spcAft>
+                <a:spcPts val="600"/>
+              </a:spcAft>
+            </a:pPr>
+            <a:r>
+              <a:rPr lang="it-IT" sz="3200" b="1" dirty="0"/>
+              <a:t>Classi di istanze da testare: </a:t>
+            </a:r>
+            <a:r>
+              <a:rPr lang="it-IT" sz="3200" dirty="0"/>
+              <a:t>incrociando i criteri di partizionamento precedentemente definiti (densità, eterogeneità del grado, ecc.), si ottengono per combinazione tutte le classi di test oggetto del progetto.</a:t>
+            </a:r>
+          </a:p>
+          <a:p>
+            <a:pPr algn="just">
+              <a:spcAft>
+                <a:spcPts val="600"/>
+              </a:spcAft>
+            </a:pPr>
+            <a:r>
+              <a:rPr lang="it-IT" sz="3200" b="1" dirty="0"/>
+              <a:t>Numero di </a:t>
+            </a:r>
+            <a:r>
+              <a:rPr lang="it-IT" sz="3200" b="1" dirty="0" err="1"/>
+              <a:t>run</a:t>
+            </a:r>
+            <a:r>
+              <a:rPr lang="it-IT" sz="3200" b="1" dirty="0"/>
+              <a:t>: </a:t>
+            </a:r>
+            <a:r>
+              <a:rPr lang="it-IT" sz="3200" dirty="0"/>
+              <a:t>per ogni classe sono stati generate 15 istanze.</a:t>
+            </a:r>
+          </a:p>
+          <a:p>
+            <a:pPr algn="just">
+              <a:spcAft>
+                <a:spcPts val="600"/>
+              </a:spcAft>
+            </a:pPr>
+            <a:r>
+              <a:rPr lang="it-IT" sz="3200" b="1" dirty="0"/>
+              <a:t>Solver scelto: </a:t>
+            </a:r>
+            <a:r>
+              <a:rPr lang="it-IT" sz="3200" dirty="0" err="1"/>
+              <a:t>Gurobi</a:t>
+            </a:r>
+            <a:r>
+              <a:rPr lang="it-IT" sz="3200" dirty="0"/>
+              <a:t> con licenza accademica (ritenuto il migliore per problemi relativi ai grafi).</a:t>
+            </a:r>
+          </a:p>
+          <a:p>
+            <a:pPr algn="just">
+              <a:spcAft>
+                <a:spcPts val="600"/>
+              </a:spcAft>
+            </a:pPr>
+            <a:r>
+              <a:rPr lang="it-IT" sz="3200" b="1" dirty="0"/>
+              <a:t>Tempo di </a:t>
+            </a:r>
+            <a:r>
+              <a:rPr lang="it-IT" sz="3200" b="1" dirty="0" err="1"/>
+              <a:t>timeout</a:t>
+            </a:r>
+            <a:r>
+              <a:rPr lang="it-IT" sz="3200" b="1" dirty="0"/>
+              <a:t>: </a:t>
+            </a:r>
+            <a:r>
+              <a:rPr lang="it-IT" sz="3200" dirty="0"/>
+              <a:t>300 secondi.</a:t>
+            </a:r>
+            <a:endParaRPr lang="it-IT" sz="3200" b="1" dirty="0"/>
+          </a:p>
+        </p:txBody>
+      </p:sp>
+      <p:sp>
+        <p:nvSpPr>
+          <p:cNvPr id="2" name="CasellaDiTesto 1">
+            <a:extLst>
+              <a:ext uri="{FF2B5EF4-FFF2-40B4-BE49-F238E27FC236}">
+                <a16:creationId xmlns:a16="http://schemas.microsoft.com/office/drawing/2014/main" id="{02010BFE-F1F0-B80A-85F5-0DD977A3E3E2}"/>
+              </a:ext>
+            </a:extLst>
+          </p:cNvPr>
+          <p:cNvSpPr txBox="1"/>
+          <p:nvPr/>
+        </p:nvSpPr>
+        <p:spPr>
+          <a:xfrm>
+            <a:off x="11434917" y="6222490"/>
+            <a:ext cx="491612" cy="400110"/>
+          </a:xfrm>
+          <a:prstGeom prst="rect">
+            <a:avLst/>
+          </a:prstGeom>
+          <a:noFill/>
+        </p:spPr>
+        <p:txBody>
+          <a:bodyPr wrap="square" rtlCol="0">
+            <a:spAutoFit/>
+          </a:bodyPr>
+          <a:lstStyle/>
+          <a:p>
+            <a:pPr algn="r"/>
+            <a:r>
+              <a:rPr lang="it-IT" sz="2000" b="1" dirty="0">
+                <a:solidFill>
+                  <a:schemeClr val="bg1"/>
+                </a:solidFill>
+              </a:rPr>
+              <a:t>59</a:t>
+            </a:r>
+          </a:p>
+        </p:txBody>
+      </p:sp>
+    </p:spTree>
+    <p:extLst>
+      <p:ext uri="{BB962C8B-B14F-4D97-AF65-F5344CB8AC3E}">
+        <p14:creationId xmlns:p14="http://schemas.microsoft.com/office/powerpoint/2010/main" val="1059840757"/>
+      </p:ext>
+    </p:extLst>
+  </p:cSld>
+  <p:clrMapOvr>
+    <a:masterClrMapping/>
+  </p:clrMapOvr>
+  <mc:AlternateContent xmlns:mc="http://schemas.openxmlformats.org/markup-compatibility/2006" xmlns:p159="http://schemas.microsoft.com/office/powerpoint/2015/09/main">
+    <mc:Choice Requires="p159">
+      <p:transition xmlns:p14="http://schemas.microsoft.com/office/powerpoint/2010/main" spd="slow" p14:dur="2000">
+        <p159:morph option="byObject"/>
+      </p:transition>
+    </mc:Choice>
+    <mc:Fallback xmlns="">
+      <p:transition spd="slow">
+        <p:fade/>
+      </p:transition>
+    </mc:Fallback>
+  </mc:AlternateContent>
+</p:sld>
+</file>
+
+<file path=ppt/slides/slide62.xml><?xml version="1.0" encoding="utf-8"?>
+<p:sld xmlns:a="http://schemas.openxmlformats.org/drawingml/2006/main" xmlns:r="http://schemas.openxmlformats.org/officeDocument/2006/relationships" xmlns:p="http://schemas.openxmlformats.org/presentationml/2006/main">
+  <p:cSld>
+    <p:spTree>
+      <p:nvGrpSpPr>
+        <p:cNvPr id="1" name="">
+          <a:extLst>
+            <a:ext uri="{FF2B5EF4-FFF2-40B4-BE49-F238E27FC236}">
+              <a16:creationId xmlns:a16="http://schemas.microsoft.com/office/drawing/2014/main" id="{9733D5EB-EF7B-B42C-69A7-AED0A5595D05}"/>
+            </a:ext>
+          </a:extLst>
+        </p:cNvPr>
+        <p:cNvGrpSpPr/>
+        <p:nvPr/>
+      </p:nvGrpSpPr>
+      <p:grpSpPr>
+        <a:xfrm>
+          <a:off x="0" y="0"/>
+          <a:ext cx="0" cy="0"/>
+          <a:chOff x="0" y="0"/>
+          <a:chExt cx="0" cy="0"/>
+        </a:xfrm>
+      </p:grpSpPr>
+      <p:sp>
+        <p:nvSpPr>
+          <p:cNvPr id="5" name="Rettangolo 4">
+            <a:extLst>
+              <a:ext uri="{FF2B5EF4-FFF2-40B4-BE49-F238E27FC236}">
+                <a16:creationId xmlns:a16="http://schemas.microsoft.com/office/drawing/2014/main" id="{E45B9468-C1AC-3F27-EB52-EB26565F6EFE}"/>
+              </a:ext>
+            </a:extLst>
+          </p:cNvPr>
+          <p:cNvSpPr/>
+          <p:nvPr/>
+        </p:nvSpPr>
+        <p:spPr>
+          <a:xfrm rot="16200000">
+            <a:off x="5612871" y="326546"/>
+            <a:ext cx="966258" cy="12192000"/>
+          </a:xfrm>
+          <a:prstGeom prst="rect">
+            <a:avLst/>
+          </a:prstGeom>
+          <a:solidFill>
+            <a:srgbClr val="990000"/>
+          </a:solidFill>
+          <a:ln>
+            <a:solidFill>
+              <a:srgbClr val="990000"/>
+            </a:solidFill>
+          </a:ln>
+        </p:spPr>
+        <p:style>
+          <a:lnRef idx="2">
+            <a:schemeClr val="accent1">
+              <a:shade val="15000"/>
+            </a:schemeClr>
+          </a:lnRef>
+          <a:fillRef idx="1">
+            <a:schemeClr val="accent1"/>
+          </a:fillRef>
+          <a:effectRef idx="0">
+            <a:schemeClr val="accent1"/>
+          </a:effectRef>
+          <a:fontRef idx="minor">
+            <a:schemeClr val="lt1"/>
+          </a:fontRef>
+        </p:style>
+        <p:txBody>
+          <a:bodyPr rtlCol="0" anchor="ctr"/>
+          <a:lstStyle/>
+          <a:p>
+            <a:pPr algn="ctr"/>
+            <a:endParaRPr lang="it-IT" dirty="0"/>
+          </a:p>
+        </p:txBody>
+      </p:sp>
+      <p:sp>
+        <p:nvSpPr>
+          <p:cNvPr id="6" name="CasellaDiTesto 5">
+            <a:extLst>
+              <a:ext uri="{FF2B5EF4-FFF2-40B4-BE49-F238E27FC236}">
+                <a16:creationId xmlns:a16="http://schemas.microsoft.com/office/drawing/2014/main" id="{26DFD405-25E8-BFFF-24BB-DD64D4D83813}"/>
+              </a:ext>
+            </a:extLst>
+          </p:cNvPr>
+          <p:cNvSpPr txBox="1"/>
+          <p:nvPr/>
+        </p:nvSpPr>
+        <p:spPr>
+          <a:xfrm>
+            <a:off x="5086139" y="6222490"/>
+            <a:ext cx="2019720" cy="400110"/>
+          </a:xfrm>
+          <a:prstGeom prst="rect">
+            <a:avLst/>
+          </a:prstGeom>
+          <a:noFill/>
+        </p:spPr>
+        <p:txBody>
+          <a:bodyPr wrap="square" rtlCol="0">
+            <a:spAutoFit/>
+          </a:bodyPr>
+          <a:lstStyle/>
+          <a:p>
+            <a:pPr algn="r"/>
+            <a:r>
+              <a:rPr lang="it-IT" sz="2000" b="1" dirty="0">
+                <a:solidFill>
+                  <a:schemeClr val="bg1"/>
+                </a:solidFill>
+              </a:rPr>
+              <a:t>Gianpaolo Pestilli</a:t>
+            </a:r>
+          </a:p>
+        </p:txBody>
+      </p:sp>
+      <p:sp>
+        <p:nvSpPr>
+          <p:cNvPr id="8" name="CasellaDiTesto 7">
+            <a:extLst>
+              <a:ext uri="{FF2B5EF4-FFF2-40B4-BE49-F238E27FC236}">
+                <a16:creationId xmlns:a16="http://schemas.microsoft.com/office/drawing/2014/main" id="{E9C5482D-671B-017A-9987-1A9C9FF6E3DF}"/>
+              </a:ext>
+            </a:extLst>
+          </p:cNvPr>
+          <p:cNvSpPr txBox="1"/>
+          <p:nvPr/>
+        </p:nvSpPr>
+        <p:spPr>
+          <a:xfrm>
+            <a:off x="533399" y="728069"/>
+            <a:ext cx="11116884" cy="4385816"/>
+          </a:xfrm>
+          <a:prstGeom prst="rect">
+            <a:avLst/>
+          </a:prstGeom>
+          <a:noFill/>
+        </p:spPr>
+        <p:txBody>
+          <a:bodyPr wrap="square" rtlCol="0">
+            <a:spAutoFit/>
+          </a:bodyPr>
+          <a:lstStyle/>
+          <a:p>
+            <a:pPr algn="just">
+              <a:spcAft>
+                <a:spcPts val="600"/>
+              </a:spcAft>
+            </a:pPr>
+            <a:r>
+              <a:rPr lang="it-IT" sz="4000" b="1" dirty="0">
+                <a:solidFill>
+                  <a:srgbClr val="990000"/>
+                </a:solidFill>
+              </a:rPr>
+              <a:t>ASSUNZIONI</a:t>
+            </a:r>
+          </a:p>
+          <a:p>
+            <a:pPr algn="just">
+              <a:spcAft>
+                <a:spcPts val="600"/>
+              </a:spcAft>
+            </a:pPr>
+            <a:r>
+              <a:rPr lang="it-IT" sz="3200" b="1" dirty="0"/>
+              <a:t>Risultati effettivamente riportati: </a:t>
+            </a:r>
+            <a:r>
+              <a:rPr lang="it-IT" sz="3200" dirty="0"/>
+              <a:t>di seguito solo i risultati più interessanti osservati su 30 classi.</a:t>
+            </a:r>
+          </a:p>
+          <a:p>
+            <a:pPr algn="just">
+              <a:spcAft>
+                <a:spcPts val="600"/>
+              </a:spcAft>
+            </a:pPr>
+            <a:endParaRPr lang="it-IT" sz="3200" b="1" dirty="0"/>
+          </a:p>
+          <a:p>
+            <a:pPr algn="just">
+              <a:spcAft>
+                <a:spcPts val="600"/>
+              </a:spcAft>
+            </a:pPr>
+            <a:r>
+              <a:rPr lang="it-IT" sz="3200" b="1" dirty="0"/>
+              <a:t>Risoluzione del </a:t>
+            </a:r>
+            <a:r>
+              <a:rPr lang="it-IT" sz="3200" b="1" dirty="0" err="1"/>
+              <a:t>timeout</a:t>
+            </a:r>
+            <a:r>
+              <a:rPr lang="it-IT" sz="3200" b="1" dirty="0"/>
+              <a:t>: </a:t>
+            </a:r>
+            <a:r>
+              <a:rPr lang="it-IT" sz="3200" dirty="0"/>
+              <a:t>se il solver va in </a:t>
+            </a:r>
+            <a:r>
+              <a:rPr lang="it-IT" sz="3200" dirty="0" err="1"/>
+              <a:t>timeout</a:t>
+            </a:r>
+            <a:r>
+              <a:rPr lang="it-IT" sz="3200" dirty="0"/>
+              <a:t> prima di trovare l’ottimo, si seleziona il miglior </a:t>
+            </a:r>
+            <a:r>
+              <a:rPr lang="it-IT" sz="3200" dirty="0" err="1"/>
+              <a:t>lower</a:t>
+            </a:r>
+            <a:r>
+              <a:rPr lang="it-IT" sz="3200" dirty="0"/>
+              <a:t> </a:t>
+            </a:r>
+            <a:r>
+              <a:rPr lang="it-IT" sz="3200" dirty="0" err="1"/>
+              <a:t>bound</a:t>
+            </a:r>
+            <a:r>
+              <a:rPr lang="it-IT" sz="3200" dirty="0"/>
+              <a:t> trovato fino a quel momento e si usa per calcolare il rapporto di approssimazione.</a:t>
+            </a:r>
+            <a:endParaRPr lang="it-IT" sz="3200" b="1" dirty="0"/>
+          </a:p>
+        </p:txBody>
+      </p:sp>
+      <p:sp>
+        <p:nvSpPr>
+          <p:cNvPr id="2" name="CasellaDiTesto 1">
+            <a:extLst>
+              <a:ext uri="{FF2B5EF4-FFF2-40B4-BE49-F238E27FC236}">
+                <a16:creationId xmlns:a16="http://schemas.microsoft.com/office/drawing/2014/main" id="{15E4C33C-FB28-CF64-1D70-D12796DBEE6E}"/>
+              </a:ext>
+            </a:extLst>
+          </p:cNvPr>
+          <p:cNvSpPr txBox="1"/>
+          <p:nvPr/>
+        </p:nvSpPr>
+        <p:spPr>
+          <a:xfrm>
+            <a:off x="11434917" y="6222490"/>
+            <a:ext cx="491612" cy="400110"/>
+          </a:xfrm>
+          <a:prstGeom prst="rect">
+            <a:avLst/>
+          </a:prstGeom>
+          <a:noFill/>
+        </p:spPr>
+        <p:txBody>
+          <a:bodyPr wrap="square" rtlCol="0">
+            <a:spAutoFit/>
+          </a:bodyPr>
+          <a:lstStyle/>
+          <a:p>
+            <a:pPr algn="r"/>
+            <a:r>
+              <a:rPr lang="it-IT" sz="2000" b="1" dirty="0">
+                <a:solidFill>
+                  <a:schemeClr val="bg1"/>
+                </a:solidFill>
+              </a:rPr>
+              <a:t>60</a:t>
+            </a:r>
+          </a:p>
+        </p:txBody>
+      </p:sp>
+    </p:spTree>
+    <p:extLst>
+      <p:ext uri="{BB962C8B-B14F-4D97-AF65-F5344CB8AC3E}">
+        <p14:creationId xmlns:p14="http://schemas.microsoft.com/office/powerpoint/2010/main" val="2591765159"/>
+      </p:ext>
+    </p:extLst>
+  </p:cSld>
+  <p:clrMapOvr>
+    <a:masterClrMapping/>
+  </p:clrMapOvr>
+  <mc:AlternateContent xmlns:mc="http://schemas.openxmlformats.org/markup-compatibility/2006" xmlns:p159="http://schemas.microsoft.com/office/powerpoint/2015/09/main">
+    <mc:Choice Requires="p159">
+      <p:transition xmlns:p14="http://schemas.microsoft.com/office/powerpoint/2010/main" spd="slow" p14:dur="2000">
+        <p159:morph option="byObject"/>
+      </p:transition>
+    </mc:Choice>
+    <mc:Fallback xmlns="">
+      <p:transition spd="slow">
+        <p:fade/>
+      </p:transition>
+    </mc:Fallback>
+  </mc:AlternateContent>
+</p:sld>
+</file>
+
+<file path=ppt/slides/slide63.xml><?xml version="1.0" encoding="utf-8"?>
+<p:sld xmlns:a="http://schemas.openxmlformats.org/drawingml/2006/main" xmlns:r="http://schemas.openxmlformats.org/officeDocument/2006/relationships" xmlns:p="http://schemas.openxmlformats.org/presentationml/2006/main">
+  <p:cSld>
+    <p:spTree>
+      <p:nvGrpSpPr>
+        <p:cNvPr id="1" name="">
+          <a:extLst>
+            <a:ext uri="{FF2B5EF4-FFF2-40B4-BE49-F238E27FC236}">
+              <a16:creationId xmlns:a16="http://schemas.microsoft.com/office/drawing/2014/main" id="{BA88C47B-CCFF-01DA-5C5A-E248B1AB4AF8}"/>
+            </a:ext>
+          </a:extLst>
+        </p:cNvPr>
+        <p:cNvGrpSpPr/>
+        <p:nvPr/>
+      </p:nvGrpSpPr>
+      <p:grpSpPr>
+        <a:xfrm>
+          <a:off x="0" y="0"/>
+          <a:ext cx="0" cy="0"/>
+          <a:chOff x="0" y="0"/>
+          <a:chExt cx="0" cy="0"/>
+        </a:xfrm>
+      </p:grpSpPr>
+      <p:sp>
+        <p:nvSpPr>
+          <p:cNvPr id="5" name="Rettangolo 4">
+            <a:extLst>
+              <a:ext uri="{FF2B5EF4-FFF2-40B4-BE49-F238E27FC236}">
+                <a16:creationId xmlns:a16="http://schemas.microsoft.com/office/drawing/2014/main" id="{1E7219C2-AA34-CE2E-7A4A-463F259EEEE6}"/>
+              </a:ext>
+            </a:extLst>
+          </p:cNvPr>
+          <p:cNvSpPr/>
+          <p:nvPr/>
+        </p:nvSpPr>
+        <p:spPr>
+          <a:xfrm rot="16200000">
+            <a:off x="5612871" y="326546"/>
+            <a:ext cx="966258" cy="12192000"/>
+          </a:xfrm>
+          <a:prstGeom prst="rect">
+            <a:avLst/>
+          </a:prstGeom>
+          <a:solidFill>
+            <a:srgbClr val="990000"/>
+          </a:solidFill>
+          <a:ln>
+            <a:solidFill>
+              <a:srgbClr val="990000"/>
+            </a:solidFill>
+          </a:ln>
+        </p:spPr>
+        <p:style>
+          <a:lnRef idx="2">
+            <a:schemeClr val="accent1">
+              <a:shade val="15000"/>
+            </a:schemeClr>
+          </a:lnRef>
+          <a:fillRef idx="1">
+            <a:schemeClr val="accent1"/>
+          </a:fillRef>
+          <a:effectRef idx="0">
+            <a:schemeClr val="accent1"/>
+          </a:effectRef>
+          <a:fontRef idx="minor">
+            <a:schemeClr val="lt1"/>
+          </a:fontRef>
+        </p:style>
+        <p:txBody>
+          <a:bodyPr rtlCol="0" anchor="ctr"/>
+          <a:lstStyle/>
+          <a:p>
+            <a:pPr algn="ctr"/>
+            <a:endParaRPr lang="it-IT" dirty="0"/>
+          </a:p>
+        </p:txBody>
+      </p:sp>
+      <p:sp>
+        <p:nvSpPr>
+          <p:cNvPr id="6" name="CasellaDiTesto 5">
+            <a:extLst>
+              <a:ext uri="{FF2B5EF4-FFF2-40B4-BE49-F238E27FC236}">
+                <a16:creationId xmlns:a16="http://schemas.microsoft.com/office/drawing/2014/main" id="{D022BB71-A4BC-3330-247F-08F0656A9CFA}"/>
+              </a:ext>
+            </a:extLst>
+          </p:cNvPr>
+          <p:cNvSpPr txBox="1"/>
+          <p:nvPr/>
+        </p:nvSpPr>
+        <p:spPr>
+          <a:xfrm>
+            <a:off x="5086139" y="6222490"/>
+            <a:ext cx="2019720" cy="400110"/>
+          </a:xfrm>
+          <a:prstGeom prst="rect">
+            <a:avLst/>
+          </a:prstGeom>
+          <a:noFill/>
+        </p:spPr>
+        <p:txBody>
+          <a:bodyPr wrap="square" rtlCol="0">
+            <a:spAutoFit/>
+          </a:bodyPr>
+          <a:lstStyle/>
+          <a:p>
+            <a:pPr algn="r"/>
+            <a:r>
+              <a:rPr lang="it-IT" sz="2000" b="1" dirty="0">
+                <a:solidFill>
+                  <a:schemeClr val="bg1"/>
+                </a:solidFill>
+              </a:rPr>
+              <a:t>Gianpaolo Pestilli</a:t>
+            </a:r>
+          </a:p>
+        </p:txBody>
+      </p:sp>
+      <p:sp>
+        <p:nvSpPr>
+          <p:cNvPr id="8" name="CasellaDiTesto 7">
+            <a:extLst>
+              <a:ext uri="{FF2B5EF4-FFF2-40B4-BE49-F238E27FC236}">
+                <a16:creationId xmlns:a16="http://schemas.microsoft.com/office/drawing/2014/main" id="{B671853E-6C02-060C-F120-65BB96E60B4C}"/>
+              </a:ext>
+            </a:extLst>
+          </p:cNvPr>
+          <p:cNvSpPr txBox="1"/>
+          <p:nvPr/>
+        </p:nvSpPr>
+        <p:spPr>
+          <a:xfrm>
+            <a:off x="533399" y="728069"/>
+            <a:ext cx="11116884" cy="2416046"/>
+          </a:xfrm>
+          <a:prstGeom prst="rect">
+            <a:avLst/>
+          </a:prstGeom>
+          <a:noFill/>
+        </p:spPr>
+        <p:txBody>
+          <a:bodyPr wrap="square" rtlCol="0">
+            <a:spAutoFit/>
+          </a:bodyPr>
+          <a:lstStyle/>
+          <a:p>
+            <a:pPr algn="just">
+              <a:spcAft>
+                <a:spcPts val="600"/>
+              </a:spcAft>
+            </a:pPr>
+            <a:r>
+              <a:rPr lang="it-IT" sz="4000" b="1" dirty="0">
+                <a:solidFill>
+                  <a:srgbClr val="990000"/>
+                </a:solidFill>
+              </a:rPr>
+              <a:t>PERFORMANCE</a:t>
+            </a:r>
+          </a:p>
+          <a:p>
+            <a:pPr algn="just">
+              <a:spcAft>
+                <a:spcPts val="600"/>
+              </a:spcAft>
+            </a:pPr>
+            <a:r>
+              <a:rPr lang="it-IT" sz="3200" b="1" dirty="0"/>
+              <a:t>Algoritmi valutati in base a:</a:t>
+            </a:r>
+          </a:p>
+          <a:p>
+            <a:pPr marL="457200" indent="-457200" algn="just">
+              <a:spcAft>
+                <a:spcPts val="600"/>
+              </a:spcAft>
+              <a:buFont typeface="Arial" panose="020B0604020202020204" pitchFamily="34" charset="0"/>
+              <a:buChar char="•"/>
+            </a:pPr>
+            <a:r>
+              <a:rPr lang="it-IT" sz="3200" dirty="0"/>
+              <a:t>Rapporto di approssimazione medio</a:t>
+            </a:r>
+          </a:p>
+          <a:p>
+            <a:pPr marL="457200" indent="-457200" algn="just">
+              <a:spcAft>
+                <a:spcPts val="600"/>
+              </a:spcAft>
+              <a:buFont typeface="Arial" panose="020B0604020202020204" pitchFamily="34" charset="0"/>
+              <a:buChar char="•"/>
+            </a:pPr>
+            <a:r>
+              <a:rPr lang="it-IT" sz="3200" dirty="0"/>
+              <a:t>Tempo di esecuzione medio</a:t>
+            </a:r>
+          </a:p>
+        </p:txBody>
+      </p:sp>
+      <p:sp>
+        <p:nvSpPr>
+          <p:cNvPr id="2" name="CasellaDiTesto 1">
+            <a:extLst>
+              <a:ext uri="{FF2B5EF4-FFF2-40B4-BE49-F238E27FC236}">
+                <a16:creationId xmlns:a16="http://schemas.microsoft.com/office/drawing/2014/main" id="{63B6912E-24BE-0E8F-AB0E-6B086C8666FF}"/>
+              </a:ext>
+            </a:extLst>
+          </p:cNvPr>
+          <p:cNvSpPr txBox="1"/>
+          <p:nvPr/>
+        </p:nvSpPr>
+        <p:spPr>
+          <a:xfrm>
+            <a:off x="11434917" y="6222490"/>
+            <a:ext cx="491612" cy="400110"/>
+          </a:xfrm>
+          <a:prstGeom prst="rect">
+            <a:avLst/>
+          </a:prstGeom>
+          <a:noFill/>
+        </p:spPr>
+        <p:txBody>
+          <a:bodyPr wrap="square" rtlCol="0">
+            <a:spAutoFit/>
+          </a:bodyPr>
+          <a:lstStyle/>
+          <a:p>
+            <a:pPr algn="r"/>
+            <a:r>
+              <a:rPr lang="it-IT" sz="2000" b="1" dirty="0">
+                <a:solidFill>
+                  <a:schemeClr val="bg1"/>
+                </a:solidFill>
+              </a:rPr>
+              <a:t>61</a:t>
+            </a:r>
+          </a:p>
+        </p:txBody>
+      </p:sp>
+    </p:spTree>
+    <p:extLst>
+      <p:ext uri="{BB962C8B-B14F-4D97-AF65-F5344CB8AC3E}">
+        <p14:creationId xmlns:p14="http://schemas.microsoft.com/office/powerpoint/2010/main" val="3351515646"/>
       </p:ext>
     </p:extLst>
   </p:cSld>

--- a/Risultati_0386492.pptx
+++ b/Risultati_0386492.pptx
@@ -5,7 +5,7 @@
     <p:sldMasterId id="2147483648" r:id="rId1"/>
   </p:sldMasterIdLst>
   <p:notesMasterIdLst>
-    <p:notesMasterId r:id="rId65"/>
+    <p:notesMasterId r:id="rId66"/>
   </p:notesMasterIdLst>
   <p:sldIdLst>
     <p:sldId id="256" r:id="rId2"/>
@@ -70,7 +70,8 @@
     <p:sldId id="304" r:id="rId61"/>
     <p:sldId id="318" r:id="rId62"/>
     <p:sldId id="319" r:id="rId63"/>
-    <p:sldId id="320" r:id="rId64"/>
+    <p:sldId id="321" r:id="rId64"/>
+    <p:sldId id="320" r:id="rId65"/>
   </p:sldIdLst>
   <p:sldSz cx="12192000" cy="6858000"/>
   <p:notesSz cx="6858000" cy="9144000"/>
@@ -259,7 +260,7 @@
           <a:p>
             <a:fld id="{E0C88626-8297-4000-AA78-E4F17AAF9259}" type="datetimeFigureOut">
               <a:rPr lang="it-IT" smtClean="0"/>
-              <a:t>25/06/2026</a:t>
+              <a:t>27/06/2026</a:t>
             </a:fld>
             <a:endParaRPr lang="it-IT"/>
           </a:p>
@@ -673,7 +674,7 @@
           <a:p>
             <a:fld id="{4EEC3E97-3DDD-4186-A208-B850F35723DB}" type="datetime1">
               <a:rPr lang="it-IT" smtClean="0"/>
-              <a:t>25/06/2026</a:t>
+              <a:t>27/06/2026</a:t>
             </a:fld>
             <a:endParaRPr lang="it-IT"/>
           </a:p>
@@ -871,7 +872,7 @@
           <a:p>
             <a:fld id="{88C2FBA6-F7A9-4C74-B465-9FF20E4A7E98}" type="datetime1">
               <a:rPr lang="it-IT" smtClean="0"/>
-              <a:t>25/06/2026</a:t>
+              <a:t>27/06/2026</a:t>
             </a:fld>
             <a:endParaRPr lang="it-IT"/>
           </a:p>
@@ -1079,7 +1080,7 @@
           <a:p>
             <a:fld id="{7C289735-B0FA-42EC-B352-C4875869C0BC}" type="datetime1">
               <a:rPr lang="it-IT" smtClean="0"/>
-              <a:t>25/06/2026</a:t>
+              <a:t>27/06/2026</a:t>
             </a:fld>
             <a:endParaRPr lang="it-IT"/>
           </a:p>
@@ -1277,7 +1278,7 @@
           <a:p>
             <a:fld id="{10E9C9B6-BFF0-438D-B09E-8432B8734EE5}" type="datetime1">
               <a:rPr lang="it-IT" smtClean="0"/>
-              <a:t>25/06/2026</a:t>
+              <a:t>27/06/2026</a:t>
             </a:fld>
             <a:endParaRPr lang="it-IT"/>
           </a:p>
@@ -1552,7 +1553,7 @@
           <a:p>
             <a:fld id="{ABFC7979-BD5D-4D0F-9310-241562FF9E94}" type="datetime1">
               <a:rPr lang="it-IT" smtClean="0"/>
-              <a:t>25/06/2026</a:t>
+              <a:t>27/06/2026</a:t>
             </a:fld>
             <a:endParaRPr lang="it-IT"/>
           </a:p>
@@ -1817,7 +1818,7 @@
           <a:p>
             <a:fld id="{E6C8F376-66C7-47F4-9CDC-69997AFD8804}" type="datetime1">
               <a:rPr lang="it-IT" smtClean="0"/>
-              <a:t>25/06/2026</a:t>
+              <a:t>27/06/2026</a:t>
             </a:fld>
             <a:endParaRPr lang="it-IT"/>
           </a:p>
@@ -2229,7 +2230,7 @@
           <a:p>
             <a:fld id="{DD3CE95E-26FA-4B50-AEEC-A0C3476A6D97}" type="datetime1">
               <a:rPr lang="it-IT" smtClean="0"/>
-              <a:t>25/06/2026</a:t>
+              <a:t>27/06/2026</a:t>
             </a:fld>
             <a:endParaRPr lang="it-IT"/>
           </a:p>
@@ -2370,7 +2371,7 @@
           <a:p>
             <a:fld id="{6E6C9EBA-B4EE-4B7C-8D99-E4EE9B4515D3}" type="datetime1">
               <a:rPr lang="it-IT" smtClean="0"/>
-              <a:t>25/06/2026</a:t>
+              <a:t>27/06/2026</a:t>
             </a:fld>
             <a:endParaRPr lang="it-IT"/>
           </a:p>
@@ -2483,7 +2484,7 @@
           <a:p>
             <a:fld id="{DE74029C-F4FA-44C2-8417-402E4F9F070D}" type="datetime1">
               <a:rPr lang="it-IT" smtClean="0"/>
-              <a:t>25/06/2026</a:t>
+              <a:t>27/06/2026</a:t>
             </a:fld>
             <a:endParaRPr lang="it-IT"/>
           </a:p>
@@ -2794,7 +2795,7 @@
           <a:p>
             <a:fld id="{A99525BE-1E49-4B4B-B3DA-784C3A60B941}" type="datetime1">
               <a:rPr lang="it-IT" smtClean="0"/>
-              <a:t>25/06/2026</a:t>
+              <a:t>27/06/2026</a:t>
             </a:fld>
             <a:endParaRPr lang="it-IT"/>
           </a:p>
@@ -3082,7 +3083,7 @@
           <a:p>
             <a:fld id="{D2BC9992-29B7-4892-A984-BAD5A3D1DFD6}" type="datetime1">
               <a:rPr lang="it-IT" smtClean="0"/>
-              <a:t>25/06/2026</a:t>
+              <a:t>27/06/2026</a:t>
             </a:fld>
             <a:endParaRPr lang="it-IT"/>
           </a:p>
@@ -3323,7 +3324,7 @@
           <a:p>
             <a:fld id="{C55A07EC-953A-454F-8426-34AAF06A63B6}" type="datetime1">
               <a:rPr lang="it-IT" smtClean="0"/>
-              <a:t>25/06/2026</a:t>
+              <a:t>27/06/2026</a:t>
             </a:fld>
             <a:endParaRPr lang="it-IT"/>
           </a:p>
@@ -17127,12 +17128,17 @@
             </a:r>
             <a:r>
               <a:rPr lang="it-IT" sz="3200" dirty="0" err="1"/>
-              <a:t>handshaking</a:t>
+              <a:t>Handshaking</a:t>
             </a:r>
             <a:r>
               <a:rPr lang="it-IT" sz="3200" dirty="0"/>
-              <a:t> lemma si prende un vertice qualsiasi e, se non ha già grado massimo, si aumenta il suo grado di 1.</a:t>
-            </a:r>
+              <a:t> Lemma si prende un vertice qualsiasi e se ne modifica </a:t>
+            </a:r>
+            <a:r>
+              <a:rPr lang="it-IT" sz="3200"/>
+              <a:t>il grado di 1.</a:t>
+            </a:r>
+            <a:endParaRPr lang="it-IT" sz="3200" dirty="0"/>
           </a:p>
         </p:txBody>
       </p:sp>
@@ -21217,8 +21223,8 @@
           </a:p>
         </p:txBody>
       </p:sp>
-      <mc:AlternateContent xmlns:mc="http://schemas.openxmlformats.org/markup-compatibility/2006">
-        <mc:Choice xmlns:a14="http://schemas.microsoft.com/office/drawing/2010/main" Requires="a14">
+      <mc:AlternateContent xmlns:mc="http://schemas.openxmlformats.org/markup-compatibility/2006" xmlns:a14="http://schemas.microsoft.com/office/drawing/2010/main">
+        <mc:Choice Requires="a14">
           <p:sp>
             <p:nvSpPr>
               <p:cNvPr id="8" name="CasellaDiTesto 7">
@@ -21332,7 +21338,7 @@
             </p:txBody>
           </p:sp>
         </mc:Choice>
-        <mc:Fallback>
+        <mc:Fallback xmlns="">
           <p:sp>
             <p:nvSpPr>
               <p:cNvPr id="8" name="CasellaDiTesto 7">
@@ -22534,7 +22540,7 @@
         <p:spPr>
           <a:xfrm>
             <a:off x="533399" y="728069"/>
-            <a:ext cx="11116884" cy="4955203"/>
+            <a:ext cx="11116884" cy="4385816"/>
           </a:xfrm>
           <a:prstGeom prst="rect">
             <a:avLst/>
@@ -22617,30 +22623,6 @@
               <a:rPr lang="it-IT" sz="3200" dirty="0"/>
               <a:t> con licenza accademica (ritenuto il migliore per problemi relativi ai grafi).</a:t>
             </a:r>
-          </a:p>
-          <a:p>
-            <a:pPr algn="just">
-              <a:spcAft>
-                <a:spcPts val="600"/>
-              </a:spcAft>
-            </a:pPr>
-            <a:r>
-              <a:rPr lang="it-IT" sz="3200" b="1" dirty="0"/>
-              <a:t>Tempo di </a:t>
-            </a:r>
-            <a:r>
-              <a:rPr lang="it-IT" sz="3200" b="1" dirty="0" err="1"/>
-              <a:t>timeout</a:t>
-            </a:r>
-            <a:r>
-              <a:rPr lang="it-IT" sz="3200" b="1" dirty="0"/>
-              <a:t>: </a:t>
-            </a:r>
-            <a:r>
-              <a:rPr lang="it-IT" sz="3200" dirty="0"/>
-              <a:t>300 secondi.</a:t>
-            </a:r>
-            <a:endParaRPr lang="it-IT" sz="3200" b="1" dirty="0"/>
           </a:p>
         </p:txBody>
       </p:sp>
@@ -22841,7 +22823,7 @@
         <p:spPr>
           <a:xfrm>
             <a:off x="533399" y="728069"/>
-            <a:ext cx="11116884" cy="4385816"/>
+            <a:ext cx="11116884" cy="4878259"/>
           </a:xfrm>
           <a:prstGeom prst="rect">
             <a:avLst/>
@@ -22889,6 +22871,22 @@
                 <a:spcPts val="600"/>
               </a:spcAft>
             </a:pPr>
+            <a:r>
+              <a:rPr lang="it-IT" sz="3200" b="1" dirty="0"/>
+              <a:t>Tempo di </a:t>
+            </a:r>
+            <a:r>
+              <a:rPr lang="it-IT" sz="3200" b="1" dirty="0" err="1"/>
+              <a:t>timeout</a:t>
+            </a:r>
+            <a:r>
+              <a:rPr lang="it-IT" sz="3200" b="1" dirty="0"/>
+              <a:t>: </a:t>
+            </a:r>
+            <a:r>
+              <a:rPr lang="it-IT" sz="3200" dirty="0"/>
+              <a:t>300 secondi, sia per l’algoritmo che utilizza il rilassamento lineare, sia per il calcolo della soluzione ottima.</a:t>
+            </a:r>
             <a:endParaRPr lang="it-IT" sz="3200" b="1" dirty="0"/>
           </a:p>
           <a:p>
@@ -23014,7 +23012,7 @@
         <p:cNvPr id="1" name="">
           <a:extLst>
             <a:ext uri="{FF2B5EF4-FFF2-40B4-BE49-F238E27FC236}">
-              <a16:creationId xmlns:a16="http://schemas.microsoft.com/office/drawing/2014/main" id="{BA88C47B-CCFF-01DA-5C5A-E248B1AB4AF8}"/>
+              <a16:creationId xmlns:a16="http://schemas.microsoft.com/office/drawing/2014/main" id="{8E8184BD-10B8-CC69-B8C5-E971F13D1A99}"/>
             </a:ext>
           </a:extLst>
         </p:cNvPr>
@@ -23034,7 +23032,7 @@
           <p:cNvPr id="5" name="Rettangolo 4">
             <a:extLst>
               <a:ext uri="{FF2B5EF4-FFF2-40B4-BE49-F238E27FC236}">
-                <a16:creationId xmlns:a16="http://schemas.microsoft.com/office/drawing/2014/main" id="{1E7219C2-AA34-CE2E-7A4A-463F259EEEE6}"/>
+                <a16:creationId xmlns:a16="http://schemas.microsoft.com/office/drawing/2014/main" id="{4510E97F-1506-132C-BD5D-A8BC8AFA8A03}"/>
               </a:ext>
             </a:extLst>
           </p:cNvPr>
@@ -23088,6 +23086,299 @@
           <p:cNvPr id="6" name="CasellaDiTesto 5">
             <a:extLst>
               <a:ext uri="{FF2B5EF4-FFF2-40B4-BE49-F238E27FC236}">
+                <a16:creationId xmlns:a16="http://schemas.microsoft.com/office/drawing/2014/main" id="{FC7D1CBE-94E2-289D-4D0D-F3B4BFF7FC3B}"/>
+              </a:ext>
+            </a:extLst>
+          </p:cNvPr>
+          <p:cNvSpPr txBox="1"/>
+          <p:nvPr/>
+        </p:nvSpPr>
+        <p:spPr>
+          <a:xfrm>
+            <a:off x="5086139" y="6222490"/>
+            <a:ext cx="2019720" cy="400110"/>
+          </a:xfrm>
+          <a:prstGeom prst="rect">
+            <a:avLst/>
+          </a:prstGeom>
+          <a:noFill/>
+        </p:spPr>
+        <p:txBody>
+          <a:bodyPr wrap="square" rtlCol="0">
+            <a:spAutoFit/>
+          </a:bodyPr>
+          <a:lstStyle/>
+          <a:p>
+            <a:pPr algn="r"/>
+            <a:r>
+              <a:rPr lang="it-IT" sz="2000" b="1" dirty="0">
+                <a:solidFill>
+                  <a:schemeClr val="bg1"/>
+                </a:solidFill>
+              </a:rPr>
+              <a:t>Gianpaolo Pestilli</a:t>
+            </a:r>
+          </a:p>
+        </p:txBody>
+      </p:sp>
+      <p:sp>
+        <p:nvSpPr>
+          <p:cNvPr id="8" name="CasellaDiTesto 7">
+            <a:extLst>
+              <a:ext uri="{FF2B5EF4-FFF2-40B4-BE49-F238E27FC236}">
+                <a16:creationId xmlns:a16="http://schemas.microsoft.com/office/drawing/2014/main" id="{6260B967-6C8B-5C2A-DEE9-91DFF8F492A5}"/>
+              </a:ext>
+            </a:extLst>
+          </p:cNvPr>
+          <p:cNvSpPr txBox="1"/>
+          <p:nvPr/>
+        </p:nvSpPr>
+        <p:spPr>
+          <a:xfrm>
+            <a:off x="533399" y="728069"/>
+            <a:ext cx="11116884" cy="4308872"/>
+          </a:xfrm>
+          <a:prstGeom prst="rect">
+            <a:avLst/>
+          </a:prstGeom>
+          <a:noFill/>
+        </p:spPr>
+        <p:txBody>
+          <a:bodyPr wrap="square" rtlCol="0">
+            <a:spAutoFit/>
+          </a:bodyPr>
+          <a:lstStyle/>
+          <a:p>
+            <a:pPr algn="just">
+              <a:spcAft>
+                <a:spcPts val="600"/>
+              </a:spcAft>
+            </a:pPr>
+            <a:r>
+              <a:rPr lang="it-IT" sz="4000" b="1" dirty="0">
+                <a:solidFill>
+                  <a:srgbClr val="990000"/>
+                </a:solidFill>
+              </a:rPr>
+              <a:t>ASSUNZIONI</a:t>
+            </a:r>
+          </a:p>
+          <a:p>
+            <a:pPr algn="just">
+              <a:spcAft>
+                <a:spcPts val="600"/>
+              </a:spcAft>
+            </a:pPr>
+            <a:r>
+              <a:rPr lang="it-IT" sz="3200" b="1" dirty="0"/>
+              <a:t>Crash del solver nel calcolo dell’ottimo: </a:t>
+            </a:r>
+            <a:r>
+              <a:rPr lang="it-IT" sz="3200" dirty="0"/>
+              <a:t>se </a:t>
+            </a:r>
+            <a:r>
+              <a:rPr lang="it-IT" sz="3200" dirty="0" err="1"/>
+              <a:t>Gurobi</a:t>
+            </a:r>
+            <a:r>
+              <a:rPr lang="it-IT" sz="3200" dirty="0"/>
+              <a:t> riporta errori su una specifica istanza, quella viene ignorata poiché non si ha a disposizione alcun </a:t>
+            </a:r>
+            <a:r>
+              <a:rPr lang="it-IT" sz="3200" dirty="0" err="1"/>
+              <a:t>lower</a:t>
+            </a:r>
+            <a:r>
+              <a:rPr lang="it-IT" sz="3200" dirty="0"/>
+              <a:t> </a:t>
+            </a:r>
+            <a:r>
+              <a:rPr lang="it-IT" sz="3200" dirty="0" err="1"/>
+              <a:t>bound</a:t>
+            </a:r>
+            <a:r>
+              <a:rPr lang="it-IT" sz="3200" dirty="0"/>
+              <a:t> con cui fare confronti.</a:t>
+            </a:r>
+          </a:p>
+          <a:p>
+            <a:pPr algn="just">
+              <a:spcAft>
+                <a:spcPts val="600"/>
+              </a:spcAft>
+            </a:pPr>
+            <a:r>
+              <a:rPr lang="it-IT" sz="3200" b="1" dirty="0"/>
+              <a:t>Crash del solver nel calcolo dell’ottimo del rilassamento: </a:t>
+            </a:r>
+            <a:r>
+              <a:rPr lang="it-IT" sz="3200" dirty="0"/>
+              <a:t>se </a:t>
+            </a:r>
+            <a:r>
+              <a:rPr lang="it-IT" sz="3200" dirty="0" err="1"/>
+              <a:t>Gurobi</a:t>
+            </a:r>
+            <a:r>
+              <a:rPr lang="it-IT" sz="3200" dirty="0"/>
+              <a:t> non riesce a trovare alcun risultato entro 300 secondi e/o sorgono problemi di memoria, viene considerato come cover l’insieme di tutti i vertici </a:t>
+            </a:r>
+            <a:r>
+              <a:rPr lang="it-IT" sz="3200"/>
+              <a:t>del grafo.</a:t>
+            </a:r>
+            <a:endParaRPr lang="it-IT" sz="3200" b="1" dirty="0"/>
+          </a:p>
+        </p:txBody>
+      </p:sp>
+      <p:sp>
+        <p:nvSpPr>
+          <p:cNvPr id="2" name="CasellaDiTesto 1">
+            <a:extLst>
+              <a:ext uri="{FF2B5EF4-FFF2-40B4-BE49-F238E27FC236}">
+                <a16:creationId xmlns:a16="http://schemas.microsoft.com/office/drawing/2014/main" id="{047F045E-E3BE-105B-C090-80A0859C6FDF}"/>
+              </a:ext>
+            </a:extLst>
+          </p:cNvPr>
+          <p:cNvSpPr txBox="1"/>
+          <p:nvPr/>
+        </p:nvSpPr>
+        <p:spPr>
+          <a:xfrm>
+            <a:off x="11434917" y="6222490"/>
+            <a:ext cx="491612" cy="400110"/>
+          </a:xfrm>
+          <a:prstGeom prst="rect">
+            <a:avLst/>
+          </a:prstGeom>
+          <a:noFill/>
+        </p:spPr>
+        <p:txBody>
+          <a:bodyPr wrap="square" rtlCol="0">
+            <a:spAutoFit/>
+          </a:bodyPr>
+          <a:lstStyle/>
+          <a:p>
+            <a:pPr algn="r"/>
+            <a:r>
+              <a:rPr lang="it-IT" sz="2000" b="1" dirty="0">
+                <a:solidFill>
+                  <a:schemeClr val="bg1"/>
+                </a:solidFill>
+              </a:rPr>
+              <a:t>61</a:t>
+            </a:r>
+          </a:p>
+        </p:txBody>
+      </p:sp>
+    </p:spTree>
+    <p:extLst>
+      <p:ext uri="{BB962C8B-B14F-4D97-AF65-F5344CB8AC3E}">
+        <p14:creationId xmlns:p14="http://schemas.microsoft.com/office/powerpoint/2010/main" val="1103860728"/>
+      </p:ext>
+    </p:extLst>
+  </p:cSld>
+  <p:clrMapOvr>
+    <a:masterClrMapping/>
+  </p:clrMapOvr>
+  <mc:AlternateContent xmlns:mc="http://schemas.openxmlformats.org/markup-compatibility/2006" xmlns:p159="http://schemas.microsoft.com/office/powerpoint/2015/09/main">
+    <mc:Choice Requires="p159">
+      <p:transition xmlns:p14="http://schemas.microsoft.com/office/powerpoint/2010/main" spd="slow" p14:dur="2000">
+        <p159:morph option="byObject"/>
+      </p:transition>
+    </mc:Choice>
+    <mc:Fallback xmlns="">
+      <p:transition spd="slow">
+        <p:fade/>
+      </p:transition>
+    </mc:Fallback>
+  </mc:AlternateContent>
+</p:sld>
+</file>
+
+<file path=ppt/slides/slide64.xml><?xml version="1.0" encoding="utf-8"?>
+<p:sld xmlns:a="http://schemas.openxmlformats.org/drawingml/2006/main" xmlns:r="http://schemas.openxmlformats.org/officeDocument/2006/relationships" xmlns:p="http://schemas.openxmlformats.org/presentationml/2006/main">
+  <p:cSld>
+    <p:spTree>
+      <p:nvGrpSpPr>
+        <p:cNvPr id="1" name="">
+          <a:extLst>
+            <a:ext uri="{FF2B5EF4-FFF2-40B4-BE49-F238E27FC236}">
+              <a16:creationId xmlns:a16="http://schemas.microsoft.com/office/drawing/2014/main" id="{BA88C47B-CCFF-01DA-5C5A-E248B1AB4AF8}"/>
+            </a:ext>
+          </a:extLst>
+        </p:cNvPr>
+        <p:cNvGrpSpPr/>
+        <p:nvPr/>
+      </p:nvGrpSpPr>
+      <p:grpSpPr>
+        <a:xfrm>
+          <a:off x="0" y="0"/>
+          <a:ext cx="0" cy="0"/>
+          <a:chOff x="0" y="0"/>
+          <a:chExt cx="0" cy="0"/>
+        </a:xfrm>
+      </p:grpSpPr>
+      <p:sp>
+        <p:nvSpPr>
+          <p:cNvPr id="5" name="Rettangolo 4">
+            <a:extLst>
+              <a:ext uri="{FF2B5EF4-FFF2-40B4-BE49-F238E27FC236}">
+                <a16:creationId xmlns:a16="http://schemas.microsoft.com/office/drawing/2014/main" id="{1E7219C2-AA34-CE2E-7A4A-463F259EEEE6}"/>
+              </a:ext>
+            </a:extLst>
+          </p:cNvPr>
+          <p:cNvSpPr/>
+          <p:nvPr/>
+        </p:nvSpPr>
+        <p:spPr>
+          <a:xfrm rot="16200000">
+            <a:off x="5612871" y="326546"/>
+            <a:ext cx="966258" cy="12192000"/>
+          </a:xfrm>
+          <a:prstGeom prst="rect">
+            <a:avLst/>
+          </a:prstGeom>
+          <a:solidFill>
+            <a:srgbClr val="990000"/>
+          </a:solidFill>
+          <a:ln>
+            <a:solidFill>
+              <a:srgbClr val="990000"/>
+            </a:solidFill>
+          </a:ln>
+        </p:spPr>
+        <p:style>
+          <a:lnRef idx="2">
+            <a:schemeClr val="accent1">
+              <a:shade val="15000"/>
+            </a:schemeClr>
+          </a:lnRef>
+          <a:fillRef idx="1">
+            <a:schemeClr val="accent1"/>
+          </a:fillRef>
+          <a:effectRef idx="0">
+            <a:schemeClr val="accent1"/>
+          </a:effectRef>
+          <a:fontRef idx="minor">
+            <a:schemeClr val="lt1"/>
+          </a:fontRef>
+        </p:style>
+        <p:txBody>
+          <a:bodyPr rtlCol="0" anchor="ctr"/>
+          <a:lstStyle/>
+          <a:p>
+            <a:pPr algn="ctr"/>
+            <a:endParaRPr lang="it-IT" dirty="0"/>
+          </a:p>
+        </p:txBody>
+      </p:sp>
+      <p:sp>
+        <p:nvSpPr>
+          <p:cNvPr id="6" name="CasellaDiTesto 5">
+            <a:extLst>
+              <a:ext uri="{FF2B5EF4-FFF2-40B4-BE49-F238E27FC236}">
                 <a16:creationId xmlns:a16="http://schemas.microsoft.com/office/drawing/2014/main" id="{D022BB71-A4BC-3330-247F-08F0656A9CFA}"/>
               </a:ext>
             </a:extLst>
@@ -23239,7 +23530,7 @@
                   <a:schemeClr val="bg1"/>
                 </a:solidFill>
               </a:rPr>
-              <a:t>61</a:t>
+              <a:t>62</a:t>
             </a:r>
           </a:p>
         </p:txBody>
